--- a/docs/pptx/carbo/jx-carbo-linsubhr-ratio-hosp5.pptx
+++ b/docs/pptx/carbo/jx-carbo-linsubhr-ratio-hosp5.pptx
@@ -2271,7 +2271,7 @@
           </p:nvSpPr>
           <p:spPr>
             <a:xfrm>
-              <a:off x="817517" y="5114368"/>
+              <a:off x="817517" y="5142518"/>
               <a:ext cx="7799693" cy="0"/>
             </a:xfrm>
             <a:custGeom>
@@ -2314,7 +2314,7 @@
           </p:nvSpPr>
           <p:spPr>
             <a:xfrm>
-              <a:off x="817517" y="4244691"/>
+              <a:off x="817517" y="4313054"/>
               <a:ext cx="7799693" cy="0"/>
             </a:xfrm>
             <a:custGeom>
@@ -2357,7 +2357,7 @@
           </p:nvSpPr>
           <p:spPr>
             <a:xfrm>
-              <a:off x="817517" y="3375014"/>
+              <a:off x="817517" y="3483591"/>
               <a:ext cx="7799693" cy="0"/>
             </a:xfrm>
             <a:custGeom>
@@ -2400,7 +2400,7 @@
           </p:nvSpPr>
           <p:spPr>
             <a:xfrm>
-              <a:off x="817517" y="2505337"/>
+              <a:off x="817517" y="2654127"/>
               <a:ext cx="7799693" cy="0"/>
             </a:xfrm>
             <a:custGeom>
@@ -2443,15 +2443,15 @@
           </p:nvSpPr>
           <p:spPr>
             <a:xfrm>
-              <a:off x="1615213" y="1896563"/>
-              <a:ext cx="0" cy="3826579"/>
+              <a:off x="1615213" y="2073503"/>
+              <a:ext cx="0" cy="3649639"/>
             </a:xfrm>
             <a:custGeom>
               <a:avLst/>
               <a:pathLst>
-                <a:path w="0" h="3826579">
+                <a:path w="0" h="3649639">
                   <a:moveTo>
-                    <a:pt x="0" y="3826579"/>
+                    <a:pt x="0" y="3649639"/>
                   </a:moveTo>
                   <a:lnTo>
                     <a:pt x="0" y="0"/>
@@ -2486,15 +2486,15 @@
           </p:nvSpPr>
           <p:spPr>
             <a:xfrm>
-              <a:off x="3387871" y="1896563"/>
-              <a:ext cx="0" cy="3826579"/>
+              <a:off x="3387871" y="2073503"/>
+              <a:ext cx="0" cy="3649639"/>
             </a:xfrm>
             <a:custGeom>
               <a:avLst/>
               <a:pathLst>
-                <a:path w="0" h="3826579">
+                <a:path w="0" h="3649639">
                   <a:moveTo>
-                    <a:pt x="0" y="3826579"/>
+                    <a:pt x="0" y="3649639"/>
                   </a:moveTo>
                   <a:lnTo>
                     <a:pt x="0" y="0"/>
@@ -2529,15 +2529,15 @@
           </p:nvSpPr>
           <p:spPr>
             <a:xfrm>
-              <a:off x="5160528" y="1896563"/>
-              <a:ext cx="0" cy="3826579"/>
+              <a:off x="5160528" y="2073503"/>
+              <a:ext cx="0" cy="3649639"/>
             </a:xfrm>
             <a:custGeom>
               <a:avLst/>
               <a:pathLst>
-                <a:path w="0" h="3826579">
+                <a:path w="0" h="3649639">
                   <a:moveTo>
-                    <a:pt x="0" y="3826579"/>
+                    <a:pt x="0" y="3649639"/>
                   </a:moveTo>
                   <a:lnTo>
                     <a:pt x="0" y="0"/>
@@ -2572,15 +2572,15 @@
           </p:nvSpPr>
           <p:spPr>
             <a:xfrm>
-              <a:off x="6933186" y="1896563"/>
-              <a:ext cx="0" cy="3826579"/>
+              <a:off x="6933186" y="2073503"/>
+              <a:ext cx="0" cy="3649639"/>
             </a:xfrm>
             <a:custGeom>
               <a:avLst/>
               <a:pathLst>
-                <a:path w="0" h="3826579">
+                <a:path w="0" h="3649639">
                   <a:moveTo>
-                    <a:pt x="0" y="3826579"/>
+                    <a:pt x="0" y="3649639"/>
                   </a:moveTo>
                   <a:lnTo>
                     <a:pt x="0" y="0"/>
@@ -2615,7 +2615,7 @@
           </p:nvSpPr>
           <p:spPr>
             <a:xfrm>
-              <a:off x="817517" y="5549207"/>
+              <a:off x="817517" y="5557249"/>
               <a:ext cx="7799693" cy="0"/>
             </a:xfrm>
             <a:custGeom>
@@ -2658,7 +2658,7 @@
           </p:nvSpPr>
           <p:spPr>
             <a:xfrm>
-              <a:off x="817517" y="4679530"/>
+              <a:off x="817517" y="4727786"/>
               <a:ext cx="7799693" cy="0"/>
             </a:xfrm>
             <a:custGeom>
@@ -2701,7 +2701,7 @@
           </p:nvSpPr>
           <p:spPr>
             <a:xfrm>
-              <a:off x="817517" y="3809853"/>
+              <a:off x="817517" y="3898322"/>
               <a:ext cx="7799693" cy="0"/>
             </a:xfrm>
             <a:custGeom>
@@ -2744,7 +2744,7 @@
           </p:nvSpPr>
           <p:spPr>
             <a:xfrm>
-              <a:off x="817517" y="2940175"/>
+              <a:off x="817517" y="3068859"/>
               <a:ext cx="7799693" cy="0"/>
             </a:xfrm>
             <a:custGeom>
@@ -2787,7 +2787,7 @@
           </p:nvSpPr>
           <p:spPr>
             <a:xfrm>
-              <a:off x="817517" y="2070498"/>
+              <a:off x="817517" y="2239395"/>
               <a:ext cx="7799693" cy="0"/>
             </a:xfrm>
             <a:custGeom>
@@ -2830,15 +2830,15 @@
           </p:nvSpPr>
           <p:spPr>
             <a:xfrm>
-              <a:off x="2501542" y="1896563"/>
-              <a:ext cx="0" cy="3826579"/>
+              <a:off x="2501542" y="2073503"/>
+              <a:ext cx="0" cy="3649639"/>
             </a:xfrm>
             <a:custGeom>
               <a:avLst/>
               <a:pathLst>
-                <a:path w="0" h="3826579">
+                <a:path w="0" h="3649639">
                   <a:moveTo>
-                    <a:pt x="0" y="3826579"/>
+                    <a:pt x="0" y="3649639"/>
                   </a:moveTo>
                   <a:lnTo>
                     <a:pt x="0" y="0"/>
@@ -2873,15 +2873,15 @@
           </p:nvSpPr>
           <p:spPr>
             <a:xfrm>
-              <a:off x="4274200" y="1896563"/>
-              <a:ext cx="0" cy="3826579"/>
+              <a:off x="4274200" y="2073503"/>
+              <a:ext cx="0" cy="3649639"/>
             </a:xfrm>
             <a:custGeom>
               <a:avLst/>
               <a:pathLst>
-                <a:path w="0" h="3826579">
+                <a:path w="0" h="3649639">
                   <a:moveTo>
-                    <a:pt x="0" y="3826579"/>
+                    <a:pt x="0" y="3649639"/>
                   </a:moveTo>
                   <a:lnTo>
                     <a:pt x="0" y="0"/>
@@ -2916,15 +2916,15 @@
           </p:nvSpPr>
           <p:spPr>
             <a:xfrm>
-              <a:off x="6046857" y="1896563"/>
-              <a:ext cx="0" cy="3826579"/>
+              <a:off x="6046857" y="2073503"/>
+              <a:ext cx="0" cy="3649639"/>
             </a:xfrm>
             <a:custGeom>
               <a:avLst/>
               <a:pathLst>
-                <a:path w="0" h="3826579">
+                <a:path w="0" h="3649639">
                   <a:moveTo>
-                    <a:pt x="0" y="3826579"/>
+                    <a:pt x="0" y="3649639"/>
                   </a:moveTo>
                   <a:lnTo>
                     <a:pt x="0" y="0"/>
@@ -2959,15 +2959,15 @@
           </p:nvSpPr>
           <p:spPr>
             <a:xfrm>
-              <a:off x="7819515" y="1896563"/>
-              <a:ext cx="0" cy="3826579"/>
+              <a:off x="7819515" y="2073503"/>
+              <a:ext cx="0" cy="3649639"/>
             </a:xfrm>
             <a:custGeom>
               <a:avLst/>
               <a:pathLst>
-                <a:path w="0" h="3826579">
+                <a:path w="0" h="3649639">
                   <a:moveTo>
-                    <a:pt x="0" y="3826579"/>
+                    <a:pt x="0" y="3649639"/>
                   </a:moveTo>
                   <a:lnTo>
                     <a:pt x="0" y="0"/>
@@ -3002,513 +3002,513 @@
           </p:nvSpPr>
           <p:spPr>
             <a:xfrm>
-              <a:off x="817517" y="1896563"/>
-              <a:ext cx="7403783" cy="3646708"/>
+              <a:off x="817517" y="2073503"/>
+              <a:ext cx="7403783" cy="3478086"/>
             </a:xfrm>
             <a:custGeom>
               <a:avLst/>
               <a:pathLst>
-                <a:path w="7403783" h="3646708">
+                <a:path w="7403783" h="3478086">
                   <a:moveTo>
                     <a:pt x="2257101" y="0"/>
                   </a:moveTo>
                   <a:lnTo>
-                    <a:pt x="2269402" y="57896"/>
-                  </a:lnTo>
-                  <a:lnTo>
-                    <a:pt x="2346034" y="385696"/>
-                  </a:lnTo>
-                  <a:lnTo>
-                    <a:pt x="2422667" y="683604"/>
-                  </a:lnTo>
-                  <a:lnTo>
-                    <a:pt x="2499300" y="954346"/>
-                  </a:lnTo>
-                  <a:lnTo>
-                    <a:pt x="2575932" y="1200399"/>
-                  </a:lnTo>
-                  <a:lnTo>
-                    <a:pt x="2652565" y="1424016"/>
-                  </a:lnTo>
-                  <a:lnTo>
-                    <a:pt x="2729197" y="1627241"/>
-                  </a:lnTo>
-                  <a:lnTo>
-                    <a:pt x="2805830" y="1811934"/>
-                  </a:lnTo>
-                  <a:lnTo>
-                    <a:pt x="2882462" y="1979786"/>
-                  </a:lnTo>
-                  <a:lnTo>
-                    <a:pt x="2959095" y="2132331"/>
-                  </a:lnTo>
-                  <a:lnTo>
-                    <a:pt x="3035727" y="2270966"/>
-                  </a:lnTo>
-                  <a:lnTo>
-                    <a:pt x="3112360" y="2396959"/>
-                  </a:lnTo>
-                  <a:lnTo>
-                    <a:pt x="3188993" y="2511463"/>
-                  </a:lnTo>
-                  <a:lnTo>
-                    <a:pt x="3265625" y="2615525"/>
-                  </a:lnTo>
-                  <a:lnTo>
-                    <a:pt x="3342258" y="2710098"/>
-                  </a:lnTo>
-                  <a:lnTo>
-                    <a:pt x="3418890" y="2786615"/>
-                  </a:lnTo>
-                  <a:lnTo>
-                    <a:pt x="3495523" y="2809287"/>
-                  </a:lnTo>
-                  <a:lnTo>
-                    <a:pt x="3572155" y="2831365"/>
-                  </a:lnTo>
-                  <a:lnTo>
-                    <a:pt x="3648788" y="2852865"/>
-                  </a:lnTo>
-                  <a:lnTo>
-                    <a:pt x="3725420" y="2873802"/>
-                  </a:lnTo>
-                  <a:lnTo>
-                    <a:pt x="3802053" y="2894191"/>
-                  </a:lnTo>
-                  <a:lnTo>
-                    <a:pt x="3878685" y="2914046"/>
-                  </a:lnTo>
-                  <a:lnTo>
-                    <a:pt x="3955318" y="2933382"/>
-                  </a:lnTo>
-                  <a:lnTo>
-                    <a:pt x="4031951" y="2952211"/>
-                  </a:lnTo>
-                  <a:lnTo>
-                    <a:pt x="4108583" y="2970548"/>
-                  </a:lnTo>
-                  <a:lnTo>
-                    <a:pt x="4185216" y="2988404"/>
-                  </a:lnTo>
-                  <a:lnTo>
-                    <a:pt x="4261848" y="3005793"/>
-                  </a:lnTo>
-                  <a:lnTo>
-                    <a:pt x="4338481" y="3022727"/>
-                  </a:lnTo>
-                  <a:lnTo>
-                    <a:pt x="4415113" y="3039217"/>
-                  </a:lnTo>
-                  <a:lnTo>
-                    <a:pt x="4491746" y="3055276"/>
-                  </a:lnTo>
-                  <a:lnTo>
-                    <a:pt x="4568378" y="3070914"/>
-                  </a:lnTo>
-                  <a:lnTo>
-                    <a:pt x="4645011" y="3086143"/>
-                  </a:lnTo>
-                  <a:lnTo>
-                    <a:pt x="4721644" y="3100973"/>
-                  </a:lnTo>
-                  <a:lnTo>
-                    <a:pt x="4798276" y="3115415"/>
-                  </a:lnTo>
-                  <a:lnTo>
-                    <a:pt x="4874909" y="3129479"/>
-                  </a:lnTo>
-                  <a:lnTo>
-                    <a:pt x="4951541" y="3143175"/>
-                  </a:lnTo>
-                  <a:lnTo>
-                    <a:pt x="5028174" y="3156512"/>
-                  </a:lnTo>
-                  <a:lnTo>
-                    <a:pt x="5104806" y="3169501"/>
-                  </a:lnTo>
-                  <a:lnTo>
-                    <a:pt x="5181439" y="3182149"/>
-                  </a:lnTo>
-                  <a:lnTo>
-                    <a:pt x="5258071" y="3194466"/>
-                  </a:lnTo>
-                  <a:lnTo>
-                    <a:pt x="5334704" y="3206460"/>
-                  </a:lnTo>
-                  <a:lnTo>
-                    <a:pt x="5411336" y="3218141"/>
-                  </a:lnTo>
-                  <a:lnTo>
-                    <a:pt x="5487969" y="3229515"/>
-                  </a:lnTo>
-                  <a:lnTo>
-                    <a:pt x="5564602" y="3240592"/>
-                  </a:lnTo>
-                  <a:lnTo>
-                    <a:pt x="5641234" y="3251379"/>
-                  </a:lnTo>
-                  <a:lnTo>
-                    <a:pt x="5717867" y="3261884"/>
-                  </a:lnTo>
-                  <a:lnTo>
-                    <a:pt x="5794499" y="3272113"/>
-                  </a:lnTo>
-                  <a:lnTo>
-                    <a:pt x="5871132" y="3282075"/>
-                  </a:lnTo>
-                  <a:lnTo>
-                    <a:pt x="5947764" y="3291776"/>
-                  </a:lnTo>
-                  <a:lnTo>
-                    <a:pt x="6024397" y="3301223"/>
-                  </a:lnTo>
-                  <a:lnTo>
-                    <a:pt x="6101029" y="3310423"/>
-                  </a:lnTo>
-                  <a:lnTo>
-                    <a:pt x="6177662" y="3319382"/>
-                  </a:lnTo>
-                  <a:lnTo>
-                    <a:pt x="6254294" y="3328106"/>
-                  </a:lnTo>
-                  <a:lnTo>
-                    <a:pt x="6330927" y="3336602"/>
-                  </a:lnTo>
-                  <a:lnTo>
-                    <a:pt x="6407560" y="3344876"/>
-                  </a:lnTo>
-                  <a:lnTo>
-                    <a:pt x="6484192" y="3352933"/>
-                  </a:lnTo>
-                  <a:lnTo>
-                    <a:pt x="6560825" y="3360779"/>
-                  </a:lnTo>
-                  <a:lnTo>
-                    <a:pt x="6637457" y="3368419"/>
-                  </a:lnTo>
-                  <a:lnTo>
-                    <a:pt x="6714090" y="3375860"/>
-                  </a:lnTo>
-                  <a:lnTo>
-                    <a:pt x="6790722" y="3383106"/>
-                  </a:lnTo>
-                  <a:lnTo>
-                    <a:pt x="6867355" y="3390162"/>
-                  </a:lnTo>
-                  <a:lnTo>
-                    <a:pt x="6943987" y="3397033"/>
-                  </a:lnTo>
-                  <a:lnTo>
-                    <a:pt x="7020620" y="3403725"/>
-                  </a:lnTo>
-                  <a:lnTo>
-                    <a:pt x="7097253" y="3410241"/>
-                  </a:lnTo>
-                  <a:lnTo>
-                    <a:pt x="7173885" y="3416587"/>
-                  </a:lnTo>
-                  <a:lnTo>
-                    <a:pt x="7250518" y="3422767"/>
-                  </a:lnTo>
-                  <a:lnTo>
-                    <a:pt x="7327150" y="3428785"/>
-                  </a:lnTo>
-                  <a:lnTo>
-                    <a:pt x="7403783" y="3434645"/>
-                  </a:lnTo>
-                  <a:lnTo>
-                    <a:pt x="7403783" y="3646708"/>
-                  </a:lnTo>
-                  <a:lnTo>
-                    <a:pt x="7327150" y="3646113"/>
-                  </a:lnTo>
-                  <a:lnTo>
-                    <a:pt x="7250518" y="3645458"/>
-                  </a:lnTo>
-                  <a:lnTo>
-                    <a:pt x="7173885" y="3644737"/>
-                  </a:lnTo>
-                  <a:lnTo>
-                    <a:pt x="7097253" y="3643943"/>
-                  </a:lnTo>
-                  <a:lnTo>
-                    <a:pt x="7020620" y="3643070"/>
-                  </a:lnTo>
-                  <a:lnTo>
-                    <a:pt x="6943987" y="3642110"/>
-                  </a:lnTo>
-                  <a:lnTo>
-                    <a:pt x="6867355" y="3641053"/>
-                  </a:lnTo>
-                  <a:lnTo>
-                    <a:pt x="6790722" y="3639890"/>
-                  </a:lnTo>
-                  <a:lnTo>
-                    <a:pt x="6714090" y="3638610"/>
-                  </a:lnTo>
-                  <a:lnTo>
-                    <a:pt x="6637457" y="3637202"/>
-                  </a:lnTo>
-                  <a:lnTo>
-                    <a:pt x="6560825" y="3635653"/>
-                  </a:lnTo>
-                  <a:lnTo>
-                    <a:pt x="6484192" y="3633948"/>
-                  </a:lnTo>
-                  <a:lnTo>
-                    <a:pt x="6407560" y="3632072"/>
-                  </a:lnTo>
-                  <a:lnTo>
-                    <a:pt x="6330927" y="3630008"/>
-                  </a:lnTo>
-                  <a:lnTo>
-                    <a:pt x="6254294" y="3627737"/>
-                  </a:lnTo>
-                  <a:lnTo>
-                    <a:pt x="6177662" y="3625238"/>
-                  </a:lnTo>
-                  <a:lnTo>
-                    <a:pt x="6101029" y="3622488"/>
-                  </a:lnTo>
-                  <a:lnTo>
-                    <a:pt x="6024397" y="3619463"/>
-                  </a:lnTo>
-                  <a:lnTo>
-                    <a:pt x="5947764" y="3616133"/>
-                  </a:lnTo>
-                  <a:lnTo>
-                    <a:pt x="5871132" y="3612470"/>
-                  </a:lnTo>
-                  <a:lnTo>
-                    <a:pt x="5794499" y="3608439"/>
-                  </a:lnTo>
-                  <a:lnTo>
-                    <a:pt x="5717867" y="3604004"/>
-                  </a:lnTo>
-                  <a:lnTo>
-                    <a:pt x="5641234" y="3599123"/>
-                  </a:lnTo>
-                  <a:lnTo>
-                    <a:pt x="5564602" y="3593753"/>
-                  </a:lnTo>
-                  <a:lnTo>
-                    <a:pt x="5487969" y="3587844"/>
-                  </a:lnTo>
-                  <a:lnTo>
-                    <a:pt x="5411336" y="3581342"/>
-                  </a:lnTo>
-                  <a:lnTo>
-                    <a:pt x="5334704" y="3574188"/>
-                  </a:lnTo>
-                  <a:lnTo>
-                    <a:pt x="5258071" y="3566316"/>
-                  </a:lnTo>
-                  <a:lnTo>
-                    <a:pt x="5181439" y="3557654"/>
-                  </a:lnTo>
-                  <a:lnTo>
-                    <a:pt x="5104806" y="3548123"/>
-                  </a:lnTo>
-                  <a:lnTo>
-                    <a:pt x="5028174" y="3537636"/>
-                  </a:lnTo>
-                  <a:lnTo>
-                    <a:pt x="4951541" y="3526096"/>
-                  </a:lnTo>
-                  <a:lnTo>
-                    <a:pt x="4874909" y="3513399"/>
-                  </a:lnTo>
-                  <a:lnTo>
-                    <a:pt x="4798276" y="3499427"/>
-                  </a:lnTo>
-                  <a:lnTo>
-                    <a:pt x="4721644" y="3484054"/>
-                  </a:lnTo>
-                  <a:lnTo>
-                    <a:pt x="4645011" y="3467138"/>
-                  </a:lnTo>
-                  <a:lnTo>
-                    <a:pt x="4568378" y="3448524"/>
-                  </a:lnTo>
-                  <a:lnTo>
-                    <a:pt x="4491746" y="3428043"/>
-                  </a:lnTo>
-                  <a:lnTo>
-                    <a:pt x="4415113" y="3405507"/>
-                  </a:lnTo>
-                  <a:lnTo>
-                    <a:pt x="4338481" y="3380710"/>
-                  </a:lnTo>
-                  <a:lnTo>
-                    <a:pt x="4261848" y="3353425"/>
-                  </a:lnTo>
-                  <a:lnTo>
-                    <a:pt x="4185216" y="3323402"/>
-                  </a:lnTo>
-                  <a:lnTo>
-                    <a:pt x="4108583" y="3290367"/>
-                  </a:lnTo>
-                  <a:lnTo>
-                    <a:pt x="4031951" y="3254016"/>
-                  </a:lnTo>
-                  <a:lnTo>
-                    <a:pt x="3955318" y="3214019"/>
-                  </a:lnTo>
-                  <a:lnTo>
-                    <a:pt x="3878685" y="3170008"/>
-                  </a:lnTo>
-                  <a:lnTo>
-                    <a:pt x="3802053" y="3121581"/>
-                  </a:lnTo>
-                  <a:lnTo>
-                    <a:pt x="3725420" y="3068296"/>
-                  </a:lnTo>
-                  <a:lnTo>
-                    <a:pt x="3648788" y="3009663"/>
-                  </a:lnTo>
-                  <a:lnTo>
-                    <a:pt x="3572155" y="2945148"/>
-                  </a:lnTo>
-                  <a:lnTo>
-                    <a:pt x="3495523" y="2874159"/>
-                  </a:lnTo>
-                  <a:lnTo>
-                    <a:pt x="3418890" y="2796048"/>
-                  </a:lnTo>
-                  <a:lnTo>
-                    <a:pt x="3342258" y="2763334"/>
-                  </a:lnTo>
-                  <a:lnTo>
-                    <a:pt x="3265625" y="2739427"/>
-                  </a:lnTo>
-                  <a:lnTo>
-                    <a:pt x="3188993" y="2714878"/>
-                  </a:lnTo>
-                  <a:lnTo>
-                    <a:pt x="3112360" y="2689669"/>
-                  </a:lnTo>
-                  <a:lnTo>
-                    <a:pt x="3035727" y="2663781"/>
-                  </a:lnTo>
-                  <a:lnTo>
-                    <a:pt x="2959095" y="2637198"/>
-                  </a:lnTo>
-                  <a:lnTo>
-                    <a:pt x="2882462" y="2609901"/>
-                  </a:lnTo>
-                  <a:lnTo>
-                    <a:pt x="2805830" y="2581869"/>
-                  </a:lnTo>
-                  <a:lnTo>
-                    <a:pt x="2729197" y="2553084"/>
-                  </a:lnTo>
-                  <a:lnTo>
-                    <a:pt x="2652565" y="2523525"/>
-                  </a:lnTo>
-                  <a:lnTo>
-                    <a:pt x="2575932" y="2493172"/>
-                  </a:lnTo>
-                  <a:lnTo>
-                    <a:pt x="2499300" y="2462002"/>
-                  </a:lnTo>
-                  <a:lnTo>
-                    <a:pt x="2422667" y="2429995"/>
-                  </a:lnTo>
-                  <a:lnTo>
-                    <a:pt x="2346034" y="2397127"/>
-                  </a:lnTo>
-                  <a:lnTo>
-                    <a:pt x="2269402" y="2363376"/>
-                  </a:lnTo>
-                  <a:lnTo>
-                    <a:pt x="2192769" y="2328717"/>
-                  </a:lnTo>
-                  <a:lnTo>
-                    <a:pt x="2116137" y="2293126"/>
-                  </a:lnTo>
-                  <a:lnTo>
-                    <a:pt x="2039504" y="2256579"/>
-                  </a:lnTo>
-                  <a:lnTo>
-                    <a:pt x="1962872" y="2219050"/>
-                  </a:lnTo>
-                  <a:lnTo>
-                    <a:pt x="1886239" y="2180511"/>
-                  </a:lnTo>
-                  <a:lnTo>
-                    <a:pt x="1809607" y="2140936"/>
-                  </a:lnTo>
-                  <a:lnTo>
-                    <a:pt x="1732974" y="2100298"/>
-                  </a:lnTo>
-                  <a:lnTo>
-                    <a:pt x="1656342" y="2058567"/>
-                  </a:lnTo>
-                  <a:lnTo>
-                    <a:pt x="1579709" y="2015714"/>
-                  </a:lnTo>
-                  <a:lnTo>
-                    <a:pt x="1503076" y="1971710"/>
-                  </a:lnTo>
-                  <a:lnTo>
-                    <a:pt x="1426444" y="1926522"/>
-                  </a:lnTo>
-                  <a:lnTo>
-                    <a:pt x="1349811" y="1880119"/>
-                  </a:lnTo>
-                  <a:lnTo>
-                    <a:pt x="1273179" y="1832470"/>
-                  </a:lnTo>
-                  <a:lnTo>
-                    <a:pt x="1196546" y="1783539"/>
-                  </a:lnTo>
-                  <a:lnTo>
-                    <a:pt x="1119914" y="1733293"/>
-                  </a:lnTo>
-                  <a:lnTo>
-                    <a:pt x="1043281" y="1681696"/>
-                  </a:lnTo>
-                  <a:lnTo>
-                    <a:pt x="966649" y="1628712"/>
-                  </a:lnTo>
-                  <a:lnTo>
-                    <a:pt x="890016" y="1574303"/>
-                  </a:lnTo>
-                  <a:lnTo>
-                    <a:pt x="813384" y="1518433"/>
-                  </a:lnTo>
-                  <a:lnTo>
-                    <a:pt x="736751" y="1461060"/>
-                  </a:lnTo>
-                  <a:lnTo>
-                    <a:pt x="660118" y="1402144"/>
-                  </a:lnTo>
-                  <a:lnTo>
-                    <a:pt x="583486" y="1341645"/>
-                  </a:lnTo>
-                  <a:lnTo>
-                    <a:pt x="506853" y="1279520"/>
-                  </a:lnTo>
-                  <a:lnTo>
-                    <a:pt x="430221" y="1215725"/>
-                  </a:lnTo>
-                  <a:lnTo>
-                    <a:pt x="353588" y="1150214"/>
-                  </a:lnTo>
-                  <a:lnTo>
-                    <a:pt x="276956" y="1082943"/>
-                  </a:lnTo>
-                  <a:lnTo>
-                    <a:pt x="200323" y="1013863"/>
-                  </a:lnTo>
-                  <a:lnTo>
-                    <a:pt x="123691" y="942926"/>
-                  </a:lnTo>
-                  <a:lnTo>
-                    <a:pt x="47058" y="870082"/>
-                  </a:lnTo>
-                  <a:lnTo>
-                    <a:pt x="0" y="824147"/>
+                    <a:pt x="2269402" y="55219"/>
+                  </a:lnTo>
+                  <a:lnTo>
+                    <a:pt x="2346034" y="367861"/>
+                  </a:lnTo>
+                  <a:lnTo>
+                    <a:pt x="2422667" y="651994"/>
+                  </a:lnTo>
+                  <a:lnTo>
+                    <a:pt x="2499300" y="910217"/>
+                  </a:lnTo>
+                  <a:lnTo>
+                    <a:pt x="2575932" y="1144893"/>
+                  </a:lnTo>
+                  <a:lnTo>
+                    <a:pt x="2652565" y="1358170"/>
+                  </a:lnTo>
+                  <a:lnTo>
+                    <a:pt x="2729197" y="1551998"/>
+                  </a:lnTo>
+                  <a:lnTo>
+                    <a:pt x="2805830" y="1728151"/>
+                  </a:lnTo>
+                  <a:lnTo>
+                    <a:pt x="2882462" y="1888241"/>
+                  </a:lnTo>
+                  <a:lnTo>
+                    <a:pt x="2959095" y="2033733"/>
+                  </a:lnTo>
+                  <a:lnTo>
+                    <a:pt x="3035727" y="2165957"/>
+                  </a:lnTo>
+                  <a:lnTo>
+                    <a:pt x="3112360" y="2286124"/>
+                  </a:lnTo>
+                  <a:lnTo>
+                    <a:pt x="3188993" y="2395334"/>
+                  </a:lnTo>
+                  <a:lnTo>
+                    <a:pt x="3265625" y="2494584"/>
+                  </a:lnTo>
+                  <a:lnTo>
+                    <a:pt x="3342258" y="2584784"/>
+                  </a:lnTo>
+                  <a:lnTo>
+                    <a:pt x="3418890" y="2657763"/>
+                  </a:lnTo>
+                  <a:lnTo>
+                    <a:pt x="3495523" y="2679386"/>
+                  </a:lnTo>
+                  <a:lnTo>
+                    <a:pt x="3572155" y="2700444"/>
+                  </a:lnTo>
+                  <a:lnTo>
+                    <a:pt x="3648788" y="2720949"/>
+                  </a:lnTo>
+                  <a:lnTo>
+                    <a:pt x="3725420" y="2740918"/>
+                  </a:lnTo>
+                  <a:lnTo>
+                    <a:pt x="3802053" y="2760365"/>
+                  </a:lnTo>
+                  <a:lnTo>
+                    <a:pt x="3878685" y="2779302"/>
+                  </a:lnTo>
+                  <a:lnTo>
+                    <a:pt x="3955318" y="2797743"/>
+                  </a:lnTo>
+                  <a:lnTo>
+                    <a:pt x="4031951" y="2815702"/>
+                  </a:lnTo>
+                  <a:lnTo>
+                    <a:pt x="4108583" y="2833191"/>
+                  </a:lnTo>
+                  <a:lnTo>
+                    <a:pt x="4185216" y="2850221"/>
+                  </a:lnTo>
+                  <a:lnTo>
+                    <a:pt x="4261848" y="2866806"/>
+                  </a:lnTo>
+                  <a:lnTo>
+                    <a:pt x="4338481" y="2882957"/>
+                  </a:lnTo>
+                  <a:lnTo>
+                    <a:pt x="4415113" y="2898685"/>
+                  </a:lnTo>
+                  <a:lnTo>
+                    <a:pt x="4491746" y="2914001"/>
+                  </a:lnTo>
+                  <a:lnTo>
+                    <a:pt x="4568378" y="2928916"/>
+                  </a:lnTo>
+                  <a:lnTo>
+                    <a:pt x="4645011" y="2943441"/>
+                  </a:lnTo>
+                  <a:lnTo>
+                    <a:pt x="4721644" y="2957586"/>
+                  </a:lnTo>
+                  <a:lnTo>
+                    <a:pt x="4798276" y="2971360"/>
+                  </a:lnTo>
+                  <a:lnTo>
+                    <a:pt x="4874909" y="2984773"/>
+                  </a:lnTo>
+                  <a:lnTo>
+                    <a:pt x="4951541" y="2997836"/>
+                  </a:lnTo>
+                  <a:lnTo>
+                    <a:pt x="5028174" y="3010556"/>
+                  </a:lnTo>
+                  <a:lnTo>
+                    <a:pt x="5104806" y="3022944"/>
+                  </a:lnTo>
+                  <a:lnTo>
+                    <a:pt x="5181439" y="3035007"/>
+                  </a:lnTo>
+                  <a:lnTo>
+                    <a:pt x="5258071" y="3046755"/>
+                  </a:lnTo>
+                  <a:lnTo>
+                    <a:pt x="5334704" y="3058195"/>
+                  </a:lnTo>
+                  <a:lnTo>
+                    <a:pt x="5411336" y="3069335"/>
+                  </a:lnTo>
+                  <a:lnTo>
+                    <a:pt x="5487969" y="3080184"/>
+                  </a:lnTo>
+                  <a:lnTo>
+                    <a:pt x="5564602" y="3090748"/>
+                  </a:lnTo>
+                  <a:lnTo>
+                    <a:pt x="5641234" y="3101037"/>
+                  </a:lnTo>
+                  <a:lnTo>
+                    <a:pt x="5717867" y="3111055"/>
+                  </a:lnTo>
+                  <a:lnTo>
+                    <a:pt x="5794499" y="3120812"/>
+                  </a:lnTo>
+                  <a:lnTo>
+                    <a:pt x="5871132" y="3130313"/>
+                  </a:lnTo>
+                  <a:lnTo>
+                    <a:pt x="5947764" y="3139566"/>
+                  </a:lnTo>
+                  <a:lnTo>
+                    <a:pt x="6024397" y="3148576"/>
+                  </a:lnTo>
+                  <a:lnTo>
+                    <a:pt x="6101029" y="3157350"/>
+                  </a:lnTo>
+                  <a:lnTo>
+                    <a:pt x="6177662" y="3165895"/>
+                  </a:lnTo>
+                  <a:lnTo>
+                    <a:pt x="6254294" y="3174216"/>
+                  </a:lnTo>
+                  <a:lnTo>
+                    <a:pt x="6330927" y="3182319"/>
+                  </a:lnTo>
+                  <a:lnTo>
+                    <a:pt x="6407560" y="3190210"/>
+                  </a:lnTo>
+                  <a:lnTo>
+                    <a:pt x="6484192" y="3197894"/>
+                  </a:lnTo>
+                  <a:lnTo>
+                    <a:pt x="6560825" y="3205378"/>
+                  </a:lnTo>
+                  <a:lnTo>
+                    <a:pt x="6637457" y="3212665"/>
+                  </a:lnTo>
+                  <a:lnTo>
+                    <a:pt x="6714090" y="3219761"/>
+                  </a:lnTo>
+                  <a:lnTo>
+                    <a:pt x="6790722" y="3226672"/>
+                  </a:lnTo>
+                  <a:lnTo>
+                    <a:pt x="6867355" y="3233402"/>
+                  </a:lnTo>
+                  <a:lnTo>
+                    <a:pt x="6943987" y="3239956"/>
+                  </a:lnTo>
+                  <a:lnTo>
+                    <a:pt x="7020620" y="3246338"/>
+                  </a:lnTo>
+                  <a:lnTo>
+                    <a:pt x="7097253" y="3252553"/>
+                  </a:lnTo>
+                  <a:lnTo>
+                    <a:pt x="7173885" y="3258605"/>
+                  </a:lnTo>
+                  <a:lnTo>
+                    <a:pt x="7250518" y="3264499"/>
+                  </a:lnTo>
+                  <a:lnTo>
+                    <a:pt x="7327150" y="3270239"/>
+                  </a:lnTo>
+                  <a:lnTo>
+                    <a:pt x="7403783" y="3275828"/>
+                  </a:lnTo>
+                  <a:lnTo>
+                    <a:pt x="7403783" y="3478086"/>
+                  </a:lnTo>
+                  <a:lnTo>
+                    <a:pt x="7327150" y="3477518"/>
+                  </a:lnTo>
+                  <a:lnTo>
+                    <a:pt x="7250518" y="3476893"/>
+                  </a:lnTo>
+                  <a:lnTo>
+                    <a:pt x="7173885" y="3476205"/>
+                  </a:lnTo>
+                  <a:lnTo>
+                    <a:pt x="7097253" y="3475449"/>
+                  </a:lnTo>
+                  <a:lnTo>
+                    <a:pt x="7020620" y="3474616"/>
+                  </a:lnTo>
+                  <a:lnTo>
+                    <a:pt x="6943987" y="3473700"/>
+                  </a:lnTo>
+                  <a:lnTo>
+                    <a:pt x="6867355" y="3472692"/>
+                  </a:lnTo>
+                  <a:lnTo>
+                    <a:pt x="6790722" y="3471583"/>
+                  </a:lnTo>
+                  <a:lnTo>
+                    <a:pt x="6714090" y="3470362"/>
+                  </a:lnTo>
+                  <a:lnTo>
+                    <a:pt x="6637457" y="3469019"/>
+                  </a:lnTo>
+                  <a:lnTo>
+                    <a:pt x="6560825" y="3467542"/>
+                  </a:lnTo>
+                  <a:lnTo>
+                    <a:pt x="6484192" y="3465916"/>
+                  </a:lnTo>
+                  <a:lnTo>
+                    <a:pt x="6407560" y="3464127"/>
+                  </a:lnTo>
+                  <a:lnTo>
+                    <a:pt x="6330927" y="3462158"/>
+                  </a:lnTo>
+                  <a:lnTo>
+                    <a:pt x="6254294" y="3459992"/>
+                  </a:lnTo>
+                  <a:lnTo>
+                    <a:pt x="6177662" y="3457608"/>
+                  </a:lnTo>
+                  <a:lnTo>
+                    <a:pt x="6101029" y="3454986"/>
+                  </a:lnTo>
+                  <a:lnTo>
+                    <a:pt x="6024397" y="3452100"/>
+                  </a:lnTo>
+                  <a:lnTo>
+                    <a:pt x="5947764" y="3448925"/>
+                  </a:lnTo>
+                  <a:lnTo>
+                    <a:pt x="5871132" y="3445431"/>
+                  </a:lnTo>
+                  <a:lnTo>
+                    <a:pt x="5794499" y="3441586"/>
+                  </a:lnTo>
+                  <a:lnTo>
+                    <a:pt x="5717867" y="3437356"/>
+                  </a:lnTo>
+                  <a:lnTo>
+                    <a:pt x="5641234" y="3432701"/>
+                  </a:lnTo>
+                  <a:lnTo>
+                    <a:pt x="5564602" y="3427579"/>
+                  </a:lnTo>
+                  <a:lnTo>
+                    <a:pt x="5487969" y="3421944"/>
+                  </a:lnTo>
+                  <a:lnTo>
+                    <a:pt x="5411336" y="3415742"/>
+                  </a:lnTo>
+                  <a:lnTo>
+                    <a:pt x="5334704" y="3408919"/>
+                  </a:lnTo>
+                  <a:lnTo>
+                    <a:pt x="5258071" y="3401411"/>
+                  </a:lnTo>
+                  <a:lnTo>
+                    <a:pt x="5181439" y="3393149"/>
+                  </a:lnTo>
+                  <a:lnTo>
+                    <a:pt x="5104806" y="3384059"/>
+                  </a:lnTo>
+                  <a:lnTo>
+                    <a:pt x="5028174" y="3374057"/>
+                  </a:lnTo>
+                  <a:lnTo>
+                    <a:pt x="4951541" y="3363051"/>
+                  </a:lnTo>
+                  <a:lnTo>
+                    <a:pt x="4874909" y="3350940"/>
+                  </a:lnTo>
+                  <a:lnTo>
+                    <a:pt x="4798276" y="3337615"/>
+                  </a:lnTo>
+                  <a:lnTo>
+                    <a:pt x="4721644" y="3322952"/>
+                  </a:lnTo>
+                  <a:lnTo>
+                    <a:pt x="4645011" y="3306818"/>
+                  </a:lnTo>
+                  <a:lnTo>
+                    <a:pt x="4568378" y="3289066"/>
+                  </a:lnTo>
+                  <a:lnTo>
+                    <a:pt x="4491746" y="3269532"/>
+                  </a:lnTo>
+                  <a:lnTo>
+                    <a:pt x="4415113" y="3248038"/>
+                  </a:lnTo>
+                  <a:lnTo>
+                    <a:pt x="4338481" y="3224387"/>
+                  </a:lnTo>
+                  <a:lnTo>
+                    <a:pt x="4261848" y="3198364"/>
+                  </a:lnTo>
+                  <a:lnTo>
+                    <a:pt x="4185216" y="3169729"/>
+                  </a:lnTo>
+                  <a:lnTo>
+                    <a:pt x="4108583" y="3138221"/>
+                  </a:lnTo>
+                  <a:lnTo>
+                    <a:pt x="4031951" y="3103552"/>
+                  </a:lnTo>
+                  <a:lnTo>
+                    <a:pt x="3955318" y="3065404"/>
+                  </a:lnTo>
+                  <a:lnTo>
+                    <a:pt x="3878685" y="3023428"/>
+                  </a:lnTo>
+                  <a:lnTo>
+                    <a:pt x="3802053" y="2977241"/>
+                  </a:lnTo>
+                  <a:lnTo>
+                    <a:pt x="3725420" y="2926419"/>
+                  </a:lnTo>
+                  <a:lnTo>
+                    <a:pt x="3648788" y="2870498"/>
+                  </a:lnTo>
+                  <a:lnTo>
+                    <a:pt x="3572155" y="2808965"/>
+                  </a:lnTo>
+                  <a:lnTo>
+                    <a:pt x="3495523" y="2741259"/>
+                  </a:lnTo>
+                  <a:lnTo>
+                    <a:pt x="3418890" y="2666759"/>
+                  </a:lnTo>
+                  <a:lnTo>
+                    <a:pt x="3342258" y="2635559"/>
+                  </a:lnTo>
+                  <a:lnTo>
+                    <a:pt x="3265625" y="2612757"/>
+                  </a:lnTo>
+                  <a:lnTo>
+                    <a:pt x="3188993" y="2589343"/>
+                  </a:lnTo>
+                  <a:lnTo>
+                    <a:pt x="3112360" y="2565299"/>
+                  </a:lnTo>
+                  <a:lnTo>
+                    <a:pt x="3035727" y="2540609"/>
+                  </a:lnTo>
+                  <a:lnTo>
+                    <a:pt x="2959095" y="2515255"/>
+                  </a:lnTo>
+                  <a:lnTo>
+                    <a:pt x="2882462" y="2489220"/>
+                  </a:lnTo>
+                  <a:lnTo>
+                    <a:pt x="2805830" y="2462484"/>
+                  </a:lnTo>
+                  <a:lnTo>
+                    <a:pt x="2729197" y="2435030"/>
+                  </a:lnTo>
+                  <a:lnTo>
+                    <a:pt x="2652565" y="2406838"/>
+                  </a:lnTo>
+                  <a:lnTo>
+                    <a:pt x="2575932" y="2377888"/>
+                  </a:lnTo>
+                  <a:lnTo>
+                    <a:pt x="2499300" y="2348160"/>
+                  </a:lnTo>
+                  <a:lnTo>
+                    <a:pt x="2422667" y="2317633"/>
+                  </a:lnTo>
+                  <a:lnTo>
+                    <a:pt x="2346034" y="2286285"/>
+                  </a:lnTo>
+                  <a:lnTo>
+                    <a:pt x="2269402" y="2254094"/>
+                  </a:lnTo>
+                  <a:lnTo>
+                    <a:pt x="2192769" y="2221038"/>
+                  </a:lnTo>
+                  <a:lnTo>
+                    <a:pt x="2116137" y="2187093"/>
+                  </a:lnTo>
+                  <a:lnTo>
+                    <a:pt x="2039504" y="2152236"/>
+                  </a:lnTo>
+                  <a:lnTo>
+                    <a:pt x="1962872" y="2116441"/>
+                  </a:lnTo>
+                  <a:lnTo>
+                    <a:pt x="1886239" y="2079685"/>
+                  </a:lnTo>
+                  <a:lnTo>
+                    <a:pt x="1809607" y="2041940"/>
+                  </a:lnTo>
+                  <a:lnTo>
+                    <a:pt x="1732974" y="2003181"/>
+                  </a:lnTo>
+                  <a:lnTo>
+                    <a:pt x="1656342" y="1963380"/>
+                  </a:lnTo>
+                  <a:lnTo>
+                    <a:pt x="1579709" y="1922508"/>
+                  </a:lnTo>
+                  <a:lnTo>
+                    <a:pt x="1503076" y="1880538"/>
+                  </a:lnTo>
+                  <a:lnTo>
+                    <a:pt x="1426444" y="1837440"/>
+                  </a:lnTo>
+                  <a:lnTo>
+                    <a:pt x="1349811" y="1793183"/>
+                  </a:lnTo>
+                  <a:lnTo>
+                    <a:pt x="1273179" y="1747737"/>
+                  </a:lnTo>
+                  <a:lnTo>
+                    <a:pt x="1196546" y="1701069"/>
+                  </a:lnTo>
+                  <a:lnTo>
+                    <a:pt x="1119914" y="1653146"/>
+                  </a:lnTo>
+                  <a:lnTo>
+                    <a:pt x="1043281" y="1603935"/>
+                  </a:lnTo>
+                  <a:lnTo>
+                    <a:pt x="966649" y="1553401"/>
+                  </a:lnTo>
+                  <a:lnTo>
+                    <a:pt x="890016" y="1501508"/>
+                  </a:lnTo>
+                  <a:lnTo>
+                    <a:pt x="813384" y="1448221"/>
+                  </a:lnTo>
+                  <a:lnTo>
+                    <a:pt x="736751" y="1393501"/>
+                  </a:lnTo>
+                  <a:lnTo>
+                    <a:pt x="660118" y="1337310"/>
+                  </a:lnTo>
+                  <a:lnTo>
+                    <a:pt x="583486" y="1279608"/>
+                  </a:lnTo>
+                  <a:lnTo>
+                    <a:pt x="506853" y="1220355"/>
+                  </a:lnTo>
+                  <a:lnTo>
+                    <a:pt x="430221" y="1159510"/>
+                  </a:lnTo>
+                  <a:lnTo>
+                    <a:pt x="353588" y="1097029"/>
+                  </a:lnTo>
+                  <a:lnTo>
+                    <a:pt x="276956" y="1032868"/>
+                  </a:lnTo>
+                  <a:lnTo>
+                    <a:pt x="200323" y="966982"/>
+                  </a:lnTo>
+                  <a:lnTo>
+                    <a:pt x="123691" y="899325"/>
+                  </a:lnTo>
+                  <a:lnTo>
+                    <a:pt x="47058" y="829849"/>
+                  </a:lnTo>
+                  <a:lnTo>
+                    <a:pt x="0" y="786039"/>
                   </a:lnTo>
                   <a:close/>
                 </a:path>
@@ -3534,219 +3534,219 @@
           </p:nvSpPr>
           <p:spPr>
             <a:xfrm>
-              <a:off x="3074619" y="1896563"/>
-              <a:ext cx="5146681" cy="3434645"/>
+              <a:off x="3074619" y="2073503"/>
+              <a:ext cx="5146681" cy="3275828"/>
             </a:xfrm>
             <a:custGeom>
               <a:avLst/>
               <a:pathLst>
-                <a:path w="5146681" h="3434645">
+                <a:path w="5146681" h="3275828">
                   <a:moveTo>
                     <a:pt x="0" y="0"/>
                   </a:moveTo>
                   <a:lnTo>
-                    <a:pt x="12300" y="57896"/>
-                  </a:lnTo>
-                  <a:lnTo>
-                    <a:pt x="88933" y="385696"/>
-                  </a:lnTo>
-                  <a:lnTo>
-                    <a:pt x="165565" y="683604"/>
-                  </a:lnTo>
-                  <a:lnTo>
-                    <a:pt x="242198" y="954346"/>
-                  </a:lnTo>
-                  <a:lnTo>
-                    <a:pt x="318831" y="1200399"/>
-                  </a:lnTo>
-                  <a:lnTo>
-                    <a:pt x="395463" y="1424016"/>
-                  </a:lnTo>
-                  <a:lnTo>
-                    <a:pt x="472096" y="1627241"/>
-                  </a:lnTo>
-                  <a:lnTo>
-                    <a:pt x="548728" y="1811934"/>
-                  </a:lnTo>
-                  <a:lnTo>
-                    <a:pt x="625361" y="1979786"/>
-                  </a:lnTo>
-                  <a:lnTo>
-                    <a:pt x="701993" y="2132331"/>
-                  </a:lnTo>
-                  <a:lnTo>
-                    <a:pt x="778626" y="2270966"/>
-                  </a:lnTo>
-                  <a:lnTo>
-                    <a:pt x="855258" y="2396959"/>
-                  </a:lnTo>
-                  <a:lnTo>
-                    <a:pt x="931891" y="2511463"/>
-                  </a:lnTo>
-                  <a:lnTo>
-                    <a:pt x="1008523" y="2615525"/>
-                  </a:lnTo>
-                  <a:lnTo>
-                    <a:pt x="1085156" y="2710098"/>
-                  </a:lnTo>
-                  <a:lnTo>
-                    <a:pt x="1161789" y="2786615"/>
-                  </a:lnTo>
-                  <a:lnTo>
-                    <a:pt x="1238421" y="2809287"/>
-                  </a:lnTo>
-                  <a:lnTo>
-                    <a:pt x="1315054" y="2831365"/>
-                  </a:lnTo>
-                  <a:lnTo>
-                    <a:pt x="1391686" y="2852865"/>
-                  </a:lnTo>
-                  <a:lnTo>
-                    <a:pt x="1468319" y="2873802"/>
-                  </a:lnTo>
-                  <a:lnTo>
-                    <a:pt x="1544951" y="2894191"/>
-                  </a:lnTo>
-                  <a:lnTo>
-                    <a:pt x="1621584" y="2914046"/>
-                  </a:lnTo>
-                  <a:lnTo>
-                    <a:pt x="1698216" y="2933382"/>
-                  </a:lnTo>
-                  <a:lnTo>
-                    <a:pt x="1774849" y="2952211"/>
-                  </a:lnTo>
-                  <a:lnTo>
-                    <a:pt x="1851482" y="2970548"/>
-                  </a:lnTo>
-                  <a:lnTo>
-                    <a:pt x="1928114" y="2988404"/>
-                  </a:lnTo>
-                  <a:lnTo>
-                    <a:pt x="2004747" y="3005793"/>
-                  </a:lnTo>
-                  <a:lnTo>
-                    <a:pt x="2081379" y="3022727"/>
-                  </a:lnTo>
-                  <a:lnTo>
-                    <a:pt x="2158012" y="3039217"/>
-                  </a:lnTo>
-                  <a:lnTo>
-                    <a:pt x="2234644" y="3055276"/>
-                  </a:lnTo>
-                  <a:lnTo>
-                    <a:pt x="2311277" y="3070914"/>
-                  </a:lnTo>
-                  <a:lnTo>
-                    <a:pt x="2387909" y="3086143"/>
-                  </a:lnTo>
-                  <a:lnTo>
-                    <a:pt x="2464542" y="3100973"/>
-                  </a:lnTo>
-                  <a:lnTo>
-                    <a:pt x="2541174" y="3115415"/>
-                  </a:lnTo>
-                  <a:lnTo>
-                    <a:pt x="2617807" y="3129479"/>
-                  </a:lnTo>
-                  <a:lnTo>
-                    <a:pt x="2694440" y="3143175"/>
-                  </a:lnTo>
-                  <a:lnTo>
-                    <a:pt x="2771072" y="3156512"/>
-                  </a:lnTo>
-                  <a:lnTo>
-                    <a:pt x="2847705" y="3169501"/>
-                  </a:lnTo>
-                  <a:lnTo>
-                    <a:pt x="2924337" y="3182149"/>
-                  </a:lnTo>
-                  <a:lnTo>
-                    <a:pt x="3000970" y="3194466"/>
-                  </a:lnTo>
-                  <a:lnTo>
-                    <a:pt x="3077602" y="3206460"/>
-                  </a:lnTo>
-                  <a:lnTo>
-                    <a:pt x="3154235" y="3218141"/>
-                  </a:lnTo>
-                  <a:lnTo>
-                    <a:pt x="3230867" y="3229515"/>
-                  </a:lnTo>
-                  <a:lnTo>
-                    <a:pt x="3307500" y="3240592"/>
-                  </a:lnTo>
-                  <a:lnTo>
-                    <a:pt x="3384132" y="3251379"/>
-                  </a:lnTo>
-                  <a:lnTo>
-                    <a:pt x="3460765" y="3261884"/>
-                  </a:lnTo>
-                  <a:lnTo>
-                    <a:pt x="3537398" y="3272113"/>
-                  </a:lnTo>
-                  <a:lnTo>
-                    <a:pt x="3614030" y="3282075"/>
-                  </a:lnTo>
-                  <a:lnTo>
-                    <a:pt x="3690663" y="3291776"/>
-                  </a:lnTo>
-                  <a:lnTo>
-                    <a:pt x="3767295" y="3301223"/>
-                  </a:lnTo>
-                  <a:lnTo>
-                    <a:pt x="3843928" y="3310423"/>
-                  </a:lnTo>
-                  <a:lnTo>
-                    <a:pt x="3920560" y="3319382"/>
-                  </a:lnTo>
-                  <a:lnTo>
-                    <a:pt x="3997193" y="3328106"/>
-                  </a:lnTo>
-                  <a:lnTo>
-                    <a:pt x="4073825" y="3336602"/>
-                  </a:lnTo>
-                  <a:lnTo>
-                    <a:pt x="4150458" y="3344876"/>
-                  </a:lnTo>
-                  <a:lnTo>
-                    <a:pt x="4227091" y="3352933"/>
-                  </a:lnTo>
-                  <a:lnTo>
-                    <a:pt x="4303723" y="3360779"/>
-                  </a:lnTo>
-                  <a:lnTo>
-                    <a:pt x="4380356" y="3368419"/>
-                  </a:lnTo>
-                  <a:lnTo>
-                    <a:pt x="4456988" y="3375860"/>
-                  </a:lnTo>
-                  <a:lnTo>
-                    <a:pt x="4533621" y="3383106"/>
-                  </a:lnTo>
-                  <a:lnTo>
-                    <a:pt x="4610253" y="3390162"/>
-                  </a:lnTo>
-                  <a:lnTo>
-                    <a:pt x="4686886" y="3397033"/>
-                  </a:lnTo>
-                  <a:lnTo>
-                    <a:pt x="4763518" y="3403725"/>
-                  </a:lnTo>
-                  <a:lnTo>
-                    <a:pt x="4840151" y="3410241"/>
-                  </a:lnTo>
-                  <a:lnTo>
-                    <a:pt x="4916783" y="3416587"/>
-                  </a:lnTo>
-                  <a:lnTo>
-                    <a:pt x="4993416" y="3422767"/>
-                  </a:lnTo>
-                  <a:lnTo>
-                    <a:pt x="5070049" y="3428785"/>
-                  </a:lnTo>
-                  <a:lnTo>
-                    <a:pt x="5146681" y="3434645"/>
+                    <a:pt x="12300" y="55219"/>
+                  </a:lnTo>
+                  <a:lnTo>
+                    <a:pt x="88933" y="367861"/>
+                  </a:lnTo>
+                  <a:lnTo>
+                    <a:pt x="165565" y="651994"/>
+                  </a:lnTo>
+                  <a:lnTo>
+                    <a:pt x="242198" y="910217"/>
+                  </a:lnTo>
+                  <a:lnTo>
+                    <a:pt x="318831" y="1144893"/>
+                  </a:lnTo>
+                  <a:lnTo>
+                    <a:pt x="395463" y="1358170"/>
+                  </a:lnTo>
+                  <a:lnTo>
+                    <a:pt x="472096" y="1551998"/>
+                  </a:lnTo>
+                  <a:lnTo>
+                    <a:pt x="548728" y="1728151"/>
+                  </a:lnTo>
+                  <a:lnTo>
+                    <a:pt x="625361" y="1888241"/>
+                  </a:lnTo>
+                  <a:lnTo>
+                    <a:pt x="701993" y="2033733"/>
+                  </a:lnTo>
+                  <a:lnTo>
+                    <a:pt x="778626" y="2165957"/>
+                  </a:lnTo>
+                  <a:lnTo>
+                    <a:pt x="855258" y="2286124"/>
+                  </a:lnTo>
+                  <a:lnTo>
+                    <a:pt x="931891" y="2395334"/>
+                  </a:lnTo>
+                  <a:lnTo>
+                    <a:pt x="1008523" y="2494584"/>
+                  </a:lnTo>
+                  <a:lnTo>
+                    <a:pt x="1085156" y="2584784"/>
+                  </a:lnTo>
+                  <a:lnTo>
+                    <a:pt x="1161789" y="2657763"/>
+                  </a:lnTo>
+                  <a:lnTo>
+                    <a:pt x="1238421" y="2679386"/>
+                  </a:lnTo>
+                  <a:lnTo>
+                    <a:pt x="1315054" y="2700444"/>
+                  </a:lnTo>
+                  <a:lnTo>
+                    <a:pt x="1391686" y="2720949"/>
+                  </a:lnTo>
+                  <a:lnTo>
+                    <a:pt x="1468319" y="2740918"/>
+                  </a:lnTo>
+                  <a:lnTo>
+                    <a:pt x="1544951" y="2760365"/>
+                  </a:lnTo>
+                  <a:lnTo>
+                    <a:pt x="1621584" y="2779302"/>
+                  </a:lnTo>
+                  <a:lnTo>
+                    <a:pt x="1698216" y="2797743"/>
+                  </a:lnTo>
+                  <a:lnTo>
+                    <a:pt x="1774849" y="2815702"/>
+                  </a:lnTo>
+                  <a:lnTo>
+                    <a:pt x="1851482" y="2833191"/>
+                  </a:lnTo>
+                  <a:lnTo>
+                    <a:pt x="1928114" y="2850221"/>
+                  </a:lnTo>
+                  <a:lnTo>
+                    <a:pt x="2004747" y="2866806"/>
+                  </a:lnTo>
+                  <a:lnTo>
+                    <a:pt x="2081379" y="2882957"/>
+                  </a:lnTo>
+                  <a:lnTo>
+                    <a:pt x="2158012" y="2898685"/>
+                  </a:lnTo>
+                  <a:lnTo>
+                    <a:pt x="2234644" y="2914001"/>
+                  </a:lnTo>
+                  <a:lnTo>
+                    <a:pt x="2311277" y="2928916"/>
+                  </a:lnTo>
+                  <a:lnTo>
+                    <a:pt x="2387909" y="2943441"/>
+                  </a:lnTo>
+                  <a:lnTo>
+                    <a:pt x="2464542" y="2957586"/>
+                  </a:lnTo>
+                  <a:lnTo>
+                    <a:pt x="2541174" y="2971360"/>
+                  </a:lnTo>
+                  <a:lnTo>
+                    <a:pt x="2617807" y="2984773"/>
+                  </a:lnTo>
+                  <a:lnTo>
+                    <a:pt x="2694440" y="2997836"/>
+                  </a:lnTo>
+                  <a:lnTo>
+                    <a:pt x="2771072" y="3010556"/>
+                  </a:lnTo>
+                  <a:lnTo>
+                    <a:pt x="2847705" y="3022944"/>
+                  </a:lnTo>
+                  <a:lnTo>
+                    <a:pt x="2924337" y="3035007"/>
+                  </a:lnTo>
+                  <a:lnTo>
+                    <a:pt x="3000970" y="3046755"/>
+                  </a:lnTo>
+                  <a:lnTo>
+                    <a:pt x="3077602" y="3058195"/>
+                  </a:lnTo>
+                  <a:lnTo>
+                    <a:pt x="3154235" y="3069335"/>
+                  </a:lnTo>
+                  <a:lnTo>
+                    <a:pt x="3230867" y="3080184"/>
+                  </a:lnTo>
+                  <a:lnTo>
+                    <a:pt x="3307500" y="3090748"/>
+                  </a:lnTo>
+                  <a:lnTo>
+                    <a:pt x="3384132" y="3101037"/>
+                  </a:lnTo>
+                  <a:lnTo>
+                    <a:pt x="3460765" y="3111055"/>
+                  </a:lnTo>
+                  <a:lnTo>
+                    <a:pt x="3537398" y="3120812"/>
+                  </a:lnTo>
+                  <a:lnTo>
+                    <a:pt x="3614030" y="3130313"/>
+                  </a:lnTo>
+                  <a:lnTo>
+                    <a:pt x="3690663" y="3139566"/>
+                  </a:lnTo>
+                  <a:lnTo>
+                    <a:pt x="3767295" y="3148576"/>
+                  </a:lnTo>
+                  <a:lnTo>
+                    <a:pt x="3843928" y="3157350"/>
+                  </a:lnTo>
+                  <a:lnTo>
+                    <a:pt x="3920560" y="3165895"/>
+                  </a:lnTo>
+                  <a:lnTo>
+                    <a:pt x="3997193" y="3174216"/>
+                  </a:lnTo>
+                  <a:lnTo>
+                    <a:pt x="4073825" y="3182319"/>
+                  </a:lnTo>
+                  <a:lnTo>
+                    <a:pt x="4150458" y="3190210"/>
+                  </a:lnTo>
+                  <a:lnTo>
+                    <a:pt x="4227091" y="3197894"/>
+                  </a:lnTo>
+                  <a:lnTo>
+                    <a:pt x="4303723" y="3205378"/>
+                  </a:lnTo>
+                  <a:lnTo>
+                    <a:pt x="4380356" y="3212665"/>
+                  </a:lnTo>
+                  <a:lnTo>
+                    <a:pt x="4456988" y="3219761"/>
+                  </a:lnTo>
+                  <a:lnTo>
+                    <a:pt x="4533621" y="3226672"/>
+                  </a:lnTo>
+                  <a:lnTo>
+                    <a:pt x="4610253" y="3233402"/>
+                  </a:lnTo>
+                  <a:lnTo>
+                    <a:pt x="4686886" y="3239956"/>
+                  </a:lnTo>
+                  <a:lnTo>
+                    <a:pt x="4763518" y="3246338"/>
+                  </a:lnTo>
+                  <a:lnTo>
+                    <a:pt x="4840151" y="3252553"/>
+                  </a:lnTo>
+                  <a:lnTo>
+                    <a:pt x="4916783" y="3258605"/>
+                  </a:lnTo>
+                  <a:lnTo>
+                    <a:pt x="4993416" y="3264499"/>
+                  </a:lnTo>
+                  <a:lnTo>
+                    <a:pt x="5070049" y="3270239"/>
+                  </a:lnTo>
+                  <a:lnTo>
+                    <a:pt x="5146681" y="3275828"/>
                   </a:lnTo>
                 </a:path>
               </a:pathLst>
@@ -3766,303 +3766,303 @@
           </p:nvSpPr>
           <p:spPr>
             <a:xfrm>
-              <a:off x="817517" y="2720711"/>
-              <a:ext cx="7403783" cy="2822561"/>
+              <a:off x="817517" y="2859542"/>
+              <a:ext cx="7403783" cy="2692046"/>
             </a:xfrm>
             <a:custGeom>
               <a:avLst/>
               <a:pathLst>
-                <a:path w="7403783" h="2822561">
+                <a:path w="7403783" h="2692046">
                   <a:moveTo>
-                    <a:pt x="7403783" y="2822561"/>
+                    <a:pt x="7403783" y="2692046"/>
                   </a:moveTo>
                   <a:lnTo>
-                    <a:pt x="7327150" y="2821965"/>
-                  </a:lnTo>
-                  <a:lnTo>
-                    <a:pt x="7250518" y="2821310"/>
-                  </a:lnTo>
-                  <a:lnTo>
-                    <a:pt x="7173885" y="2820589"/>
-                  </a:lnTo>
-                  <a:lnTo>
-                    <a:pt x="7097253" y="2819796"/>
-                  </a:lnTo>
-                  <a:lnTo>
-                    <a:pt x="7020620" y="2818923"/>
-                  </a:lnTo>
-                  <a:lnTo>
-                    <a:pt x="6943987" y="2817962"/>
-                  </a:lnTo>
-                  <a:lnTo>
-                    <a:pt x="6867355" y="2816905"/>
-                  </a:lnTo>
-                  <a:lnTo>
-                    <a:pt x="6790722" y="2815742"/>
-                  </a:lnTo>
-                  <a:lnTo>
-                    <a:pt x="6714090" y="2814463"/>
-                  </a:lnTo>
-                  <a:lnTo>
-                    <a:pt x="6637457" y="2813054"/>
-                  </a:lnTo>
-                  <a:lnTo>
-                    <a:pt x="6560825" y="2811505"/>
-                  </a:lnTo>
-                  <a:lnTo>
-                    <a:pt x="6484192" y="2809800"/>
-                  </a:lnTo>
-                  <a:lnTo>
-                    <a:pt x="6407560" y="2807925"/>
-                  </a:lnTo>
-                  <a:lnTo>
-                    <a:pt x="6330927" y="2805860"/>
-                  </a:lnTo>
-                  <a:lnTo>
-                    <a:pt x="6254294" y="2803589"/>
-                  </a:lnTo>
-                  <a:lnTo>
-                    <a:pt x="6177662" y="2801090"/>
-                  </a:lnTo>
-                  <a:lnTo>
-                    <a:pt x="6101029" y="2798340"/>
-                  </a:lnTo>
-                  <a:lnTo>
-                    <a:pt x="6024397" y="2795315"/>
-                  </a:lnTo>
-                  <a:lnTo>
-                    <a:pt x="5947764" y="2791985"/>
-                  </a:lnTo>
-                  <a:lnTo>
-                    <a:pt x="5871132" y="2788322"/>
-                  </a:lnTo>
-                  <a:lnTo>
-                    <a:pt x="5794499" y="2784291"/>
-                  </a:lnTo>
-                  <a:lnTo>
-                    <a:pt x="5717867" y="2779856"/>
-                  </a:lnTo>
-                  <a:lnTo>
-                    <a:pt x="5641234" y="2774975"/>
-                  </a:lnTo>
-                  <a:lnTo>
-                    <a:pt x="5564602" y="2769605"/>
-                  </a:lnTo>
-                  <a:lnTo>
-                    <a:pt x="5487969" y="2763696"/>
-                  </a:lnTo>
-                  <a:lnTo>
-                    <a:pt x="5411336" y="2757195"/>
-                  </a:lnTo>
-                  <a:lnTo>
-                    <a:pt x="5334704" y="2750040"/>
-                  </a:lnTo>
-                  <a:lnTo>
-                    <a:pt x="5258071" y="2742168"/>
-                  </a:lnTo>
-                  <a:lnTo>
-                    <a:pt x="5181439" y="2733506"/>
-                  </a:lnTo>
-                  <a:lnTo>
-                    <a:pt x="5104806" y="2723975"/>
-                  </a:lnTo>
-                  <a:lnTo>
-                    <a:pt x="5028174" y="2713488"/>
-                  </a:lnTo>
-                  <a:lnTo>
-                    <a:pt x="4951541" y="2701948"/>
-                  </a:lnTo>
-                  <a:lnTo>
-                    <a:pt x="4874909" y="2689251"/>
-                  </a:lnTo>
-                  <a:lnTo>
-                    <a:pt x="4798276" y="2675279"/>
-                  </a:lnTo>
-                  <a:lnTo>
-                    <a:pt x="4721644" y="2659906"/>
-                  </a:lnTo>
-                  <a:lnTo>
-                    <a:pt x="4645011" y="2642990"/>
-                  </a:lnTo>
-                  <a:lnTo>
-                    <a:pt x="4568378" y="2624377"/>
-                  </a:lnTo>
-                  <a:lnTo>
-                    <a:pt x="4491746" y="2603896"/>
-                  </a:lnTo>
-                  <a:lnTo>
-                    <a:pt x="4415113" y="2581360"/>
-                  </a:lnTo>
-                  <a:lnTo>
-                    <a:pt x="4338481" y="2556563"/>
-                  </a:lnTo>
-                  <a:lnTo>
-                    <a:pt x="4261848" y="2529277"/>
-                  </a:lnTo>
-                  <a:lnTo>
-                    <a:pt x="4185216" y="2499254"/>
-                  </a:lnTo>
-                  <a:lnTo>
-                    <a:pt x="4108583" y="2466219"/>
-                  </a:lnTo>
-                  <a:lnTo>
-                    <a:pt x="4031951" y="2429869"/>
-                  </a:lnTo>
-                  <a:lnTo>
-                    <a:pt x="3955318" y="2389871"/>
-                  </a:lnTo>
-                  <a:lnTo>
-                    <a:pt x="3878685" y="2345860"/>
-                  </a:lnTo>
-                  <a:lnTo>
-                    <a:pt x="3802053" y="2297434"/>
-                  </a:lnTo>
-                  <a:lnTo>
-                    <a:pt x="3725420" y="2244148"/>
-                  </a:lnTo>
-                  <a:lnTo>
-                    <a:pt x="3648788" y="2185516"/>
-                  </a:lnTo>
-                  <a:lnTo>
-                    <a:pt x="3572155" y="2121000"/>
-                  </a:lnTo>
-                  <a:lnTo>
-                    <a:pt x="3495523" y="2050011"/>
-                  </a:lnTo>
-                  <a:lnTo>
-                    <a:pt x="3418890" y="1971900"/>
-                  </a:lnTo>
-                  <a:lnTo>
-                    <a:pt x="3342258" y="1939187"/>
-                  </a:lnTo>
-                  <a:lnTo>
-                    <a:pt x="3265625" y="1915280"/>
-                  </a:lnTo>
-                  <a:lnTo>
-                    <a:pt x="3188993" y="1890730"/>
-                  </a:lnTo>
-                  <a:lnTo>
-                    <a:pt x="3112360" y="1865521"/>
-                  </a:lnTo>
-                  <a:lnTo>
-                    <a:pt x="3035727" y="1839634"/>
-                  </a:lnTo>
-                  <a:lnTo>
-                    <a:pt x="2959095" y="1813051"/>
-                  </a:lnTo>
-                  <a:lnTo>
-                    <a:pt x="2882462" y="1785753"/>
-                  </a:lnTo>
-                  <a:lnTo>
-                    <a:pt x="2805830" y="1757721"/>
-                  </a:lnTo>
-                  <a:lnTo>
-                    <a:pt x="2729197" y="1728936"/>
-                  </a:lnTo>
-                  <a:lnTo>
-                    <a:pt x="2652565" y="1699377"/>
-                  </a:lnTo>
-                  <a:lnTo>
-                    <a:pt x="2575932" y="1669024"/>
-                  </a:lnTo>
-                  <a:lnTo>
-                    <a:pt x="2499300" y="1637854"/>
-                  </a:lnTo>
-                  <a:lnTo>
-                    <a:pt x="2422667" y="1605847"/>
-                  </a:lnTo>
-                  <a:lnTo>
-                    <a:pt x="2346034" y="1572979"/>
-                  </a:lnTo>
-                  <a:lnTo>
-                    <a:pt x="2269402" y="1539228"/>
-                  </a:lnTo>
-                  <a:lnTo>
-                    <a:pt x="2192769" y="1504569"/>
-                  </a:lnTo>
-                  <a:lnTo>
-                    <a:pt x="2116137" y="1468979"/>
-                  </a:lnTo>
-                  <a:lnTo>
-                    <a:pt x="2039504" y="1432431"/>
-                  </a:lnTo>
-                  <a:lnTo>
-                    <a:pt x="1962872" y="1394902"/>
-                  </a:lnTo>
-                  <a:lnTo>
-                    <a:pt x="1886239" y="1356363"/>
-                  </a:lnTo>
-                  <a:lnTo>
-                    <a:pt x="1809607" y="1316789"/>
-                  </a:lnTo>
-                  <a:lnTo>
-                    <a:pt x="1732974" y="1276150"/>
-                  </a:lnTo>
-                  <a:lnTo>
-                    <a:pt x="1656342" y="1234419"/>
-                  </a:lnTo>
-                  <a:lnTo>
-                    <a:pt x="1579709" y="1191567"/>
-                  </a:lnTo>
-                  <a:lnTo>
-                    <a:pt x="1503076" y="1147562"/>
-                  </a:lnTo>
-                  <a:lnTo>
-                    <a:pt x="1426444" y="1102374"/>
-                  </a:lnTo>
-                  <a:lnTo>
-                    <a:pt x="1349811" y="1055972"/>
-                  </a:lnTo>
-                  <a:lnTo>
-                    <a:pt x="1273179" y="1008322"/>
-                  </a:lnTo>
-                  <a:lnTo>
-                    <a:pt x="1196546" y="959391"/>
-                  </a:lnTo>
-                  <a:lnTo>
-                    <a:pt x="1119914" y="909145"/>
-                  </a:lnTo>
-                  <a:lnTo>
-                    <a:pt x="1043281" y="857548"/>
-                  </a:lnTo>
-                  <a:lnTo>
-                    <a:pt x="966649" y="804564"/>
-                  </a:lnTo>
-                  <a:lnTo>
-                    <a:pt x="890016" y="750156"/>
-                  </a:lnTo>
-                  <a:lnTo>
-                    <a:pt x="813384" y="694285"/>
-                  </a:lnTo>
-                  <a:lnTo>
-                    <a:pt x="736751" y="636912"/>
-                  </a:lnTo>
-                  <a:lnTo>
-                    <a:pt x="660118" y="577997"/>
-                  </a:lnTo>
-                  <a:lnTo>
-                    <a:pt x="583486" y="517498"/>
-                  </a:lnTo>
-                  <a:lnTo>
-                    <a:pt x="506853" y="455372"/>
-                  </a:lnTo>
-                  <a:lnTo>
-                    <a:pt x="430221" y="391577"/>
-                  </a:lnTo>
-                  <a:lnTo>
-                    <a:pt x="353588" y="326066"/>
-                  </a:lnTo>
-                  <a:lnTo>
-                    <a:pt x="276956" y="258795"/>
-                  </a:lnTo>
-                  <a:lnTo>
-                    <a:pt x="200323" y="189715"/>
-                  </a:lnTo>
-                  <a:lnTo>
-                    <a:pt x="123691" y="118778"/>
-                  </a:lnTo>
-                  <a:lnTo>
-                    <a:pt x="47058" y="45934"/>
+                    <a:pt x="7327150" y="2691478"/>
+                  </a:lnTo>
+                  <a:lnTo>
+                    <a:pt x="7250518" y="2690854"/>
+                  </a:lnTo>
+                  <a:lnTo>
+                    <a:pt x="7173885" y="2690166"/>
+                  </a:lnTo>
+                  <a:lnTo>
+                    <a:pt x="7097253" y="2689409"/>
+                  </a:lnTo>
+                  <a:lnTo>
+                    <a:pt x="7020620" y="2688577"/>
+                  </a:lnTo>
+                  <a:lnTo>
+                    <a:pt x="6943987" y="2687661"/>
+                  </a:lnTo>
+                  <a:lnTo>
+                    <a:pt x="6867355" y="2686652"/>
+                  </a:lnTo>
+                  <a:lnTo>
+                    <a:pt x="6790722" y="2685543"/>
+                  </a:lnTo>
+                  <a:lnTo>
+                    <a:pt x="6714090" y="2684323"/>
+                  </a:lnTo>
+                  <a:lnTo>
+                    <a:pt x="6637457" y="2682980"/>
+                  </a:lnTo>
+                  <a:lnTo>
+                    <a:pt x="6560825" y="2681502"/>
+                  </a:lnTo>
+                  <a:lnTo>
+                    <a:pt x="6484192" y="2679876"/>
+                  </a:lnTo>
+                  <a:lnTo>
+                    <a:pt x="6407560" y="2678087"/>
+                  </a:lnTo>
+                  <a:lnTo>
+                    <a:pt x="6330927" y="2676119"/>
+                  </a:lnTo>
+                  <a:lnTo>
+                    <a:pt x="6254294" y="2673952"/>
+                  </a:lnTo>
+                  <a:lnTo>
+                    <a:pt x="6177662" y="2671569"/>
+                  </a:lnTo>
+                  <a:lnTo>
+                    <a:pt x="6101029" y="2668946"/>
+                  </a:lnTo>
+                  <a:lnTo>
+                    <a:pt x="6024397" y="2666060"/>
+                  </a:lnTo>
+                  <a:lnTo>
+                    <a:pt x="5947764" y="2662885"/>
+                  </a:lnTo>
+                  <a:lnTo>
+                    <a:pt x="5871132" y="2659391"/>
+                  </a:lnTo>
+                  <a:lnTo>
+                    <a:pt x="5794499" y="2655547"/>
+                  </a:lnTo>
+                  <a:lnTo>
+                    <a:pt x="5717867" y="2651316"/>
+                  </a:lnTo>
+                  <a:lnTo>
+                    <a:pt x="5641234" y="2646662"/>
+                  </a:lnTo>
+                  <a:lnTo>
+                    <a:pt x="5564602" y="2641540"/>
+                  </a:lnTo>
+                  <a:lnTo>
+                    <a:pt x="5487969" y="2635904"/>
+                  </a:lnTo>
+                  <a:lnTo>
+                    <a:pt x="5411336" y="2629703"/>
+                  </a:lnTo>
+                  <a:lnTo>
+                    <a:pt x="5334704" y="2622879"/>
+                  </a:lnTo>
+                  <a:lnTo>
+                    <a:pt x="5258071" y="2615371"/>
+                  </a:lnTo>
+                  <a:lnTo>
+                    <a:pt x="5181439" y="2607110"/>
+                  </a:lnTo>
+                  <a:lnTo>
+                    <a:pt x="5104806" y="2598020"/>
+                  </a:lnTo>
+                  <a:lnTo>
+                    <a:pt x="5028174" y="2588017"/>
+                  </a:lnTo>
+                  <a:lnTo>
+                    <a:pt x="4951541" y="2577011"/>
+                  </a:lnTo>
+                  <a:lnTo>
+                    <a:pt x="4874909" y="2564901"/>
+                  </a:lnTo>
+                  <a:lnTo>
+                    <a:pt x="4798276" y="2551575"/>
+                  </a:lnTo>
+                  <a:lnTo>
+                    <a:pt x="4721644" y="2536913"/>
+                  </a:lnTo>
+                  <a:lnTo>
+                    <a:pt x="4645011" y="2520779"/>
+                  </a:lnTo>
+                  <a:lnTo>
+                    <a:pt x="4568378" y="2503026"/>
+                  </a:lnTo>
+                  <a:lnTo>
+                    <a:pt x="4491746" y="2483492"/>
+                  </a:lnTo>
+                  <a:lnTo>
+                    <a:pt x="4415113" y="2461999"/>
+                  </a:lnTo>
+                  <a:lnTo>
+                    <a:pt x="4338481" y="2438348"/>
+                  </a:lnTo>
+                  <a:lnTo>
+                    <a:pt x="4261848" y="2412324"/>
+                  </a:lnTo>
+                  <a:lnTo>
+                    <a:pt x="4185216" y="2383690"/>
+                  </a:lnTo>
+                  <a:lnTo>
+                    <a:pt x="4108583" y="2352182"/>
+                  </a:lnTo>
+                  <a:lnTo>
+                    <a:pt x="4031951" y="2317512"/>
+                  </a:lnTo>
+                  <a:lnTo>
+                    <a:pt x="3955318" y="2279364"/>
+                  </a:lnTo>
+                  <a:lnTo>
+                    <a:pt x="3878685" y="2237389"/>
+                  </a:lnTo>
+                  <a:lnTo>
+                    <a:pt x="3802053" y="2191201"/>
+                  </a:lnTo>
+                  <a:lnTo>
+                    <a:pt x="3725420" y="2140379"/>
+                  </a:lnTo>
+                  <a:lnTo>
+                    <a:pt x="3648788" y="2084458"/>
+                  </a:lnTo>
+                  <a:lnTo>
+                    <a:pt x="3572155" y="2022926"/>
+                  </a:lnTo>
+                  <a:lnTo>
+                    <a:pt x="3495523" y="1955220"/>
+                  </a:lnTo>
+                  <a:lnTo>
+                    <a:pt x="3418890" y="1880720"/>
+                  </a:lnTo>
+                  <a:lnTo>
+                    <a:pt x="3342258" y="1849519"/>
+                  </a:lnTo>
+                  <a:lnTo>
+                    <a:pt x="3265625" y="1826718"/>
+                  </a:lnTo>
+                  <a:lnTo>
+                    <a:pt x="3188993" y="1803304"/>
+                  </a:lnTo>
+                  <a:lnTo>
+                    <a:pt x="3112360" y="1779260"/>
+                  </a:lnTo>
+                  <a:lnTo>
+                    <a:pt x="3035727" y="1754570"/>
+                  </a:lnTo>
+                  <a:lnTo>
+                    <a:pt x="2959095" y="1729216"/>
+                  </a:lnTo>
+                  <a:lnTo>
+                    <a:pt x="2882462" y="1703180"/>
+                  </a:lnTo>
+                  <a:lnTo>
+                    <a:pt x="2805830" y="1676445"/>
+                  </a:lnTo>
+                  <a:lnTo>
+                    <a:pt x="2729197" y="1648991"/>
+                  </a:lnTo>
+                  <a:lnTo>
+                    <a:pt x="2652565" y="1620799"/>
+                  </a:lnTo>
+                  <a:lnTo>
+                    <a:pt x="2575932" y="1591849"/>
+                  </a:lnTo>
+                  <a:lnTo>
+                    <a:pt x="2499300" y="1562121"/>
+                  </a:lnTo>
+                  <a:lnTo>
+                    <a:pt x="2422667" y="1531593"/>
+                  </a:lnTo>
+                  <a:lnTo>
+                    <a:pt x="2346034" y="1500245"/>
+                  </a:lnTo>
+                  <a:lnTo>
+                    <a:pt x="2269402" y="1468054"/>
+                  </a:lnTo>
+                  <a:lnTo>
+                    <a:pt x="2192769" y="1434998"/>
+                  </a:lnTo>
+                  <a:lnTo>
+                    <a:pt x="2116137" y="1401054"/>
+                  </a:lnTo>
+                  <a:lnTo>
+                    <a:pt x="2039504" y="1366196"/>
+                  </a:lnTo>
+                  <a:lnTo>
+                    <a:pt x="1962872" y="1330402"/>
+                  </a:lnTo>
+                  <a:lnTo>
+                    <a:pt x="1886239" y="1293645"/>
+                  </a:lnTo>
+                  <a:lnTo>
+                    <a:pt x="1809607" y="1255901"/>
+                  </a:lnTo>
+                  <a:lnTo>
+                    <a:pt x="1732974" y="1217141"/>
+                  </a:lnTo>
+                  <a:lnTo>
+                    <a:pt x="1656342" y="1177340"/>
+                  </a:lnTo>
+                  <a:lnTo>
+                    <a:pt x="1579709" y="1136469"/>
+                  </a:lnTo>
+                  <a:lnTo>
+                    <a:pt x="1503076" y="1094499"/>
+                  </a:lnTo>
+                  <a:lnTo>
+                    <a:pt x="1426444" y="1051401"/>
+                  </a:lnTo>
+                  <a:lnTo>
+                    <a:pt x="1349811" y="1007144"/>
+                  </a:lnTo>
+                  <a:lnTo>
+                    <a:pt x="1273179" y="961697"/>
+                  </a:lnTo>
+                  <a:lnTo>
+                    <a:pt x="1196546" y="915029"/>
+                  </a:lnTo>
+                  <a:lnTo>
+                    <a:pt x="1119914" y="867106"/>
+                  </a:lnTo>
+                  <a:lnTo>
+                    <a:pt x="1043281" y="817895"/>
+                  </a:lnTo>
+                  <a:lnTo>
+                    <a:pt x="966649" y="767361"/>
+                  </a:lnTo>
+                  <a:lnTo>
+                    <a:pt x="890016" y="715469"/>
+                  </a:lnTo>
+                  <a:lnTo>
+                    <a:pt x="813384" y="662181"/>
+                  </a:lnTo>
+                  <a:lnTo>
+                    <a:pt x="736751" y="607461"/>
+                  </a:lnTo>
+                  <a:lnTo>
+                    <a:pt x="660118" y="551270"/>
+                  </a:lnTo>
+                  <a:lnTo>
+                    <a:pt x="583486" y="493569"/>
+                  </a:lnTo>
+                  <a:lnTo>
+                    <a:pt x="506853" y="434316"/>
+                  </a:lnTo>
+                  <a:lnTo>
+                    <a:pt x="430221" y="373470"/>
+                  </a:lnTo>
+                  <a:lnTo>
+                    <a:pt x="353588" y="310989"/>
+                  </a:lnTo>
+                  <a:lnTo>
+                    <a:pt x="276956" y="246828"/>
+                  </a:lnTo>
+                  <a:lnTo>
+                    <a:pt x="200323" y="180943"/>
+                  </a:lnTo>
+                  <a:lnTo>
+                    <a:pt x="123691" y="113286"/>
+                  </a:lnTo>
+                  <a:lnTo>
+                    <a:pt x="47058" y="43810"/>
                   </a:lnTo>
                   <a:lnTo>
                     <a:pt x="0" y="0"/>
@@ -4085,243 +4085,243 @@
           </p:nvSpPr>
           <p:spPr>
             <a:xfrm>
-              <a:off x="2424076" y="1896563"/>
-              <a:ext cx="5797224" cy="3616674"/>
+              <a:off x="2424076" y="2073503"/>
+              <a:ext cx="5797224" cy="3449440"/>
             </a:xfrm>
             <a:custGeom>
               <a:avLst/>
               <a:pathLst>
-                <a:path w="5797224" h="3616674">
+                <a:path w="5797224" h="3449440">
                   <a:moveTo>
                     <a:pt x="0" y="0"/>
                   </a:moveTo>
                   <a:lnTo>
-                    <a:pt x="49783" y="143563"/>
-                  </a:lnTo>
-                  <a:lnTo>
-                    <a:pt x="126416" y="351458"/>
-                  </a:lnTo>
-                  <a:lnTo>
-                    <a:pt x="203048" y="547037"/>
-                  </a:lnTo>
-                  <a:lnTo>
-                    <a:pt x="279681" y="731028"/>
-                  </a:lnTo>
-                  <a:lnTo>
-                    <a:pt x="356313" y="904119"/>
-                  </a:lnTo>
-                  <a:lnTo>
-                    <a:pt x="432946" y="1066956"/>
-                  </a:lnTo>
-                  <a:lnTo>
-                    <a:pt x="509579" y="1220145"/>
-                  </a:lnTo>
-                  <a:lnTo>
-                    <a:pt x="586211" y="1364258"/>
-                  </a:lnTo>
-                  <a:lnTo>
-                    <a:pt x="662844" y="1499833"/>
-                  </a:lnTo>
-                  <a:lnTo>
-                    <a:pt x="739476" y="1627376"/>
-                  </a:lnTo>
-                  <a:lnTo>
-                    <a:pt x="816109" y="1747363"/>
-                  </a:lnTo>
-                  <a:lnTo>
-                    <a:pt x="892741" y="1860242"/>
-                  </a:lnTo>
-                  <a:lnTo>
-                    <a:pt x="969374" y="1966432"/>
-                  </a:lnTo>
-                  <a:lnTo>
-                    <a:pt x="1046006" y="2066332"/>
-                  </a:lnTo>
-                  <a:lnTo>
-                    <a:pt x="1122639" y="2160313"/>
-                  </a:lnTo>
-                  <a:lnTo>
-                    <a:pt x="1199272" y="2248726"/>
-                  </a:lnTo>
-                  <a:lnTo>
-                    <a:pt x="1275904" y="2331901"/>
-                  </a:lnTo>
-                  <a:lnTo>
-                    <a:pt x="1352537" y="2410148"/>
-                  </a:lnTo>
-                  <a:lnTo>
-                    <a:pt x="1429169" y="2483760"/>
-                  </a:lnTo>
-                  <a:lnTo>
-                    <a:pt x="1505802" y="2553010"/>
-                  </a:lnTo>
-                  <a:lnTo>
-                    <a:pt x="1582434" y="2618158"/>
-                  </a:lnTo>
-                  <a:lnTo>
-                    <a:pt x="1659067" y="2679446"/>
-                  </a:lnTo>
-                  <a:lnTo>
-                    <a:pt x="1735699" y="2737103"/>
-                  </a:lnTo>
-                  <a:lnTo>
-                    <a:pt x="1812332" y="2791344"/>
-                  </a:lnTo>
-                  <a:lnTo>
-                    <a:pt x="1888964" y="2842372"/>
-                  </a:lnTo>
-                  <a:lnTo>
-                    <a:pt x="1965597" y="2890377"/>
-                  </a:lnTo>
-                  <a:lnTo>
-                    <a:pt x="2042230" y="2935537"/>
-                  </a:lnTo>
-                  <a:lnTo>
-                    <a:pt x="2118862" y="2978022"/>
-                  </a:lnTo>
-                  <a:lnTo>
-                    <a:pt x="2195495" y="3017990"/>
-                  </a:lnTo>
-                  <a:lnTo>
-                    <a:pt x="2272127" y="3055590"/>
-                  </a:lnTo>
-                  <a:lnTo>
-                    <a:pt x="2348760" y="3090962"/>
-                  </a:lnTo>
-                  <a:lnTo>
-                    <a:pt x="2425392" y="3124239"/>
-                  </a:lnTo>
-                  <a:lnTo>
-                    <a:pt x="2502025" y="3155544"/>
-                  </a:lnTo>
-                  <a:lnTo>
-                    <a:pt x="2578657" y="3184995"/>
-                  </a:lnTo>
-                  <a:lnTo>
-                    <a:pt x="2655290" y="3212701"/>
-                  </a:lnTo>
-                  <a:lnTo>
-                    <a:pt x="2731923" y="3238765"/>
-                  </a:lnTo>
-                  <a:lnTo>
-                    <a:pt x="2808555" y="3263285"/>
-                  </a:lnTo>
-                  <a:lnTo>
-                    <a:pt x="2885188" y="3286353"/>
-                  </a:lnTo>
-                  <a:lnTo>
-                    <a:pt x="2961820" y="3308054"/>
-                  </a:lnTo>
-                  <a:lnTo>
-                    <a:pt x="3038453" y="3328469"/>
-                  </a:lnTo>
-                  <a:lnTo>
-                    <a:pt x="3115085" y="3347675"/>
-                  </a:lnTo>
-                  <a:lnTo>
-                    <a:pt x="3191718" y="3365743"/>
-                  </a:lnTo>
-                  <a:lnTo>
-                    <a:pt x="3268350" y="3382740"/>
-                  </a:lnTo>
-                  <a:lnTo>
-                    <a:pt x="3344983" y="3398730"/>
-                  </a:lnTo>
-                  <a:lnTo>
-                    <a:pt x="3421615" y="3413773"/>
-                  </a:lnTo>
-                  <a:lnTo>
-                    <a:pt x="3498248" y="3427925"/>
-                  </a:lnTo>
-                  <a:lnTo>
-                    <a:pt x="3574881" y="3441239"/>
-                  </a:lnTo>
-                  <a:lnTo>
-                    <a:pt x="3651513" y="3453763"/>
-                  </a:lnTo>
-                  <a:lnTo>
-                    <a:pt x="3728146" y="3465546"/>
-                  </a:lnTo>
-                  <a:lnTo>
-                    <a:pt x="3804778" y="3476631"/>
-                  </a:lnTo>
-                  <a:lnTo>
-                    <a:pt x="3881411" y="3487058"/>
-                  </a:lnTo>
-                  <a:lnTo>
-                    <a:pt x="3958043" y="3496868"/>
-                  </a:lnTo>
-                  <a:lnTo>
-                    <a:pt x="4034676" y="3506097"/>
-                  </a:lnTo>
-                  <a:lnTo>
-                    <a:pt x="4111308" y="3514779"/>
-                  </a:lnTo>
-                  <a:lnTo>
-                    <a:pt x="4187941" y="3522947"/>
-                  </a:lnTo>
-                  <a:lnTo>
-                    <a:pt x="4264573" y="3530631"/>
-                  </a:lnTo>
-                  <a:lnTo>
-                    <a:pt x="4341206" y="3537860"/>
-                  </a:lnTo>
-                  <a:lnTo>
-                    <a:pt x="4417839" y="3544660"/>
-                  </a:lnTo>
-                  <a:lnTo>
-                    <a:pt x="4494471" y="3551057"/>
-                  </a:lnTo>
-                  <a:lnTo>
-                    <a:pt x="4571104" y="3557076"/>
-                  </a:lnTo>
-                  <a:lnTo>
-                    <a:pt x="4647736" y="3562738"/>
-                  </a:lnTo>
-                  <a:lnTo>
-                    <a:pt x="4724369" y="3568064"/>
-                  </a:lnTo>
-                  <a:lnTo>
-                    <a:pt x="4801001" y="3573075"/>
-                  </a:lnTo>
-                  <a:lnTo>
-                    <a:pt x="4877634" y="3577789"/>
-                  </a:lnTo>
-                  <a:lnTo>
-                    <a:pt x="4954266" y="3582224"/>
-                  </a:lnTo>
-                  <a:lnTo>
-                    <a:pt x="5030899" y="3586396"/>
-                  </a:lnTo>
-                  <a:lnTo>
-                    <a:pt x="5107532" y="3590321"/>
-                  </a:lnTo>
-                  <a:lnTo>
-                    <a:pt x="5184164" y="3594013"/>
-                  </a:lnTo>
-                  <a:lnTo>
-                    <a:pt x="5260797" y="3597487"/>
-                  </a:lnTo>
-                  <a:lnTo>
-                    <a:pt x="5337429" y="3600754"/>
-                  </a:lnTo>
-                  <a:lnTo>
-                    <a:pt x="5414062" y="3603828"/>
-                  </a:lnTo>
-                  <a:lnTo>
-                    <a:pt x="5490694" y="3606721"/>
-                  </a:lnTo>
-                  <a:lnTo>
-                    <a:pt x="5567327" y="3609441"/>
-                  </a:lnTo>
-                  <a:lnTo>
-                    <a:pt x="5643959" y="3612001"/>
-                  </a:lnTo>
-                  <a:lnTo>
-                    <a:pt x="5720592" y="3614409"/>
-                  </a:lnTo>
-                  <a:lnTo>
-                    <a:pt x="5797224" y="3616674"/>
+                    <a:pt x="49783" y="136924"/>
+                  </a:lnTo>
+                  <a:lnTo>
+                    <a:pt x="126416" y="335207"/>
+                  </a:lnTo>
+                  <a:lnTo>
+                    <a:pt x="203048" y="521742"/>
+                  </a:lnTo>
+                  <a:lnTo>
+                    <a:pt x="279681" y="697226"/>
+                  </a:lnTo>
+                  <a:lnTo>
+                    <a:pt x="356313" y="862313"/>
+                  </a:lnTo>
+                  <a:lnTo>
+                    <a:pt x="432946" y="1017620"/>
+                  </a:lnTo>
+                  <a:lnTo>
+                    <a:pt x="509579" y="1163725"/>
+                  </a:lnTo>
+                  <a:lnTo>
+                    <a:pt x="586211" y="1301175"/>
+                  </a:lnTo>
+                  <a:lnTo>
+                    <a:pt x="662844" y="1430481"/>
+                  </a:lnTo>
+                  <a:lnTo>
+                    <a:pt x="739476" y="1552127"/>
+                  </a:lnTo>
+                  <a:lnTo>
+                    <a:pt x="816109" y="1666566"/>
+                  </a:lnTo>
+                  <a:lnTo>
+                    <a:pt x="892741" y="1774225"/>
+                  </a:lnTo>
+                  <a:lnTo>
+                    <a:pt x="969374" y="1875505"/>
+                  </a:lnTo>
+                  <a:lnTo>
+                    <a:pt x="1046006" y="1970785"/>
+                  </a:lnTo>
+                  <a:lnTo>
+                    <a:pt x="1122639" y="2060421"/>
+                  </a:lnTo>
+                  <a:lnTo>
+                    <a:pt x="1199272" y="2144746"/>
+                  </a:lnTo>
+                  <a:lnTo>
+                    <a:pt x="1275904" y="2224075"/>
+                  </a:lnTo>
+                  <a:lnTo>
+                    <a:pt x="1352537" y="2298704"/>
+                  </a:lnTo>
+                  <a:lnTo>
+                    <a:pt x="1429169" y="2368912"/>
+                  </a:lnTo>
+                  <a:lnTo>
+                    <a:pt x="1505802" y="2434960"/>
+                  </a:lnTo>
+                  <a:lnTo>
+                    <a:pt x="1582434" y="2497095"/>
+                  </a:lnTo>
+                  <a:lnTo>
+                    <a:pt x="1659067" y="2555550"/>
+                  </a:lnTo>
+                  <a:lnTo>
+                    <a:pt x="1735699" y="2610541"/>
+                  </a:lnTo>
+                  <a:lnTo>
+                    <a:pt x="1812332" y="2662274"/>
+                  </a:lnTo>
+                  <a:lnTo>
+                    <a:pt x="1888964" y="2710942"/>
+                  </a:lnTo>
+                  <a:lnTo>
+                    <a:pt x="1965597" y="2756727"/>
+                  </a:lnTo>
+                  <a:lnTo>
+                    <a:pt x="2042230" y="2799799"/>
+                  </a:lnTo>
+                  <a:lnTo>
+                    <a:pt x="2118862" y="2840319"/>
+                  </a:lnTo>
+                  <a:lnTo>
+                    <a:pt x="2195495" y="2878439"/>
+                  </a:lnTo>
+                  <a:lnTo>
+                    <a:pt x="2272127" y="2914301"/>
+                  </a:lnTo>
+                  <a:lnTo>
+                    <a:pt x="2348760" y="2948037"/>
+                  </a:lnTo>
+                  <a:lnTo>
+                    <a:pt x="2425392" y="2979775"/>
+                  </a:lnTo>
+                  <a:lnTo>
+                    <a:pt x="2502025" y="3009633"/>
+                  </a:lnTo>
+                  <a:lnTo>
+                    <a:pt x="2578657" y="3037722"/>
+                  </a:lnTo>
+                  <a:lnTo>
+                    <a:pt x="2655290" y="3064147"/>
+                  </a:lnTo>
+                  <a:lnTo>
+                    <a:pt x="2731923" y="3089006"/>
+                  </a:lnTo>
+                  <a:lnTo>
+                    <a:pt x="2808555" y="3112392"/>
+                  </a:lnTo>
+                  <a:lnTo>
+                    <a:pt x="2885188" y="3134393"/>
+                  </a:lnTo>
+                  <a:lnTo>
+                    <a:pt x="2961820" y="3155091"/>
+                  </a:lnTo>
+                  <a:lnTo>
+                    <a:pt x="3038453" y="3174562"/>
+                  </a:lnTo>
+                  <a:lnTo>
+                    <a:pt x="3115085" y="3192879"/>
+                  </a:lnTo>
+                  <a:lnTo>
+                    <a:pt x="3191718" y="3210112"/>
+                  </a:lnTo>
+                  <a:lnTo>
+                    <a:pt x="3268350" y="3226323"/>
+                  </a:lnTo>
+                  <a:lnTo>
+                    <a:pt x="3344983" y="3241574"/>
+                  </a:lnTo>
+                  <a:lnTo>
+                    <a:pt x="3421615" y="3255922"/>
+                  </a:lnTo>
+                  <a:lnTo>
+                    <a:pt x="3498248" y="3269419"/>
+                  </a:lnTo>
+                  <a:lnTo>
+                    <a:pt x="3574881" y="3282117"/>
+                  </a:lnTo>
+                  <a:lnTo>
+                    <a:pt x="3651513" y="3294063"/>
+                  </a:lnTo>
+                  <a:lnTo>
+                    <a:pt x="3728146" y="3305300"/>
+                  </a:lnTo>
+                  <a:lnTo>
+                    <a:pt x="3804778" y="3315872"/>
+                  </a:lnTo>
+                  <a:lnTo>
+                    <a:pt x="3881411" y="3325818"/>
+                  </a:lnTo>
+                  <a:lnTo>
+                    <a:pt x="3958043" y="3335175"/>
+                  </a:lnTo>
+                  <a:lnTo>
+                    <a:pt x="4034676" y="3343977"/>
+                  </a:lnTo>
+                  <a:lnTo>
+                    <a:pt x="4111308" y="3352257"/>
+                  </a:lnTo>
+                  <a:lnTo>
+                    <a:pt x="4187941" y="3360047"/>
+                  </a:lnTo>
+                  <a:lnTo>
+                    <a:pt x="4264573" y="3367376"/>
+                  </a:lnTo>
+                  <a:lnTo>
+                    <a:pt x="4341206" y="3374270"/>
+                  </a:lnTo>
+                  <a:lnTo>
+                    <a:pt x="4417839" y="3380756"/>
+                  </a:lnTo>
+                  <a:lnTo>
+                    <a:pt x="4494471" y="3386858"/>
+                  </a:lnTo>
+                  <a:lnTo>
+                    <a:pt x="4571104" y="3392598"/>
+                  </a:lnTo>
+                  <a:lnTo>
+                    <a:pt x="4647736" y="3397998"/>
+                  </a:lnTo>
+                  <a:lnTo>
+                    <a:pt x="4724369" y="3403078"/>
+                  </a:lnTo>
+                  <a:lnTo>
+                    <a:pt x="4801001" y="3407857"/>
+                  </a:lnTo>
+                  <a:lnTo>
+                    <a:pt x="4877634" y="3412354"/>
+                  </a:lnTo>
+                  <a:lnTo>
+                    <a:pt x="4954266" y="3416583"/>
+                  </a:lnTo>
+                  <a:lnTo>
+                    <a:pt x="5030899" y="3420562"/>
+                  </a:lnTo>
+                  <a:lnTo>
+                    <a:pt x="5107532" y="3424306"/>
+                  </a:lnTo>
+                  <a:lnTo>
+                    <a:pt x="5184164" y="3427827"/>
+                  </a:lnTo>
+                  <a:lnTo>
+                    <a:pt x="5260797" y="3431140"/>
+                  </a:lnTo>
+                  <a:lnTo>
+                    <a:pt x="5337429" y="3434257"/>
+                  </a:lnTo>
+                  <a:lnTo>
+                    <a:pt x="5414062" y="3437189"/>
+                  </a:lnTo>
+                  <a:lnTo>
+                    <a:pt x="5490694" y="3439947"/>
+                  </a:lnTo>
+                  <a:lnTo>
+                    <a:pt x="5567327" y="3442542"/>
+                  </a:lnTo>
+                  <a:lnTo>
+                    <a:pt x="5643959" y="3444983"/>
+                  </a:lnTo>
+                  <a:lnTo>
+                    <a:pt x="5720592" y="3447280"/>
+                  </a:lnTo>
+                  <a:lnTo>
+                    <a:pt x="5797224" y="3449440"/>
                   </a:lnTo>
                 </a:path>
               </a:pathLst>
@@ -4350,7 +4350,7 @@
           </p:nvSpPr>
           <p:spPr>
             <a:xfrm>
-              <a:off x="817517" y="4679530"/>
+              <a:off x="817517" y="4727786"/>
               <a:ext cx="7799693" cy="0"/>
             </a:xfrm>
             <a:custGeom>
@@ -4393,15 +4393,15 @@
           </p:nvSpPr>
           <p:spPr>
             <a:xfrm>
-              <a:off x="4224261" y="1896563"/>
-              <a:ext cx="0" cy="3826579"/>
+              <a:off x="4224261" y="2073503"/>
+              <a:ext cx="0" cy="3649639"/>
             </a:xfrm>
             <a:custGeom>
               <a:avLst/>
               <a:pathLst>
-                <a:path w="0" h="3826579">
+                <a:path w="0" h="3649639">
                   <a:moveTo>
-                    <a:pt x="0" y="3826579"/>
+                    <a:pt x="0" y="3649639"/>
                   </a:moveTo>
                   <a:lnTo>
                     <a:pt x="0" y="0"/>
@@ -4436,7 +4436,7 @@
           </p:nvSpPr>
           <p:spPr>
             <a:xfrm>
-              <a:off x="692708" y="5509156"/>
+              <a:off x="692708" y="5517199"/>
               <a:ext cx="62179" cy="80101"/>
             </a:xfrm>
             <a:prstGeom prst="rect">
@@ -4482,7 +4482,7 @@
           </p:nvSpPr>
           <p:spPr>
             <a:xfrm>
-              <a:off x="692708" y="4639479"/>
+              <a:off x="692708" y="4687735"/>
               <a:ext cx="62179" cy="80101"/>
             </a:xfrm>
             <a:prstGeom prst="rect">
@@ -4528,7 +4528,7 @@
           </p:nvSpPr>
           <p:spPr>
             <a:xfrm>
-              <a:off x="692708" y="3769802"/>
+              <a:off x="692708" y="3858272"/>
               <a:ext cx="62179" cy="80101"/>
             </a:xfrm>
             <a:prstGeom prst="rect">
@@ -4574,7 +4574,7 @@
           </p:nvSpPr>
           <p:spPr>
             <a:xfrm>
-              <a:off x="692708" y="2900125"/>
+              <a:off x="692708" y="3028808"/>
               <a:ext cx="62179" cy="80101"/>
             </a:xfrm>
             <a:prstGeom prst="rect">
@@ -4620,7 +4620,7 @@
           </p:nvSpPr>
           <p:spPr>
             <a:xfrm>
-              <a:off x="692708" y="2030448"/>
+              <a:off x="692708" y="2199345"/>
               <a:ext cx="62179" cy="80101"/>
             </a:xfrm>
             <a:prstGeom prst="rect">
@@ -4896,7 +4896,7 @@
           </p:nvSpPr>
           <p:spPr>
             <a:xfrm rot="-5400000">
-              <a:off x="68446" y="3759743"/>
+              <a:off x="68446" y="3848213"/>
               <a:ext cx="1016904" cy="100218"/>
             </a:xfrm>
             <a:prstGeom prst="rect">
@@ -4937,6 +4937,52 @@
         <p:sp>
           <p:nvSpPr>
             <p:cNvPr id="38" name="tx38"/>
+            <p:cNvSpPr/>
+            <p:nvPr/>
+          </p:nvSpPr>
+          <p:spPr>
+            <a:xfrm>
+              <a:off x="817517" y="1896563"/>
+              <a:ext cx="5689762" cy="82021"/>
+            </a:xfrm>
+            <a:prstGeom prst="rect">
+              <a:avLst/>
+            </a:prstGeom>
+            <a:noFill/>
+          </p:spPr>
+          <p:txBody>
+            <a:bodyPr lIns="0" rIns="0" tIns="0" bIns="0" anchorCtr="1" anchor="ctr" wrap="none"/>
+            <a:lstStyle/>
+            <a:p>
+              <a:pPr algn="l" marL="0" marR="0" indent="0">
+                <a:lnSpc>
+                  <a:spcPts val="900"/>
+                </a:lnSpc>
+                <a:spcBef>
+                  <a:spcPts val="0"/>
+                </a:spcBef>
+                <a:spcAft>
+                  <a:spcPts val="0"/>
+                </a:spcAft>
+              </a:pPr>
+              <a:r>
+                <a:rPr sz="900">
+                  <a:solidFill>
+                    <a:srgbClr val="404040">
+                      <a:alpha val="100000"/>
+                    </a:srgbClr>
+                  </a:solidFill>
+                  <a:latin typeface="Helvetica"/>
+                  <a:cs typeface="Helvetica"/>
+                </a:rPr>
+                <a:t>subHR per 0.1 ratio decline: 2.03 (1.36-3.02)  |  per IQR decline (Δ = 0.30): 8.27 (2.50-27.34)  |  IQR: [0.85, 1.15]</a:t>
+              </a:r>
+            </a:p>
+          </p:txBody>
+        </p:sp>
+        <p:sp>
+          <p:nvSpPr>
+            <p:cNvPr id="39" name="tx39"/>
             <p:cNvSpPr/>
             <p:nvPr/>
           </p:nvSpPr>

--- a/docs/pptx/carbo/jx-carbo-linsubhr-ratio-hosp5.pptx
+++ b/docs/pptx/carbo/jx-carbo-linsubhr-ratio-hosp5.pptx
@@ -4943,7 +4943,7 @@
           <p:spPr>
             <a:xfrm>
               <a:off x="817517" y="1896563"/>
-              <a:ext cx="5689762" cy="82021"/>
+              <a:ext cx="6299667" cy="82021"/>
             </a:xfrm>
             <a:prstGeom prst="rect">
               <a:avLst/>
@@ -4975,7 +4975,7 @@
                   <a:latin typeface="Helvetica"/>
                   <a:cs typeface="Helvetica"/>
                 </a:rPr>
-                <a:t>subHR per 0.1 ratio decline: 2.03 (1.36-3.02)  |  per IQR decline (Δ = 0.30): 8.27 (2.50-27.34)  |  IQR: [0.85, 1.15]</a:t>
+                <a:t>subHR per 0.1 ratio decline: 2.03 (1.36-3.02), p = &lt;0.001  |  per IQR decline (Δ = 0.30): 8.27 (2.50-27.34)  |  IQR: [0.85, 1.15]</a:t>
               </a:r>
             </a:p>
           </p:txBody>

--- a/docs/pptx/carbo/jx-carbo-linsubhr-ratio-hosp5.pptx
+++ b/docs/pptx/carbo/jx-carbo-linsubhr-ratio-hosp5.pptx
@@ -2443,7 +2443,7 @@
           </p:nvSpPr>
           <p:spPr>
             <a:xfrm>
-              <a:off x="1615213" y="2073503"/>
+              <a:off x="1467192" y="2073503"/>
               <a:ext cx="0" cy="3649639"/>
             </a:xfrm>
             <a:custGeom>
@@ -2486,7 +2486,7 @@
           </p:nvSpPr>
           <p:spPr>
             <a:xfrm>
-              <a:off x="3387871" y="2073503"/>
+              <a:off x="3538150" y="2073503"/>
               <a:ext cx="0" cy="3649639"/>
             </a:xfrm>
             <a:custGeom>
@@ -2529,7 +2529,7 @@
           </p:nvSpPr>
           <p:spPr>
             <a:xfrm>
-              <a:off x="5160528" y="2073503"/>
+              <a:off x="5609107" y="2073503"/>
               <a:ext cx="0" cy="3649639"/>
             </a:xfrm>
             <a:custGeom>
@@ -2572,7 +2572,7 @@
           </p:nvSpPr>
           <p:spPr>
             <a:xfrm>
-              <a:off x="6933186" y="2073503"/>
+              <a:off x="7680065" y="2073503"/>
               <a:ext cx="0" cy="3649639"/>
             </a:xfrm>
             <a:custGeom>
@@ -2830,7 +2830,7 @@
           </p:nvSpPr>
           <p:spPr>
             <a:xfrm>
-              <a:off x="2501542" y="2073503"/>
+              <a:off x="2502671" y="2073503"/>
               <a:ext cx="0" cy="3649639"/>
             </a:xfrm>
             <a:custGeom>
@@ -2873,7 +2873,7 @@
           </p:nvSpPr>
           <p:spPr>
             <a:xfrm>
-              <a:off x="4274200" y="2073503"/>
+              <a:off x="4573628" y="2073503"/>
               <a:ext cx="0" cy="3649639"/>
             </a:xfrm>
             <a:custGeom>
@@ -2916,7 +2916,7 @@
           </p:nvSpPr>
           <p:spPr>
             <a:xfrm>
-              <a:off x="6046857" y="2073503"/>
+              <a:off x="6644586" y="2073503"/>
               <a:ext cx="0" cy="3649639"/>
             </a:xfrm>
             <a:custGeom>
@@ -2953,562 +2953,528 @@
         </p:sp>
         <p:sp>
           <p:nvSpPr>
-            <p:cNvPr id="20" name="pl20"/>
+            <p:cNvPr id="20" name="pg20"/>
             <p:cNvSpPr/>
             <p:nvPr/>
           </p:nvSpPr>
           <p:spPr>
             <a:xfrm>
-              <a:off x="7819515" y="2073503"/>
-              <a:ext cx="0" cy="3649639"/>
+              <a:off x="1172049" y="2073503"/>
+              <a:ext cx="7090630" cy="3478086"/>
             </a:xfrm>
             <a:custGeom>
               <a:avLst/>
               <a:pathLst>
-                <a:path w="0" h="3649639">
+                <a:path w="7090630" h="3478086">
                   <a:moveTo>
-                    <a:pt x="0" y="3649639"/>
+                    <a:pt x="2280424" y="0"/>
                   </a:moveTo>
                   <a:lnTo>
+                    <a:pt x="2291920" y="55219"/>
+                  </a:lnTo>
+                  <a:lnTo>
+                    <a:pt x="2363543" y="367861"/>
+                  </a:lnTo>
+                  <a:lnTo>
+                    <a:pt x="2435165" y="651994"/>
+                  </a:lnTo>
+                  <a:lnTo>
+                    <a:pt x="2506788" y="910217"/>
+                  </a:lnTo>
+                  <a:lnTo>
+                    <a:pt x="2578410" y="1144893"/>
+                  </a:lnTo>
+                  <a:lnTo>
+                    <a:pt x="2650033" y="1358170"/>
+                  </a:lnTo>
+                  <a:lnTo>
+                    <a:pt x="2721655" y="1551998"/>
+                  </a:lnTo>
+                  <a:lnTo>
+                    <a:pt x="2793278" y="1728151"/>
+                  </a:lnTo>
+                  <a:lnTo>
+                    <a:pt x="2864901" y="1888241"/>
+                  </a:lnTo>
+                  <a:lnTo>
+                    <a:pt x="2936523" y="2033733"/>
+                  </a:lnTo>
+                  <a:lnTo>
+                    <a:pt x="3008146" y="2165957"/>
+                  </a:lnTo>
+                  <a:lnTo>
+                    <a:pt x="3079768" y="2286124"/>
+                  </a:lnTo>
+                  <a:lnTo>
+                    <a:pt x="3151391" y="2395334"/>
+                  </a:lnTo>
+                  <a:lnTo>
+                    <a:pt x="3223013" y="2494584"/>
+                  </a:lnTo>
+                  <a:lnTo>
+                    <a:pt x="3294636" y="2584784"/>
+                  </a:lnTo>
+                  <a:lnTo>
+                    <a:pt x="3366258" y="2657763"/>
+                  </a:lnTo>
+                  <a:lnTo>
+                    <a:pt x="3437881" y="2679386"/>
+                  </a:lnTo>
+                  <a:lnTo>
+                    <a:pt x="3509503" y="2700444"/>
+                  </a:lnTo>
+                  <a:lnTo>
+                    <a:pt x="3581126" y="2720949"/>
+                  </a:lnTo>
+                  <a:lnTo>
+                    <a:pt x="3652748" y="2740918"/>
+                  </a:lnTo>
+                  <a:lnTo>
+                    <a:pt x="3724371" y="2760365"/>
+                  </a:lnTo>
+                  <a:lnTo>
+                    <a:pt x="3795993" y="2779302"/>
+                  </a:lnTo>
+                  <a:lnTo>
+                    <a:pt x="3867616" y="2797743"/>
+                  </a:lnTo>
+                  <a:lnTo>
+                    <a:pt x="3939238" y="2815702"/>
+                  </a:lnTo>
+                  <a:lnTo>
+                    <a:pt x="4010861" y="2833191"/>
+                  </a:lnTo>
+                  <a:lnTo>
+                    <a:pt x="4082483" y="2850221"/>
+                  </a:lnTo>
+                  <a:lnTo>
+                    <a:pt x="4154106" y="2866806"/>
+                  </a:lnTo>
+                  <a:lnTo>
+                    <a:pt x="4225729" y="2882957"/>
+                  </a:lnTo>
+                  <a:lnTo>
+                    <a:pt x="4297351" y="2898685"/>
+                  </a:lnTo>
+                  <a:lnTo>
+                    <a:pt x="4368974" y="2914001"/>
+                  </a:lnTo>
+                  <a:lnTo>
+                    <a:pt x="4440596" y="2928916"/>
+                  </a:lnTo>
+                  <a:lnTo>
+                    <a:pt x="4512219" y="2943441"/>
+                  </a:lnTo>
+                  <a:lnTo>
+                    <a:pt x="4583841" y="2957586"/>
+                  </a:lnTo>
+                  <a:lnTo>
+                    <a:pt x="4655464" y="2971360"/>
+                  </a:lnTo>
+                  <a:lnTo>
+                    <a:pt x="4727086" y="2984773"/>
+                  </a:lnTo>
+                  <a:lnTo>
+                    <a:pt x="4798709" y="2997836"/>
+                  </a:lnTo>
+                  <a:lnTo>
+                    <a:pt x="4870331" y="3010556"/>
+                  </a:lnTo>
+                  <a:lnTo>
+                    <a:pt x="4941954" y="3022944"/>
+                  </a:lnTo>
+                  <a:lnTo>
+                    <a:pt x="5013576" y="3035007"/>
+                  </a:lnTo>
+                  <a:lnTo>
+                    <a:pt x="5085199" y="3046755"/>
+                  </a:lnTo>
+                  <a:lnTo>
+                    <a:pt x="5156821" y="3058195"/>
+                  </a:lnTo>
+                  <a:lnTo>
+                    <a:pt x="5228444" y="3069335"/>
+                  </a:lnTo>
+                  <a:lnTo>
+                    <a:pt x="5300066" y="3080184"/>
+                  </a:lnTo>
+                  <a:lnTo>
+                    <a:pt x="5371689" y="3090748"/>
+                  </a:lnTo>
+                  <a:lnTo>
+                    <a:pt x="5443311" y="3101037"/>
+                  </a:lnTo>
+                  <a:lnTo>
+                    <a:pt x="5514934" y="3111055"/>
+                  </a:lnTo>
+                  <a:lnTo>
+                    <a:pt x="5586557" y="3120812"/>
+                  </a:lnTo>
+                  <a:lnTo>
+                    <a:pt x="5658179" y="3130313"/>
+                  </a:lnTo>
+                  <a:lnTo>
+                    <a:pt x="5729802" y="3139566"/>
+                  </a:lnTo>
+                  <a:lnTo>
+                    <a:pt x="5801424" y="3148576"/>
+                  </a:lnTo>
+                  <a:lnTo>
+                    <a:pt x="5873047" y="3157350"/>
+                  </a:lnTo>
+                  <a:lnTo>
+                    <a:pt x="5944669" y="3165895"/>
+                  </a:lnTo>
+                  <a:lnTo>
+                    <a:pt x="6016292" y="3174216"/>
+                  </a:lnTo>
+                  <a:lnTo>
+                    <a:pt x="6087914" y="3182319"/>
+                  </a:lnTo>
+                  <a:lnTo>
+                    <a:pt x="6159537" y="3190210"/>
+                  </a:lnTo>
+                  <a:lnTo>
+                    <a:pt x="6231159" y="3197894"/>
+                  </a:lnTo>
+                  <a:lnTo>
+                    <a:pt x="6302782" y="3205378"/>
+                  </a:lnTo>
+                  <a:lnTo>
+                    <a:pt x="6374404" y="3212665"/>
+                  </a:lnTo>
+                  <a:lnTo>
+                    <a:pt x="6446027" y="3219761"/>
+                  </a:lnTo>
+                  <a:lnTo>
+                    <a:pt x="6517649" y="3226672"/>
+                  </a:lnTo>
+                  <a:lnTo>
+                    <a:pt x="6589272" y="3233402"/>
+                  </a:lnTo>
+                  <a:lnTo>
+                    <a:pt x="6660894" y="3239956"/>
+                  </a:lnTo>
+                  <a:lnTo>
+                    <a:pt x="6732517" y="3246338"/>
+                  </a:lnTo>
+                  <a:lnTo>
+                    <a:pt x="6804139" y="3252553"/>
+                  </a:lnTo>
+                  <a:lnTo>
+                    <a:pt x="6875762" y="3258605"/>
+                  </a:lnTo>
+                  <a:lnTo>
+                    <a:pt x="6947385" y="3264499"/>
+                  </a:lnTo>
+                  <a:lnTo>
+                    <a:pt x="7019007" y="3270239"/>
+                  </a:lnTo>
+                  <a:lnTo>
+                    <a:pt x="7090630" y="3275828"/>
+                  </a:lnTo>
+                  <a:lnTo>
+                    <a:pt x="7090630" y="3478086"/>
+                  </a:lnTo>
+                  <a:lnTo>
+                    <a:pt x="7019007" y="3477518"/>
+                  </a:lnTo>
+                  <a:lnTo>
+                    <a:pt x="6947385" y="3476893"/>
+                  </a:lnTo>
+                  <a:lnTo>
+                    <a:pt x="6875762" y="3476205"/>
+                  </a:lnTo>
+                  <a:lnTo>
+                    <a:pt x="6804139" y="3475449"/>
+                  </a:lnTo>
+                  <a:lnTo>
+                    <a:pt x="6732517" y="3474616"/>
+                  </a:lnTo>
+                  <a:lnTo>
+                    <a:pt x="6660894" y="3473700"/>
+                  </a:lnTo>
+                  <a:lnTo>
+                    <a:pt x="6589272" y="3472692"/>
+                  </a:lnTo>
+                  <a:lnTo>
+                    <a:pt x="6517649" y="3471583"/>
+                  </a:lnTo>
+                  <a:lnTo>
+                    <a:pt x="6446027" y="3470362"/>
+                  </a:lnTo>
+                  <a:lnTo>
+                    <a:pt x="6374404" y="3469019"/>
+                  </a:lnTo>
+                  <a:lnTo>
+                    <a:pt x="6302782" y="3467542"/>
+                  </a:lnTo>
+                  <a:lnTo>
+                    <a:pt x="6231159" y="3465916"/>
+                  </a:lnTo>
+                  <a:lnTo>
+                    <a:pt x="6159537" y="3464127"/>
+                  </a:lnTo>
+                  <a:lnTo>
+                    <a:pt x="6087914" y="3462158"/>
+                  </a:lnTo>
+                  <a:lnTo>
+                    <a:pt x="6016292" y="3459992"/>
+                  </a:lnTo>
+                  <a:lnTo>
+                    <a:pt x="5944669" y="3457608"/>
+                  </a:lnTo>
+                  <a:lnTo>
+                    <a:pt x="5873047" y="3454986"/>
+                  </a:lnTo>
+                  <a:lnTo>
+                    <a:pt x="5801424" y="3452100"/>
+                  </a:lnTo>
+                  <a:lnTo>
+                    <a:pt x="5729802" y="3448925"/>
+                  </a:lnTo>
+                  <a:lnTo>
+                    <a:pt x="5658179" y="3445431"/>
+                  </a:lnTo>
+                  <a:lnTo>
+                    <a:pt x="5586557" y="3441586"/>
+                  </a:lnTo>
+                  <a:lnTo>
+                    <a:pt x="5514934" y="3437356"/>
+                  </a:lnTo>
+                  <a:lnTo>
+                    <a:pt x="5443311" y="3432701"/>
+                  </a:lnTo>
+                  <a:lnTo>
+                    <a:pt x="5371689" y="3427579"/>
+                  </a:lnTo>
+                  <a:lnTo>
+                    <a:pt x="5300066" y="3421944"/>
+                  </a:lnTo>
+                  <a:lnTo>
+                    <a:pt x="5228444" y="3415742"/>
+                  </a:lnTo>
+                  <a:lnTo>
+                    <a:pt x="5156821" y="3408919"/>
+                  </a:lnTo>
+                  <a:lnTo>
+                    <a:pt x="5085199" y="3401411"/>
+                  </a:lnTo>
+                  <a:lnTo>
+                    <a:pt x="5013576" y="3393149"/>
+                  </a:lnTo>
+                  <a:lnTo>
+                    <a:pt x="4941954" y="3384059"/>
+                  </a:lnTo>
+                  <a:lnTo>
+                    <a:pt x="4870331" y="3374057"/>
+                  </a:lnTo>
+                  <a:lnTo>
+                    <a:pt x="4798709" y="3363051"/>
+                  </a:lnTo>
+                  <a:lnTo>
+                    <a:pt x="4727086" y="3350940"/>
+                  </a:lnTo>
+                  <a:lnTo>
+                    <a:pt x="4655464" y="3337615"/>
+                  </a:lnTo>
+                  <a:lnTo>
+                    <a:pt x="4583841" y="3322952"/>
+                  </a:lnTo>
+                  <a:lnTo>
+                    <a:pt x="4512219" y="3306818"/>
+                  </a:lnTo>
+                  <a:lnTo>
+                    <a:pt x="4440596" y="3289066"/>
+                  </a:lnTo>
+                  <a:lnTo>
+                    <a:pt x="4368974" y="3269532"/>
+                  </a:lnTo>
+                  <a:lnTo>
+                    <a:pt x="4297351" y="3248038"/>
+                  </a:lnTo>
+                  <a:lnTo>
+                    <a:pt x="4225729" y="3224387"/>
+                  </a:lnTo>
+                  <a:lnTo>
+                    <a:pt x="4154106" y="3198364"/>
+                  </a:lnTo>
+                  <a:lnTo>
+                    <a:pt x="4082483" y="3169729"/>
+                  </a:lnTo>
+                  <a:lnTo>
+                    <a:pt x="4010861" y="3138221"/>
+                  </a:lnTo>
+                  <a:lnTo>
+                    <a:pt x="3939238" y="3103552"/>
+                  </a:lnTo>
+                  <a:lnTo>
+                    <a:pt x="3867616" y="3065404"/>
+                  </a:lnTo>
+                  <a:lnTo>
+                    <a:pt x="3795993" y="3023428"/>
+                  </a:lnTo>
+                  <a:lnTo>
+                    <a:pt x="3724371" y="2977241"/>
+                  </a:lnTo>
+                  <a:lnTo>
+                    <a:pt x="3652748" y="2926419"/>
+                  </a:lnTo>
+                  <a:lnTo>
+                    <a:pt x="3581126" y="2870498"/>
+                  </a:lnTo>
+                  <a:lnTo>
+                    <a:pt x="3509503" y="2808965"/>
+                  </a:lnTo>
+                  <a:lnTo>
+                    <a:pt x="3437881" y="2741259"/>
+                  </a:lnTo>
+                  <a:lnTo>
+                    <a:pt x="3366258" y="2666759"/>
+                  </a:lnTo>
+                  <a:lnTo>
+                    <a:pt x="3294636" y="2635559"/>
+                  </a:lnTo>
+                  <a:lnTo>
+                    <a:pt x="3223013" y="2612757"/>
+                  </a:lnTo>
+                  <a:lnTo>
+                    <a:pt x="3151391" y="2589343"/>
+                  </a:lnTo>
+                  <a:lnTo>
+                    <a:pt x="3079768" y="2565299"/>
+                  </a:lnTo>
+                  <a:lnTo>
+                    <a:pt x="3008146" y="2540609"/>
+                  </a:lnTo>
+                  <a:lnTo>
+                    <a:pt x="2936523" y="2515255"/>
+                  </a:lnTo>
+                  <a:lnTo>
+                    <a:pt x="2864901" y="2489220"/>
+                  </a:lnTo>
+                  <a:lnTo>
+                    <a:pt x="2793278" y="2462484"/>
+                  </a:lnTo>
+                  <a:lnTo>
+                    <a:pt x="2721655" y="2435030"/>
+                  </a:lnTo>
+                  <a:lnTo>
+                    <a:pt x="2650033" y="2406838"/>
+                  </a:lnTo>
+                  <a:lnTo>
+                    <a:pt x="2578410" y="2377888"/>
+                  </a:lnTo>
+                  <a:lnTo>
+                    <a:pt x="2506788" y="2348160"/>
+                  </a:lnTo>
+                  <a:lnTo>
+                    <a:pt x="2435165" y="2317633"/>
+                  </a:lnTo>
+                  <a:lnTo>
+                    <a:pt x="2363543" y="2286285"/>
+                  </a:lnTo>
+                  <a:lnTo>
+                    <a:pt x="2291920" y="2254094"/>
+                  </a:lnTo>
+                  <a:lnTo>
+                    <a:pt x="2220298" y="2221038"/>
+                  </a:lnTo>
+                  <a:lnTo>
+                    <a:pt x="2148675" y="2187093"/>
+                  </a:lnTo>
+                  <a:lnTo>
+                    <a:pt x="2077053" y="2152236"/>
+                  </a:lnTo>
+                  <a:lnTo>
+                    <a:pt x="2005430" y="2116441"/>
+                  </a:lnTo>
+                  <a:lnTo>
+                    <a:pt x="1933808" y="2079685"/>
+                  </a:lnTo>
+                  <a:lnTo>
+                    <a:pt x="1862185" y="2041940"/>
+                  </a:lnTo>
+                  <a:lnTo>
+                    <a:pt x="1790563" y="2003181"/>
+                  </a:lnTo>
+                  <a:lnTo>
+                    <a:pt x="1718940" y="1963380"/>
+                  </a:lnTo>
+                  <a:lnTo>
+                    <a:pt x="1647318" y="1922508"/>
+                  </a:lnTo>
+                  <a:lnTo>
+                    <a:pt x="1575695" y="1880538"/>
+                  </a:lnTo>
+                  <a:lnTo>
+                    <a:pt x="1504073" y="1837440"/>
+                  </a:lnTo>
+                  <a:lnTo>
+                    <a:pt x="1432450" y="1793183"/>
+                  </a:lnTo>
+                  <a:lnTo>
+                    <a:pt x="1360827" y="1747737"/>
+                  </a:lnTo>
+                  <a:lnTo>
+                    <a:pt x="1289205" y="1701069"/>
+                  </a:lnTo>
+                  <a:lnTo>
+                    <a:pt x="1217582" y="1653146"/>
+                  </a:lnTo>
+                  <a:lnTo>
+                    <a:pt x="1145960" y="1603935"/>
+                  </a:lnTo>
+                  <a:lnTo>
+                    <a:pt x="1074337" y="1553401"/>
+                  </a:lnTo>
+                  <a:lnTo>
+                    <a:pt x="1002715" y="1501508"/>
+                  </a:lnTo>
+                  <a:lnTo>
+                    <a:pt x="931092" y="1448221"/>
+                  </a:lnTo>
+                  <a:lnTo>
+                    <a:pt x="859470" y="1393501"/>
+                  </a:lnTo>
+                  <a:lnTo>
+                    <a:pt x="787847" y="1337310"/>
+                  </a:lnTo>
+                  <a:lnTo>
+                    <a:pt x="716225" y="1279608"/>
+                  </a:lnTo>
+                  <a:lnTo>
+                    <a:pt x="644602" y="1220355"/>
+                  </a:lnTo>
+                  <a:lnTo>
+                    <a:pt x="572980" y="1159510"/>
+                  </a:lnTo>
+                  <a:lnTo>
+                    <a:pt x="501357" y="1097029"/>
+                  </a:lnTo>
+                  <a:lnTo>
+                    <a:pt x="429735" y="1032868"/>
+                  </a:lnTo>
+                  <a:lnTo>
+                    <a:pt x="358112" y="966982"/>
+                  </a:lnTo>
+                  <a:lnTo>
+                    <a:pt x="286490" y="899325"/>
+                  </a:lnTo>
+                  <a:lnTo>
+                    <a:pt x="214867" y="829849"/>
+                  </a:lnTo>
+                  <a:lnTo>
+                    <a:pt x="143245" y="758506"/>
+                  </a:lnTo>
+                  <a:lnTo>
+                    <a:pt x="71622" y="685245"/>
+                  </a:lnTo>
+                  <a:lnTo>
+                    <a:pt x="0" y="610014"/>
+                  </a:lnTo>
+                  <a:lnTo>
                     <a:pt x="0" y="0"/>
-                  </a:lnTo>
-                  <a:lnTo>
-                    <a:pt x="0" y="0"/>
-                  </a:lnTo>
-                </a:path>
-              </a:pathLst>
-            </a:custGeom>
-            <a:ln w="13550" cap="flat">
-              <a:solidFill>
-                <a:srgbClr val="EBEBEB">
-                  <a:alpha val="100000"/>
-                </a:srgbClr>
-              </a:solidFill>
-              <a:prstDash val="solid"/>
-              <a:round/>
-            </a:ln>
-          </p:spPr>
-          <p:txBody>
-            <a:bodyPr/>
-            <a:lstStyle/>
-            <a:p/>
-          </p:txBody>
-        </p:sp>
-        <p:sp>
-          <p:nvSpPr>
-            <p:cNvPr id="21" name="pg21"/>
-            <p:cNvSpPr/>
-            <p:nvPr/>
-          </p:nvSpPr>
-          <p:spPr>
-            <a:xfrm>
-              <a:off x="817517" y="2073503"/>
-              <a:ext cx="7403783" cy="3478086"/>
-            </a:xfrm>
-            <a:custGeom>
-              <a:avLst/>
-              <a:pathLst>
-                <a:path w="7403783" h="3478086">
-                  <a:moveTo>
-                    <a:pt x="2257101" y="0"/>
-                  </a:moveTo>
-                  <a:lnTo>
-                    <a:pt x="2269402" y="55219"/>
-                  </a:lnTo>
-                  <a:lnTo>
-                    <a:pt x="2346034" y="367861"/>
-                  </a:lnTo>
-                  <a:lnTo>
-                    <a:pt x="2422667" y="651994"/>
-                  </a:lnTo>
-                  <a:lnTo>
-                    <a:pt x="2499300" y="910217"/>
-                  </a:lnTo>
-                  <a:lnTo>
-                    <a:pt x="2575932" y="1144893"/>
-                  </a:lnTo>
-                  <a:lnTo>
-                    <a:pt x="2652565" y="1358170"/>
-                  </a:lnTo>
-                  <a:lnTo>
-                    <a:pt x="2729197" y="1551998"/>
-                  </a:lnTo>
-                  <a:lnTo>
-                    <a:pt x="2805830" y="1728151"/>
-                  </a:lnTo>
-                  <a:lnTo>
-                    <a:pt x="2882462" y="1888241"/>
-                  </a:lnTo>
-                  <a:lnTo>
-                    <a:pt x="2959095" y="2033733"/>
-                  </a:lnTo>
-                  <a:lnTo>
-                    <a:pt x="3035727" y="2165957"/>
-                  </a:lnTo>
-                  <a:lnTo>
-                    <a:pt x="3112360" y="2286124"/>
-                  </a:lnTo>
-                  <a:lnTo>
-                    <a:pt x="3188993" y="2395334"/>
-                  </a:lnTo>
-                  <a:lnTo>
-                    <a:pt x="3265625" y="2494584"/>
-                  </a:lnTo>
-                  <a:lnTo>
-                    <a:pt x="3342258" y="2584784"/>
-                  </a:lnTo>
-                  <a:lnTo>
-                    <a:pt x="3418890" y="2657763"/>
-                  </a:lnTo>
-                  <a:lnTo>
-                    <a:pt x="3495523" y="2679386"/>
-                  </a:lnTo>
-                  <a:lnTo>
-                    <a:pt x="3572155" y="2700444"/>
-                  </a:lnTo>
-                  <a:lnTo>
-                    <a:pt x="3648788" y="2720949"/>
-                  </a:lnTo>
-                  <a:lnTo>
-                    <a:pt x="3725420" y="2740918"/>
-                  </a:lnTo>
-                  <a:lnTo>
-                    <a:pt x="3802053" y="2760365"/>
-                  </a:lnTo>
-                  <a:lnTo>
-                    <a:pt x="3878685" y="2779302"/>
-                  </a:lnTo>
-                  <a:lnTo>
-                    <a:pt x="3955318" y="2797743"/>
-                  </a:lnTo>
-                  <a:lnTo>
-                    <a:pt x="4031951" y="2815702"/>
-                  </a:lnTo>
-                  <a:lnTo>
-                    <a:pt x="4108583" y="2833191"/>
-                  </a:lnTo>
-                  <a:lnTo>
-                    <a:pt x="4185216" y="2850221"/>
-                  </a:lnTo>
-                  <a:lnTo>
-                    <a:pt x="4261848" y="2866806"/>
-                  </a:lnTo>
-                  <a:lnTo>
-                    <a:pt x="4338481" y="2882957"/>
-                  </a:lnTo>
-                  <a:lnTo>
-                    <a:pt x="4415113" y="2898685"/>
-                  </a:lnTo>
-                  <a:lnTo>
-                    <a:pt x="4491746" y="2914001"/>
-                  </a:lnTo>
-                  <a:lnTo>
-                    <a:pt x="4568378" y="2928916"/>
-                  </a:lnTo>
-                  <a:lnTo>
-                    <a:pt x="4645011" y="2943441"/>
-                  </a:lnTo>
-                  <a:lnTo>
-                    <a:pt x="4721644" y="2957586"/>
-                  </a:lnTo>
-                  <a:lnTo>
-                    <a:pt x="4798276" y="2971360"/>
-                  </a:lnTo>
-                  <a:lnTo>
-                    <a:pt x="4874909" y="2984773"/>
-                  </a:lnTo>
-                  <a:lnTo>
-                    <a:pt x="4951541" y="2997836"/>
-                  </a:lnTo>
-                  <a:lnTo>
-                    <a:pt x="5028174" y="3010556"/>
-                  </a:lnTo>
-                  <a:lnTo>
-                    <a:pt x="5104806" y="3022944"/>
-                  </a:lnTo>
-                  <a:lnTo>
-                    <a:pt x="5181439" y="3035007"/>
-                  </a:lnTo>
-                  <a:lnTo>
-                    <a:pt x="5258071" y="3046755"/>
-                  </a:lnTo>
-                  <a:lnTo>
-                    <a:pt x="5334704" y="3058195"/>
-                  </a:lnTo>
-                  <a:lnTo>
-                    <a:pt x="5411336" y="3069335"/>
-                  </a:lnTo>
-                  <a:lnTo>
-                    <a:pt x="5487969" y="3080184"/>
-                  </a:lnTo>
-                  <a:lnTo>
-                    <a:pt x="5564602" y="3090748"/>
-                  </a:lnTo>
-                  <a:lnTo>
-                    <a:pt x="5641234" y="3101037"/>
-                  </a:lnTo>
-                  <a:lnTo>
-                    <a:pt x="5717867" y="3111055"/>
-                  </a:lnTo>
-                  <a:lnTo>
-                    <a:pt x="5794499" y="3120812"/>
-                  </a:lnTo>
-                  <a:lnTo>
-                    <a:pt x="5871132" y="3130313"/>
-                  </a:lnTo>
-                  <a:lnTo>
-                    <a:pt x="5947764" y="3139566"/>
-                  </a:lnTo>
-                  <a:lnTo>
-                    <a:pt x="6024397" y="3148576"/>
-                  </a:lnTo>
-                  <a:lnTo>
-                    <a:pt x="6101029" y="3157350"/>
-                  </a:lnTo>
-                  <a:lnTo>
-                    <a:pt x="6177662" y="3165895"/>
-                  </a:lnTo>
-                  <a:lnTo>
-                    <a:pt x="6254294" y="3174216"/>
-                  </a:lnTo>
-                  <a:lnTo>
-                    <a:pt x="6330927" y="3182319"/>
-                  </a:lnTo>
-                  <a:lnTo>
-                    <a:pt x="6407560" y="3190210"/>
-                  </a:lnTo>
-                  <a:lnTo>
-                    <a:pt x="6484192" y="3197894"/>
-                  </a:lnTo>
-                  <a:lnTo>
-                    <a:pt x="6560825" y="3205378"/>
-                  </a:lnTo>
-                  <a:lnTo>
-                    <a:pt x="6637457" y="3212665"/>
-                  </a:lnTo>
-                  <a:lnTo>
-                    <a:pt x="6714090" y="3219761"/>
-                  </a:lnTo>
-                  <a:lnTo>
-                    <a:pt x="6790722" y="3226672"/>
-                  </a:lnTo>
-                  <a:lnTo>
-                    <a:pt x="6867355" y="3233402"/>
-                  </a:lnTo>
-                  <a:lnTo>
-                    <a:pt x="6943987" y="3239956"/>
-                  </a:lnTo>
-                  <a:lnTo>
-                    <a:pt x="7020620" y="3246338"/>
-                  </a:lnTo>
-                  <a:lnTo>
-                    <a:pt x="7097253" y="3252553"/>
-                  </a:lnTo>
-                  <a:lnTo>
-                    <a:pt x="7173885" y="3258605"/>
-                  </a:lnTo>
-                  <a:lnTo>
-                    <a:pt x="7250518" y="3264499"/>
-                  </a:lnTo>
-                  <a:lnTo>
-                    <a:pt x="7327150" y="3270239"/>
-                  </a:lnTo>
-                  <a:lnTo>
-                    <a:pt x="7403783" y="3275828"/>
-                  </a:lnTo>
-                  <a:lnTo>
-                    <a:pt x="7403783" y="3478086"/>
-                  </a:lnTo>
-                  <a:lnTo>
-                    <a:pt x="7327150" y="3477518"/>
-                  </a:lnTo>
-                  <a:lnTo>
-                    <a:pt x="7250518" y="3476893"/>
-                  </a:lnTo>
-                  <a:lnTo>
-                    <a:pt x="7173885" y="3476205"/>
-                  </a:lnTo>
-                  <a:lnTo>
-                    <a:pt x="7097253" y="3475449"/>
-                  </a:lnTo>
-                  <a:lnTo>
-                    <a:pt x="7020620" y="3474616"/>
-                  </a:lnTo>
-                  <a:lnTo>
-                    <a:pt x="6943987" y="3473700"/>
-                  </a:lnTo>
-                  <a:lnTo>
-                    <a:pt x="6867355" y="3472692"/>
-                  </a:lnTo>
-                  <a:lnTo>
-                    <a:pt x="6790722" y="3471583"/>
-                  </a:lnTo>
-                  <a:lnTo>
-                    <a:pt x="6714090" y="3470362"/>
-                  </a:lnTo>
-                  <a:lnTo>
-                    <a:pt x="6637457" y="3469019"/>
-                  </a:lnTo>
-                  <a:lnTo>
-                    <a:pt x="6560825" y="3467542"/>
-                  </a:lnTo>
-                  <a:lnTo>
-                    <a:pt x="6484192" y="3465916"/>
-                  </a:lnTo>
-                  <a:lnTo>
-                    <a:pt x="6407560" y="3464127"/>
-                  </a:lnTo>
-                  <a:lnTo>
-                    <a:pt x="6330927" y="3462158"/>
-                  </a:lnTo>
-                  <a:lnTo>
-                    <a:pt x="6254294" y="3459992"/>
-                  </a:lnTo>
-                  <a:lnTo>
-                    <a:pt x="6177662" y="3457608"/>
-                  </a:lnTo>
-                  <a:lnTo>
-                    <a:pt x="6101029" y="3454986"/>
-                  </a:lnTo>
-                  <a:lnTo>
-                    <a:pt x="6024397" y="3452100"/>
-                  </a:lnTo>
-                  <a:lnTo>
-                    <a:pt x="5947764" y="3448925"/>
-                  </a:lnTo>
-                  <a:lnTo>
-                    <a:pt x="5871132" y="3445431"/>
-                  </a:lnTo>
-                  <a:lnTo>
-                    <a:pt x="5794499" y="3441586"/>
-                  </a:lnTo>
-                  <a:lnTo>
-                    <a:pt x="5717867" y="3437356"/>
-                  </a:lnTo>
-                  <a:lnTo>
-                    <a:pt x="5641234" y="3432701"/>
-                  </a:lnTo>
-                  <a:lnTo>
-                    <a:pt x="5564602" y="3427579"/>
-                  </a:lnTo>
-                  <a:lnTo>
-                    <a:pt x="5487969" y="3421944"/>
-                  </a:lnTo>
-                  <a:lnTo>
-                    <a:pt x="5411336" y="3415742"/>
-                  </a:lnTo>
-                  <a:lnTo>
-                    <a:pt x="5334704" y="3408919"/>
-                  </a:lnTo>
-                  <a:lnTo>
-                    <a:pt x="5258071" y="3401411"/>
-                  </a:lnTo>
-                  <a:lnTo>
-                    <a:pt x="5181439" y="3393149"/>
-                  </a:lnTo>
-                  <a:lnTo>
-                    <a:pt x="5104806" y="3384059"/>
-                  </a:lnTo>
-                  <a:lnTo>
-                    <a:pt x="5028174" y="3374057"/>
-                  </a:lnTo>
-                  <a:lnTo>
-                    <a:pt x="4951541" y="3363051"/>
-                  </a:lnTo>
-                  <a:lnTo>
-                    <a:pt x="4874909" y="3350940"/>
-                  </a:lnTo>
-                  <a:lnTo>
-                    <a:pt x="4798276" y="3337615"/>
-                  </a:lnTo>
-                  <a:lnTo>
-                    <a:pt x="4721644" y="3322952"/>
-                  </a:lnTo>
-                  <a:lnTo>
-                    <a:pt x="4645011" y="3306818"/>
-                  </a:lnTo>
-                  <a:lnTo>
-                    <a:pt x="4568378" y="3289066"/>
-                  </a:lnTo>
-                  <a:lnTo>
-                    <a:pt x="4491746" y="3269532"/>
-                  </a:lnTo>
-                  <a:lnTo>
-                    <a:pt x="4415113" y="3248038"/>
-                  </a:lnTo>
-                  <a:lnTo>
-                    <a:pt x="4338481" y="3224387"/>
-                  </a:lnTo>
-                  <a:lnTo>
-                    <a:pt x="4261848" y="3198364"/>
-                  </a:lnTo>
-                  <a:lnTo>
-                    <a:pt x="4185216" y="3169729"/>
-                  </a:lnTo>
-                  <a:lnTo>
-                    <a:pt x="4108583" y="3138221"/>
-                  </a:lnTo>
-                  <a:lnTo>
-                    <a:pt x="4031951" y="3103552"/>
-                  </a:lnTo>
-                  <a:lnTo>
-                    <a:pt x="3955318" y="3065404"/>
-                  </a:lnTo>
-                  <a:lnTo>
-                    <a:pt x="3878685" y="3023428"/>
-                  </a:lnTo>
-                  <a:lnTo>
-                    <a:pt x="3802053" y="2977241"/>
-                  </a:lnTo>
-                  <a:lnTo>
-                    <a:pt x="3725420" y="2926419"/>
-                  </a:lnTo>
-                  <a:lnTo>
-                    <a:pt x="3648788" y="2870498"/>
-                  </a:lnTo>
-                  <a:lnTo>
-                    <a:pt x="3572155" y="2808965"/>
-                  </a:lnTo>
-                  <a:lnTo>
-                    <a:pt x="3495523" y="2741259"/>
-                  </a:lnTo>
-                  <a:lnTo>
-                    <a:pt x="3418890" y="2666759"/>
-                  </a:lnTo>
-                  <a:lnTo>
-                    <a:pt x="3342258" y="2635559"/>
-                  </a:lnTo>
-                  <a:lnTo>
-                    <a:pt x="3265625" y="2612757"/>
-                  </a:lnTo>
-                  <a:lnTo>
-                    <a:pt x="3188993" y="2589343"/>
-                  </a:lnTo>
-                  <a:lnTo>
-                    <a:pt x="3112360" y="2565299"/>
-                  </a:lnTo>
-                  <a:lnTo>
-                    <a:pt x="3035727" y="2540609"/>
-                  </a:lnTo>
-                  <a:lnTo>
-                    <a:pt x="2959095" y="2515255"/>
-                  </a:lnTo>
-                  <a:lnTo>
-                    <a:pt x="2882462" y="2489220"/>
-                  </a:lnTo>
-                  <a:lnTo>
-                    <a:pt x="2805830" y="2462484"/>
-                  </a:lnTo>
-                  <a:lnTo>
-                    <a:pt x="2729197" y="2435030"/>
-                  </a:lnTo>
-                  <a:lnTo>
-                    <a:pt x="2652565" y="2406838"/>
-                  </a:lnTo>
-                  <a:lnTo>
-                    <a:pt x="2575932" y="2377888"/>
-                  </a:lnTo>
-                  <a:lnTo>
-                    <a:pt x="2499300" y="2348160"/>
-                  </a:lnTo>
-                  <a:lnTo>
-                    <a:pt x="2422667" y="2317633"/>
-                  </a:lnTo>
-                  <a:lnTo>
-                    <a:pt x="2346034" y="2286285"/>
-                  </a:lnTo>
-                  <a:lnTo>
-                    <a:pt x="2269402" y="2254094"/>
-                  </a:lnTo>
-                  <a:lnTo>
-                    <a:pt x="2192769" y="2221038"/>
-                  </a:lnTo>
-                  <a:lnTo>
-                    <a:pt x="2116137" y="2187093"/>
-                  </a:lnTo>
-                  <a:lnTo>
-                    <a:pt x="2039504" y="2152236"/>
-                  </a:lnTo>
-                  <a:lnTo>
-                    <a:pt x="1962872" y="2116441"/>
-                  </a:lnTo>
-                  <a:lnTo>
-                    <a:pt x="1886239" y="2079685"/>
-                  </a:lnTo>
-                  <a:lnTo>
-                    <a:pt x="1809607" y="2041940"/>
-                  </a:lnTo>
-                  <a:lnTo>
-                    <a:pt x="1732974" y="2003181"/>
-                  </a:lnTo>
-                  <a:lnTo>
-                    <a:pt x="1656342" y="1963380"/>
-                  </a:lnTo>
-                  <a:lnTo>
-                    <a:pt x="1579709" y="1922508"/>
-                  </a:lnTo>
-                  <a:lnTo>
-                    <a:pt x="1503076" y="1880538"/>
-                  </a:lnTo>
-                  <a:lnTo>
-                    <a:pt x="1426444" y="1837440"/>
-                  </a:lnTo>
-                  <a:lnTo>
-                    <a:pt x="1349811" y="1793183"/>
-                  </a:lnTo>
-                  <a:lnTo>
-                    <a:pt x="1273179" y="1747737"/>
-                  </a:lnTo>
-                  <a:lnTo>
-                    <a:pt x="1196546" y="1701069"/>
-                  </a:lnTo>
-                  <a:lnTo>
-                    <a:pt x="1119914" y="1653146"/>
-                  </a:lnTo>
-                  <a:lnTo>
-                    <a:pt x="1043281" y="1603935"/>
-                  </a:lnTo>
-                  <a:lnTo>
-                    <a:pt x="966649" y="1553401"/>
-                  </a:lnTo>
-                  <a:lnTo>
-                    <a:pt x="890016" y="1501508"/>
-                  </a:lnTo>
-                  <a:lnTo>
-                    <a:pt x="813384" y="1448221"/>
-                  </a:lnTo>
-                  <a:lnTo>
-                    <a:pt x="736751" y="1393501"/>
-                  </a:lnTo>
-                  <a:lnTo>
-                    <a:pt x="660118" y="1337310"/>
-                  </a:lnTo>
-                  <a:lnTo>
-                    <a:pt x="583486" y="1279608"/>
-                  </a:lnTo>
-                  <a:lnTo>
-                    <a:pt x="506853" y="1220355"/>
-                  </a:lnTo>
-                  <a:lnTo>
-                    <a:pt x="430221" y="1159510"/>
-                  </a:lnTo>
-                  <a:lnTo>
-                    <a:pt x="353588" y="1097029"/>
-                  </a:lnTo>
-                  <a:lnTo>
-                    <a:pt x="276956" y="1032868"/>
-                  </a:lnTo>
-                  <a:lnTo>
-                    <a:pt x="200323" y="966982"/>
-                  </a:lnTo>
-                  <a:lnTo>
-                    <a:pt x="123691" y="899325"/>
-                  </a:lnTo>
-                  <a:lnTo>
-                    <a:pt x="47058" y="829849"/>
-                  </a:lnTo>
-                  <a:lnTo>
-                    <a:pt x="0" y="786039"/>
                   </a:lnTo>
                   <a:close/>
                 </a:path>
@@ -3528,225 +3494,550 @@
         </p:sp>
         <p:sp>
           <p:nvSpPr>
+            <p:cNvPr id="21" name="pl21"/>
+            <p:cNvSpPr/>
+            <p:nvPr/>
+          </p:nvSpPr>
+          <p:spPr>
+            <a:xfrm>
+              <a:off x="3452473" y="2073503"/>
+              <a:ext cx="4810205" cy="3275828"/>
+            </a:xfrm>
+            <a:custGeom>
+              <a:avLst/>
+              <a:pathLst>
+                <a:path w="4810205" h="3275828">
+                  <a:moveTo>
+                    <a:pt x="0" y="0"/>
+                  </a:moveTo>
+                  <a:lnTo>
+                    <a:pt x="11496" y="55219"/>
+                  </a:lnTo>
+                  <a:lnTo>
+                    <a:pt x="83119" y="367861"/>
+                  </a:lnTo>
+                  <a:lnTo>
+                    <a:pt x="154741" y="651994"/>
+                  </a:lnTo>
+                  <a:lnTo>
+                    <a:pt x="226364" y="910217"/>
+                  </a:lnTo>
+                  <a:lnTo>
+                    <a:pt x="297986" y="1144893"/>
+                  </a:lnTo>
+                  <a:lnTo>
+                    <a:pt x="369609" y="1358170"/>
+                  </a:lnTo>
+                  <a:lnTo>
+                    <a:pt x="441231" y="1551998"/>
+                  </a:lnTo>
+                  <a:lnTo>
+                    <a:pt x="512854" y="1728151"/>
+                  </a:lnTo>
+                  <a:lnTo>
+                    <a:pt x="584476" y="1888241"/>
+                  </a:lnTo>
+                  <a:lnTo>
+                    <a:pt x="656099" y="2033733"/>
+                  </a:lnTo>
+                  <a:lnTo>
+                    <a:pt x="727721" y="2165957"/>
+                  </a:lnTo>
+                  <a:lnTo>
+                    <a:pt x="799344" y="2286124"/>
+                  </a:lnTo>
+                  <a:lnTo>
+                    <a:pt x="870966" y="2395334"/>
+                  </a:lnTo>
+                  <a:lnTo>
+                    <a:pt x="942589" y="2494584"/>
+                  </a:lnTo>
+                  <a:lnTo>
+                    <a:pt x="1014212" y="2584784"/>
+                  </a:lnTo>
+                  <a:lnTo>
+                    <a:pt x="1085834" y="2657763"/>
+                  </a:lnTo>
+                  <a:lnTo>
+                    <a:pt x="1157457" y="2679386"/>
+                  </a:lnTo>
+                  <a:lnTo>
+                    <a:pt x="1229079" y="2700444"/>
+                  </a:lnTo>
+                  <a:lnTo>
+                    <a:pt x="1300702" y="2720949"/>
+                  </a:lnTo>
+                  <a:lnTo>
+                    <a:pt x="1372324" y="2740918"/>
+                  </a:lnTo>
+                  <a:lnTo>
+                    <a:pt x="1443947" y="2760365"/>
+                  </a:lnTo>
+                  <a:lnTo>
+                    <a:pt x="1515569" y="2779302"/>
+                  </a:lnTo>
+                  <a:lnTo>
+                    <a:pt x="1587192" y="2797743"/>
+                  </a:lnTo>
+                  <a:lnTo>
+                    <a:pt x="1658814" y="2815702"/>
+                  </a:lnTo>
+                  <a:lnTo>
+                    <a:pt x="1730437" y="2833191"/>
+                  </a:lnTo>
+                  <a:lnTo>
+                    <a:pt x="1802059" y="2850221"/>
+                  </a:lnTo>
+                  <a:lnTo>
+                    <a:pt x="1873682" y="2866806"/>
+                  </a:lnTo>
+                  <a:lnTo>
+                    <a:pt x="1945304" y="2882957"/>
+                  </a:lnTo>
+                  <a:lnTo>
+                    <a:pt x="2016927" y="2898685"/>
+                  </a:lnTo>
+                  <a:lnTo>
+                    <a:pt x="2088549" y="2914001"/>
+                  </a:lnTo>
+                  <a:lnTo>
+                    <a:pt x="2160172" y="2928916"/>
+                  </a:lnTo>
+                  <a:lnTo>
+                    <a:pt x="2231794" y="2943441"/>
+                  </a:lnTo>
+                  <a:lnTo>
+                    <a:pt x="2303417" y="2957586"/>
+                  </a:lnTo>
+                  <a:lnTo>
+                    <a:pt x="2375040" y="2971360"/>
+                  </a:lnTo>
+                  <a:lnTo>
+                    <a:pt x="2446662" y="2984773"/>
+                  </a:lnTo>
+                  <a:lnTo>
+                    <a:pt x="2518285" y="2997836"/>
+                  </a:lnTo>
+                  <a:lnTo>
+                    <a:pt x="2589907" y="3010556"/>
+                  </a:lnTo>
+                  <a:lnTo>
+                    <a:pt x="2661530" y="3022944"/>
+                  </a:lnTo>
+                  <a:lnTo>
+                    <a:pt x="2733152" y="3035007"/>
+                  </a:lnTo>
+                  <a:lnTo>
+                    <a:pt x="2804775" y="3046755"/>
+                  </a:lnTo>
+                  <a:lnTo>
+                    <a:pt x="2876397" y="3058195"/>
+                  </a:lnTo>
+                  <a:lnTo>
+                    <a:pt x="2948020" y="3069335"/>
+                  </a:lnTo>
+                  <a:lnTo>
+                    <a:pt x="3019642" y="3080184"/>
+                  </a:lnTo>
+                  <a:lnTo>
+                    <a:pt x="3091265" y="3090748"/>
+                  </a:lnTo>
+                  <a:lnTo>
+                    <a:pt x="3162887" y="3101037"/>
+                  </a:lnTo>
+                  <a:lnTo>
+                    <a:pt x="3234510" y="3111055"/>
+                  </a:lnTo>
+                  <a:lnTo>
+                    <a:pt x="3306132" y="3120812"/>
+                  </a:lnTo>
+                  <a:lnTo>
+                    <a:pt x="3377755" y="3130313"/>
+                  </a:lnTo>
+                  <a:lnTo>
+                    <a:pt x="3449377" y="3139566"/>
+                  </a:lnTo>
+                  <a:lnTo>
+                    <a:pt x="3521000" y="3148576"/>
+                  </a:lnTo>
+                  <a:lnTo>
+                    <a:pt x="3592622" y="3157350"/>
+                  </a:lnTo>
+                  <a:lnTo>
+                    <a:pt x="3664245" y="3165895"/>
+                  </a:lnTo>
+                  <a:lnTo>
+                    <a:pt x="3735868" y="3174216"/>
+                  </a:lnTo>
+                  <a:lnTo>
+                    <a:pt x="3807490" y="3182319"/>
+                  </a:lnTo>
+                  <a:lnTo>
+                    <a:pt x="3879113" y="3190210"/>
+                  </a:lnTo>
+                  <a:lnTo>
+                    <a:pt x="3950735" y="3197894"/>
+                  </a:lnTo>
+                  <a:lnTo>
+                    <a:pt x="4022358" y="3205378"/>
+                  </a:lnTo>
+                  <a:lnTo>
+                    <a:pt x="4093980" y="3212665"/>
+                  </a:lnTo>
+                  <a:lnTo>
+                    <a:pt x="4165603" y="3219761"/>
+                  </a:lnTo>
+                  <a:lnTo>
+                    <a:pt x="4237225" y="3226672"/>
+                  </a:lnTo>
+                  <a:lnTo>
+                    <a:pt x="4308848" y="3233402"/>
+                  </a:lnTo>
+                  <a:lnTo>
+                    <a:pt x="4380470" y="3239956"/>
+                  </a:lnTo>
+                  <a:lnTo>
+                    <a:pt x="4452093" y="3246338"/>
+                  </a:lnTo>
+                  <a:lnTo>
+                    <a:pt x="4523715" y="3252553"/>
+                  </a:lnTo>
+                  <a:lnTo>
+                    <a:pt x="4595338" y="3258605"/>
+                  </a:lnTo>
+                  <a:lnTo>
+                    <a:pt x="4666960" y="3264499"/>
+                  </a:lnTo>
+                  <a:lnTo>
+                    <a:pt x="4738583" y="3270239"/>
+                  </a:lnTo>
+                  <a:lnTo>
+                    <a:pt x="4810205" y="3275828"/>
+                  </a:lnTo>
+                </a:path>
+              </a:pathLst>
+            </a:custGeom>
+          </p:spPr>
+          <p:txBody>
+            <a:bodyPr/>
+            <a:lstStyle/>
+            <a:p/>
+          </p:txBody>
+        </p:sp>
+        <p:sp>
+          <p:nvSpPr>
             <p:cNvPr id="22" name="pl22"/>
             <p:cNvSpPr/>
             <p:nvPr/>
           </p:nvSpPr>
           <p:spPr>
             <a:xfrm>
-              <a:off x="3074619" y="2073503"/>
-              <a:ext cx="5146681" cy="3275828"/>
+              <a:off x="1172049" y="2683517"/>
+              <a:ext cx="7090630" cy="2868071"/>
             </a:xfrm>
             <a:custGeom>
               <a:avLst/>
               <a:pathLst>
-                <a:path w="5146681" h="3275828">
+                <a:path w="7090630" h="2868071">
                   <a:moveTo>
+                    <a:pt x="7090630" y="2868071"/>
+                  </a:moveTo>
+                  <a:lnTo>
+                    <a:pt x="7019007" y="2867503"/>
+                  </a:lnTo>
+                  <a:lnTo>
+                    <a:pt x="6947385" y="2866878"/>
+                  </a:lnTo>
+                  <a:lnTo>
+                    <a:pt x="6875762" y="2866191"/>
+                  </a:lnTo>
+                  <a:lnTo>
+                    <a:pt x="6804139" y="2865434"/>
+                  </a:lnTo>
+                  <a:lnTo>
+                    <a:pt x="6732517" y="2864601"/>
+                  </a:lnTo>
+                  <a:lnTo>
+                    <a:pt x="6660894" y="2863685"/>
+                  </a:lnTo>
+                  <a:lnTo>
+                    <a:pt x="6589272" y="2862677"/>
+                  </a:lnTo>
+                  <a:lnTo>
+                    <a:pt x="6517649" y="2861568"/>
+                  </a:lnTo>
+                  <a:lnTo>
+                    <a:pt x="6446027" y="2860348"/>
+                  </a:lnTo>
+                  <a:lnTo>
+                    <a:pt x="6374404" y="2859005"/>
+                  </a:lnTo>
+                  <a:lnTo>
+                    <a:pt x="6302782" y="2857527"/>
+                  </a:lnTo>
+                  <a:lnTo>
+                    <a:pt x="6231159" y="2855901"/>
+                  </a:lnTo>
+                  <a:lnTo>
+                    <a:pt x="6159537" y="2854112"/>
+                  </a:lnTo>
+                  <a:lnTo>
+                    <a:pt x="6087914" y="2852143"/>
+                  </a:lnTo>
+                  <a:lnTo>
+                    <a:pt x="6016292" y="2849977"/>
+                  </a:lnTo>
+                  <a:lnTo>
+                    <a:pt x="5944669" y="2847594"/>
+                  </a:lnTo>
+                  <a:lnTo>
+                    <a:pt x="5873047" y="2844971"/>
+                  </a:lnTo>
+                  <a:lnTo>
+                    <a:pt x="5801424" y="2842085"/>
+                  </a:lnTo>
+                  <a:lnTo>
+                    <a:pt x="5729802" y="2838910"/>
+                  </a:lnTo>
+                  <a:lnTo>
+                    <a:pt x="5658179" y="2835416"/>
+                  </a:lnTo>
+                  <a:lnTo>
+                    <a:pt x="5586557" y="2831571"/>
+                  </a:lnTo>
+                  <a:lnTo>
+                    <a:pt x="5514934" y="2827341"/>
+                  </a:lnTo>
+                  <a:lnTo>
+                    <a:pt x="5443311" y="2822686"/>
+                  </a:lnTo>
+                  <a:lnTo>
+                    <a:pt x="5371689" y="2817564"/>
+                  </a:lnTo>
+                  <a:lnTo>
+                    <a:pt x="5300066" y="2811929"/>
+                  </a:lnTo>
+                  <a:lnTo>
+                    <a:pt x="5228444" y="2805728"/>
+                  </a:lnTo>
+                  <a:lnTo>
+                    <a:pt x="5156821" y="2798904"/>
+                  </a:lnTo>
+                  <a:lnTo>
+                    <a:pt x="5085199" y="2791396"/>
+                  </a:lnTo>
+                  <a:lnTo>
+                    <a:pt x="5013576" y="2783135"/>
+                  </a:lnTo>
+                  <a:lnTo>
+                    <a:pt x="4941954" y="2774044"/>
+                  </a:lnTo>
+                  <a:lnTo>
+                    <a:pt x="4870331" y="2764042"/>
+                  </a:lnTo>
+                  <a:lnTo>
+                    <a:pt x="4798709" y="2753036"/>
+                  </a:lnTo>
+                  <a:lnTo>
+                    <a:pt x="4727086" y="2740926"/>
+                  </a:lnTo>
+                  <a:lnTo>
+                    <a:pt x="4655464" y="2727600"/>
+                  </a:lnTo>
+                  <a:lnTo>
+                    <a:pt x="4583841" y="2712937"/>
+                  </a:lnTo>
+                  <a:lnTo>
+                    <a:pt x="4512219" y="2696804"/>
+                  </a:lnTo>
+                  <a:lnTo>
+                    <a:pt x="4440596" y="2679051"/>
+                  </a:lnTo>
+                  <a:lnTo>
+                    <a:pt x="4368974" y="2659517"/>
+                  </a:lnTo>
+                  <a:lnTo>
+                    <a:pt x="4297351" y="2638023"/>
+                  </a:lnTo>
+                  <a:lnTo>
+                    <a:pt x="4225729" y="2614373"/>
+                  </a:lnTo>
+                  <a:lnTo>
+                    <a:pt x="4154106" y="2588349"/>
+                  </a:lnTo>
+                  <a:lnTo>
+                    <a:pt x="4082483" y="2559714"/>
+                  </a:lnTo>
+                  <a:lnTo>
+                    <a:pt x="4010861" y="2528206"/>
+                  </a:lnTo>
+                  <a:lnTo>
+                    <a:pt x="3939238" y="2493537"/>
+                  </a:lnTo>
+                  <a:lnTo>
+                    <a:pt x="3867616" y="2455389"/>
+                  </a:lnTo>
+                  <a:lnTo>
+                    <a:pt x="3795993" y="2413413"/>
+                  </a:lnTo>
+                  <a:lnTo>
+                    <a:pt x="3724371" y="2367226"/>
+                  </a:lnTo>
+                  <a:lnTo>
+                    <a:pt x="3652748" y="2316404"/>
+                  </a:lnTo>
+                  <a:lnTo>
+                    <a:pt x="3581126" y="2260483"/>
+                  </a:lnTo>
+                  <a:lnTo>
+                    <a:pt x="3509503" y="2198951"/>
+                  </a:lnTo>
+                  <a:lnTo>
+                    <a:pt x="3437881" y="2131244"/>
+                  </a:lnTo>
+                  <a:lnTo>
+                    <a:pt x="3366258" y="2056745"/>
+                  </a:lnTo>
+                  <a:lnTo>
+                    <a:pt x="3294636" y="2025544"/>
+                  </a:lnTo>
+                  <a:lnTo>
+                    <a:pt x="3223013" y="2002743"/>
+                  </a:lnTo>
+                  <a:lnTo>
+                    <a:pt x="3151391" y="1979328"/>
+                  </a:lnTo>
+                  <a:lnTo>
+                    <a:pt x="3079768" y="1955284"/>
+                  </a:lnTo>
+                  <a:lnTo>
+                    <a:pt x="3008146" y="1930594"/>
+                  </a:lnTo>
+                  <a:lnTo>
+                    <a:pt x="2936523" y="1905240"/>
+                  </a:lnTo>
+                  <a:lnTo>
+                    <a:pt x="2864901" y="1879205"/>
+                  </a:lnTo>
+                  <a:lnTo>
+                    <a:pt x="2793278" y="1852470"/>
+                  </a:lnTo>
+                  <a:lnTo>
+                    <a:pt x="2721655" y="1825016"/>
+                  </a:lnTo>
+                  <a:lnTo>
+                    <a:pt x="2650033" y="1796824"/>
+                  </a:lnTo>
+                  <a:lnTo>
+                    <a:pt x="2578410" y="1767874"/>
+                  </a:lnTo>
+                  <a:lnTo>
+                    <a:pt x="2506788" y="1738145"/>
+                  </a:lnTo>
+                  <a:lnTo>
+                    <a:pt x="2435165" y="1707618"/>
+                  </a:lnTo>
+                  <a:lnTo>
+                    <a:pt x="2363543" y="1676270"/>
+                  </a:lnTo>
+                  <a:lnTo>
+                    <a:pt x="2291920" y="1644079"/>
+                  </a:lnTo>
+                  <a:lnTo>
+                    <a:pt x="2220298" y="1611023"/>
+                  </a:lnTo>
+                  <a:lnTo>
+                    <a:pt x="2148675" y="1577078"/>
+                  </a:lnTo>
+                  <a:lnTo>
+                    <a:pt x="2077053" y="1542221"/>
+                  </a:lnTo>
+                  <a:lnTo>
+                    <a:pt x="2005430" y="1506427"/>
+                  </a:lnTo>
+                  <a:lnTo>
+                    <a:pt x="1933808" y="1469670"/>
+                  </a:lnTo>
+                  <a:lnTo>
+                    <a:pt x="1862185" y="1431925"/>
+                  </a:lnTo>
+                  <a:lnTo>
+                    <a:pt x="1790563" y="1393166"/>
+                  </a:lnTo>
+                  <a:lnTo>
+                    <a:pt x="1718940" y="1353365"/>
+                  </a:lnTo>
+                  <a:lnTo>
+                    <a:pt x="1647318" y="1312494"/>
+                  </a:lnTo>
+                  <a:lnTo>
+                    <a:pt x="1575695" y="1270524"/>
+                  </a:lnTo>
+                  <a:lnTo>
+                    <a:pt x="1504073" y="1227425"/>
+                  </a:lnTo>
+                  <a:lnTo>
+                    <a:pt x="1432450" y="1183169"/>
+                  </a:lnTo>
+                  <a:lnTo>
+                    <a:pt x="1360827" y="1137722"/>
+                  </a:lnTo>
+                  <a:lnTo>
+                    <a:pt x="1289205" y="1091054"/>
+                  </a:lnTo>
+                  <a:lnTo>
+                    <a:pt x="1217582" y="1043131"/>
+                  </a:lnTo>
+                  <a:lnTo>
+                    <a:pt x="1145960" y="993920"/>
+                  </a:lnTo>
+                  <a:lnTo>
+                    <a:pt x="1074337" y="943386"/>
+                  </a:lnTo>
+                  <a:lnTo>
+                    <a:pt x="1002715" y="891493"/>
+                  </a:lnTo>
+                  <a:lnTo>
+                    <a:pt x="931092" y="838206"/>
+                  </a:lnTo>
+                  <a:lnTo>
+                    <a:pt x="859470" y="783486"/>
+                  </a:lnTo>
+                  <a:lnTo>
+                    <a:pt x="787847" y="727295"/>
+                  </a:lnTo>
+                  <a:lnTo>
+                    <a:pt x="716225" y="669593"/>
+                  </a:lnTo>
+                  <a:lnTo>
+                    <a:pt x="644602" y="610341"/>
+                  </a:lnTo>
+                  <a:lnTo>
+                    <a:pt x="572980" y="549495"/>
+                  </a:lnTo>
+                  <a:lnTo>
+                    <a:pt x="501357" y="487014"/>
+                  </a:lnTo>
+                  <a:lnTo>
+                    <a:pt x="429735" y="422853"/>
+                  </a:lnTo>
+                  <a:lnTo>
+                    <a:pt x="358112" y="356967"/>
+                  </a:lnTo>
+                  <a:lnTo>
+                    <a:pt x="286490" y="289310"/>
+                  </a:lnTo>
+                  <a:lnTo>
+                    <a:pt x="214867" y="219835"/>
+                  </a:lnTo>
+                  <a:lnTo>
+                    <a:pt x="143245" y="148491"/>
+                  </a:lnTo>
+                  <a:lnTo>
+                    <a:pt x="71622" y="75230"/>
+                  </a:lnTo>
+                  <a:lnTo>
                     <a:pt x="0" y="0"/>
-                  </a:moveTo>
-                  <a:lnTo>
-                    <a:pt x="12300" y="55219"/>
-                  </a:lnTo>
-                  <a:lnTo>
-                    <a:pt x="88933" y="367861"/>
-                  </a:lnTo>
-                  <a:lnTo>
-                    <a:pt x="165565" y="651994"/>
-                  </a:lnTo>
-                  <a:lnTo>
-                    <a:pt x="242198" y="910217"/>
-                  </a:lnTo>
-                  <a:lnTo>
-                    <a:pt x="318831" y="1144893"/>
-                  </a:lnTo>
-                  <a:lnTo>
-                    <a:pt x="395463" y="1358170"/>
-                  </a:lnTo>
-                  <a:lnTo>
-                    <a:pt x="472096" y="1551998"/>
-                  </a:lnTo>
-                  <a:lnTo>
-                    <a:pt x="548728" y="1728151"/>
-                  </a:lnTo>
-                  <a:lnTo>
-                    <a:pt x="625361" y="1888241"/>
-                  </a:lnTo>
-                  <a:lnTo>
-                    <a:pt x="701993" y="2033733"/>
-                  </a:lnTo>
-                  <a:lnTo>
-                    <a:pt x="778626" y="2165957"/>
-                  </a:lnTo>
-                  <a:lnTo>
-                    <a:pt x="855258" y="2286124"/>
-                  </a:lnTo>
-                  <a:lnTo>
-                    <a:pt x="931891" y="2395334"/>
-                  </a:lnTo>
-                  <a:lnTo>
-                    <a:pt x="1008523" y="2494584"/>
-                  </a:lnTo>
-                  <a:lnTo>
-                    <a:pt x="1085156" y="2584784"/>
-                  </a:lnTo>
-                  <a:lnTo>
-                    <a:pt x="1161789" y="2657763"/>
-                  </a:lnTo>
-                  <a:lnTo>
-                    <a:pt x="1238421" y="2679386"/>
-                  </a:lnTo>
-                  <a:lnTo>
-                    <a:pt x="1315054" y="2700444"/>
-                  </a:lnTo>
-                  <a:lnTo>
-                    <a:pt x="1391686" y="2720949"/>
-                  </a:lnTo>
-                  <a:lnTo>
-                    <a:pt x="1468319" y="2740918"/>
-                  </a:lnTo>
-                  <a:lnTo>
-                    <a:pt x="1544951" y="2760365"/>
-                  </a:lnTo>
-                  <a:lnTo>
-                    <a:pt x="1621584" y="2779302"/>
-                  </a:lnTo>
-                  <a:lnTo>
-                    <a:pt x="1698216" y="2797743"/>
-                  </a:lnTo>
-                  <a:lnTo>
-                    <a:pt x="1774849" y="2815702"/>
-                  </a:lnTo>
-                  <a:lnTo>
-                    <a:pt x="1851482" y="2833191"/>
-                  </a:lnTo>
-                  <a:lnTo>
-                    <a:pt x="1928114" y="2850221"/>
-                  </a:lnTo>
-                  <a:lnTo>
-                    <a:pt x="2004747" y="2866806"/>
-                  </a:lnTo>
-                  <a:lnTo>
-                    <a:pt x="2081379" y="2882957"/>
-                  </a:lnTo>
-                  <a:lnTo>
-                    <a:pt x="2158012" y="2898685"/>
-                  </a:lnTo>
-                  <a:lnTo>
-                    <a:pt x="2234644" y="2914001"/>
-                  </a:lnTo>
-                  <a:lnTo>
-                    <a:pt x="2311277" y="2928916"/>
-                  </a:lnTo>
-                  <a:lnTo>
-                    <a:pt x="2387909" y="2943441"/>
-                  </a:lnTo>
-                  <a:lnTo>
-                    <a:pt x="2464542" y="2957586"/>
-                  </a:lnTo>
-                  <a:lnTo>
-                    <a:pt x="2541174" y="2971360"/>
-                  </a:lnTo>
-                  <a:lnTo>
-                    <a:pt x="2617807" y="2984773"/>
-                  </a:lnTo>
-                  <a:lnTo>
-                    <a:pt x="2694440" y="2997836"/>
-                  </a:lnTo>
-                  <a:lnTo>
-                    <a:pt x="2771072" y="3010556"/>
-                  </a:lnTo>
-                  <a:lnTo>
-                    <a:pt x="2847705" y="3022944"/>
-                  </a:lnTo>
-                  <a:lnTo>
-                    <a:pt x="2924337" y="3035007"/>
-                  </a:lnTo>
-                  <a:lnTo>
-                    <a:pt x="3000970" y="3046755"/>
-                  </a:lnTo>
-                  <a:lnTo>
-                    <a:pt x="3077602" y="3058195"/>
-                  </a:lnTo>
-                  <a:lnTo>
-                    <a:pt x="3154235" y="3069335"/>
-                  </a:lnTo>
-                  <a:lnTo>
-                    <a:pt x="3230867" y="3080184"/>
-                  </a:lnTo>
-                  <a:lnTo>
-                    <a:pt x="3307500" y="3090748"/>
-                  </a:lnTo>
-                  <a:lnTo>
-                    <a:pt x="3384132" y="3101037"/>
-                  </a:lnTo>
-                  <a:lnTo>
-                    <a:pt x="3460765" y="3111055"/>
-                  </a:lnTo>
-                  <a:lnTo>
-                    <a:pt x="3537398" y="3120812"/>
-                  </a:lnTo>
-                  <a:lnTo>
-                    <a:pt x="3614030" y="3130313"/>
-                  </a:lnTo>
-                  <a:lnTo>
-                    <a:pt x="3690663" y="3139566"/>
-                  </a:lnTo>
-                  <a:lnTo>
-                    <a:pt x="3767295" y="3148576"/>
-                  </a:lnTo>
-                  <a:lnTo>
-                    <a:pt x="3843928" y="3157350"/>
-                  </a:lnTo>
-                  <a:lnTo>
-                    <a:pt x="3920560" y="3165895"/>
-                  </a:lnTo>
-                  <a:lnTo>
-                    <a:pt x="3997193" y="3174216"/>
-                  </a:lnTo>
-                  <a:lnTo>
-                    <a:pt x="4073825" y="3182319"/>
-                  </a:lnTo>
-                  <a:lnTo>
-                    <a:pt x="4150458" y="3190210"/>
-                  </a:lnTo>
-                  <a:lnTo>
-                    <a:pt x="4227091" y="3197894"/>
-                  </a:lnTo>
-                  <a:lnTo>
-                    <a:pt x="4303723" y="3205378"/>
-                  </a:lnTo>
-                  <a:lnTo>
-                    <a:pt x="4380356" y="3212665"/>
-                  </a:lnTo>
-                  <a:lnTo>
-                    <a:pt x="4456988" y="3219761"/>
-                  </a:lnTo>
-                  <a:lnTo>
-                    <a:pt x="4533621" y="3226672"/>
-                  </a:lnTo>
-                  <a:lnTo>
-                    <a:pt x="4610253" y="3233402"/>
-                  </a:lnTo>
-                  <a:lnTo>
-                    <a:pt x="4686886" y="3239956"/>
-                  </a:lnTo>
-                  <a:lnTo>
-                    <a:pt x="4763518" y="3246338"/>
-                  </a:lnTo>
-                  <a:lnTo>
-                    <a:pt x="4840151" y="3252553"/>
-                  </a:lnTo>
-                  <a:lnTo>
-                    <a:pt x="4916783" y="3258605"/>
-                  </a:lnTo>
-                  <a:lnTo>
-                    <a:pt x="4993416" y="3264499"/>
-                  </a:lnTo>
-                  <a:lnTo>
-                    <a:pt x="5070049" y="3270239"/>
-                  </a:lnTo>
-                  <a:lnTo>
-                    <a:pt x="5146681" y="3275828"/>
                   </a:lnTo>
                 </a:path>
               </a:pathLst>
@@ -3766,562 +4057,243 @@
           </p:nvSpPr>
           <p:spPr>
             <a:xfrm>
-              <a:off x="817517" y="2859542"/>
-              <a:ext cx="7403783" cy="2692046"/>
+              <a:off x="2844460" y="2073503"/>
+              <a:ext cx="5418218" cy="3449440"/>
             </a:xfrm>
             <a:custGeom>
               <a:avLst/>
               <a:pathLst>
-                <a:path w="7403783" h="2692046">
-                  <a:moveTo>
-                    <a:pt x="7403783" y="2692046"/>
-                  </a:moveTo>
-                  <a:lnTo>
-                    <a:pt x="7327150" y="2691478"/>
-                  </a:lnTo>
-                  <a:lnTo>
-                    <a:pt x="7250518" y="2690854"/>
-                  </a:lnTo>
-                  <a:lnTo>
-                    <a:pt x="7173885" y="2690166"/>
-                  </a:lnTo>
-                  <a:lnTo>
-                    <a:pt x="7097253" y="2689409"/>
-                  </a:lnTo>
-                  <a:lnTo>
-                    <a:pt x="7020620" y="2688577"/>
-                  </a:lnTo>
-                  <a:lnTo>
-                    <a:pt x="6943987" y="2687661"/>
-                  </a:lnTo>
-                  <a:lnTo>
-                    <a:pt x="6867355" y="2686652"/>
-                  </a:lnTo>
-                  <a:lnTo>
-                    <a:pt x="6790722" y="2685543"/>
-                  </a:lnTo>
-                  <a:lnTo>
-                    <a:pt x="6714090" y="2684323"/>
-                  </a:lnTo>
-                  <a:lnTo>
-                    <a:pt x="6637457" y="2682980"/>
-                  </a:lnTo>
-                  <a:lnTo>
-                    <a:pt x="6560825" y="2681502"/>
-                  </a:lnTo>
-                  <a:lnTo>
-                    <a:pt x="6484192" y="2679876"/>
-                  </a:lnTo>
-                  <a:lnTo>
-                    <a:pt x="6407560" y="2678087"/>
-                  </a:lnTo>
-                  <a:lnTo>
-                    <a:pt x="6330927" y="2676119"/>
-                  </a:lnTo>
-                  <a:lnTo>
-                    <a:pt x="6254294" y="2673952"/>
-                  </a:lnTo>
-                  <a:lnTo>
-                    <a:pt x="6177662" y="2671569"/>
-                  </a:lnTo>
-                  <a:lnTo>
-                    <a:pt x="6101029" y="2668946"/>
-                  </a:lnTo>
-                  <a:lnTo>
-                    <a:pt x="6024397" y="2666060"/>
-                  </a:lnTo>
-                  <a:lnTo>
-                    <a:pt x="5947764" y="2662885"/>
-                  </a:lnTo>
-                  <a:lnTo>
-                    <a:pt x="5871132" y="2659391"/>
-                  </a:lnTo>
-                  <a:lnTo>
-                    <a:pt x="5794499" y="2655547"/>
-                  </a:lnTo>
-                  <a:lnTo>
-                    <a:pt x="5717867" y="2651316"/>
-                  </a:lnTo>
-                  <a:lnTo>
-                    <a:pt x="5641234" y="2646662"/>
-                  </a:lnTo>
-                  <a:lnTo>
-                    <a:pt x="5564602" y="2641540"/>
-                  </a:lnTo>
-                  <a:lnTo>
-                    <a:pt x="5487969" y="2635904"/>
-                  </a:lnTo>
-                  <a:lnTo>
-                    <a:pt x="5411336" y="2629703"/>
-                  </a:lnTo>
-                  <a:lnTo>
-                    <a:pt x="5334704" y="2622879"/>
-                  </a:lnTo>
-                  <a:lnTo>
-                    <a:pt x="5258071" y="2615371"/>
-                  </a:lnTo>
-                  <a:lnTo>
-                    <a:pt x="5181439" y="2607110"/>
-                  </a:lnTo>
-                  <a:lnTo>
-                    <a:pt x="5104806" y="2598020"/>
-                  </a:lnTo>
-                  <a:lnTo>
-                    <a:pt x="5028174" y="2588017"/>
-                  </a:lnTo>
-                  <a:lnTo>
-                    <a:pt x="4951541" y="2577011"/>
-                  </a:lnTo>
-                  <a:lnTo>
-                    <a:pt x="4874909" y="2564901"/>
-                  </a:lnTo>
-                  <a:lnTo>
-                    <a:pt x="4798276" y="2551575"/>
-                  </a:lnTo>
-                  <a:lnTo>
-                    <a:pt x="4721644" y="2536913"/>
-                  </a:lnTo>
-                  <a:lnTo>
-                    <a:pt x="4645011" y="2520779"/>
-                  </a:lnTo>
-                  <a:lnTo>
-                    <a:pt x="4568378" y="2503026"/>
-                  </a:lnTo>
-                  <a:lnTo>
-                    <a:pt x="4491746" y="2483492"/>
-                  </a:lnTo>
-                  <a:lnTo>
-                    <a:pt x="4415113" y="2461999"/>
-                  </a:lnTo>
-                  <a:lnTo>
-                    <a:pt x="4338481" y="2438348"/>
-                  </a:lnTo>
-                  <a:lnTo>
-                    <a:pt x="4261848" y="2412324"/>
-                  </a:lnTo>
-                  <a:lnTo>
-                    <a:pt x="4185216" y="2383690"/>
-                  </a:lnTo>
-                  <a:lnTo>
-                    <a:pt x="4108583" y="2352182"/>
-                  </a:lnTo>
-                  <a:lnTo>
-                    <a:pt x="4031951" y="2317512"/>
-                  </a:lnTo>
-                  <a:lnTo>
-                    <a:pt x="3955318" y="2279364"/>
-                  </a:lnTo>
-                  <a:lnTo>
-                    <a:pt x="3878685" y="2237389"/>
-                  </a:lnTo>
-                  <a:lnTo>
-                    <a:pt x="3802053" y="2191201"/>
-                  </a:lnTo>
-                  <a:lnTo>
-                    <a:pt x="3725420" y="2140379"/>
-                  </a:lnTo>
-                  <a:lnTo>
-                    <a:pt x="3648788" y="2084458"/>
-                  </a:lnTo>
-                  <a:lnTo>
-                    <a:pt x="3572155" y="2022926"/>
-                  </a:lnTo>
-                  <a:lnTo>
-                    <a:pt x="3495523" y="1955220"/>
-                  </a:lnTo>
-                  <a:lnTo>
-                    <a:pt x="3418890" y="1880720"/>
-                  </a:lnTo>
-                  <a:lnTo>
-                    <a:pt x="3342258" y="1849519"/>
-                  </a:lnTo>
-                  <a:lnTo>
-                    <a:pt x="3265625" y="1826718"/>
-                  </a:lnTo>
-                  <a:lnTo>
-                    <a:pt x="3188993" y="1803304"/>
-                  </a:lnTo>
-                  <a:lnTo>
-                    <a:pt x="3112360" y="1779260"/>
-                  </a:lnTo>
-                  <a:lnTo>
-                    <a:pt x="3035727" y="1754570"/>
-                  </a:lnTo>
-                  <a:lnTo>
-                    <a:pt x="2959095" y="1729216"/>
-                  </a:lnTo>
-                  <a:lnTo>
-                    <a:pt x="2882462" y="1703180"/>
-                  </a:lnTo>
-                  <a:lnTo>
-                    <a:pt x="2805830" y="1676445"/>
-                  </a:lnTo>
-                  <a:lnTo>
-                    <a:pt x="2729197" y="1648991"/>
-                  </a:lnTo>
-                  <a:lnTo>
-                    <a:pt x="2652565" y="1620799"/>
-                  </a:lnTo>
-                  <a:lnTo>
-                    <a:pt x="2575932" y="1591849"/>
-                  </a:lnTo>
-                  <a:lnTo>
-                    <a:pt x="2499300" y="1562121"/>
-                  </a:lnTo>
-                  <a:lnTo>
-                    <a:pt x="2422667" y="1531593"/>
-                  </a:lnTo>
-                  <a:lnTo>
-                    <a:pt x="2346034" y="1500245"/>
-                  </a:lnTo>
-                  <a:lnTo>
-                    <a:pt x="2269402" y="1468054"/>
-                  </a:lnTo>
-                  <a:lnTo>
-                    <a:pt x="2192769" y="1434998"/>
-                  </a:lnTo>
-                  <a:lnTo>
-                    <a:pt x="2116137" y="1401054"/>
-                  </a:lnTo>
-                  <a:lnTo>
-                    <a:pt x="2039504" y="1366196"/>
-                  </a:lnTo>
-                  <a:lnTo>
-                    <a:pt x="1962872" y="1330402"/>
-                  </a:lnTo>
-                  <a:lnTo>
-                    <a:pt x="1886239" y="1293645"/>
-                  </a:lnTo>
-                  <a:lnTo>
-                    <a:pt x="1809607" y="1255901"/>
-                  </a:lnTo>
-                  <a:lnTo>
-                    <a:pt x="1732974" y="1217141"/>
-                  </a:lnTo>
-                  <a:lnTo>
-                    <a:pt x="1656342" y="1177340"/>
-                  </a:lnTo>
-                  <a:lnTo>
-                    <a:pt x="1579709" y="1136469"/>
-                  </a:lnTo>
-                  <a:lnTo>
-                    <a:pt x="1503076" y="1094499"/>
-                  </a:lnTo>
-                  <a:lnTo>
-                    <a:pt x="1426444" y="1051401"/>
-                  </a:lnTo>
-                  <a:lnTo>
-                    <a:pt x="1349811" y="1007144"/>
-                  </a:lnTo>
-                  <a:lnTo>
-                    <a:pt x="1273179" y="961697"/>
-                  </a:lnTo>
-                  <a:lnTo>
-                    <a:pt x="1196546" y="915029"/>
-                  </a:lnTo>
-                  <a:lnTo>
-                    <a:pt x="1119914" y="867106"/>
-                  </a:lnTo>
-                  <a:lnTo>
-                    <a:pt x="1043281" y="817895"/>
-                  </a:lnTo>
-                  <a:lnTo>
-                    <a:pt x="966649" y="767361"/>
-                  </a:lnTo>
-                  <a:lnTo>
-                    <a:pt x="890016" y="715469"/>
-                  </a:lnTo>
-                  <a:lnTo>
-                    <a:pt x="813384" y="662181"/>
-                  </a:lnTo>
-                  <a:lnTo>
-                    <a:pt x="736751" y="607461"/>
-                  </a:lnTo>
-                  <a:lnTo>
-                    <a:pt x="660118" y="551270"/>
-                  </a:lnTo>
-                  <a:lnTo>
-                    <a:pt x="583486" y="493569"/>
-                  </a:lnTo>
-                  <a:lnTo>
-                    <a:pt x="506853" y="434316"/>
-                  </a:lnTo>
-                  <a:lnTo>
-                    <a:pt x="430221" y="373470"/>
-                  </a:lnTo>
-                  <a:lnTo>
-                    <a:pt x="353588" y="310989"/>
-                  </a:lnTo>
-                  <a:lnTo>
-                    <a:pt x="276956" y="246828"/>
-                  </a:lnTo>
-                  <a:lnTo>
-                    <a:pt x="200323" y="180943"/>
-                  </a:lnTo>
-                  <a:lnTo>
-                    <a:pt x="123691" y="113286"/>
-                  </a:lnTo>
-                  <a:lnTo>
-                    <a:pt x="47058" y="43810"/>
-                  </a:lnTo>
-                  <a:lnTo>
-                    <a:pt x="0" y="0"/>
-                  </a:lnTo>
-                </a:path>
-              </a:pathLst>
-            </a:custGeom>
-          </p:spPr>
-          <p:txBody>
-            <a:bodyPr/>
-            <a:lstStyle/>
-            <a:p/>
-          </p:txBody>
-        </p:sp>
-        <p:sp>
-          <p:nvSpPr>
-            <p:cNvPr id="24" name="pl24"/>
-            <p:cNvSpPr/>
-            <p:nvPr/>
-          </p:nvSpPr>
-          <p:spPr>
-            <a:xfrm>
-              <a:off x="2424076" y="2073503"/>
-              <a:ext cx="5797224" cy="3449440"/>
-            </a:xfrm>
-            <a:custGeom>
-              <a:avLst/>
-              <a:pathLst>
-                <a:path w="5797224" h="3449440">
+                <a:path w="5418218" h="3449440">
                   <a:moveTo>
                     <a:pt x="0" y="0"/>
                   </a:moveTo>
                   <a:lnTo>
-                    <a:pt x="49783" y="136924"/>
-                  </a:lnTo>
-                  <a:lnTo>
-                    <a:pt x="126416" y="335207"/>
-                  </a:lnTo>
-                  <a:lnTo>
-                    <a:pt x="203048" y="521742"/>
-                  </a:lnTo>
-                  <a:lnTo>
-                    <a:pt x="279681" y="697226"/>
-                  </a:lnTo>
-                  <a:lnTo>
-                    <a:pt x="356313" y="862313"/>
-                  </a:lnTo>
-                  <a:lnTo>
-                    <a:pt x="432946" y="1017620"/>
-                  </a:lnTo>
-                  <a:lnTo>
-                    <a:pt x="509579" y="1163725"/>
-                  </a:lnTo>
-                  <a:lnTo>
-                    <a:pt x="586211" y="1301175"/>
-                  </a:lnTo>
-                  <a:lnTo>
-                    <a:pt x="662844" y="1430481"/>
-                  </a:lnTo>
-                  <a:lnTo>
-                    <a:pt x="739476" y="1552127"/>
-                  </a:lnTo>
-                  <a:lnTo>
-                    <a:pt x="816109" y="1666566"/>
-                  </a:lnTo>
-                  <a:lnTo>
-                    <a:pt x="892741" y="1774225"/>
-                  </a:lnTo>
-                  <a:lnTo>
-                    <a:pt x="969374" y="1875505"/>
-                  </a:lnTo>
-                  <a:lnTo>
-                    <a:pt x="1046006" y="1970785"/>
-                  </a:lnTo>
-                  <a:lnTo>
-                    <a:pt x="1122639" y="2060421"/>
-                  </a:lnTo>
-                  <a:lnTo>
-                    <a:pt x="1199272" y="2144746"/>
-                  </a:lnTo>
-                  <a:lnTo>
-                    <a:pt x="1275904" y="2224075"/>
-                  </a:lnTo>
-                  <a:lnTo>
-                    <a:pt x="1352537" y="2298704"/>
-                  </a:lnTo>
-                  <a:lnTo>
-                    <a:pt x="1429169" y="2368912"/>
-                  </a:lnTo>
-                  <a:lnTo>
-                    <a:pt x="1505802" y="2434960"/>
-                  </a:lnTo>
-                  <a:lnTo>
-                    <a:pt x="1582434" y="2497095"/>
-                  </a:lnTo>
-                  <a:lnTo>
-                    <a:pt x="1659067" y="2555550"/>
-                  </a:lnTo>
-                  <a:lnTo>
-                    <a:pt x="1735699" y="2610541"/>
-                  </a:lnTo>
-                  <a:lnTo>
-                    <a:pt x="1812332" y="2662274"/>
-                  </a:lnTo>
-                  <a:lnTo>
-                    <a:pt x="1888964" y="2710942"/>
-                  </a:lnTo>
-                  <a:lnTo>
-                    <a:pt x="1965597" y="2756727"/>
-                  </a:lnTo>
-                  <a:lnTo>
-                    <a:pt x="2042230" y="2799799"/>
-                  </a:lnTo>
-                  <a:lnTo>
-                    <a:pt x="2118862" y="2840319"/>
-                  </a:lnTo>
-                  <a:lnTo>
-                    <a:pt x="2195495" y="2878439"/>
-                  </a:lnTo>
-                  <a:lnTo>
-                    <a:pt x="2272127" y="2914301"/>
-                  </a:lnTo>
-                  <a:lnTo>
-                    <a:pt x="2348760" y="2948037"/>
-                  </a:lnTo>
-                  <a:lnTo>
-                    <a:pt x="2425392" y="2979775"/>
-                  </a:lnTo>
-                  <a:lnTo>
-                    <a:pt x="2502025" y="3009633"/>
-                  </a:lnTo>
-                  <a:lnTo>
-                    <a:pt x="2578657" y="3037722"/>
-                  </a:lnTo>
-                  <a:lnTo>
-                    <a:pt x="2655290" y="3064147"/>
-                  </a:lnTo>
-                  <a:lnTo>
-                    <a:pt x="2731923" y="3089006"/>
-                  </a:lnTo>
-                  <a:lnTo>
-                    <a:pt x="2808555" y="3112392"/>
-                  </a:lnTo>
-                  <a:lnTo>
-                    <a:pt x="2885188" y="3134393"/>
-                  </a:lnTo>
-                  <a:lnTo>
-                    <a:pt x="2961820" y="3155091"/>
-                  </a:lnTo>
-                  <a:lnTo>
-                    <a:pt x="3038453" y="3174562"/>
-                  </a:lnTo>
-                  <a:lnTo>
-                    <a:pt x="3115085" y="3192879"/>
-                  </a:lnTo>
-                  <a:lnTo>
-                    <a:pt x="3191718" y="3210112"/>
-                  </a:lnTo>
-                  <a:lnTo>
-                    <a:pt x="3268350" y="3226323"/>
-                  </a:lnTo>
-                  <a:lnTo>
-                    <a:pt x="3344983" y="3241574"/>
-                  </a:lnTo>
-                  <a:lnTo>
-                    <a:pt x="3421615" y="3255922"/>
-                  </a:lnTo>
-                  <a:lnTo>
-                    <a:pt x="3498248" y="3269419"/>
-                  </a:lnTo>
-                  <a:lnTo>
-                    <a:pt x="3574881" y="3282117"/>
-                  </a:lnTo>
-                  <a:lnTo>
-                    <a:pt x="3651513" y="3294063"/>
-                  </a:lnTo>
-                  <a:lnTo>
-                    <a:pt x="3728146" y="3305300"/>
-                  </a:lnTo>
-                  <a:lnTo>
-                    <a:pt x="3804778" y="3315872"/>
-                  </a:lnTo>
-                  <a:lnTo>
-                    <a:pt x="3881411" y="3325818"/>
-                  </a:lnTo>
-                  <a:lnTo>
-                    <a:pt x="3958043" y="3335175"/>
-                  </a:lnTo>
-                  <a:lnTo>
-                    <a:pt x="4034676" y="3343977"/>
-                  </a:lnTo>
-                  <a:lnTo>
-                    <a:pt x="4111308" y="3352257"/>
-                  </a:lnTo>
-                  <a:lnTo>
-                    <a:pt x="4187941" y="3360047"/>
-                  </a:lnTo>
-                  <a:lnTo>
-                    <a:pt x="4264573" y="3367376"/>
-                  </a:lnTo>
-                  <a:lnTo>
-                    <a:pt x="4341206" y="3374270"/>
-                  </a:lnTo>
-                  <a:lnTo>
-                    <a:pt x="4417839" y="3380756"/>
-                  </a:lnTo>
-                  <a:lnTo>
-                    <a:pt x="4494471" y="3386858"/>
-                  </a:lnTo>
-                  <a:lnTo>
-                    <a:pt x="4571104" y="3392598"/>
-                  </a:lnTo>
-                  <a:lnTo>
-                    <a:pt x="4647736" y="3397998"/>
-                  </a:lnTo>
-                  <a:lnTo>
-                    <a:pt x="4724369" y="3403078"/>
-                  </a:lnTo>
-                  <a:lnTo>
-                    <a:pt x="4801001" y="3407857"/>
-                  </a:lnTo>
-                  <a:lnTo>
-                    <a:pt x="4877634" y="3412354"/>
-                  </a:lnTo>
-                  <a:lnTo>
-                    <a:pt x="4954266" y="3416583"/>
-                  </a:lnTo>
-                  <a:lnTo>
-                    <a:pt x="5030899" y="3420562"/>
-                  </a:lnTo>
-                  <a:lnTo>
-                    <a:pt x="5107532" y="3424306"/>
-                  </a:lnTo>
-                  <a:lnTo>
-                    <a:pt x="5184164" y="3427827"/>
-                  </a:lnTo>
-                  <a:lnTo>
-                    <a:pt x="5260797" y="3431140"/>
-                  </a:lnTo>
-                  <a:lnTo>
-                    <a:pt x="5337429" y="3434257"/>
-                  </a:lnTo>
-                  <a:lnTo>
-                    <a:pt x="5414062" y="3437189"/>
-                  </a:lnTo>
-                  <a:lnTo>
-                    <a:pt x="5490694" y="3439947"/>
-                  </a:lnTo>
-                  <a:lnTo>
-                    <a:pt x="5567327" y="3442542"/>
-                  </a:lnTo>
-                  <a:lnTo>
-                    <a:pt x="5643959" y="3444983"/>
-                  </a:lnTo>
-                  <a:lnTo>
-                    <a:pt x="5720592" y="3447280"/>
-                  </a:lnTo>
-                  <a:lnTo>
-                    <a:pt x="5797224" y="3449440"/>
+                    <a:pt x="46529" y="136924"/>
+                  </a:lnTo>
+                  <a:lnTo>
+                    <a:pt x="118151" y="335207"/>
+                  </a:lnTo>
+                  <a:lnTo>
+                    <a:pt x="189774" y="521742"/>
+                  </a:lnTo>
+                  <a:lnTo>
+                    <a:pt x="261396" y="697226"/>
+                  </a:lnTo>
+                  <a:lnTo>
+                    <a:pt x="333019" y="862313"/>
+                  </a:lnTo>
+                  <a:lnTo>
+                    <a:pt x="404641" y="1017620"/>
+                  </a:lnTo>
+                  <a:lnTo>
+                    <a:pt x="476264" y="1163725"/>
+                  </a:lnTo>
+                  <a:lnTo>
+                    <a:pt x="547886" y="1301175"/>
+                  </a:lnTo>
+                  <a:lnTo>
+                    <a:pt x="619509" y="1430481"/>
+                  </a:lnTo>
+                  <a:lnTo>
+                    <a:pt x="691131" y="1552127"/>
+                  </a:lnTo>
+                  <a:lnTo>
+                    <a:pt x="762754" y="1666566"/>
+                  </a:lnTo>
+                  <a:lnTo>
+                    <a:pt x="834376" y="1774225"/>
+                  </a:lnTo>
+                  <a:lnTo>
+                    <a:pt x="905999" y="1875505"/>
+                  </a:lnTo>
+                  <a:lnTo>
+                    <a:pt x="977621" y="1970785"/>
+                  </a:lnTo>
+                  <a:lnTo>
+                    <a:pt x="1049244" y="2060421"/>
+                  </a:lnTo>
+                  <a:lnTo>
+                    <a:pt x="1120866" y="2144746"/>
+                  </a:lnTo>
+                  <a:lnTo>
+                    <a:pt x="1192489" y="2224075"/>
+                  </a:lnTo>
+                  <a:lnTo>
+                    <a:pt x="1264112" y="2298704"/>
+                  </a:lnTo>
+                  <a:lnTo>
+                    <a:pt x="1335734" y="2368912"/>
+                  </a:lnTo>
+                  <a:lnTo>
+                    <a:pt x="1407357" y="2434960"/>
+                  </a:lnTo>
+                  <a:lnTo>
+                    <a:pt x="1478979" y="2497095"/>
+                  </a:lnTo>
+                  <a:lnTo>
+                    <a:pt x="1550602" y="2555550"/>
+                  </a:lnTo>
+                  <a:lnTo>
+                    <a:pt x="1622224" y="2610541"/>
+                  </a:lnTo>
+                  <a:lnTo>
+                    <a:pt x="1693847" y="2662274"/>
+                  </a:lnTo>
+                  <a:lnTo>
+                    <a:pt x="1765469" y="2710942"/>
+                  </a:lnTo>
+                  <a:lnTo>
+                    <a:pt x="1837092" y="2756727"/>
+                  </a:lnTo>
+                  <a:lnTo>
+                    <a:pt x="1908714" y="2799799"/>
+                  </a:lnTo>
+                  <a:lnTo>
+                    <a:pt x="1980337" y="2840319"/>
+                  </a:lnTo>
+                  <a:lnTo>
+                    <a:pt x="2051959" y="2878439"/>
+                  </a:lnTo>
+                  <a:lnTo>
+                    <a:pt x="2123582" y="2914301"/>
+                  </a:lnTo>
+                  <a:lnTo>
+                    <a:pt x="2195204" y="2948037"/>
+                  </a:lnTo>
+                  <a:lnTo>
+                    <a:pt x="2266827" y="2979775"/>
+                  </a:lnTo>
+                  <a:lnTo>
+                    <a:pt x="2338449" y="3009633"/>
+                  </a:lnTo>
+                  <a:lnTo>
+                    <a:pt x="2410072" y="3037722"/>
+                  </a:lnTo>
+                  <a:lnTo>
+                    <a:pt x="2481694" y="3064147"/>
+                  </a:lnTo>
+                  <a:lnTo>
+                    <a:pt x="2553317" y="3089006"/>
+                  </a:lnTo>
+                  <a:lnTo>
+                    <a:pt x="2624940" y="3112392"/>
+                  </a:lnTo>
+                  <a:lnTo>
+                    <a:pt x="2696562" y="3134393"/>
+                  </a:lnTo>
+                  <a:lnTo>
+                    <a:pt x="2768185" y="3155091"/>
+                  </a:lnTo>
+                  <a:lnTo>
+                    <a:pt x="2839807" y="3174562"/>
+                  </a:lnTo>
+                  <a:lnTo>
+                    <a:pt x="2911430" y="3192879"/>
+                  </a:lnTo>
+                  <a:lnTo>
+                    <a:pt x="2983052" y="3210112"/>
+                  </a:lnTo>
+                  <a:lnTo>
+                    <a:pt x="3054675" y="3226323"/>
+                  </a:lnTo>
+                  <a:lnTo>
+                    <a:pt x="3126297" y="3241574"/>
+                  </a:lnTo>
+                  <a:lnTo>
+                    <a:pt x="3197920" y="3255922"/>
+                  </a:lnTo>
+                  <a:lnTo>
+                    <a:pt x="3269542" y="3269419"/>
+                  </a:lnTo>
+                  <a:lnTo>
+                    <a:pt x="3341165" y="3282117"/>
+                  </a:lnTo>
+                  <a:lnTo>
+                    <a:pt x="3412787" y="3294063"/>
+                  </a:lnTo>
+                  <a:lnTo>
+                    <a:pt x="3484410" y="3305300"/>
+                  </a:lnTo>
+                  <a:lnTo>
+                    <a:pt x="3556032" y="3315872"/>
+                  </a:lnTo>
+                  <a:lnTo>
+                    <a:pt x="3627655" y="3325818"/>
+                  </a:lnTo>
+                  <a:lnTo>
+                    <a:pt x="3699277" y="3335175"/>
+                  </a:lnTo>
+                  <a:lnTo>
+                    <a:pt x="3770900" y="3343977"/>
+                  </a:lnTo>
+                  <a:lnTo>
+                    <a:pt x="3842522" y="3352257"/>
+                  </a:lnTo>
+                  <a:lnTo>
+                    <a:pt x="3914145" y="3360047"/>
+                  </a:lnTo>
+                  <a:lnTo>
+                    <a:pt x="3985768" y="3367376"/>
+                  </a:lnTo>
+                  <a:lnTo>
+                    <a:pt x="4057390" y="3374270"/>
+                  </a:lnTo>
+                  <a:lnTo>
+                    <a:pt x="4129013" y="3380756"/>
+                  </a:lnTo>
+                  <a:lnTo>
+                    <a:pt x="4200635" y="3386858"/>
+                  </a:lnTo>
+                  <a:lnTo>
+                    <a:pt x="4272258" y="3392598"/>
+                  </a:lnTo>
+                  <a:lnTo>
+                    <a:pt x="4343880" y="3397998"/>
+                  </a:lnTo>
+                  <a:lnTo>
+                    <a:pt x="4415503" y="3403078"/>
+                  </a:lnTo>
+                  <a:lnTo>
+                    <a:pt x="4487125" y="3407857"/>
+                  </a:lnTo>
+                  <a:lnTo>
+                    <a:pt x="4558748" y="3412354"/>
+                  </a:lnTo>
+                  <a:lnTo>
+                    <a:pt x="4630370" y="3416583"/>
+                  </a:lnTo>
+                  <a:lnTo>
+                    <a:pt x="4701993" y="3420562"/>
+                  </a:lnTo>
+                  <a:lnTo>
+                    <a:pt x="4773615" y="3424306"/>
+                  </a:lnTo>
+                  <a:lnTo>
+                    <a:pt x="4845238" y="3427827"/>
+                  </a:lnTo>
+                  <a:lnTo>
+                    <a:pt x="4916860" y="3431140"/>
+                  </a:lnTo>
+                  <a:lnTo>
+                    <a:pt x="4988483" y="3434257"/>
+                  </a:lnTo>
+                  <a:lnTo>
+                    <a:pt x="5060105" y="3437189"/>
+                  </a:lnTo>
+                  <a:lnTo>
+                    <a:pt x="5131728" y="3439947"/>
+                  </a:lnTo>
+                  <a:lnTo>
+                    <a:pt x="5203350" y="3442542"/>
+                  </a:lnTo>
+                  <a:lnTo>
+                    <a:pt x="5274973" y="3444983"/>
+                  </a:lnTo>
+                  <a:lnTo>
+                    <a:pt x="5346595" y="3447280"/>
+                  </a:lnTo>
+                  <a:lnTo>
+                    <a:pt x="5418218" y="3449440"/>
                   </a:lnTo>
                 </a:path>
               </a:pathLst>
@@ -4344,7 +4316,7 @@
         </p:sp>
         <p:sp>
           <p:nvSpPr>
-            <p:cNvPr id="25" name="pl25"/>
+            <p:cNvPr id="24" name="pl24"/>
             <p:cNvSpPr/>
             <p:nvPr/>
           </p:nvSpPr>
@@ -4387,13 +4359,13 @@
         </p:sp>
         <p:sp>
           <p:nvSpPr>
-            <p:cNvPr id="26" name="pl26"/>
+            <p:cNvPr id="25" name="pl25"/>
             <p:cNvSpPr/>
             <p:nvPr/>
           </p:nvSpPr>
           <p:spPr>
             <a:xfrm>
-              <a:off x="4224261" y="2073503"/>
+              <a:off x="4526955" y="2073503"/>
               <a:ext cx="0" cy="3649639"/>
             </a:xfrm>
             <a:custGeom>
@@ -4430,7 +4402,7 @@
         </p:sp>
         <p:sp>
           <p:nvSpPr>
-            <p:cNvPr id="27" name="tx27"/>
+            <p:cNvPr id="26" name="tx26"/>
             <p:cNvSpPr/>
             <p:nvPr/>
           </p:nvSpPr>
@@ -4476,7 +4448,7 @@
         </p:sp>
         <p:sp>
           <p:nvSpPr>
-            <p:cNvPr id="28" name="tx28"/>
+            <p:cNvPr id="27" name="tx27"/>
             <p:cNvSpPr/>
             <p:nvPr/>
           </p:nvSpPr>
@@ -4522,7 +4494,7 @@
         </p:sp>
         <p:sp>
           <p:nvSpPr>
-            <p:cNvPr id="29" name="tx29"/>
+            <p:cNvPr id="28" name="tx28"/>
             <p:cNvSpPr/>
             <p:nvPr/>
           </p:nvSpPr>
@@ -4568,7 +4540,7 @@
         </p:sp>
         <p:sp>
           <p:nvSpPr>
-            <p:cNvPr id="30" name="tx30"/>
+            <p:cNvPr id="29" name="tx29"/>
             <p:cNvSpPr/>
             <p:nvPr/>
           </p:nvSpPr>
@@ -4614,7 +4586,7 @@
         </p:sp>
         <p:sp>
           <p:nvSpPr>
-            <p:cNvPr id="31" name="tx31"/>
+            <p:cNvPr id="30" name="tx30"/>
             <p:cNvSpPr/>
             <p:nvPr/>
           </p:nvSpPr>
@@ -4660,14 +4632,14 @@
         </p:sp>
         <p:sp>
           <p:nvSpPr>
-            <p:cNvPr id="32" name="tx32"/>
+            <p:cNvPr id="31" name="tx31"/>
             <p:cNvSpPr/>
             <p:nvPr/>
           </p:nvSpPr>
           <p:spPr>
             <a:xfrm>
-              <a:off x="2423864" y="5785772"/>
-              <a:ext cx="155356" cy="80101"/>
+              <a:off x="2421884" y="5785772"/>
+              <a:ext cx="161574" cy="80101"/>
             </a:xfrm>
             <a:prstGeom prst="rect">
               <a:avLst/>
@@ -4699,21 +4671,21 @@
                   <a:latin typeface="Helvetica"/>
                   <a:cs typeface="Helvetica"/>
                 </a:rPr>
-                <a:t>0.8</a:t>
+                <a:t>-25</a:t>
               </a:r>
             </a:p>
           </p:txBody>
         </p:sp>
         <p:sp>
           <p:nvSpPr>
-            <p:cNvPr id="33" name="tx33"/>
+            <p:cNvPr id="32" name="tx32"/>
             <p:cNvSpPr/>
             <p:nvPr/>
           </p:nvSpPr>
           <p:spPr>
             <a:xfrm>
-              <a:off x="4196521" y="5785772"/>
-              <a:ext cx="155356" cy="80101"/>
+              <a:off x="4542539" y="5785772"/>
+              <a:ext cx="62179" cy="80101"/>
             </a:xfrm>
             <a:prstGeom prst="rect">
               <a:avLst/>
@@ -4745,21 +4717,21 @@
                   <a:latin typeface="Helvetica"/>
                   <a:cs typeface="Helvetica"/>
                 </a:rPr>
-                <a:t>1.0</a:t>
+                <a:t>0</a:t>
               </a:r>
             </a:p>
           </p:txBody>
         </p:sp>
         <p:sp>
           <p:nvSpPr>
-            <p:cNvPr id="34" name="tx34"/>
+            <p:cNvPr id="33" name="tx33"/>
             <p:cNvSpPr/>
             <p:nvPr/>
           </p:nvSpPr>
           <p:spPr>
             <a:xfrm>
-              <a:off x="5969179" y="5785772"/>
-              <a:ext cx="155356" cy="80101"/>
+              <a:off x="6582407" y="5785772"/>
+              <a:ext cx="124358" cy="80101"/>
             </a:xfrm>
             <a:prstGeom prst="rect">
               <a:avLst/>
@@ -4791,67 +4763,21 @@
                   <a:latin typeface="Helvetica"/>
                   <a:cs typeface="Helvetica"/>
                 </a:rPr>
-                <a:t>1.2</a:t>
+                <a:t>25</a:t>
               </a:r>
             </a:p>
           </p:txBody>
         </p:sp>
         <p:sp>
           <p:nvSpPr>
-            <p:cNvPr id="35" name="tx35"/>
+            <p:cNvPr id="34" name="tx34"/>
             <p:cNvSpPr/>
             <p:nvPr/>
           </p:nvSpPr>
           <p:spPr>
             <a:xfrm>
-              <a:off x="7741836" y="5785772"/>
-              <a:ext cx="155356" cy="80101"/>
-            </a:xfrm>
-            <a:prstGeom prst="rect">
-              <a:avLst/>
-            </a:prstGeom>
-            <a:noFill/>
-          </p:spPr>
-          <p:txBody>
-            <a:bodyPr lIns="0" rIns="0" tIns="0" bIns="0" anchorCtr="1" anchor="ctr" wrap="none"/>
-            <a:lstStyle/>
-            <a:p>
-              <a:pPr algn="l" marL="0" marR="0" indent="0">
-                <a:lnSpc>
-                  <a:spcPts val="880"/>
-                </a:lnSpc>
-                <a:spcBef>
-                  <a:spcPts val="0"/>
-                </a:spcBef>
-                <a:spcAft>
-                  <a:spcPts val="0"/>
-                </a:spcAft>
-              </a:pPr>
-              <a:r>
-                <a:rPr sz="880">
-                  <a:solidFill>
-                    <a:srgbClr val="4D4D4D">
-                      <a:alpha val="100000"/>
-                    </a:srgbClr>
-                  </a:solidFill>
-                  <a:latin typeface="Helvetica"/>
-                  <a:cs typeface="Helvetica"/>
-                </a:rPr>
-                <a:t>1.4</a:t>
-              </a:r>
-            </a:p>
-          </p:txBody>
-        </p:sp>
-        <p:sp>
-          <p:nvSpPr>
-            <p:cNvPr id="36" name="tx36"/>
-            <p:cNvSpPr/>
-            <p:nvPr/>
-          </p:nvSpPr>
-          <p:spPr>
-            <a:xfrm>
-              <a:off x="3879271" y="5925448"/>
-              <a:ext cx="1676186" cy="100218"/>
+              <a:off x="2928340" y="5925448"/>
+              <a:ext cx="3578047" cy="100218"/>
             </a:xfrm>
             <a:prstGeom prst="rect">
               <a:avLst/>
@@ -4883,14 +4809,14 @@
                   <a:latin typeface="Helvetica"/>
                   <a:cs typeface="Helvetica"/>
                 </a:rPr>
-                <a:t>CKD-EPI Cr-Cys / CG ratio</a:t>
+                <a:t>eGFR difference (%): 100 × (CKD-EPI Cr-Cys − CG) / CG</a:t>
               </a:r>
             </a:p>
           </p:txBody>
         </p:sp>
         <p:sp>
           <p:nvSpPr>
-            <p:cNvPr id="37" name="tx37"/>
+            <p:cNvPr id="35" name="tx35"/>
             <p:cNvSpPr/>
             <p:nvPr/>
           </p:nvSpPr>
@@ -4936,14 +4862,14 @@
         </p:sp>
         <p:sp>
           <p:nvSpPr>
-            <p:cNvPr id="38" name="tx38"/>
+            <p:cNvPr id="36" name="tx36"/>
             <p:cNvSpPr/>
             <p:nvPr/>
           </p:nvSpPr>
           <p:spPr>
             <a:xfrm>
               <a:off x="817517" y="1896563"/>
-              <a:ext cx="6299667" cy="82021"/>
+              <a:ext cx="6451914" cy="82021"/>
             </a:xfrm>
             <a:prstGeom prst="rect">
               <a:avLst/>
@@ -4975,14 +4901,14 @@
                   <a:latin typeface="Helvetica"/>
                   <a:cs typeface="Helvetica"/>
                 </a:rPr>
-                <a:t>subHR per 0.1 ratio decline: 2.03 (1.36-3.02), p = &lt;0.001  |  per IQR decline (Δ = 0.30): 8.27 (2.50-27.34)  |  IQR: [0.85, 1.15]</a:t>
+                <a:t>subHR per 10 % decline: 2.03 (1.36-3.02), p = &lt;0.001  |  per IQR decline (Δ = 29.9 %): 8.27 (2.50-27.34)  |  IQR: [-15.0, 14.9] %</a:t>
               </a:r>
             </a:p>
           </p:txBody>
         </p:sp>
         <p:sp>
           <p:nvSpPr>
-            <p:cNvPr id="39" name="tx39"/>
+            <p:cNvPr id="37" name="tx37"/>
             <p:cNvSpPr/>
             <p:nvPr/>
           </p:nvSpPr>

--- a/docs/pptx/carbo/jx-carbo-linsubhr-ratio-hosp5.pptx
+++ b/docs/pptx/carbo/jx-carbo-linsubhr-ratio-hosp5.pptx
@@ -2265,34 +2265,26 @@
         </p:sp>
         <p:sp>
           <p:nvSpPr>
-            <p:cNvPr id="4" name="pl4"/>
+            <p:cNvPr id="4" name="rc4"/>
             <p:cNvSpPr/>
             <p:nvPr/>
           </p:nvSpPr>
           <p:spPr>
             <a:xfrm>
-              <a:off x="817517" y="5142518"/>
-              <a:ext cx="7799693" cy="0"/>
+              <a:off x="457200" y="1600200"/>
+              <a:ext cx="8229600" cy="4525962"/>
             </a:xfrm>
-            <a:custGeom>
+            <a:prstGeom prst="rect">
               <a:avLst/>
-              <a:pathLst>
-                <a:path w="7799693" h="0">
-                  <a:moveTo>
-                    <a:pt x="0" y="0"/>
-                  </a:moveTo>
-                  <a:lnTo>
-                    <a:pt x="7799693" y="0"/>
-                  </a:lnTo>
-                  <a:lnTo>
-                    <a:pt x="7799693" y="0"/>
-                  </a:lnTo>
-                </a:path>
-              </a:pathLst>
-            </a:custGeom>
-            <a:ln w="6775" cap="flat">
+            </a:prstGeom>
+            <a:solidFill>
+              <a:srgbClr val="FFFFFF">
+                <a:alpha val="100000"/>
+              </a:srgbClr>
+            </a:solidFill>
+            <a:ln w="13550" cap="rnd">
               <a:solidFill>
-                <a:srgbClr val="EBEBEB">
+                <a:srgbClr val="FFFFFF">
                   <a:alpha val="100000"/>
                 </a:srgbClr>
               </a:solidFill>
@@ -2314,21 +2306,21 @@
           </p:nvSpPr>
           <p:spPr>
             <a:xfrm>
-              <a:off x="817517" y="4313054"/>
-              <a:ext cx="7799693" cy="0"/>
+              <a:off x="887106" y="3250627"/>
+              <a:ext cx="7660515" cy="0"/>
             </a:xfrm>
             <a:custGeom>
               <a:avLst/>
               <a:pathLst>
-                <a:path w="7799693" h="0">
+                <a:path w="7660515" h="0">
                   <a:moveTo>
                     <a:pt x="0" y="0"/>
                   </a:moveTo>
                   <a:lnTo>
-                    <a:pt x="7799693" y="0"/>
-                  </a:lnTo>
-                  <a:lnTo>
-                    <a:pt x="7799693" y="0"/>
+                    <a:pt x="7660515" y="0"/>
+                  </a:lnTo>
+                  <a:lnTo>
+                    <a:pt x="7660515" y="0"/>
                   </a:lnTo>
                 </a:path>
               </a:pathLst>
@@ -2357,21 +2349,21 @@
           </p:nvSpPr>
           <p:spPr>
             <a:xfrm>
-              <a:off x="817517" y="3483591"/>
-              <a:ext cx="7799693" cy="0"/>
+              <a:off x="887106" y="2951293"/>
+              <a:ext cx="7660515" cy="0"/>
             </a:xfrm>
             <a:custGeom>
               <a:avLst/>
               <a:pathLst>
-                <a:path w="7799693" h="0">
+                <a:path w="7660515" h="0">
                   <a:moveTo>
                     <a:pt x="0" y="0"/>
                   </a:moveTo>
                   <a:lnTo>
-                    <a:pt x="7799693" y="0"/>
-                  </a:lnTo>
-                  <a:lnTo>
-                    <a:pt x="7799693" y="0"/>
+                    <a:pt x="7660515" y="0"/>
+                  </a:lnTo>
+                  <a:lnTo>
+                    <a:pt x="7660515" y="0"/>
                   </a:lnTo>
                 </a:path>
               </a:pathLst>
@@ -2400,21 +2392,21 @@
           </p:nvSpPr>
           <p:spPr>
             <a:xfrm>
-              <a:off x="817517" y="2654127"/>
-              <a:ext cx="7799693" cy="0"/>
+              <a:off x="887106" y="2651959"/>
+              <a:ext cx="7660515" cy="0"/>
             </a:xfrm>
             <a:custGeom>
               <a:avLst/>
               <a:pathLst>
-                <a:path w="7799693" h="0">
+                <a:path w="7660515" h="0">
                   <a:moveTo>
                     <a:pt x="0" y="0"/>
                   </a:moveTo>
                   <a:lnTo>
-                    <a:pt x="7799693" y="0"/>
-                  </a:lnTo>
-                  <a:lnTo>
-                    <a:pt x="7799693" y="0"/>
+                    <a:pt x="7660515" y="0"/>
+                  </a:lnTo>
+                  <a:lnTo>
+                    <a:pt x="7660515" y="0"/>
                   </a:lnTo>
                 </a:path>
               </a:pathLst>
@@ -2443,21 +2435,21 @@
           </p:nvSpPr>
           <p:spPr>
             <a:xfrm>
-              <a:off x="1467192" y="2073503"/>
-              <a:ext cx="0" cy="3649639"/>
+              <a:off x="887106" y="2352625"/>
+              <a:ext cx="7660515" cy="0"/>
             </a:xfrm>
             <a:custGeom>
               <a:avLst/>
               <a:pathLst>
-                <a:path w="0" h="3649639">
+                <a:path w="7660515" h="0">
                   <a:moveTo>
-                    <a:pt x="0" y="3649639"/>
+                    <a:pt x="0" y="0"/>
                   </a:moveTo>
                   <a:lnTo>
-                    <a:pt x="0" y="0"/>
-                  </a:lnTo>
-                  <a:lnTo>
-                    <a:pt x="0" y="0"/>
+                    <a:pt x="7660515" y="0"/>
+                  </a:lnTo>
+                  <a:lnTo>
+                    <a:pt x="7660515" y="0"/>
                   </a:lnTo>
                 </a:path>
               </a:pathLst>
@@ -2486,15 +2478,15 @@
           </p:nvSpPr>
           <p:spPr>
             <a:xfrm>
-              <a:off x="3538150" y="2073503"/>
-              <a:ext cx="0" cy="3649639"/>
+              <a:off x="1525188" y="2143092"/>
+              <a:ext cx="0" cy="1317069"/>
             </a:xfrm>
             <a:custGeom>
               <a:avLst/>
               <a:pathLst>
-                <a:path w="0" h="3649639">
+                <a:path w="0" h="1317069">
                   <a:moveTo>
-                    <a:pt x="0" y="3649639"/>
+                    <a:pt x="0" y="1317069"/>
                   </a:moveTo>
                   <a:lnTo>
                     <a:pt x="0" y="0"/>
@@ -2529,15 +2521,15 @@
           </p:nvSpPr>
           <p:spPr>
             <a:xfrm>
-              <a:off x="5609107" y="2073503"/>
-              <a:ext cx="0" cy="3649639"/>
+              <a:off x="3559192" y="2143092"/>
+              <a:ext cx="0" cy="1317069"/>
             </a:xfrm>
             <a:custGeom>
               <a:avLst/>
               <a:pathLst>
-                <a:path w="0" h="3649639">
+                <a:path w="0" h="1317069">
                   <a:moveTo>
-                    <a:pt x="0" y="3649639"/>
+                    <a:pt x="0" y="1317069"/>
                   </a:moveTo>
                   <a:lnTo>
                     <a:pt x="0" y="0"/>
@@ -2572,15 +2564,15 @@
           </p:nvSpPr>
           <p:spPr>
             <a:xfrm>
-              <a:off x="7680065" y="2073503"/>
-              <a:ext cx="0" cy="3649639"/>
+              <a:off x="5593195" y="2143092"/>
+              <a:ext cx="0" cy="1317069"/>
             </a:xfrm>
             <a:custGeom>
               <a:avLst/>
               <a:pathLst>
-                <a:path w="0" h="3649639">
+                <a:path w="0" h="1317069">
                   <a:moveTo>
-                    <a:pt x="0" y="3649639"/>
+                    <a:pt x="0" y="1317069"/>
                   </a:moveTo>
                   <a:lnTo>
                     <a:pt x="0" y="0"/>
@@ -2615,26 +2607,26 @@
           </p:nvSpPr>
           <p:spPr>
             <a:xfrm>
-              <a:off x="817517" y="5557249"/>
-              <a:ext cx="7799693" cy="0"/>
+              <a:off x="7627198" y="2143092"/>
+              <a:ext cx="0" cy="1317069"/>
             </a:xfrm>
             <a:custGeom>
               <a:avLst/>
               <a:pathLst>
-                <a:path w="7799693" h="0">
+                <a:path w="0" h="1317069">
                   <a:moveTo>
+                    <a:pt x="0" y="1317069"/>
+                  </a:moveTo>
+                  <a:lnTo>
                     <a:pt x="0" y="0"/>
-                  </a:moveTo>
-                  <a:lnTo>
-                    <a:pt x="7799693" y="0"/>
-                  </a:lnTo>
-                  <a:lnTo>
-                    <a:pt x="7799693" y="0"/>
+                  </a:lnTo>
+                  <a:lnTo>
+                    <a:pt x="0" y="0"/>
                   </a:lnTo>
                 </a:path>
               </a:pathLst>
             </a:custGeom>
-            <a:ln w="13550" cap="flat">
+            <a:ln w="6775" cap="flat">
               <a:solidFill>
                 <a:srgbClr val="EBEBEB">
                   <a:alpha val="100000"/>
@@ -2658,21 +2650,21 @@
           </p:nvSpPr>
           <p:spPr>
             <a:xfrm>
-              <a:off x="817517" y="4727786"/>
-              <a:ext cx="7799693" cy="0"/>
+              <a:off x="887106" y="3400294"/>
+              <a:ext cx="7660515" cy="0"/>
             </a:xfrm>
             <a:custGeom>
               <a:avLst/>
               <a:pathLst>
-                <a:path w="7799693" h="0">
+                <a:path w="7660515" h="0">
                   <a:moveTo>
                     <a:pt x="0" y="0"/>
                   </a:moveTo>
                   <a:lnTo>
-                    <a:pt x="7799693" y="0"/>
-                  </a:lnTo>
-                  <a:lnTo>
-                    <a:pt x="7799693" y="0"/>
+                    <a:pt x="7660515" y="0"/>
+                  </a:lnTo>
+                  <a:lnTo>
+                    <a:pt x="7660515" y="0"/>
                   </a:lnTo>
                 </a:path>
               </a:pathLst>
@@ -2701,21 +2693,21 @@
           </p:nvSpPr>
           <p:spPr>
             <a:xfrm>
-              <a:off x="817517" y="3898322"/>
-              <a:ext cx="7799693" cy="0"/>
+              <a:off x="887106" y="3100960"/>
+              <a:ext cx="7660515" cy="0"/>
             </a:xfrm>
             <a:custGeom>
               <a:avLst/>
               <a:pathLst>
-                <a:path w="7799693" h="0">
+                <a:path w="7660515" h="0">
                   <a:moveTo>
                     <a:pt x="0" y="0"/>
                   </a:moveTo>
                   <a:lnTo>
-                    <a:pt x="7799693" y="0"/>
-                  </a:lnTo>
-                  <a:lnTo>
-                    <a:pt x="7799693" y="0"/>
+                    <a:pt x="7660515" y="0"/>
+                  </a:lnTo>
+                  <a:lnTo>
+                    <a:pt x="7660515" y="0"/>
                   </a:lnTo>
                 </a:path>
               </a:pathLst>
@@ -2744,21 +2736,21 @@
           </p:nvSpPr>
           <p:spPr>
             <a:xfrm>
-              <a:off x="817517" y="3068859"/>
-              <a:ext cx="7799693" cy="0"/>
+              <a:off x="887106" y="2801626"/>
+              <a:ext cx="7660515" cy="0"/>
             </a:xfrm>
             <a:custGeom>
               <a:avLst/>
               <a:pathLst>
-                <a:path w="7799693" h="0">
+                <a:path w="7660515" h="0">
                   <a:moveTo>
                     <a:pt x="0" y="0"/>
                   </a:moveTo>
                   <a:lnTo>
-                    <a:pt x="7799693" y="0"/>
-                  </a:lnTo>
-                  <a:lnTo>
-                    <a:pt x="7799693" y="0"/>
+                    <a:pt x="7660515" y="0"/>
+                  </a:lnTo>
+                  <a:lnTo>
+                    <a:pt x="7660515" y="0"/>
                   </a:lnTo>
                 </a:path>
               </a:pathLst>
@@ -2787,21 +2779,21 @@
           </p:nvSpPr>
           <p:spPr>
             <a:xfrm>
-              <a:off x="817517" y="2239395"/>
-              <a:ext cx="7799693" cy="0"/>
+              <a:off x="887106" y="2502292"/>
+              <a:ext cx="7660515" cy="0"/>
             </a:xfrm>
             <a:custGeom>
               <a:avLst/>
               <a:pathLst>
-                <a:path w="7799693" h="0">
+                <a:path w="7660515" h="0">
                   <a:moveTo>
                     <a:pt x="0" y="0"/>
                   </a:moveTo>
                   <a:lnTo>
-                    <a:pt x="7799693" y="0"/>
-                  </a:lnTo>
-                  <a:lnTo>
-                    <a:pt x="7799693" y="0"/>
+                    <a:pt x="7660515" y="0"/>
+                  </a:lnTo>
+                  <a:lnTo>
+                    <a:pt x="7660515" y="0"/>
                   </a:lnTo>
                 </a:path>
               </a:pathLst>
@@ -2830,21 +2822,21 @@
           </p:nvSpPr>
           <p:spPr>
             <a:xfrm>
-              <a:off x="2502671" y="2073503"/>
-              <a:ext cx="0" cy="3649639"/>
+              <a:off x="887106" y="2202958"/>
+              <a:ext cx="7660515" cy="0"/>
             </a:xfrm>
             <a:custGeom>
               <a:avLst/>
               <a:pathLst>
-                <a:path w="0" h="3649639">
+                <a:path w="7660515" h="0">
                   <a:moveTo>
-                    <a:pt x="0" y="3649639"/>
+                    <a:pt x="0" y="0"/>
                   </a:moveTo>
                   <a:lnTo>
-                    <a:pt x="0" y="0"/>
-                  </a:lnTo>
-                  <a:lnTo>
-                    <a:pt x="0" y="0"/>
+                    <a:pt x="7660515" y="0"/>
+                  </a:lnTo>
+                  <a:lnTo>
+                    <a:pt x="7660515" y="0"/>
                   </a:lnTo>
                 </a:path>
               </a:pathLst>
@@ -2873,15 +2865,15 @@
           </p:nvSpPr>
           <p:spPr>
             <a:xfrm>
-              <a:off x="4573628" y="2073503"/>
-              <a:ext cx="0" cy="3649639"/>
+              <a:off x="2542190" y="2143092"/>
+              <a:ext cx="0" cy="1317069"/>
             </a:xfrm>
             <a:custGeom>
               <a:avLst/>
               <a:pathLst>
-                <a:path w="0" h="3649639">
+                <a:path w="0" h="1317069">
                   <a:moveTo>
-                    <a:pt x="0" y="3649639"/>
+                    <a:pt x="0" y="1317069"/>
                   </a:moveTo>
                   <a:lnTo>
                     <a:pt x="0" y="0"/>
@@ -2916,15 +2908,15 @@
           </p:nvSpPr>
           <p:spPr>
             <a:xfrm>
-              <a:off x="6644586" y="2073503"/>
-              <a:ext cx="0" cy="3649639"/>
+              <a:off x="4576193" y="2143092"/>
+              <a:ext cx="0" cy="1317069"/>
             </a:xfrm>
             <a:custGeom>
               <a:avLst/>
               <a:pathLst>
-                <a:path w="0" h="3649639">
+                <a:path w="0" h="1317069">
                   <a:moveTo>
-                    <a:pt x="0" y="3649639"/>
+                    <a:pt x="0" y="1317069"/>
                   </a:moveTo>
                   <a:lnTo>
                     <a:pt x="0" y="0"/>
@@ -2953,528 +2945,568 @@
         </p:sp>
         <p:sp>
           <p:nvSpPr>
-            <p:cNvPr id="20" name="pg20"/>
+            <p:cNvPr id="20" name="pl20"/>
             <p:cNvSpPr/>
             <p:nvPr/>
           </p:nvSpPr>
           <p:spPr>
             <a:xfrm>
-              <a:off x="1172049" y="2073503"/>
-              <a:ext cx="7090630" cy="3478086"/>
+              <a:off x="6610197" y="2143092"/>
+              <a:ext cx="0" cy="1317069"/>
             </a:xfrm>
             <a:custGeom>
               <a:avLst/>
               <a:pathLst>
-                <a:path w="7090630" h="3478086">
+                <a:path w="0" h="1317069">
                   <a:moveTo>
-                    <a:pt x="2280424" y="0"/>
+                    <a:pt x="0" y="1317069"/>
                   </a:moveTo>
                   <a:lnTo>
-                    <a:pt x="2291920" y="55219"/>
-                  </a:lnTo>
-                  <a:lnTo>
-                    <a:pt x="2363543" y="367861"/>
-                  </a:lnTo>
-                  <a:lnTo>
-                    <a:pt x="2435165" y="651994"/>
-                  </a:lnTo>
-                  <a:lnTo>
-                    <a:pt x="2506788" y="910217"/>
-                  </a:lnTo>
-                  <a:lnTo>
-                    <a:pt x="2578410" y="1144893"/>
-                  </a:lnTo>
-                  <a:lnTo>
-                    <a:pt x="2650033" y="1358170"/>
-                  </a:lnTo>
-                  <a:lnTo>
-                    <a:pt x="2721655" y="1551998"/>
-                  </a:lnTo>
-                  <a:lnTo>
-                    <a:pt x="2793278" y="1728151"/>
-                  </a:lnTo>
-                  <a:lnTo>
-                    <a:pt x="2864901" y="1888241"/>
-                  </a:lnTo>
-                  <a:lnTo>
-                    <a:pt x="2936523" y="2033733"/>
-                  </a:lnTo>
-                  <a:lnTo>
-                    <a:pt x="3008146" y="2165957"/>
-                  </a:lnTo>
-                  <a:lnTo>
-                    <a:pt x="3079768" y="2286124"/>
-                  </a:lnTo>
-                  <a:lnTo>
-                    <a:pt x="3151391" y="2395334"/>
-                  </a:lnTo>
-                  <a:lnTo>
-                    <a:pt x="3223013" y="2494584"/>
-                  </a:lnTo>
-                  <a:lnTo>
-                    <a:pt x="3294636" y="2584784"/>
-                  </a:lnTo>
-                  <a:lnTo>
-                    <a:pt x="3366258" y="2657763"/>
-                  </a:lnTo>
-                  <a:lnTo>
-                    <a:pt x="3437881" y="2679386"/>
-                  </a:lnTo>
-                  <a:lnTo>
-                    <a:pt x="3509503" y="2700444"/>
-                  </a:lnTo>
-                  <a:lnTo>
-                    <a:pt x="3581126" y="2720949"/>
-                  </a:lnTo>
-                  <a:lnTo>
-                    <a:pt x="3652748" y="2740918"/>
-                  </a:lnTo>
-                  <a:lnTo>
-                    <a:pt x="3724371" y="2760365"/>
-                  </a:lnTo>
-                  <a:lnTo>
-                    <a:pt x="3795993" y="2779302"/>
-                  </a:lnTo>
-                  <a:lnTo>
-                    <a:pt x="3867616" y="2797743"/>
-                  </a:lnTo>
-                  <a:lnTo>
-                    <a:pt x="3939238" y="2815702"/>
-                  </a:lnTo>
-                  <a:lnTo>
-                    <a:pt x="4010861" y="2833191"/>
-                  </a:lnTo>
-                  <a:lnTo>
-                    <a:pt x="4082483" y="2850221"/>
-                  </a:lnTo>
-                  <a:lnTo>
-                    <a:pt x="4154106" y="2866806"/>
-                  </a:lnTo>
-                  <a:lnTo>
-                    <a:pt x="4225729" y="2882957"/>
-                  </a:lnTo>
-                  <a:lnTo>
-                    <a:pt x="4297351" y="2898685"/>
-                  </a:lnTo>
-                  <a:lnTo>
-                    <a:pt x="4368974" y="2914001"/>
-                  </a:lnTo>
-                  <a:lnTo>
-                    <a:pt x="4440596" y="2928916"/>
-                  </a:lnTo>
-                  <a:lnTo>
-                    <a:pt x="4512219" y="2943441"/>
-                  </a:lnTo>
-                  <a:lnTo>
-                    <a:pt x="4583841" y="2957586"/>
-                  </a:lnTo>
-                  <a:lnTo>
-                    <a:pt x="4655464" y="2971360"/>
-                  </a:lnTo>
-                  <a:lnTo>
-                    <a:pt x="4727086" y="2984773"/>
-                  </a:lnTo>
-                  <a:lnTo>
-                    <a:pt x="4798709" y="2997836"/>
-                  </a:lnTo>
-                  <a:lnTo>
-                    <a:pt x="4870331" y="3010556"/>
-                  </a:lnTo>
-                  <a:lnTo>
-                    <a:pt x="4941954" y="3022944"/>
-                  </a:lnTo>
-                  <a:lnTo>
-                    <a:pt x="5013576" y="3035007"/>
-                  </a:lnTo>
-                  <a:lnTo>
-                    <a:pt x="5085199" y="3046755"/>
-                  </a:lnTo>
-                  <a:lnTo>
-                    <a:pt x="5156821" y="3058195"/>
-                  </a:lnTo>
-                  <a:lnTo>
-                    <a:pt x="5228444" y="3069335"/>
-                  </a:lnTo>
-                  <a:lnTo>
-                    <a:pt x="5300066" y="3080184"/>
-                  </a:lnTo>
-                  <a:lnTo>
-                    <a:pt x="5371689" y="3090748"/>
-                  </a:lnTo>
-                  <a:lnTo>
-                    <a:pt x="5443311" y="3101037"/>
-                  </a:lnTo>
-                  <a:lnTo>
-                    <a:pt x="5514934" y="3111055"/>
-                  </a:lnTo>
-                  <a:lnTo>
-                    <a:pt x="5586557" y="3120812"/>
-                  </a:lnTo>
-                  <a:lnTo>
-                    <a:pt x="5658179" y="3130313"/>
-                  </a:lnTo>
-                  <a:lnTo>
-                    <a:pt x="5729802" y="3139566"/>
-                  </a:lnTo>
-                  <a:lnTo>
-                    <a:pt x="5801424" y="3148576"/>
-                  </a:lnTo>
-                  <a:lnTo>
-                    <a:pt x="5873047" y="3157350"/>
-                  </a:lnTo>
-                  <a:lnTo>
-                    <a:pt x="5944669" y="3165895"/>
-                  </a:lnTo>
-                  <a:lnTo>
-                    <a:pt x="6016292" y="3174216"/>
-                  </a:lnTo>
-                  <a:lnTo>
-                    <a:pt x="6087914" y="3182319"/>
-                  </a:lnTo>
-                  <a:lnTo>
-                    <a:pt x="6159537" y="3190210"/>
-                  </a:lnTo>
-                  <a:lnTo>
-                    <a:pt x="6231159" y="3197894"/>
-                  </a:lnTo>
-                  <a:lnTo>
-                    <a:pt x="6302782" y="3205378"/>
-                  </a:lnTo>
-                  <a:lnTo>
-                    <a:pt x="6374404" y="3212665"/>
-                  </a:lnTo>
-                  <a:lnTo>
-                    <a:pt x="6446027" y="3219761"/>
-                  </a:lnTo>
-                  <a:lnTo>
-                    <a:pt x="6517649" y="3226672"/>
-                  </a:lnTo>
-                  <a:lnTo>
-                    <a:pt x="6589272" y="3233402"/>
-                  </a:lnTo>
-                  <a:lnTo>
-                    <a:pt x="6660894" y="3239956"/>
-                  </a:lnTo>
-                  <a:lnTo>
-                    <a:pt x="6732517" y="3246338"/>
-                  </a:lnTo>
-                  <a:lnTo>
-                    <a:pt x="6804139" y="3252553"/>
-                  </a:lnTo>
-                  <a:lnTo>
-                    <a:pt x="6875762" y="3258605"/>
-                  </a:lnTo>
-                  <a:lnTo>
-                    <a:pt x="6947385" y="3264499"/>
-                  </a:lnTo>
-                  <a:lnTo>
-                    <a:pt x="7019007" y="3270239"/>
-                  </a:lnTo>
-                  <a:lnTo>
-                    <a:pt x="7090630" y="3275828"/>
-                  </a:lnTo>
-                  <a:lnTo>
-                    <a:pt x="7090630" y="3478086"/>
-                  </a:lnTo>
-                  <a:lnTo>
-                    <a:pt x="7019007" y="3477518"/>
-                  </a:lnTo>
-                  <a:lnTo>
-                    <a:pt x="6947385" y="3476893"/>
-                  </a:lnTo>
-                  <a:lnTo>
-                    <a:pt x="6875762" y="3476205"/>
-                  </a:lnTo>
-                  <a:lnTo>
-                    <a:pt x="6804139" y="3475449"/>
-                  </a:lnTo>
-                  <a:lnTo>
-                    <a:pt x="6732517" y="3474616"/>
-                  </a:lnTo>
-                  <a:lnTo>
-                    <a:pt x="6660894" y="3473700"/>
-                  </a:lnTo>
-                  <a:lnTo>
-                    <a:pt x="6589272" y="3472692"/>
-                  </a:lnTo>
-                  <a:lnTo>
-                    <a:pt x="6517649" y="3471583"/>
-                  </a:lnTo>
-                  <a:lnTo>
-                    <a:pt x="6446027" y="3470362"/>
-                  </a:lnTo>
-                  <a:lnTo>
-                    <a:pt x="6374404" y="3469019"/>
-                  </a:lnTo>
-                  <a:lnTo>
-                    <a:pt x="6302782" y="3467542"/>
-                  </a:lnTo>
-                  <a:lnTo>
-                    <a:pt x="6231159" y="3465916"/>
-                  </a:lnTo>
-                  <a:lnTo>
-                    <a:pt x="6159537" y="3464127"/>
-                  </a:lnTo>
-                  <a:lnTo>
-                    <a:pt x="6087914" y="3462158"/>
-                  </a:lnTo>
-                  <a:lnTo>
-                    <a:pt x="6016292" y="3459992"/>
-                  </a:lnTo>
-                  <a:lnTo>
-                    <a:pt x="5944669" y="3457608"/>
-                  </a:lnTo>
-                  <a:lnTo>
-                    <a:pt x="5873047" y="3454986"/>
-                  </a:lnTo>
-                  <a:lnTo>
-                    <a:pt x="5801424" y="3452100"/>
-                  </a:lnTo>
-                  <a:lnTo>
-                    <a:pt x="5729802" y="3448925"/>
-                  </a:lnTo>
-                  <a:lnTo>
-                    <a:pt x="5658179" y="3445431"/>
-                  </a:lnTo>
-                  <a:lnTo>
-                    <a:pt x="5586557" y="3441586"/>
-                  </a:lnTo>
-                  <a:lnTo>
-                    <a:pt x="5514934" y="3437356"/>
-                  </a:lnTo>
-                  <a:lnTo>
-                    <a:pt x="5443311" y="3432701"/>
-                  </a:lnTo>
-                  <a:lnTo>
-                    <a:pt x="5371689" y="3427579"/>
-                  </a:lnTo>
-                  <a:lnTo>
-                    <a:pt x="5300066" y="3421944"/>
-                  </a:lnTo>
-                  <a:lnTo>
-                    <a:pt x="5228444" y="3415742"/>
-                  </a:lnTo>
-                  <a:lnTo>
-                    <a:pt x="5156821" y="3408919"/>
-                  </a:lnTo>
-                  <a:lnTo>
-                    <a:pt x="5085199" y="3401411"/>
-                  </a:lnTo>
-                  <a:lnTo>
-                    <a:pt x="5013576" y="3393149"/>
-                  </a:lnTo>
-                  <a:lnTo>
-                    <a:pt x="4941954" y="3384059"/>
-                  </a:lnTo>
-                  <a:lnTo>
-                    <a:pt x="4870331" y="3374057"/>
-                  </a:lnTo>
-                  <a:lnTo>
-                    <a:pt x="4798709" y="3363051"/>
-                  </a:lnTo>
-                  <a:lnTo>
-                    <a:pt x="4727086" y="3350940"/>
-                  </a:lnTo>
-                  <a:lnTo>
-                    <a:pt x="4655464" y="3337615"/>
-                  </a:lnTo>
-                  <a:lnTo>
-                    <a:pt x="4583841" y="3322952"/>
-                  </a:lnTo>
-                  <a:lnTo>
-                    <a:pt x="4512219" y="3306818"/>
-                  </a:lnTo>
-                  <a:lnTo>
-                    <a:pt x="4440596" y="3289066"/>
-                  </a:lnTo>
-                  <a:lnTo>
-                    <a:pt x="4368974" y="3269532"/>
-                  </a:lnTo>
-                  <a:lnTo>
-                    <a:pt x="4297351" y="3248038"/>
-                  </a:lnTo>
-                  <a:lnTo>
-                    <a:pt x="4225729" y="3224387"/>
-                  </a:lnTo>
-                  <a:lnTo>
-                    <a:pt x="4154106" y="3198364"/>
-                  </a:lnTo>
-                  <a:lnTo>
-                    <a:pt x="4082483" y="3169729"/>
-                  </a:lnTo>
-                  <a:lnTo>
-                    <a:pt x="4010861" y="3138221"/>
-                  </a:lnTo>
-                  <a:lnTo>
-                    <a:pt x="3939238" y="3103552"/>
-                  </a:lnTo>
-                  <a:lnTo>
-                    <a:pt x="3867616" y="3065404"/>
-                  </a:lnTo>
-                  <a:lnTo>
-                    <a:pt x="3795993" y="3023428"/>
-                  </a:lnTo>
-                  <a:lnTo>
-                    <a:pt x="3724371" y="2977241"/>
-                  </a:lnTo>
-                  <a:lnTo>
-                    <a:pt x="3652748" y="2926419"/>
-                  </a:lnTo>
-                  <a:lnTo>
-                    <a:pt x="3581126" y="2870498"/>
-                  </a:lnTo>
-                  <a:lnTo>
-                    <a:pt x="3509503" y="2808965"/>
-                  </a:lnTo>
-                  <a:lnTo>
-                    <a:pt x="3437881" y="2741259"/>
-                  </a:lnTo>
-                  <a:lnTo>
-                    <a:pt x="3366258" y="2666759"/>
-                  </a:lnTo>
-                  <a:lnTo>
-                    <a:pt x="3294636" y="2635559"/>
-                  </a:lnTo>
-                  <a:lnTo>
-                    <a:pt x="3223013" y="2612757"/>
-                  </a:lnTo>
-                  <a:lnTo>
-                    <a:pt x="3151391" y="2589343"/>
-                  </a:lnTo>
-                  <a:lnTo>
-                    <a:pt x="3079768" y="2565299"/>
-                  </a:lnTo>
-                  <a:lnTo>
-                    <a:pt x="3008146" y="2540609"/>
-                  </a:lnTo>
-                  <a:lnTo>
-                    <a:pt x="2936523" y="2515255"/>
-                  </a:lnTo>
-                  <a:lnTo>
-                    <a:pt x="2864901" y="2489220"/>
-                  </a:lnTo>
-                  <a:lnTo>
-                    <a:pt x="2793278" y="2462484"/>
-                  </a:lnTo>
-                  <a:lnTo>
-                    <a:pt x="2721655" y="2435030"/>
-                  </a:lnTo>
-                  <a:lnTo>
-                    <a:pt x="2650033" y="2406838"/>
-                  </a:lnTo>
-                  <a:lnTo>
-                    <a:pt x="2578410" y="2377888"/>
-                  </a:lnTo>
-                  <a:lnTo>
-                    <a:pt x="2506788" y="2348160"/>
-                  </a:lnTo>
-                  <a:lnTo>
-                    <a:pt x="2435165" y="2317633"/>
-                  </a:lnTo>
-                  <a:lnTo>
-                    <a:pt x="2363543" y="2286285"/>
-                  </a:lnTo>
-                  <a:lnTo>
-                    <a:pt x="2291920" y="2254094"/>
-                  </a:lnTo>
-                  <a:lnTo>
-                    <a:pt x="2220298" y="2221038"/>
-                  </a:lnTo>
-                  <a:lnTo>
-                    <a:pt x="2148675" y="2187093"/>
-                  </a:lnTo>
-                  <a:lnTo>
-                    <a:pt x="2077053" y="2152236"/>
-                  </a:lnTo>
-                  <a:lnTo>
-                    <a:pt x="2005430" y="2116441"/>
-                  </a:lnTo>
-                  <a:lnTo>
-                    <a:pt x="1933808" y="2079685"/>
-                  </a:lnTo>
-                  <a:lnTo>
-                    <a:pt x="1862185" y="2041940"/>
-                  </a:lnTo>
-                  <a:lnTo>
-                    <a:pt x="1790563" y="2003181"/>
-                  </a:lnTo>
-                  <a:lnTo>
-                    <a:pt x="1718940" y="1963380"/>
-                  </a:lnTo>
-                  <a:lnTo>
-                    <a:pt x="1647318" y="1922508"/>
-                  </a:lnTo>
-                  <a:lnTo>
-                    <a:pt x="1575695" y="1880538"/>
-                  </a:lnTo>
-                  <a:lnTo>
-                    <a:pt x="1504073" y="1837440"/>
-                  </a:lnTo>
-                  <a:lnTo>
-                    <a:pt x="1432450" y="1793183"/>
-                  </a:lnTo>
-                  <a:lnTo>
-                    <a:pt x="1360827" y="1747737"/>
-                  </a:lnTo>
-                  <a:lnTo>
-                    <a:pt x="1289205" y="1701069"/>
-                  </a:lnTo>
-                  <a:lnTo>
-                    <a:pt x="1217582" y="1653146"/>
-                  </a:lnTo>
-                  <a:lnTo>
-                    <a:pt x="1145960" y="1603935"/>
-                  </a:lnTo>
-                  <a:lnTo>
-                    <a:pt x="1074337" y="1553401"/>
-                  </a:lnTo>
-                  <a:lnTo>
-                    <a:pt x="1002715" y="1501508"/>
-                  </a:lnTo>
-                  <a:lnTo>
-                    <a:pt x="931092" y="1448221"/>
-                  </a:lnTo>
-                  <a:lnTo>
-                    <a:pt x="859470" y="1393501"/>
-                  </a:lnTo>
-                  <a:lnTo>
-                    <a:pt x="787847" y="1337310"/>
-                  </a:lnTo>
-                  <a:lnTo>
-                    <a:pt x="716225" y="1279608"/>
-                  </a:lnTo>
-                  <a:lnTo>
-                    <a:pt x="644602" y="1220355"/>
-                  </a:lnTo>
-                  <a:lnTo>
-                    <a:pt x="572980" y="1159510"/>
-                  </a:lnTo>
-                  <a:lnTo>
-                    <a:pt x="501357" y="1097029"/>
-                  </a:lnTo>
-                  <a:lnTo>
-                    <a:pt x="429735" y="1032868"/>
-                  </a:lnTo>
-                  <a:lnTo>
-                    <a:pt x="358112" y="966982"/>
-                  </a:lnTo>
-                  <a:lnTo>
-                    <a:pt x="286490" y="899325"/>
-                  </a:lnTo>
-                  <a:lnTo>
-                    <a:pt x="214867" y="829849"/>
-                  </a:lnTo>
-                  <a:lnTo>
-                    <a:pt x="143245" y="758506"/>
-                  </a:lnTo>
-                  <a:lnTo>
-                    <a:pt x="71622" y="685245"/>
-                  </a:lnTo>
-                  <a:lnTo>
-                    <a:pt x="0" y="610014"/>
-                  </a:lnTo>
-                  <a:lnTo>
                     <a:pt x="0" y="0"/>
+                  </a:lnTo>
+                  <a:lnTo>
+                    <a:pt x="0" y="0"/>
+                  </a:lnTo>
+                </a:path>
+              </a:pathLst>
+            </a:custGeom>
+            <a:ln w="13550" cap="flat">
+              <a:solidFill>
+                <a:srgbClr val="EBEBEB">
+                  <a:alpha val="100000"/>
+                </a:srgbClr>
+              </a:solidFill>
+              <a:prstDash val="solid"/>
+              <a:round/>
+            </a:ln>
+          </p:spPr>
+          <p:txBody>
+            <a:bodyPr/>
+            <a:lstStyle/>
+            <a:p/>
+          </p:txBody>
+        </p:sp>
+        <p:sp>
+          <p:nvSpPr>
+            <p:cNvPr id="21" name="pg21"/>
+            <p:cNvSpPr/>
+            <p:nvPr/>
+          </p:nvSpPr>
+          <p:spPr>
+            <a:xfrm>
+              <a:off x="1235312" y="2143092"/>
+              <a:ext cx="6964104" cy="1255159"/>
+            </a:xfrm>
+            <a:custGeom>
+              <a:avLst/>
+              <a:pathLst>
+                <a:path w="6964104" h="1255159">
+                  <a:moveTo>
+                    <a:pt x="2239732" y="0"/>
+                  </a:moveTo>
+                  <a:lnTo>
+                    <a:pt x="2251023" y="19927"/>
+                  </a:lnTo>
+                  <a:lnTo>
+                    <a:pt x="2321368" y="132752"/>
+                  </a:lnTo>
+                  <a:lnTo>
+                    <a:pt x="2391712" y="235289"/>
+                  </a:lnTo>
+                  <a:lnTo>
+                    <a:pt x="2462057" y="328476"/>
+                  </a:lnTo>
+                  <a:lnTo>
+                    <a:pt x="2532401" y="413165"/>
+                  </a:lnTo>
+                  <a:lnTo>
+                    <a:pt x="2602746" y="490131"/>
+                  </a:lnTo>
+                  <a:lnTo>
+                    <a:pt x="2673090" y="560079"/>
+                  </a:lnTo>
+                  <a:lnTo>
+                    <a:pt x="2743435" y="623649"/>
+                  </a:lnTo>
+                  <a:lnTo>
+                    <a:pt x="2813779" y="681421"/>
+                  </a:lnTo>
+                  <a:lnTo>
+                    <a:pt x="2884124" y="733926"/>
+                  </a:lnTo>
+                  <a:lnTo>
+                    <a:pt x="2954468" y="781643"/>
+                  </a:lnTo>
+                  <a:lnTo>
+                    <a:pt x="3024813" y="825008"/>
+                  </a:lnTo>
+                  <a:lnTo>
+                    <a:pt x="3095157" y="864419"/>
+                  </a:lnTo>
+                  <a:lnTo>
+                    <a:pt x="3165502" y="900236"/>
+                  </a:lnTo>
+                  <a:lnTo>
+                    <a:pt x="3235846" y="932788"/>
+                  </a:lnTo>
+                  <a:lnTo>
+                    <a:pt x="3306191" y="959124"/>
+                  </a:lnTo>
+                  <a:lnTo>
+                    <a:pt x="3376535" y="966927"/>
+                  </a:lnTo>
+                  <a:lnTo>
+                    <a:pt x="3446880" y="974526"/>
+                  </a:lnTo>
+                  <a:lnTo>
+                    <a:pt x="3517224" y="981926"/>
+                  </a:lnTo>
+                  <a:lnTo>
+                    <a:pt x="3587569" y="989133"/>
+                  </a:lnTo>
+                  <a:lnTo>
+                    <a:pt x="3657913" y="996150"/>
+                  </a:lnTo>
+                  <a:lnTo>
+                    <a:pt x="3728257" y="1002984"/>
+                  </a:lnTo>
+                  <a:lnTo>
+                    <a:pt x="3798602" y="1009639"/>
+                  </a:lnTo>
+                  <a:lnTo>
+                    <a:pt x="3868946" y="1016120"/>
+                  </a:lnTo>
+                  <a:lnTo>
+                    <a:pt x="3939291" y="1022432"/>
+                  </a:lnTo>
+                  <a:lnTo>
+                    <a:pt x="4009635" y="1028578"/>
+                  </a:lnTo>
+                  <a:lnTo>
+                    <a:pt x="4079980" y="1034563"/>
+                  </a:lnTo>
+                  <a:lnTo>
+                    <a:pt x="4150324" y="1040391"/>
+                  </a:lnTo>
+                  <a:lnTo>
+                    <a:pt x="4220669" y="1046067"/>
+                  </a:lnTo>
+                  <a:lnTo>
+                    <a:pt x="4291013" y="1051594"/>
+                  </a:lnTo>
+                  <a:lnTo>
+                    <a:pt x="4361358" y="1056977"/>
+                  </a:lnTo>
+                  <a:lnTo>
+                    <a:pt x="4431702" y="1062218"/>
+                  </a:lnTo>
+                  <a:lnTo>
+                    <a:pt x="4502047" y="1067323"/>
+                  </a:lnTo>
+                  <a:lnTo>
+                    <a:pt x="4572391" y="1072294"/>
+                  </a:lnTo>
+                  <a:lnTo>
+                    <a:pt x="4642736" y="1077134"/>
+                  </a:lnTo>
+                  <a:lnTo>
+                    <a:pt x="4713080" y="1081848"/>
+                  </a:lnTo>
+                  <a:lnTo>
+                    <a:pt x="4783425" y="1086439"/>
+                  </a:lnTo>
+                  <a:lnTo>
+                    <a:pt x="4853769" y="1090909"/>
+                  </a:lnTo>
+                  <a:lnTo>
+                    <a:pt x="4924114" y="1095262"/>
+                  </a:lnTo>
+                  <a:lnTo>
+                    <a:pt x="4994458" y="1099502"/>
+                  </a:lnTo>
+                  <a:lnTo>
+                    <a:pt x="5064803" y="1103630"/>
+                  </a:lnTo>
+                  <a:lnTo>
+                    <a:pt x="5135147" y="1107650"/>
+                  </a:lnTo>
+                  <a:lnTo>
+                    <a:pt x="5205492" y="1111566"/>
+                  </a:lnTo>
+                  <a:lnTo>
+                    <a:pt x="5275836" y="1115378"/>
+                  </a:lnTo>
+                  <a:lnTo>
+                    <a:pt x="5346181" y="1119091"/>
+                  </a:lnTo>
+                  <a:lnTo>
+                    <a:pt x="5416525" y="1122706"/>
+                  </a:lnTo>
+                  <a:lnTo>
+                    <a:pt x="5486870" y="1126227"/>
+                  </a:lnTo>
+                  <a:lnTo>
+                    <a:pt x="5557214" y="1129656"/>
+                  </a:lnTo>
+                  <a:lnTo>
+                    <a:pt x="5627559" y="1132995"/>
+                  </a:lnTo>
+                  <a:lnTo>
+                    <a:pt x="5697903" y="1136247"/>
+                  </a:lnTo>
+                  <a:lnTo>
+                    <a:pt x="5768248" y="1139413"/>
+                  </a:lnTo>
+                  <a:lnTo>
+                    <a:pt x="5838592" y="1142497"/>
+                  </a:lnTo>
+                  <a:lnTo>
+                    <a:pt x="5908937" y="1145499"/>
+                  </a:lnTo>
+                  <a:lnTo>
+                    <a:pt x="5979281" y="1148424"/>
+                  </a:lnTo>
+                  <a:lnTo>
+                    <a:pt x="6049626" y="1151271"/>
+                  </a:lnTo>
+                  <a:lnTo>
+                    <a:pt x="6119970" y="1154045"/>
+                  </a:lnTo>
+                  <a:lnTo>
+                    <a:pt x="6190315" y="1156745"/>
+                  </a:lnTo>
+                  <a:lnTo>
+                    <a:pt x="6260659" y="1159375"/>
+                  </a:lnTo>
+                  <a:lnTo>
+                    <a:pt x="6331004" y="1161936"/>
+                  </a:lnTo>
+                  <a:lnTo>
+                    <a:pt x="6401348" y="1164430"/>
+                  </a:lnTo>
+                  <a:lnTo>
+                    <a:pt x="6471693" y="1166858"/>
+                  </a:lnTo>
+                  <a:lnTo>
+                    <a:pt x="6542037" y="1169224"/>
+                  </a:lnTo>
+                  <a:lnTo>
+                    <a:pt x="6612382" y="1171527"/>
+                  </a:lnTo>
+                  <a:lnTo>
+                    <a:pt x="6682726" y="1173770"/>
+                  </a:lnTo>
+                  <a:lnTo>
+                    <a:pt x="6753071" y="1175954"/>
+                  </a:lnTo>
+                  <a:lnTo>
+                    <a:pt x="6823415" y="1178081"/>
+                  </a:lnTo>
+                  <a:lnTo>
+                    <a:pt x="6893760" y="1180152"/>
+                  </a:lnTo>
+                  <a:lnTo>
+                    <a:pt x="6964104" y="1182169"/>
+                  </a:lnTo>
+                  <a:lnTo>
+                    <a:pt x="6964104" y="1255159"/>
+                  </a:lnTo>
+                  <a:lnTo>
+                    <a:pt x="6893760" y="1254954"/>
+                  </a:lnTo>
+                  <a:lnTo>
+                    <a:pt x="6823415" y="1254729"/>
+                  </a:lnTo>
+                  <a:lnTo>
+                    <a:pt x="6753071" y="1254480"/>
+                  </a:lnTo>
+                  <a:lnTo>
+                    <a:pt x="6682726" y="1254207"/>
+                  </a:lnTo>
+                  <a:lnTo>
+                    <a:pt x="6612382" y="1253907"/>
+                  </a:lnTo>
+                  <a:lnTo>
+                    <a:pt x="6542037" y="1253576"/>
+                  </a:lnTo>
+                  <a:lnTo>
+                    <a:pt x="6471693" y="1253213"/>
+                  </a:lnTo>
+                  <a:lnTo>
+                    <a:pt x="6401348" y="1252812"/>
+                  </a:lnTo>
+                  <a:lnTo>
+                    <a:pt x="6331004" y="1252372"/>
+                  </a:lnTo>
+                  <a:lnTo>
+                    <a:pt x="6260659" y="1251887"/>
+                  </a:lnTo>
+                  <a:lnTo>
+                    <a:pt x="6190315" y="1251354"/>
+                  </a:lnTo>
+                  <a:lnTo>
+                    <a:pt x="6119970" y="1250767"/>
+                  </a:lnTo>
+                  <a:lnTo>
+                    <a:pt x="6049626" y="1250121"/>
+                  </a:lnTo>
+                  <a:lnTo>
+                    <a:pt x="5979281" y="1249411"/>
+                  </a:lnTo>
+                  <a:lnTo>
+                    <a:pt x="5908937" y="1248629"/>
+                  </a:lnTo>
+                  <a:lnTo>
+                    <a:pt x="5838592" y="1247769"/>
+                  </a:lnTo>
+                  <a:lnTo>
+                    <a:pt x="5768248" y="1246823"/>
+                  </a:lnTo>
+                  <a:lnTo>
+                    <a:pt x="5697903" y="1245781"/>
+                  </a:lnTo>
+                  <a:lnTo>
+                    <a:pt x="5627559" y="1244635"/>
+                  </a:lnTo>
+                  <a:lnTo>
+                    <a:pt x="5557214" y="1243375"/>
+                  </a:lnTo>
+                  <a:lnTo>
+                    <a:pt x="5486870" y="1241987"/>
+                  </a:lnTo>
+                  <a:lnTo>
+                    <a:pt x="5416525" y="1240461"/>
+                  </a:lnTo>
+                  <a:lnTo>
+                    <a:pt x="5346181" y="1238781"/>
+                  </a:lnTo>
+                  <a:lnTo>
+                    <a:pt x="5275836" y="1236932"/>
+                  </a:lnTo>
+                  <a:lnTo>
+                    <a:pt x="5205492" y="1234899"/>
+                  </a:lnTo>
+                  <a:lnTo>
+                    <a:pt x="5135147" y="1232661"/>
+                  </a:lnTo>
+                  <a:lnTo>
+                    <a:pt x="5064803" y="1230198"/>
+                  </a:lnTo>
+                  <a:lnTo>
+                    <a:pt x="4994458" y="1227489"/>
+                  </a:lnTo>
+                  <a:lnTo>
+                    <a:pt x="4924114" y="1224508"/>
+                  </a:lnTo>
+                  <a:lnTo>
+                    <a:pt x="4853769" y="1221227"/>
+                  </a:lnTo>
+                  <a:lnTo>
+                    <a:pt x="4783425" y="1217617"/>
+                  </a:lnTo>
+                  <a:lnTo>
+                    <a:pt x="4713080" y="1213646"/>
+                  </a:lnTo>
+                  <a:lnTo>
+                    <a:pt x="4642736" y="1209275"/>
+                  </a:lnTo>
+                  <a:lnTo>
+                    <a:pt x="4572391" y="1204466"/>
+                  </a:lnTo>
+                  <a:lnTo>
+                    <a:pt x="4502047" y="1199175"/>
+                  </a:lnTo>
+                  <a:lnTo>
+                    <a:pt x="4431702" y="1193353"/>
+                  </a:lnTo>
+                  <a:lnTo>
+                    <a:pt x="4361358" y="1186946"/>
+                  </a:lnTo>
+                  <a:lnTo>
+                    <a:pt x="4291013" y="1179897"/>
+                  </a:lnTo>
+                  <a:lnTo>
+                    <a:pt x="4220669" y="1172140"/>
+                  </a:lnTo>
+                  <a:lnTo>
+                    <a:pt x="4150324" y="1163605"/>
+                  </a:lnTo>
+                  <a:lnTo>
+                    <a:pt x="4079980" y="1154214"/>
+                  </a:lnTo>
+                  <a:lnTo>
+                    <a:pt x="4009635" y="1143880"/>
+                  </a:lnTo>
+                  <a:lnTo>
+                    <a:pt x="3939291" y="1132510"/>
+                  </a:lnTo>
+                  <a:lnTo>
+                    <a:pt x="3868946" y="1119999"/>
+                  </a:lnTo>
+                  <a:lnTo>
+                    <a:pt x="3798602" y="1106232"/>
+                  </a:lnTo>
+                  <a:lnTo>
+                    <a:pt x="3728257" y="1091084"/>
+                  </a:lnTo>
+                  <a:lnTo>
+                    <a:pt x="3657913" y="1074416"/>
+                  </a:lnTo>
+                  <a:lnTo>
+                    <a:pt x="3587569" y="1056075"/>
+                  </a:lnTo>
+                  <a:lnTo>
+                    <a:pt x="3517224" y="1035895"/>
+                  </a:lnTo>
+                  <a:lnTo>
+                    <a:pt x="3446880" y="1013689"/>
+                  </a:lnTo>
+                  <a:lnTo>
+                    <a:pt x="3376535" y="989256"/>
+                  </a:lnTo>
+                  <a:lnTo>
+                    <a:pt x="3306191" y="962370"/>
+                  </a:lnTo>
+                  <a:lnTo>
+                    <a:pt x="3235846" y="951111"/>
+                  </a:lnTo>
+                  <a:lnTo>
+                    <a:pt x="3165502" y="942882"/>
+                  </a:lnTo>
+                  <a:lnTo>
+                    <a:pt x="3095157" y="934433"/>
+                  </a:lnTo>
+                  <a:lnTo>
+                    <a:pt x="3024813" y="925756"/>
+                  </a:lnTo>
+                  <a:lnTo>
+                    <a:pt x="2954468" y="916846"/>
+                  </a:lnTo>
+                  <a:lnTo>
+                    <a:pt x="2884124" y="907696"/>
+                  </a:lnTo>
+                  <a:lnTo>
+                    <a:pt x="2813779" y="898301"/>
+                  </a:lnTo>
+                  <a:lnTo>
+                    <a:pt x="2743435" y="888652"/>
+                  </a:lnTo>
+                  <a:lnTo>
+                    <a:pt x="2673090" y="878745"/>
+                  </a:lnTo>
+                  <a:lnTo>
+                    <a:pt x="2602746" y="868571"/>
+                  </a:lnTo>
+                  <a:lnTo>
+                    <a:pt x="2532401" y="858124"/>
+                  </a:lnTo>
+                  <a:lnTo>
+                    <a:pt x="2462057" y="847395"/>
+                  </a:lnTo>
+                  <a:lnTo>
+                    <a:pt x="2391712" y="836379"/>
+                  </a:lnTo>
+                  <a:lnTo>
+                    <a:pt x="2321368" y="825066"/>
+                  </a:lnTo>
+                  <a:lnTo>
+                    <a:pt x="2251023" y="813449"/>
+                  </a:lnTo>
+                  <a:lnTo>
+                    <a:pt x="2180679" y="801520"/>
+                  </a:lnTo>
+                  <a:lnTo>
+                    <a:pt x="2110334" y="789270"/>
+                  </a:lnTo>
+                  <a:lnTo>
+                    <a:pt x="2039990" y="776691"/>
+                  </a:lnTo>
+                  <a:lnTo>
+                    <a:pt x="1969645" y="763774"/>
+                  </a:lnTo>
+                  <a:lnTo>
+                    <a:pt x="1899301" y="750509"/>
+                  </a:lnTo>
+                  <a:lnTo>
+                    <a:pt x="1828956" y="736888"/>
+                  </a:lnTo>
+                  <a:lnTo>
+                    <a:pt x="1758612" y="722901"/>
+                  </a:lnTo>
+                  <a:lnTo>
+                    <a:pt x="1688267" y="708537"/>
+                  </a:lnTo>
+                  <a:lnTo>
+                    <a:pt x="1617923" y="693788"/>
+                  </a:lnTo>
+                  <a:lnTo>
+                    <a:pt x="1547578" y="678642"/>
+                  </a:lnTo>
+                  <a:lnTo>
+                    <a:pt x="1477234" y="663089"/>
+                  </a:lnTo>
+                  <a:lnTo>
+                    <a:pt x="1406889" y="647117"/>
+                  </a:lnTo>
+                  <a:lnTo>
+                    <a:pt x="1336545" y="630717"/>
+                  </a:lnTo>
+                  <a:lnTo>
+                    <a:pt x="1266200" y="613875"/>
+                  </a:lnTo>
+                  <a:lnTo>
+                    <a:pt x="1195856" y="596581"/>
+                  </a:lnTo>
+                  <a:lnTo>
+                    <a:pt x="1125511" y="578822"/>
+                  </a:lnTo>
+                  <a:lnTo>
+                    <a:pt x="1055167" y="560585"/>
+                  </a:lnTo>
+                  <a:lnTo>
+                    <a:pt x="984822" y="541859"/>
+                  </a:lnTo>
+                  <a:lnTo>
+                    <a:pt x="914478" y="522628"/>
+                  </a:lnTo>
+                  <a:lnTo>
+                    <a:pt x="844133" y="502881"/>
+                  </a:lnTo>
+                  <a:lnTo>
+                    <a:pt x="773789" y="482603"/>
+                  </a:lnTo>
+                  <a:lnTo>
+                    <a:pt x="703444" y="461780"/>
+                  </a:lnTo>
+                  <a:lnTo>
+                    <a:pt x="633100" y="440397"/>
+                  </a:lnTo>
+                  <a:lnTo>
+                    <a:pt x="562755" y="418440"/>
+                  </a:lnTo>
+                  <a:lnTo>
+                    <a:pt x="492411" y="395892"/>
+                  </a:lnTo>
+                  <a:lnTo>
+                    <a:pt x="422066" y="372737"/>
+                  </a:lnTo>
+                  <a:lnTo>
+                    <a:pt x="351722" y="348961"/>
+                  </a:lnTo>
+                  <a:lnTo>
+                    <a:pt x="281377" y="324545"/>
+                  </a:lnTo>
+                  <a:lnTo>
+                    <a:pt x="211033" y="299473"/>
+                  </a:lnTo>
+                  <a:lnTo>
+                    <a:pt x="140688" y="273727"/>
+                  </a:lnTo>
+                  <a:lnTo>
+                    <a:pt x="70344" y="247288"/>
+                  </a:lnTo>
+                  <a:lnTo>
+                    <a:pt x="0" y="220139"/>
                   </a:lnTo>
                   <a:close/>
                 </a:path>
@@ -3494,550 +3526,225 @@
         </p:sp>
         <p:sp>
           <p:nvSpPr>
-            <p:cNvPr id="21" name="pl21"/>
-            <p:cNvSpPr/>
-            <p:nvPr/>
-          </p:nvSpPr>
-          <p:spPr>
-            <a:xfrm>
-              <a:off x="3452473" y="2073503"/>
-              <a:ext cx="4810205" cy="3275828"/>
-            </a:xfrm>
-            <a:custGeom>
-              <a:avLst/>
-              <a:pathLst>
-                <a:path w="4810205" h="3275828">
-                  <a:moveTo>
-                    <a:pt x="0" y="0"/>
-                  </a:moveTo>
-                  <a:lnTo>
-                    <a:pt x="11496" y="55219"/>
-                  </a:lnTo>
-                  <a:lnTo>
-                    <a:pt x="83119" y="367861"/>
-                  </a:lnTo>
-                  <a:lnTo>
-                    <a:pt x="154741" y="651994"/>
-                  </a:lnTo>
-                  <a:lnTo>
-                    <a:pt x="226364" y="910217"/>
-                  </a:lnTo>
-                  <a:lnTo>
-                    <a:pt x="297986" y="1144893"/>
-                  </a:lnTo>
-                  <a:lnTo>
-                    <a:pt x="369609" y="1358170"/>
-                  </a:lnTo>
-                  <a:lnTo>
-                    <a:pt x="441231" y="1551998"/>
-                  </a:lnTo>
-                  <a:lnTo>
-                    <a:pt x="512854" y="1728151"/>
-                  </a:lnTo>
-                  <a:lnTo>
-                    <a:pt x="584476" y="1888241"/>
-                  </a:lnTo>
-                  <a:lnTo>
-                    <a:pt x="656099" y="2033733"/>
-                  </a:lnTo>
-                  <a:lnTo>
-                    <a:pt x="727721" y="2165957"/>
-                  </a:lnTo>
-                  <a:lnTo>
-                    <a:pt x="799344" y="2286124"/>
-                  </a:lnTo>
-                  <a:lnTo>
-                    <a:pt x="870966" y="2395334"/>
-                  </a:lnTo>
-                  <a:lnTo>
-                    <a:pt x="942589" y="2494584"/>
-                  </a:lnTo>
-                  <a:lnTo>
-                    <a:pt x="1014212" y="2584784"/>
-                  </a:lnTo>
-                  <a:lnTo>
-                    <a:pt x="1085834" y="2657763"/>
-                  </a:lnTo>
-                  <a:lnTo>
-                    <a:pt x="1157457" y="2679386"/>
-                  </a:lnTo>
-                  <a:lnTo>
-                    <a:pt x="1229079" y="2700444"/>
-                  </a:lnTo>
-                  <a:lnTo>
-                    <a:pt x="1300702" y="2720949"/>
-                  </a:lnTo>
-                  <a:lnTo>
-                    <a:pt x="1372324" y="2740918"/>
-                  </a:lnTo>
-                  <a:lnTo>
-                    <a:pt x="1443947" y="2760365"/>
-                  </a:lnTo>
-                  <a:lnTo>
-                    <a:pt x="1515569" y="2779302"/>
-                  </a:lnTo>
-                  <a:lnTo>
-                    <a:pt x="1587192" y="2797743"/>
-                  </a:lnTo>
-                  <a:lnTo>
-                    <a:pt x="1658814" y="2815702"/>
-                  </a:lnTo>
-                  <a:lnTo>
-                    <a:pt x="1730437" y="2833191"/>
-                  </a:lnTo>
-                  <a:lnTo>
-                    <a:pt x="1802059" y="2850221"/>
-                  </a:lnTo>
-                  <a:lnTo>
-                    <a:pt x="1873682" y="2866806"/>
-                  </a:lnTo>
-                  <a:lnTo>
-                    <a:pt x="1945304" y="2882957"/>
-                  </a:lnTo>
-                  <a:lnTo>
-                    <a:pt x="2016927" y="2898685"/>
-                  </a:lnTo>
-                  <a:lnTo>
-                    <a:pt x="2088549" y="2914001"/>
-                  </a:lnTo>
-                  <a:lnTo>
-                    <a:pt x="2160172" y="2928916"/>
-                  </a:lnTo>
-                  <a:lnTo>
-                    <a:pt x="2231794" y="2943441"/>
-                  </a:lnTo>
-                  <a:lnTo>
-                    <a:pt x="2303417" y="2957586"/>
-                  </a:lnTo>
-                  <a:lnTo>
-                    <a:pt x="2375040" y="2971360"/>
-                  </a:lnTo>
-                  <a:lnTo>
-                    <a:pt x="2446662" y="2984773"/>
-                  </a:lnTo>
-                  <a:lnTo>
-                    <a:pt x="2518285" y="2997836"/>
-                  </a:lnTo>
-                  <a:lnTo>
-                    <a:pt x="2589907" y="3010556"/>
-                  </a:lnTo>
-                  <a:lnTo>
-                    <a:pt x="2661530" y="3022944"/>
-                  </a:lnTo>
-                  <a:lnTo>
-                    <a:pt x="2733152" y="3035007"/>
-                  </a:lnTo>
-                  <a:lnTo>
-                    <a:pt x="2804775" y="3046755"/>
-                  </a:lnTo>
-                  <a:lnTo>
-                    <a:pt x="2876397" y="3058195"/>
-                  </a:lnTo>
-                  <a:lnTo>
-                    <a:pt x="2948020" y="3069335"/>
-                  </a:lnTo>
-                  <a:lnTo>
-                    <a:pt x="3019642" y="3080184"/>
-                  </a:lnTo>
-                  <a:lnTo>
-                    <a:pt x="3091265" y="3090748"/>
-                  </a:lnTo>
-                  <a:lnTo>
-                    <a:pt x="3162887" y="3101037"/>
-                  </a:lnTo>
-                  <a:lnTo>
-                    <a:pt x="3234510" y="3111055"/>
-                  </a:lnTo>
-                  <a:lnTo>
-                    <a:pt x="3306132" y="3120812"/>
-                  </a:lnTo>
-                  <a:lnTo>
-                    <a:pt x="3377755" y="3130313"/>
-                  </a:lnTo>
-                  <a:lnTo>
-                    <a:pt x="3449377" y="3139566"/>
-                  </a:lnTo>
-                  <a:lnTo>
-                    <a:pt x="3521000" y="3148576"/>
-                  </a:lnTo>
-                  <a:lnTo>
-                    <a:pt x="3592622" y="3157350"/>
-                  </a:lnTo>
-                  <a:lnTo>
-                    <a:pt x="3664245" y="3165895"/>
-                  </a:lnTo>
-                  <a:lnTo>
-                    <a:pt x="3735868" y="3174216"/>
-                  </a:lnTo>
-                  <a:lnTo>
-                    <a:pt x="3807490" y="3182319"/>
-                  </a:lnTo>
-                  <a:lnTo>
-                    <a:pt x="3879113" y="3190210"/>
-                  </a:lnTo>
-                  <a:lnTo>
-                    <a:pt x="3950735" y="3197894"/>
-                  </a:lnTo>
-                  <a:lnTo>
-                    <a:pt x="4022358" y="3205378"/>
-                  </a:lnTo>
-                  <a:lnTo>
-                    <a:pt x="4093980" y="3212665"/>
-                  </a:lnTo>
-                  <a:lnTo>
-                    <a:pt x="4165603" y="3219761"/>
-                  </a:lnTo>
-                  <a:lnTo>
-                    <a:pt x="4237225" y="3226672"/>
-                  </a:lnTo>
-                  <a:lnTo>
-                    <a:pt x="4308848" y="3233402"/>
-                  </a:lnTo>
-                  <a:lnTo>
-                    <a:pt x="4380470" y="3239956"/>
-                  </a:lnTo>
-                  <a:lnTo>
-                    <a:pt x="4452093" y="3246338"/>
-                  </a:lnTo>
-                  <a:lnTo>
-                    <a:pt x="4523715" y="3252553"/>
-                  </a:lnTo>
-                  <a:lnTo>
-                    <a:pt x="4595338" y="3258605"/>
-                  </a:lnTo>
-                  <a:lnTo>
-                    <a:pt x="4666960" y="3264499"/>
-                  </a:lnTo>
-                  <a:lnTo>
-                    <a:pt x="4738583" y="3270239"/>
-                  </a:lnTo>
-                  <a:lnTo>
-                    <a:pt x="4810205" y="3275828"/>
-                  </a:lnTo>
-                </a:path>
-              </a:pathLst>
-            </a:custGeom>
-          </p:spPr>
-          <p:txBody>
-            <a:bodyPr/>
-            <a:lstStyle/>
-            <a:p/>
-          </p:txBody>
-        </p:sp>
-        <p:sp>
-          <p:nvSpPr>
             <p:cNvPr id="22" name="pl22"/>
             <p:cNvSpPr/>
             <p:nvPr/>
           </p:nvSpPr>
           <p:spPr>
             <a:xfrm>
-              <a:off x="1172049" y="2683517"/>
-              <a:ext cx="7090630" cy="2868071"/>
+              <a:off x="3475044" y="2143092"/>
+              <a:ext cx="4724372" cy="1182169"/>
             </a:xfrm>
             <a:custGeom>
               <a:avLst/>
               <a:pathLst>
-                <a:path w="7090630" h="2868071">
+                <a:path w="4724372" h="1182169">
                   <a:moveTo>
-                    <a:pt x="7090630" y="2868071"/>
+                    <a:pt x="0" y="0"/>
                   </a:moveTo>
                   <a:lnTo>
-                    <a:pt x="7019007" y="2867503"/>
-                  </a:lnTo>
-                  <a:lnTo>
-                    <a:pt x="6947385" y="2866878"/>
-                  </a:lnTo>
-                  <a:lnTo>
-                    <a:pt x="6875762" y="2866191"/>
-                  </a:lnTo>
-                  <a:lnTo>
-                    <a:pt x="6804139" y="2865434"/>
-                  </a:lnTo>
-                  <a:lnTo>
-                    <a:pt x="6732517" y="2864601"/>
-                  </a:lnTo>
-                  <a:lnTo>
-                    <a:pt x="6660894" y="2863685"/>
-                  </a:lnTo>
-                  <a:lnTo>
-                    <a:pt x="6589272" y="2862677"/>
-                  </a:lnTo>
-                  <a:lnTo>
-                    <a:pt x="6517649" y="2861568"/>
-                  </a:lnTo>
-                  <a:lnTo>
-                    <a:pt x="6446027" y="2860348"/>
-                  </a:lnTo>
-                  <a:lnTo>
-                    <a:pt x="6374404" y="2859005"/>
-                  </a:lnTo>
-                  <a:lnTo>
-                    <a:pt x="6302782" y="2857527"/>
-                  </a:lnTo>
-                  <a:lnTo>
-                    <a:pt x="6231159" y="2855901"/>
-                  </a:lnTo>
-                  <a:lnTo>
-                    <a:pt x="6159537" y="2854112"/>
-                  </a:lnTo>
-                  <a:lnTo>
-                    <a:pt x="6087914" y="2852143"/>
-                  </a:lnTo>
-                  <a:lnTo>
-                    <a:pt x="6016292" y="2849977"/>
-                  </a:lnTo>
-                  <a:lnTo>
-                    <a:pt x="5944669" y="2847594"/>
-                  </a:lnTo>
-                  <a:lnTo>
-                    <a:pt x="5873047" y="2844971"/>
-                  </a:lnTo>
-                  <a:lnTo>
-                    <a:pt x="5801424" y="2842085"/>
-                  </a:lnTo>
-                  <a:lnTo>
-                    <a:pt x="5729802" y="2838910"/>
-                  </a:lnTo>
-                  <a:lnTo>
-                    <a:pt x="5658179" y="2835416"/>
-                  </a:lnTo>
-                  <a:lnTo>
-                    <a:pt x="5586557" y="2831571"/>
-                  </a:lnTo>
-                  <a:lnTo>
-                    <a:pt x="5514934" y="2827341"/>
-                  </a:lnTo>
-                  <a:lnTo>
-                    <a:pt x="5443311" y="2822686"/>
-                  </a:lnTo>
-                  <a:lnTo>
-                    <a:pt x="5371689" y="2817564"/>
-                  </a:lnTo>
-                  <a:lnTo>
-                    <a:pt x="5300066" y="2811929"/>
-                  </a:lnTo>
-                  <a:lnTo>
-                    <a:pt x="5228444" y="2805728"/>
-                  </a:lnTo>
-                  <a:lnTo>
-                    <a:pt x="5156821" y="2798904"/>
-                  </a:lnTo>
-                  <a:lnTo>
-                    <a:pt x="5085199" y="2791396"/>
-                  </a:lnTo>
-                  <a:lnTo>
-                    <a:pt x="5013576" y="2783135"/>
-                  </a:lnTo>
-                  <a:lnTo>
-                    <a:pt x="4941954" y="2774044"/>
-                  </a:lnTo>
-                  <a:lnTo>
-                    <a:pt x="4870331" y="2764042"/>
-                  </a:lnTo>
-                  <a:lnTo>
-                    <a:pt x="4798709" y="2753036"/>
-                  </a:lnTo>
-                  <a:lnTo>
-                    <a:pt x="4727086" y="2740926"/>
-                  </a:lnTo>
-                  <a:lnTo>
-                    <a:pt x="4655464" y="2727600"/>
-                  </a:lnTo>
-                  <a:lnTo>
-                    <a:pt x="4583841" y="2712937"/>
-                  </a:lnTo>
-                  <a:lnTo>
-                    <a:pt x="4512219" y="2696804"/>
-                  </a:lnTo>
-                  <a:lnTo>
-                    <a:pt x="4440596" y="2679051"/>
-                  </a:lnTo>
-                  <a:lnTo>
-                    <a:pt x="4368974" y="2659517"/>
-                  </a:lnTo>
-                  <a:lnTo>
-                    <a:pt x="4297351" y="2638023"/>
-                  </a:lnTo>
-                  <a:lnTo>
-                    <a:pt x="4225729" y="2614373"/>
-                  </a:lnTo>
-                  <a:lnTo>
-                    <a:pt x="4154106" y="2588349"/>
-                  </a:lnTo>
-                  <a:lnTo>
-                    <a:pt x="4082483" y="2559714"/>
-                  </a:lnTo>
-                  <a:lnTo>
-                    <a:pt x="4010861" y="2528206"/>
-                  </a:lnTo>
-                  <a:lnTo>
-                    <a:pt x="3939238" y="2493537"/>
-                  </a:lnTo>
-                  <a:lnTo>
-                    <a:pt x="3867616" y="2455389"/>
-                  </a:lnTo>
-                  <a:lnTo>
-                    <a:pt x="3795993" y="2413413"/>
-                  </a:lnTo>
-                  <a:lnTo>
-                    <a:pt x="3724371" y="2367226"/>
-                  </a:lnTo>
-                  <a:lnTo>
-                    <a:pt x="3652748" y="2316404"/>
-                  </a:lnTo>
-                  <a:lnTo>
-                    <a:pt x="3581126" y="2260483"/>
-                  </a:lnTo>
-                  <a:lnTo>
-                    <a:pt x="3509503" y="2198951"/>
-                  </a:lnTo>
-                  <a:lnTo>
-                    <a:pt x="3437881" y="2131244"/>
-                  </a:lnTo>
-                  <a:lnTo>
-                    <a:pt x="3366258" y="2056745"/>
-                  </a:lnTo>
-                  <a:lnTo>
-                    <a:pt x="3294636" y="2025544"/>
-                  </a:lnTo>
-                  <a:lnTo>
-                    <a:pt x="3223013" y="2002743"/>
-                  </a:lnTo>
-                  <a:lnTo>
-                    <a:pt x="3151391" y="1979328"/>
-                  </a:lnTo>
-                  <a:lnTo>
-                    <a:pt x="3079768" y="1955284"/>
-                  </a:lnTo>
-                  <a:lnTo>
-                    <a:pt x="3008146" y="1930594"/>
-                  </a:lnTo>
-                  <a:lnTo>
-                    <a:pt x="2936523" y="1905240"/>
-                  </a:lnTo>
-                  <a:lnTo>
-                    <a:pt x="2864901" y="1879205"/>
-                  </a:lnTo>
-                  <a:lnTo>
-                    <a:pt x="2793278" y="1852470"/>
-                  </a:lnTo>
-                  <a:lnTo>
-                    <a:pt x="2721655" y="1825016"/>
-                  </a:lnTo>
-                  <a:lnTo>
-                    <a:pt x="2650033" y="1796824"/>
-                  </a:lnTo>
-                  <a:lnTo>
-                    <a:pt x="2578410" y="1767874"/>
-                  </a:lnTo>
-                  <a:lnTo>
-                    <a:pt x="2506788" y="1738145"/>
-                  </a:lnTo>
-                  <a:lnTo>
-                    <a:pt x="2435165" y="1707618"/>
-                  </a:lnTo>
-                  <a:lnTo>
-                    <a:pt x="2363543" y="1676270"/>
-                  </a:lnTo>
-                  <a:lnTo>
-                    <a:pt x="2291920" y="1644079"/>
-                  </a:lnTo>
-                  <a:lnTo>
-                    <a:pt x="2220298" y="1611023"/>
-                  </a:lnTo>
-                  <a:lnTo>
-                    <a:pt x="2148675" y="1577078"/>
-                  </a:lnTo>
-                  <a:lnTo>
-                    <a:pt x="2077053" y="1542221"/>
-                  </a:lnTo>
-                  <a:lnTo>
-                    <a:pt x="2005430" y="1506427"/>
-                  </a:lnTo>
-                  <a:lnTo>
-                    <a:pt x="1933808" y="1469670"/>
-                  </a:lnTo>
-                  <a:lnTo>
-                    <a:pt x="1862185" y="1431925"/>
-                  </a:lnTo>
-                  <a:lnTo>
-                    <a:pt x="1790563" y="1393166"/>
-                  </a:lnTo>
-                  <a:lnTo>
-                    <a:pt x="1718940" y="1353365"/>
-                  </a:lnTo>
-                  <a:lnTo>
-                    <a:pt x="1647318" y="1312494"/>
-                  </a:lnTo>
-                  <a:lnTo>
-                    <a:pt x="1575695" y="1270524"/>
-                  </a:lnTo>
-                  <a:lnTo>
-                    <a:pt x="1504073" y="1227425"/>
-                  </a:lnTo>
-                  <a:lnTo>
-                    <a:pt x="1432450" y="1183169"/>
-                  </a:lnTo>
-                  <a:lnTo>
-                    <a:pt x="1360827" y="1137722"/>
-                  </a:lnTo>
-                  <a:lnTo>
-                    <a:pt x="1289205" y="1091054"/>
-                  </a:lnTo>
-                  <a:lnTo>
-                    <a:pt x="1217582" y="1043131"/>
-                  </a:lnTo>
-                  <a:lnTo>
-                    <a:pt x="1145960" y="993920"/>
-                  </a:lnTo>
-                  <a:lnTo>
-                    <a:pt x="1074337" y="943386"/>
-                  </a:lnTo>
-                  <a:lnTo>
-                    <a:pt x="1002715" y="891493"/>
-                  </a:lnTo>
-                  <a:lnTo>
-                    <a:pt x="931092" y="838206"/>
-                  </a:lnTo>
-                  <a:lnTo>
-                    <a:pt x="859470" y="783486"/>
-                  </a:lnTo>
-                  <a:lnTo>
-                    <a:pt x="787847" y="727295"/>
-                  </a:lnTo>
-                  <a:lnTo>
-                    <a:pt x="716225" y="669593"/>
-                  </a:lnTo>
-                  <a:lnTo>
-                    <a:pt x="644602" y="610341"/>
-                  </a:lnTo>
-                  <a:lnTo>
-                    <a:pt x="572980" y="549495"/>
-                  </a:lnTo>
-                  <a:lnTo>
-                    <a:pt x="501357" y="487014"/>
-                  </a:lnTo>
-                  <a:lnTo>
-                    <a:pt x="429735" y="422853"/>
-                  </a:lnTo>
-                  <a:lnTo>
-                    <a:pt x="358112" y="356967"/>
-                  </a:lnTo>
-                  <a:lnTo>
-                    <a:pt x="286490" y="289310"/>
-                  </a:lnTo>
-                  <a:lnTo>
-                    <a:pt x="214867" y="219835"/>
-                  </a:lnTo>
-                  <a:lnTo>
-                    <a:pt x="143245" y="148491"/>
-                  </a:lnTo>
-                  <a:lnTo>
-                    <a:pt x="71622" y="75230"/>
-                  </a:lnTo>
-                  <a:lnTo>
-                    <a:pt x="0" y="0"/>
+                    <a:pt x="11291" y="19927"/>
+                  </a:lnTo>
+                  <a:lnTo>
+                    <a:pt x="81635" y="132752"/>
+                  </a:lnTo>
+                  <a:lnTo>
+                    <a:pt x="151980" y="235289"/>
+                  </a:lnTo>
+                  <a:lnTo>
+                    <a:pt x="222324" y="328476"/>
+                  </a:lnTo>
+                  <a:lnTo>
+                    <a:pt x="292669" y="413165"/>
+                  </a:lnTo>
+                  <a:lnTo>
+                    <a:pt x="363013" y="490131"/>
+                  </a:lnTo>
+                  <a:lnTo>
+                    <a:pt x="433358" y="560079"/>
+                  </a:lnTo>
+                  <a:lnTo>
+                    <a:pt x="503702" y="623649"/>
+                  </a:lnTo>
+                  <a:lnTo>
+                    <a:pt x="574047" y="681421"/>
+                  </a:lnTo>
+                  <a:lnTo>
+                    <a:pt x="644391" y="733926"/>
+                  </a:lnTo>
+                  <a:lnTo>
+                    <a:pt x="714736" y="781643"/>
+                  </a:lnTo>
+                  <a:lnTo>
+                    <a:pt x="785080" y="825008"/>
+                  </a:lnTo>
+                  <a:lnTo>
+                    <a:pt x="855425" y="864419"/>
+                  </a:lnTo>
+                  <a:lnTo>
+                    <a:pt x="925769" y="900236"/>
+                  </a:lnTo>
+                  <a:lnTo>
+                    <a:pt x="996114" y="932788"/>
+                  </a:lnTo>
+                  <a:lnTo>
+                    <a:pt x="1066458" y="959124"/>
+                  </a:lnTo>
+                  <a:lnTo>
+                    <a:pt x="1136803" y="966927"/>
+                  </a:lnTo>
+                  <a:lnTo>
+                    <a:pt x="1207147" y="974526"/>
+                  </a:lnTo>
+                  <a:lnTo>
+                    <a:pt x="1277492" y="981926"/>
+                  </a:lnTo>
+                  <a:lnTo>
+                    <a:pt x="1347836" y="989133"/>
+                  </a:lnTo>
+                  <a:lnTo>
+                    <a:pt x="1418181" y="996150"/>
+                  </a:lnTo>
+                  <a:lnTo>
+                    <a:pt x="1488525" y="1002984"/>
+                  </a:lnTo>
+                  <a:lnTo>
+                    <a:pt x="1558870" y="1009639"/>
+                  </a:lnTo>
+                  <a:lnTo>
+                    <a:pt x="1629214" y="1016120"/>
+                  </a:lnTo>
+                  <a:lnTo>
+                    <a:pt x="1699559" y="1022432"/>
+                  </a:lnTo>
+                  <a:lnTo>
+                    <a:pt x="1769903" y="1028578"/>
+                  </a:lnTo>
+                  <a:lnTo>
+                    <a:pt x="1840248" y="1034563"/>
+                  </a:lnTo>
+                  <a:lnTo>
+                    <a:pt x="1910592" y="1040391"/>
+                  </a:lnTo>
+                  <a:lnTo>
+                    <a:pt x="1980937" y="1046067"/>
+                  </a:lnTo>
+                  <a:lnTo>
+                    <a:pt x="2051281" y="1051594"/>
+                  </a:lnTo>
+                  <a:lnTo>
+                    <a:pt x="2121626" y="1056977"/>
+                  </a:lnTo>
+                  <a:lnTo>
+                    <a:pt x="2191970" y="1062218"/>
+                  </a:lnTo>
+                  <a:lnTo>
+                    <a:pt x="2262315" y="1067323"/>
+                  </a:lnTo>
+                  <a:lnTo>
+                    <a:pt x="2332659" y="1072294"/>
+                  </a:lnTo>
+                  <a:lnTo>
+                    <a:pt x="2403004" y="1077134"/>
+                  </a:lnTo>
+                  <a:lnTo>
+                    <a:pt x="2473348" y="1081848"/>
+                  </a:lnTo>
+                  <a:lnTo>
+                    <a:pt x="2543693" y="1086439"/>
+                  </a:lnTo>
+                  <a:lnTo>
+                    <a:pt x="2614037" y="1090909"/>
+                  </a:lnTo>
+                  <a:lnTo>
+                    <a:pt x="2684382" y="1095262"/>
+                  </a:lnTo>
+                  <a:lnTo>
+                    <a:pt x="2754726" y="1099502"/>
+                  </a:lnTo>
+                  <a:lnTo>
+                    <a:pt x="2825071" y="1103630"/>
+                  </a:lnTo>
+                  <a:lnTo>
+                    <a:pt x="2895415" y="1107650"/>
+                  </a:lnTo>
+                  <a:lnTo>
+                    <a:pt x="2965760" y="1111566"/>
+                  </a:lnTo>
+                  <a:lnTo>
+                    <a:pt x="3036104" y="1115378"/>
+                  </a:lnTo>
+                  <a:lnTo>
+                    <a:pt x="3106449" y="1119091"/>
+                  </a:lnTo>
+                  <a:lnTo>
+                    <a:pt x="3176793" y="1122706"/>
+                  </a:lnTo>
+                  <a:lnTo>
+                    <a:pt x="3247138" y="1126227"/>
+                  </a:lnTo>
+                  <a:lnTo>
+                    <a:pt x="3317482" y="1129656"/>
+                  </a:lnTo>
+                  <a:lnTo>
+                    <a:pt x="3387827" y="1132995"/>
+                  </a:lnTo>
+                  <a:lnTo>
+                    <a:pt x="3458171" y="1136247"/>
+                  </a:lnTo>
+                  <a:lnTo>
+                    <a:pt x="3528516" y="1139413"/>
+                  </a:lnTo>
+                  <a:lnTo>
+                    <a:pt x="3598860" y="1142497"/>
+                  </a:lnTo>
+                  <a:lnTo>
+                    <a:pt x="3669205" y="1145499"/>
+                  </a:lnTo>
+                  <a:lnTo>
+                    <a:pt x="3739549" y="1148424"/>
+                  </a:lnTo>
+                  <a:lnTo>
+                    <a:pt x="3809893" y="1151271"/>
+                  </a:lnTo>
+                  <a:lnTo>
+                    <a:pt x="3880238" y="1154045"/>
+                  </a:lnTo>
+                  <a:lnTo>
+                    <a:pt x="3950582" y="1156745"/>
+                  </a:lnTo>
+                  <a:lnTo>
+                    <a:pt x="4020927" y="1159375"/>
+                  </a:lnTo>
+                  <a:lnTo>
+                    <a:pt x="4091271" y="1161936"/>
+                  </a:lnTo>
+                  <a:lnTo>
+                    <a:pt x="4161616" y="1164430"/>
+                  </a:lnTo>
+                  <a:lnTo>
+                    <a:pt x="4231960" y="1166858"/>
+                  </a:lnTo>
+                  <a:lnTo>
+                    <a:pt x="4302305" y="1169224"/>
+                  </a:lnTo>
+                  <a:lnTo>
+                    <a:pt x="4372649" y="1171527"/>
+                  </a:lnTo>
+                  <a:lnTo>
+                    <a:pt x="4442994" y="1173770"/>
+                  </a:lnTo>
+                  <a:lnTo>
+                    <a:pt x="4513338" y="1175954"/>
+                  </a:lnTo>
+                  <a:lnTo>
+                    <a:pt x="4583683" y="1178081"/>
+                  </a:lnTo>
+                  <a:lnTo>
+                    <a:pt x="4654027" y="1180152"/>
+                  </a:lnTo>
+                  <a:lnTo>
+                    <a:pt x="4724372" y="1182169"/>
                   </a:lnTo>
                 </a:path>
               </a:pathLst>
@@ -4057,243 +3764,568 @@
           </p:nvSpPr>
           <p:spPr>
             <a:xfrm>
-              <a:off x="2844460" y="2073503"/>
-              <a:ext cx="5418218" cy="3449440"/>
+              <a:off x="1235312" y="2363232"/>
+              <a:ext cx="6964104" cy="1035019"/>
             </a:xfrm>
             <a:custGeom>
               <a:avLst/>
               <a:pathLst>
-                <a:path w="5418218" h="3449440">
+                <a:path w="6964104" h="1035019">
+                  <a:moveTo>
+                    <a:pt x="6964104" y="1035019"/>
+                  </a:moveTo>
+                  <a:lnTo>
+                    <a:pt x="6893760" y="1034814"/>
+                  </a:lnTo>
+                  <a:lnTo>
+                    <a:pt x="6823415" y="1034589"/>
+                  </a:lnTo>
+                  <a:lnTo>
+                    <a:pt x="6753071" y="1034340"/>
+                  </a:lnTo>
+                  <a:lnTo>
+                    <a:pt x="6682726" y="1034067"/>
+                  </a:lnTo>
+                  <a:lnTo>
+                    <a:pt x="6612382" y="1033767"/>
+                  </a:lnTo>
+                  <a:lnTo>
+                    <a:pt x="6542037" y="1033436"/>
+                  </a:lnTo>
+                  <a:lnTo>
+                    <a:pt x="6471693" y="1033073"/>
+                  </a:lnTo>
+                  <a:lnTo>
+                    <a:pt x="6401348" y="1032672"/>
+                  </a:lnTo>
+                  <a:lnTo>
+                    <a:pt x="6331004" y="1032232"/>
+                  </a:lnTo>
+                  <a:lnTo>
+                    <a:pt x="6260659" y="1031747"/>
+                  </a:lnTo>
+                  <a:lnTo>
+                    <a:pt x="6190315" y="1031214"/>
+                  </a:lnTo>
+                  <a:lnTo>
+                    <a:pt x="6119970" y="1030627"/>
+                  </a:lnTo>
+                  <a:lnTo>
+                    <a:pt x="6049626" y="1029982"/>
+                  </a:lnTo>
+                  <a:lnTo>
+                    <a:pt x="5979281" y="1029271"/>
+                  </a:lnTo>
+                  <a:lnTo>
+                    <a:pt x="5908937" y="1028489"/>
+                  </a:lnTo>
+                  <a:lnTo>
+                    <a:pt x="5838592" y="1027629"/>
+                  </a:lnTo>
+                  <a:lnTo>
+                    <a:pt x="5768248" y="1026683"/>
+                  </a:lnTo>
+                  <a:lnTo>
+                    <a:pt x="5697903" y="1025641"/>
+                  </a:lnTo>
+                  <a:lnTo>
+                    <a:pt x="5627559" y="1024495"/>
+                  </a:lnTo>
+                  <a:lnTo>
+                    <a:pt x="5557214" y="1023235"/>
+                  </a:lnTo>
+                  <a:lnTo>
+                    <a:pt x="5486870" y="1021847"/>
+                  </a:lnTo>
+                  <a:lnTo>
+                    <a:pt x="5416525" y="1020321"/>
+                  </a:lnTo>
+                  <a:lnTo>
+                    <a:pt x="5346181" y="1018641"/>
+                  </a:lnTo>
+                  <a:lnTo>
+                    <a:pt x="5275836" y="1016792"/>
+                  </a:lnTo>
+                  <a:lnTo>
+                    <a:pt x="5205492" y="1014759"/>
+                  </a:lnTo>
+                  <a:lnTo>
+                    <a:pt x="5135147" y="1012521"/>
+                  </a:lnTo>
+                  <a:lnTo>
+                    <a:pt x="5064803" y="1010058"/>
+                  </a:lnTo>
+                  <a:lnTo>
+                    <a:pt x="4994458" y="1007349"/>
+                  </a:lnTo>
+                  <a:lnTo>
+                    <a:pt x="4924114" y="1004368"/>
+                  </a:lnTo>
+                  <a:lnTo>
+                    <a:pt x="4853769" y="1001087"/>
+                  </a:lnTo>
+                  <a:lnTo>
+                    <a:pt x="4783425" y="997477"/>
+                  </a:lnTo>
+                  <a:lnTo>
+                    <a:pt x="4713080" y="993506"/>
+                  </a:lnTo>
+                  <a:lnTo>
+                    <a:pt x="4642736" y="989135"/>
+                  </a:lnTo>
+                  <a:lnTo>
+                    <a:pt x="4572391" y="984326"/>
+                  </a:lnTo>
+                  <a:lnTo>
+                    <a:pt x="4502047" y="979035"/>
+                  </a:lnTo>
+                  <a:lnTo>
+                    <a:pt x="4431702" y="973213"/>
+                  </a:lnTo>
+                  <a:lnTo>
+                    <a:pt x="4361358" y="966806"/>
+                  </a:lnTo>
+                  <a:lnTo>
+                    <a:pt x="4291013" y="959757"/>
+                  </a:lnTo>
+                  <a:lnTo>
+                    <a:pt x="4220669" y="952000"/>
+                  </a:lnTo>
+                  <a:lnTo>
+                    <a:pt x="4150324" y="943465"/>
+                  </a:lnTo>
+                  <a:lnTo>
+                    <a:pt x="4079980" y="934074"/>
+                  </a:lnTo>
+                  <a:lnTo>
+                    <a:pt x="4009635" y="923740"/>
+                  </a:lnTo>
+                  <a:lnTo>
+                    <a:pt x="3939291" y="912370"/>
+                  </a:lnTo>
+                  <a:lnTo>
+                    <a:pt x="3868946" y="899859"/>
+                  </a:lnTo>
+                  <a:lnTo>
+                    <a:pt x="3798602" y="886092"/>
+                  </a:lnTo>
+                  <a:lnTo>
+                    <a:pt x="3728257" y="870944"/>
+                  </a:lnTo>
+                  <a:lnTo>
+                    <a:pt x="3657913" y="854276"/>
+                  </a:lnTo>
+                  <a:lnTo>
+                    <a:pt x="3587569" y="835935"/>
+                  </a:lnTo>
+                  <a:lnTo>
+                    <a:pt x="3517224" y="815755"/>
+                  </a:lnTo>
+                  <a:lnTo>
+                    <a:pt x="3446880" y="793549"/>
+                  </a:lnTo>
+                  <a:lnTo>
+                    <a:pt x="3376535" y="769116"/>
+                  </a:lnTo>
+                  <a:lnTo>
+                    <a:pt x="3306191" y="742230"/>
+                  </a:lnTo>
+                  <a:lnTo>
+                    <a:pt x="3235846" y="730971"/>
+                  </a:lnTo>
+                  <a:lnTo>
+                    <a:pt x="3165502" y="722742"/>
+                  </a:lnTo>
+                  <a:lnTo>
+                    <a:pt x="3095157" y="714293"/>
+                  </a:lnTo>
+                  <a:lnTo>
+                    <a:pt x="3024813" y="705616"/>
+                  </a:lnTo>
+                  <a:lnTo>
+                    <a:pt x="2954468" y="696706"/>
+                  </a:lnTo>
+                  <a:lnTo>
+                    <a:pt x="2884124" y="687556"/>
+                  </a:lnTo>
+                  <a:lnTo>
+                    <a:pt x="2813779" y="678161"/>
+                  </a:lnTo>
+                  <a:lnTo>
+                    <a:pt x="2743435" y="668512"/>
+                  </a:lnTo>
+                  <a:lnTo>
+                    <a:pt x="2673090" y="658605"/>
+                  </a:lnTo>
+                  <a:lnTo>
+                    <a:pt x="2602746" y="648431"/>
+                  </a:lnTo>
+                  <a:lnTo>
+                    <a:pt x="2532401" y="637984"/>
+                  </a:lnTo>
+                  <a:lnTo>
+                    <a:pt x="2462057" y="627255"/>
+                  </a:lnTo>
+                  <a:lnTo>
+                    <a:pt x="2391712" y="616239"/>
+                  </a:lnTo>
+                  <a:lnTo>
+                    <a:pt x="2321368" y="604926"/>
+                  </a:lnTo>
+                  <a:lnTo>
+                    <a:pt x="2251023" y="593309"/>
+                  </a:lnTo>
+                  <a:lnTo>
+                    <a:pt x="2180679" y="581380"/>
+                  </a:lnTo>
+                  <a:lnTo>
+                    <a:pt x="2110334" y="569130"/>
+                  </a:lnTo>
+                  <a:lnTo>
+                    <a:pt x="2039990" y="556551"/>
+                  </a:lnTo>
+                  <a:lnTo>
+                    <a:pt x="1969645" y="543634"/>
+                  </a:lnTo>
+                  <a:lnTo>
+                    <a:pt x="1899301" y="530369"/>
+                  </a:lnTo>
+                  <a:lnTo>
+                    <a:pt x="1828956" y="516748"/>
+                  </a:lnTo>
+                  <a:lnTo>
+                    <a:pt x="1758612" y="502761"/>
+                  </a:lnTo>
+                  <a:lnTo>
+                    <a:pt x="1688267" y="488397"/>
+                  </a:lnTo>
+                  <a:lnTo>
+                    <a:pt x="1617923" y="473648"/>
+                  </a:lnTo>
+                  <a:lnTo>
+                    <a:pt x="1547578" y="458502"/>
+                  </a:lnTo>
+                  <a:lnTo>
+                    <a:pt x="1477234" y="442949"/>
+                  </a:lnTo>
+                  <a:lnTo>
+                    <a:pt x="1406889" y="426977"/>
+                  </a:lnTo>
+                  <a:lnTo>
+                    <a:pt x="1336545" y="410577"/>
+                  </a:lnTo>
+                  <a:lnTo>
+                    <a:pt x="1266200" y="393735"/>
+                  </a:lnTo>
+                  <a:lnTo>
+                    <a:pt x="1195856" y="376441"/>
+                  </a:lnTo>
+                  <a:lnTo>
+                    <a:pt x="1125511" y="358682"/>
+                  </a:lnTo>
+                  <a:lnTo>
+                    <a:pt x="1055167" y="340445"/>
+                  </a:lnTo>
+                  <a:lnTo>
+                    <a:pt x="984822" y="321719"/>
+                  </a:lnTo>
+                  <a:lnTo>
+                    <a:pt x="914478" y="302489"/>
+                  </a:lnTo>
+                  <a:lnTo>
+                    <a:pt x="844133" y="282741"/>
+                  </a:lnTo>
+                  <a:lnTo>
+                    <a:pt x="773789" y="262463"/>
+                  </a:lnTo>
+                  <a:lnTo>
+                    <a:pt x="703444" y="241640"/>
+                  </a:lnTo>
+                  <a:lnTo>
+                    <a:pt x="633100" y="220257"/>
+                  </a:lnTo>
+                  <a:lnTo>
+                    <a:pt x="562755" y="198300"/>
+                  </a:lnTo>
+                  <a:lnTo>
+                    <a:pt x="492411" y="175752"/>
+                  </a:lnTo>
+                  <a:lnTo>
+                    <a:pt x="422066" y="152597"/>
+                  </a:lnTo>
+                  <a:lnTo>
+                    <a:pt x="351722" y="128821"/>
+                  </a:lnTo>
+                  <a:lnTo>
+                    <a:pt x="281377" y="104405"/>
+                  </a:lnTo>
+                  <a:lnTo>
+                    <a:pt x="211033" y="79333"/>
+                  </a:lnTo>
+                  <a:lnTo>
+                    <a:pt x="140688" y="53587"/>
+                  </a:lnTo>
+                  <a:lnTo>
+                    <a:pt x="70344" y="27148"/>
+                  </a:lnTo>
+                  <a:lnTo>
+                    <a:pt x="0" y="0"/>
+                  </a:lnTo>
+                </a:path>
+              </a:pathLst>
+            </a:custGeom>
+          </p:spPr>
+          <p:txBody>
+            <a:bodyPr/>
+            <a:lstStyle/>
+            <a:p/>
+          </p:txBody>
+        </p:sp>
+        <p:sp>
+          <p:nvSpPr>
+            <p:cNvPr id="24" name="pl24"/>
+            <p:cNvSpPr/>
+            <p:nvPr/>
+          </p:nvSpPr>
+          <p:spPr>
+            <a:xfrm>
+              <a:off x="2877881" y="2143092"/>
+              <a:ext cx="5321535" cy="1244821"/>
+            </a:xfrm>
+            <a:custGeom>
+              <a:avLst/>
+              <a:pathLst>
+                <a:path w="5321535" h="1244821">
                   <a:moveTo>
                     <a:pt x="0" y="0"/>
                   </a:moveTo>
                   <a:lnTo>
-                    <a:pt x="46529" y="136924"/>
-                  </a:lnTo>
-                  <a:lnTo>
-                    <a:pt x="118151" y="335207"/>
-                  </a:lnTo>
-                  <a:lnTo>
-                    <a:pt x="189774" y="521742"/>
-                  </a:lnTo>
-                  <a:lnTo>
-                    <a:pt x="261396" y="697226"/>
-                  </a:lnTo>
-                  <a:lnTo>
-                    <a:pt x="333019" y="862313"/>
-                  </a:lnTo>
-                  <a:lnTo>
-                    <a:pt x="404641" y="1017620"/>
-                  </a:lnTo>
-                  <a:lnTo>
-                    <a:pt x="476264" y="1163725"/>
-                  </a:lnTo>
-                  <a:lnTo>
-                    <a:pt x="547886" y="1301175"/>
-                  </a:lnTo>
-                  <a:lnTo>
-                    <a:pt x="619509" y="1430481"/>
-                  </a:lnTo>
-                  <a:lnTo>
-                    <a:pt x="691131" y="1552127"/>
-                  </a:lnTo>
-                  <a:lnTo>
-                    <a:pt x="762754" y="1666566"/>
-                  </a:lnTo>
-                  <a:lnTo>
-                    <a:pt x="834376" y="1774225"/>
-                  </a:lnTo>
-                  <a:lnTo>
-                    <a:pt x="905999" y="1875505"/>
-                  </a:lnTo>
-                  <a:lnTo>
-                    <a:pt x="977621" y="1970785"/>
-                  </a:lnTo>
-                  <a:lnTo>
-                    <a:pt x="1049244" y="2060421"/>
-                  </a:lnTo>
-                  <a:lnTo>
-                    <a:pt x="1120866" y="2144746"/>
-                  </a:lnTo>
-                  <a:lnTo>
-                    <a:pt x="1192489" y="2224075"/>
-                  </a:lnTo>
-                  <a:lnTo>
-                    <a:pt x="1264112" y="2298704"/>
-                  </a:lnTo>
-                  <a:lnTo>
-                    <a:pt x="1335734" y="2368912"/>
-                  </a:lnTo>
-                  <a:lnTo>
-                    <a:pt x="1407357" y="2434960"/>
-                  </a:lnTo>
-                  <a:lnTo>
-                    <a:pt x="1478979" y="2497095"/>
-                  </a:lnTo>
-                  <a:lnTo>
-                    <a:pt x="1550602" y="2555550"/>
-                  </a:lnTo>
-                  <a:lnTo>
-                    <a:pt x="1622224" y="2610541"/>
-                  </a:lnTo>
-                  <a:lnTo>
-                    <a:pt x="1693847" y="2662274"/>
-                  </a:lnTo>
-                  <a:lnTo>
-                    <a:pt x="1765469" y="2710942"/>
-                  </a:lnTo>
-                  <a:lnTo>
-                    <a:pt x="1837092" y="2756727"/>
-                  </a:lnTo>
-                  <a:lnTo>
-                    <a:pt x="1908714" y="2799799"/>
-                  </a:lnTo>
-                  <a:lnTo>
-                    <a:pt x="1980337" y="2840319"/>
-                  </a:lnTo>
-                  <a:lnTo>
-                    <a:pt x="2051959" y="2878439"/>
-                  </a:lnTo>
-                  <a:lnTo>
-                    <a:pt x="2123582" y="2914301"/>
-                  </a:lnTo>
-                  <a:lnTo>
-                    <a:pt x="2195204" y="2948037"/>
-                  </a:lnTo>
-                  <a:lnTo>
-                    <a:pt x="2266827" y="2979775"/>
-                  </a:lnTo>
-                  <a:lnTo>
-                    <a:pt x="2338449" y="3009633"/>
-                  </a:lnTo>
-                  <a:lnTo>
-                    <a:pt x="2410072" y="3037722"/>
-                  </a:lnTo>
-                  <a:lnTo>
-                    <a:pt x="2481694" y="3064147"/>
-                  </a:lnTo>
-                  <a:lnTo>
-                    <a:pt x="2553317" y="3089006"/>
-                  </a:lnTo>
-                  <a:lnTo>
-                    <a:pt x="2624940" y="3112392"/>
-                  </a:lnTo>
-                  <a:lnTo>
-                    <a:pt x="2696562" y="3134393"/>
-                  </a:lnTo>
-                  <a:lnTo>
-                    <a:pt x="2768185" y="3155091"/>
-                  </a:lnTo>
-                  <a:lnTo>
-                    <a:pt x="2839807" y="3174562"/>
-                  </a:lnTo>
-                  <a:lnTo>
-                    <a:pt x="2911430" y="3192879"/>
-                  </a:lnTo>
-                  <a:lnTo>
-                    <a:pt x="2983052" y="3210112"/>
-                  </a:lnTo>
-                  <a:lnTo>
-                    <a:pt x="3054675" y="3226323"/>
-                  </a:lnTo>
-                  <a:lnTo>
-                    <a:pt x="3126297" y="3241574"/>
-                  </a:lnTo>
-                  <a:lnTo>
-                    <a:pt x="3197920" y="3255922"/>
-                  </a:lnTo>
-                  <a:lnTo>
-                    <a:pt x="3269542" y="3269419"/>
-                  </a:lnTo>
-                  <a:lnTo>
-                    <a:pt x="3341165" y="3282117"/>
-                  </a:lnTo>
-                  <a:lnTo>
-                    <a:pt x="3412787" y="3294063"/>
-                  </a:lnTo>
-                  <a:lnTo>
-                    <a:pt x="3484410" y="3305300"/>
-                  </a:lnTo>
-                  <a:lnTo>
-                    <a:pt x="3556032" y="3315872"/>
-                  </a:lnTo>
-                  <a:lnTo>
-                    <a:pt x="3627655" y="3325818"/>
-                  </a:lnTo>
-                  <a:lnTo>
-                    <a:pt x="3699277" y="3335175"/>
-                  </a:lnTo>
-                  <a:lnTo>
-                    <a:pt x="3770900" y="3343977"/>
-                  </a:lnTo>
-                  <a:lnTo>
-                    <a:pt x="3842522" y="3352257"/>
-                  </a:lnTo>
-                  <a:lnTo>
-                    <a:pt x="3914145" y="3360047"/>
-                  </a:lnTo>
-                  <a:lnTo>
-                    <a:pt x="3985768" y="3367376"/>
-                  </a:lnTo>
-                  <a:lnTo>
-                    <a:pt x="4057390" y="3374270"/>
-                  </a:lnTo>
-                  <a:lnTo>
-                    <a:pt x="4129013" y="3380756"/>
-                  </a:lnTo>
-                  <a:lnTo>
-                    <a:pt x="4200635" y="3386858"/>
-                  </a:lnTo>
-                  <a:lnTo>
-                    <a:pt x="4272258" y="3392598"/>
-                  </a:lnTo>
-                  <a:lnTo>
-                    <a:pt x="4343880" y="3397998"/>
-                  </a:lnTo>
-                  <a:lnTo>
-                    <a:pt x="4415503" y="3403078"/>
-                  </a:lnTo>
-                  <a:lnTo>
-                    <a:pt x="4487125" y="3407857"/>
-                  </a:lnTo>
-                  <a:lnTo>
-                    <a:pt x="4558748" y="3412354"/>
-                  </a:lnTo>
-                  <a:lnTo>
-                    <a:pt x="4630370" y="3416583"/>
-                  </a:lnTo>
-                  <a:lnTo>
-                    <a:pt x="4701993" y="3420562"/>
-                  </a:lnTo>
-                  <a:lnTo>
-                    <a:pt x="4773615" y="3424306"/>
-                  </a:lnTo>
-                  <a:lnTo>
-                    <a:pt x="4845238" y="3427827"/>
-                  </a:lnTo>
-                  <a:lnTo>
-                    <a:pt x="4916860" y="3431140"/>
-                  </a:lnTo>
-                  <a:lnTo>
-                    <a:pt x="4988483" y="3434257"/>
-                  </a:lnTo>
-                  <a:lnTo>
-                    <a:pt x="5060105" y="3437189"/>
-                  </a:lnTo>
-                  <a:lnTo>
-                    <a:pt x="5131728" y="3439947"/>
-                  </a:lnTo>
-                  <a:lnTo>
-                    <a:pt x="5203350" y="3442542"/>
-                  </a:lnTo>
-                  <a:lnTo>
-                    <a:pt x="5274973" y="3444983"/>
-                  </a:lnTo>
-                  <a:lnTo>
-                    <a:pt x="5346595" y="3447280"/>
-                  </a:lnTo>
-                  <a:lnTo>
-                    <a:pt x="5418218" y="3449440"/>
+                    <a:pt x="45698" y="49412"/>
+                  </a:lnTo>
+                  <a:lnTo>
+                    <a:pt x="116043" y="120968"/>
+                  </a:lnTo>
+                  <a:lnTo>
+                    <a:pt x="186387" y="188284"/>
+                  </a:lnTo>
+                  <a:lnTo>
+                    <a:pt x="256732" y="251612"/>
+                  </a:lnTo>
+                  <a:lnTo>
+                    <a:pt x="327076" y="311188"/>
+                  </a:lnTo>
+                  <a:lnTo>
+                    <a:pt x="397421" y="367235"/>
+                  </a:lnTo>
+                  <a:lnTo>
+                    <a:pt x="467765" y="419961"/>
+                  </a:lnTo>
+                  <a:lnTo>
+                    <a:pt x="538110" y="469563"/>
+                  </a:lnTo>
+                  <a:lnTo>
+                    <a:pt x="608454" y="516227"/>
+                  </a:lnTo>
+                  <a:lnTo>
+                    <a:pt x="678799" y="560126"/>
+                  </a:lnTo>
+                  <a:lnTo>
+                    <a:pt x="749143" y="601424"/>
+                  </a:lnTo>
+                  <a:lnTo>
+                    <a:pt x="819488" y="640276"/>
+                  </a:lnTo>
+                  <a:lnTo>
+                    <a:pt x="889832" y="676825"/>
+                  </a:lnTo>
+                  <a:lnTo>
+                    <a:pt x="960177" y="711210"/>
+                  </a:lnTo>
+                  <a:lnTo>
+                    <a:pt x="1030521" y="743557"/>
+                  </a:lnTo>
+                  <a:lnTo>
+                    <a:pt x="1100866" y="773988"/>
+                  </a:lnTo>
+                  <a:lnTo>
+                    <a:pt x="1171210" y="802616"/>
+                  </a:lnTo>
+                  <a:lnTo>
+                    <a:pt x="1241555" y="829548"/>
+                  </a:lnTo>
+                  <a:lnTo>
+                    <a:pt x="1311899" y="854884"/>
+                  </a:lnTo>
+                  <a:lnTo>
+                    <a:pt x="1382244" y="878720"/>
+                  </a:lnTo>
+                  <a:lnTo>
+                    <a:pt x="1452588" y="901143"/>
+                  </a:lnTo>
+                  <a:lnTo>
+                    <a:pt x="1522933" y="922237"/>
+                  </a:lnTo>
+                  <a:lnTo>
+                    <a:pt x="1593277" y="942082"/>
+                  </a:lnTo>
+                  <a:lnTo>
+                    <a:pt x="1663622" y="960752"/>
+                  </a:lnTo>
+                  <a:lnTo>
+                    <a:pt x="1733966" y="978315"/>
+                  </a:lnTo>
+                  <a:lnTo>
+                    <a:pt x="1804311" y="994837"/>
+                  </a:lnTo>
+                  <a:lnTo>
+                    <a:pt x="1874655" y="1010381"/>
+                  </a:lnTo>
+                  <a:lnTo>
+                    <a:pt x="1945000" y="1025004"/>
+                  </a:lnTo>
+                  <a:lnTo>
+                    <a:pt x="2015344" y="1038761"/>
+                  </a:lnTo>
+                  <a:lnTo>
+                    <a:pt x="2085689" y="1051702"/>
+                  </a:lnTo>
+                  <a:lnTo>
+                    <a:pt x="2156033" y="1063877"/>
+                  </a:lnTo>
+                  <a:lnTo>
+                    <a:pt x="2226378" y="1075331"/>
+                  </a:lnTo>
+                  <a:lnTo>
+                    <a:pt x="2296722" y="1086105"/>
+                  </a:lnTo>
+                  <a:lnTo>
+                    <a:pt x="2367066" y="1096242"/>
+                  </a:lnTo>
+                  <a:lnTo>
+                    <a:pt x="2437411" y="1105778"/>
+                  </a:lnTo>
+                  <a:lnTo>
+                    <a:pt x="2507755" y="1114749"/>
+                  </a:lnTo>
+                  <a:lnTo>
+                    <a:pt x="2578100" y="1123189"/>
+                  </a:lnTo>
+                  <a:lnTo>
+                    <a:pt x="2648444" y="1131128"/>
+                  </a:lnTo>
+                  <a:lnTo>
+                    <a:pt x="2718789" y="1138598"/>
+                  </a:lnTo>
+                  <a:lnTo>
+                    <a:pt x="2789133" y="1145624"/>
+                  </a:lnTo>
+                  <a:lnTo>
+                    <a:pt x="2859478" y="1152235"/>
+                  </a:lnTo>
+                  <a:lnTo>
+                    <a:pt x="2929822" y="1158454"/>
+                  </a:lnTo>
+                  <a:lnTo>
+                    <a:pt x="3000167" y="1164304"/>
+                  </a:lnTo>
+                  <a:lnTo>
+                    <a:pt x="3070511" y="1169808"/>
+                  </a:lnTo>
+                  <a:lnTo>
+                    <a:pt x="3140856" y="1174985"/>
+                  </a:lnTo>
+                  <a:lnTo>
+                    <a:pt x="3211200" y="1179856"/>
+                  </a:lnTo>
+                  <a:lnTo>
+                    <a:pt x="3281545" y="1184439"/>
+                  </a:lnTo>
+                  <a:lnTo>
+                    <a:pt x="3351889" y="1188749"/>
+                  </a:lnTo>
+                  <a:lnTo>
+                    <a:pt x="3422234" y="1192805"/>
+                  </a:lnTo>
+                  <a:lnTo>
+                    <a:pt x="3492578" y="1196620"/>
+                  </a:lnTo>
+                  <a:lnTo>
+                    <a:pt x="3562923" y="1200209"/>
+                  </a:lnTo>
+                  <a:lnTo>
+                    <a:pt x="3633267" y="1203586"/>
+                  </a:lnTo>
+                  <a:lnTo>
+                    <a:pt x="3703612" y="1206762"/>
+                  </a:lnTo>
+                  <a:lnTo>
+                    <a:pt x="3773956" y="1209750"/>
+                  </a:lnTo>
+                  <a:lnTo>
+                    <a:pt x="3844301" y="1212562"/>
+                  </a:lnTo>
+                  <a:lnTo>
+                    <a:pt x="3914645" y="1215206"/>
+                  </a:lnTo>
+                  <a:lnTo>
+                    <a:pt x="3984990" y="1217694"/>
+                  </a:lnTo>
+                  <a:lnTo>
+                    <a:pt x="4055334" y="1220035"/>
+                  </a:lnTo>
+                  <a:lnTo>
+                    <a:pt x="4125679" y="1222237"/>
+                  </a:lnTo>
+                  <a:lnTo>
+                    <a:pt x="4196023" y="1224309"/>
+                  </a:lnTo>
+                  <a:lnTo>
+                    <a:pt x="4266368" y="1226257"/>
+                  </a:lnTo>
+                  <a:lnTo>
+                    <a:pt x="4336712" y="1228091"/>
+                  </a:lnTo>
+                  <a:lnTo>
+                    <a:pt x="4407057" y="1229815"/>
+                  </a:lnTo>
+                  <a:lnTo>
+                    <a:pt x="4477401" y="1231438"/>
+                  </a:lnTo>
+                  <a:lnTo>
+                    <a:pt x="4547746" y="1232964"/>
+                  </a:lnTo>
+                  <a:lnTo>
+                    <a:pt x="4618090" y="1234400"/>
+                  </a:lnTo>
+                  <a:lnTo>
+                    <a:pt x="4688435" y="1235751"/>
+                  </a:lnTo>
+                  <a:lnTo>
+                    <a:pt x="4758779" y="1237022"/>
+                  </a:lnTo>
+                  <a:lnTo>
+                    <a:pt x="4829124" y="1238217"/>
+                  </a:lnTo>
+                  <a:lnTo>
+                    <a:pt x="4899468" y="1239342"/>
+                  </a:lnTo>
+                  <a:lnTo>
+                    <a:pt x="4969813" y="1240400"/>
+                  </a:lnTo>
+                  <a:lnTo>
+                    <a:pt x="5040157" y="1241396"/>
+                  </a:lnTo>
+                  <a:lnTo>
+                    <a:pt x="5110502" y="1242332"/>
+                  </a:lnTo>
+                  <a:lnTo>
+                    <a:pt x="5180846" y="1243213"/>
+                  </a:lnTo>
+                  <a:lnTo>
+                    <a:pt x="5251191" y="1244042"/>
+                  </a:lnTo>
+                  <a:lnTo>
+                    <a:pt x="5321535" y="1244821"/>
                   </a:lnTo>
                 </a:path>
               </a:pathLst>
@@ -4316,27 +4348,27 @@
         </p:sp>
         <p:sp>
           <p:nvSpPr>
-            <p:cNvPr id="24" name="pl24"/>
+            <p:cNvPr id="25" name="pl25"/>
             <p:cNvSpPr/>
             <p:nvPr/>
           </p:nvSpPr>
           <p:spPr>
             <a:xfrm>
-              <a:off x="817517" y="4727786"/>
-              <a:ext cx="7799693" cy="0"/>
+              <a:off x="887106" y="3100960"/>
+              <a:ext cx="7660515" cy="0"/>
             </a:xfrm>
             <a:custGeom>
               <a:avLst/>
               <a:pathLst>
-                <a:path w="7799693" h="0">
+                <a:path w="7660515" h="0">
                   <a:moveTo>
                     <a:pt x="0" y="0"/>
                   </a:moveTo>
                   <a:lnTo>
-                    <a:pt x="7799693" y="0"/>
-                  </a:lnTo>
-                  <a:lnTo>
-                    <a:pt x="7799693" y="0"/>
+                    <a:pt x="7660515" y="0"/>
+                  </a:lnTo>
+                  <a:lnTo>
+                    <a:pt x="7660515" y="0"/>
                   </a:lnTo>
                 </a:path>
               </a:pathLst>
@@ -4359,21 +4391,21 @@
         </p:sp>
         <p:sp>
           <p:nvSpPr>
-            <p:cNvPr id="25" name="pl25"/>
+            <p:cNvPr id="26" name="pl26"/>
             <p:cNvSpPr/>
             <p:nvPr/>
           </p:nvSpPr>
           <p:spPr>
             <a:xfrm>
-              <a:off x="4526955" y="2073503"/>
-              <a:ext cx="0" cy="3649639"/>
+              <a:off x="4530353" y="2143092"/>
+              <a:ext cx="0" cy="1317069"/>
             </a:xfrm>
             <a:custGeom>
               <a:avLst/>
               <a:pathLst>
-                <a:path w="0" h="3649639">
+                <a:path w="0" h="1317069">
                   <a:moveTo>
-                    <a:pt x="0" y="3649639"/>
+                    <a:pt x="0" y="1317069"/>
                   </a:moveTo>
                   <a:lnTo>
                     <a:pt x="0" y="0"/>
@@ -4402,13 +4434,13 @@
         </p:sp>
         <p:sp>
           <p:nvSpPr>
-            <p:cNvPr id="26" name="tx26"/>
+            <p:cNvPr id="27" name="tx27"/>
             <p:cNvSpPr/>
             <p:nvPr/>
           </p:nvSpPr>
           <p:spPr>
             <a:xfrm>
-              <a:off x="692708" y="5517199"/>
+              <a:off x="762297" y="3360243"/>
               <a:ext cx="62179" cy="80101"/>
             </a:xfrm>
             <a:prstGeom prst="rect">
@@ -4448,13 +4480,13 @@
         </p:sp>
         <p:sp>
           <p:nvSpPr>
-            <p:cNvPr id="27" name="tx27"/>
+            <p:cNvPr id="28" name="tx28"/>
             <p:cNvSpPr/>
             <p:nvPr/>
           </p:nvSpPr>
           <p:spPr>
             <a:xfrm>
-              <a:off x="692708" y="4687735"/>
+              <a:off x="762297" y="3060909"/>
               <a:ext cx="62179" cy="80101"/>
             </a:xfrm>
             <a:prstGeom prst="rect">
@@ -4494,13 +4526,13 @@
         </p:sp>
         <p:sp>
           <p:nvSpPr>
-            <p:cNvPr id="28" name="tx28"/>
+            <p:cNvPr id="29" name="tx29"/>
             <p:cNvSpPr/>
             <p:nvPr/>
           </p:nvSpPr>
           <p:spPr>
             <a:xfrm>
-              <a:off x="692708" y="3858272"/>
+              <a:off x="762297" y="2761575"/>
               <a:ext cx="62179" cy="80101"/>
             </a:xfrm>
             <a:prstGeom prst="rect">
@@ -4540,13 +4572,13 @@
         </p:sp>
         <p:sp>
           <p:nvSpPr>
-            <p:cNvPr id="29" name="tx29"/>
+            <p:cNvPr id="30" name="tx30"/>
             <p:cNvSpPr/>
             <p:nvPr/>
           </p:nvSpPr>
           <p:spPr>
             <a:xfrm>
-              <a:off x="692708" y="3028808"/>
+              <a:off x="762297" y="2462242"/>
               <a:ext cx="62179" cy="80101"/>
             </a:xfrm>
             <a:prstGeom prst="rect">
@@ -4586,13 +4618,13 @@
         </p:sp>
         <p:sp>
           <p:nvSpPr>
-            <p:cNvPr id="30" name="tx30"/>
+            <p:cNvPr id="31" name="tx31"/>
             <p:cNvSpPr/>
             <p:nvPr/>
           </p:nvSpPr>
           <p:spPr>
             <a:xfrm>
-              <a:off x="692708" y="2199345"/>
+              <a:off x="762297" y="2162908"/>
               <a:ext cx="62179" cy="80101"/>
             </a:xfrm>
             <a:prstGeom prst="rect">
@@ -4632,13 +4664,13 @@
         </p:sp>
         <p:sp>
           <p:nvSpPr>
-            <p:cNvPr id="31" name="tx31"/>
+            <p:cNvPr id="32" name="tx32"/>
             <p:cNvSpPr/>
             <p:nvPr/>
           </p:nvSpPr>
           <p:spPr>
             <a:xfrm>
-              <a:off x="2421884" y="5785772"/>
+              <a:off x="2461403" y="3522791"/>
               <a:ext cx="161574" cy="80101"/>
             </a:xfrm>
             <a:prstGeom prst="rect">
@@ -4678,13 +4710,13 @@
         </p:sp>
         <p:sp>
           <p:nvSpPr>
-            <p:cNvPr id="32" name="tx32"/>
+            <p:cNvPr id="33" name="tx33"/>
             <p:cNvSpPr/>
             <p:nvPr/>
           </p:nvSpPr>
           <p:spPr>
             <a:xfrm>
-              <a:off x="4542539" y="5785772"/>
+              <a:off x="4545104" y="3522791"/>
               <a:ext cx="62179" cy="80101"/>
             </a:xfrm>
             <a:prstGeom prst="rect">
@@ -4724,13 +4756,13 @@
         </p:sp>
         <p:sp>
           <p:nvSpPr>
-            <p:cNvPr id="33" name="tx33"/>
+            <p:cNvPr id="34" name="tx34"/>
             <p:cNvSpPr/>
             <p:nvPr/>
           </p:nvSpPr>
           <p:spPr>
             <a:xfrm>
-              <a:off x="6582407" y="5785772"/>
+              <a:off x="6548017" y="3522791"/>
               <a:ext cx="124358" cy="80101"/>
             </a:xfrm>
             <a:prstGeom prst="rect">
@@ -4770,13 +4802,13 @@
         </p:sp>
         <p:sp>
           <p:nvSpPr>
-            <p:cNvPr id="34" name="tx34"/>
+            <p:cNvPr id="35" name="tx35"/>
             <p:cNvSpPr/>
             <p:nvPr/>
           </p:nvSpPr>
           <p:spPr>
             <a:xfrm>
-              <a:off x="2928340" y="5925448"/>
+              <a:off x="2928340" y="3662467"/>
               <a:ext cx="3578047" cy="100218"/>
             </a:xfrm>
             <a:prstGeom prst="rect">
@@ -4816,13 +4848,13 @@
         </p:sp>
         <p:sp>
           <p:nvSpPr>
-            <p:cNvPr id="35" name="tx35"/>
+            <p:cNvPr id="36" name="tx36"/>
             <p:cNvSpPr/>
             <p:nvPr/>
           </p:nvSpPr>
           <p:spPr>
             <a:xfrm rot="-5400000">
-              <a:off x="68446" y="3848213"/>
+              <a:off x="138035" y="2751517"/>
               <a:ext cx="1016904" cy="100218"/>
             </a:xfrm>
             <a:prstGeom prst="rect">
@@ -4862,13 +4894,13 @@
         </p:sp>
         <p:sp>
           <p:nvSpPr>
-            <p:cNvPr id="36" name="tx36"/>
+            <p:cNvPr id="37" name="tx37"/>
             <p:cNvSpPr/>
             <p:nvPr/>
           </p:nvSpPr>
           <p:spPr>
             <a:xfrm>
-              <a:off x="817517" y="1896563"/>
+              <a:off x="887106" y="1966152"/>
               <a:ext cx="6451914" cy="82021"/>
             </a:xfrm>
             <a:prstGeom prst="rect">
@@ -4908,13 +4940,3491 @@
         </p:sp>
         <p:sp>
           <p:nvSpPr>
-            <p:cNvPr id="37" name="tx37"/>
+            <p:cNvPr id="38" name="tx38"/>
             <p:cNvSpPr/>
             <p:nvPr/>
           </p:nvSpPr>
           <p:spPr>
             <a:xfrm>
-              <a:off x="817517" y="1669789"/>
+              <a:off x="887106" y="1739378"/>
+              <a:ext cx="1769272" cy="120152"/>
+            </a:xfrm>
+            <a:prstGeom prst="rect">
+              <a:avLst/>
+            </a:prstGeom>
+            <a:noFill/>
+          </p:spPr>
+          <p:txBody>
+            <a:bodyPr lIns="0" rIns="0" tIns="0" bIns="0" anchorCtr="1" anchor="ctr" wrap="none"/>
+            <a:lstStyle/>
+            <a:p>
+              <a:pPr algn="l" marL="0" marR="0" indent="0">
+                <a:lnSpc>
+                  <a:spcPts val="1320"/>
+                </a:lnSpc>
+                <a:spcBef>
+                  <a:spcPts val="0"/>
+                </a:spcBef>
+                <a:spcAft>
+                  <a:spcPts val="0"/>
+                </a:spcAft>
+              </a:pPr>
+              <a:r>
+                <a:rPr sz="1320">
+                  <a:solidFill>
+                    <a:srgbClr val="000000">
+                      <a:alpha val="100000"/>
+                    </a:srgbClr>
+                  </a:solidFill>
+                  <a:latin typeface="Helvetica"/>
+                  <a:cs typeface="Helvetica"/>
+                </a:rPr>
+                <a:t>Cytopenia (Carboplatin)</a:t>
+              </a:r>
+            </a:p>
+          </p:txBody>
+        </p:sp>
+        <p:sp>
+          <p:nvSpPr>
+            <p:cNvPr id="39" name="pl39"/>
+            <p:cNvSpPr/>
+            <p:nvPr/>
+          </p:nvSpPr>
+          <p:spPr>
+            <a:xfrm>
+              <a:off x="887106" y="5444019"/>
+              <a:ext cx="7660515" cy="0"/>
+            </a:xfrm>
+            <a:custGeom>
+              <a:avLst/>
+              <a:pathLst>
+                <a:path w="7660515" h="0">
+                  <a:moveTo>
+                    <a:pt x="0" y="0"/>
+                  </a:moveTo>
+                  <a:lnTo>
+                    <a:pt x="7660515" y="0"/>
+                  </a:lnTo>
+                  <a:lnTo>
+                    <a:pt x="7660515" y="0"/>
+                  </a:lnTo>
+                </a:path>
+              </a:pathLst>
+            </a:custGeom>
+            <a:ln w="6775" cap="flat">
+              <a:solidFill>
+                <a:srgbClr val="EBEBEB">
+                  <a:alpha val="100000"/>
+                </a:srgbClr>
+              </a:solidFill>
+              <a:prstDash val="solid"/>
+              <a:round/>
+            </a:ln>
+          </p:spPr>
+          <p:txBody>
+            <a:bodyPr/>
+            <a:lstStyle/>
+            <a:p/>
+          </p:txBody>
+        </p:sp>
+        <p:sp>
+          <p:nvSpPr>
+            <p:cNvPr id="40" name="pl40"/>
+            <p:cNvSpPr/>
+            <p:nvPr/>
+          </p:nvSpPr>
+          <p:spPr>
+            <a:xfrm>
+              <a:off x="887106" y="5144686"/>
+              <a:ext cx="7660515" cy="0"/>
+            </a:xfrm>
+            <a:custGeom>
+              <a:avLst/>
+              <a:pathLst>
+                <a:path w="7660515" h="0">
+                  <a:moveTo>
+                    <a:pt x="0" y="0"/>
+                  </a:moveTo>
+                  <a:lnTo>
+                    <a:pt x="7660515" y="0"/>
+                  </a:lnTo>
+                  <a:lnTo>
+                    <a:pt x="7660515" y="0"/>
+                  </a:lnTo>
+                </a:path>
+              </a:pathLst>
+            </a:custGeom>
+            <a:ln w="6775" cap="flat">
+              <a:solidFill>
+                <a:srgbClr val="EBEBEB">
+                  <a:alpha val="100000"/>
+                </a:srgbClr>
+              </a:solidFill>
+              <a:prstDash val="solid"/>
+              <a:round/>
+            </a:ln>
+          </p:spPr>
+          <p:txBody>
+            <a:bodyPr/>
+            <a:lstStyle/>
+            <a:p/>
+          </p:txBody>
+        </p:sp>
+        <p:sp>
+          <p:nvSpPr>
+            <p:cNvPr id="41" name="pl41"/>
+            <p:cNvSpPr/>
+            <p:nvPr/>
+          </p:nvSpPr>
+          <p:spPr>
+            <a:xfrm>
+              <a:off x="887106" y="4845352"/>
+              <a:ext cx="7660515" cy="0"/>
+            </a:xfrm>
+            <a:custGeom>
+              <a:avLst/>
+              <a:pathLst>
+                <a:path w="7660515" h="0">
+                  <a:moveTo>
+                    <a:pt x="0" y="0"/>
+                  </a:moveTo>
+                  <a:lnTo>
+                    <a:pt x="7660515" y="0"/>
+                  </a:lnTo>
+                  <a:lnTo>
+                    <a:pt x="7660515" y="0"/>
+                  </a:lnTo>
+                </a:path>
+              </a:pathLst>
+            </a:custGeom>
+            <a:ln w="6775" cap="flat">
+              <a:solidFill>
+                <a:srgbClr val="EBEBEB">
+                  <a:alpha val="100000"/>
+                </a:srgbClr>
+              </a:solidFill>
+              <a:prstDash val="solid"/>
+              <a:round/>
+            </a:ln>
+          </p:spPr>
+          <p:txBody>
+            <a:bodyPr/>
+            <a:lstStyle/>
+            <a:p/>
+          </p:txBody>
+        </p:sp>
+        <p:sp>
+          <p:nvSpPr>
+            <p:cNvPr id="42" name="pl42"/>
+            <p:cNvSpPr/>
+            <p:nvPr/>
+          </p:nvSpPr>
+          <p:spPr>
+            <a:xfrm>
+              <a:off x="887106" y="4546018"/>
+              <a:ext cx="7660515" cy="0"/>
+            </a:xfrm>
+            <a:custGeom>
+              <a:avLst/>
+              <a:pathLst>
+                <a:path w="7660515" h="0">
+                  <a:moveTo>
+                    <a:pt x="0" y="0"/>
+                  </a:moveTo>
+                  <a:lnTo>
+                    <a:pt x="7660515" y="0"/>
+                  </a:lnTo>
+                  <a:lnTo>
+                    <a:pt x="7660515" y="0"/>
+                  </a:lnTo>
+                </a:path>
+              </a:pathLst>
+            </a:custGeom>
+            <a:ln w="6775" cap="flat">
+              <a:solidFill>
+                <a:srgbClr val="EBEBEB">
+                  <a:alpha val="100000"/>
+                </a:srgbClr>
+              </a:solidFill>
+              <a:prstDash val="solid"/>
+              <a:round/>
+            </a:ln>
+          </p:spPr>
+          <p:txBody>
+            <a:bodyPr/>
+            <a:lstStyle/>
+            <a:p/>
+          </p:txBody>
+        </p:sp>
+        <p:sp>
+          <p:nvSpPr>
+            <p:cNvPr id="43" name="pl43"/>
+            <p:cNvSpPr/>
+            <p:nvPr/>
+          </p:nvSpPr>
+          <p:spPr>
+            <a:xfrm>
+              <a:off x="914987" y="4336484"/>
+              <a:ext cx="0" cy="1317069"/>
+            </a:xfrm>
+            <a:custGeom>
+              <a:avLst/>
+              <a:pathLst>
+                <a:path w="0" h="1317069">
+                  <a:moveTo>
+                    <a:pt x="0" y="1317069"/>
+                  </a:moveTo>
+                  <a:lnTo>
+                    <a:pt x="0" y="0"/>
+                  </a:lnTo>
+                  <a:lnTo>
+                    <a:pt x="0" y="0"/>
+                  </a:lnTo>
+                </a:path>
+              </a:pathLst>
+            </a:custGeom>
+            <a:ln w="6775" cap="flat">
+              <a:solidFill>
+                <a:srgbClr val="EBEBEB">
+                  <a:alpha val="100000"/>
+                </a:srgbClr>
+              </a:solidFill>
+              <a:prstDash val="solid"/>
+              <a:round/>
+            </a:ln>
+          </p:spPr>
+          <p:txBody>
+            <a:bodyPr/>
+            <a:lstStyle/>
+            <a:p/>
+          </p:txBody>
+        </p:sp>
+        <p:sp>
+          <p:nvSpPr>
+            <p:cNvPr id="44" name="pl44"/>
+            <p:cNvSpPr/>
+            <p:nvPr/>
+          </p:nvSpPr>
+          <p:spPr>
+            <a:xfrm>
+              <a:off x="1728588" y="4336484"/>
+              <a:ext cx="0" cy="1317069"/>
+            </a:xfrm>
+            <a:custGeom>
+              <a:avLst/>
+              <a:pathLst>
+                <a:path w="0" h="1317069">
+                  <a:moveTo>
+                    <a:pt x="0" y="1317069"/>
+                  </a:moveTo>
+                  <a:lnTo>
+                    <a:pt x="0" y="0"/>
+                  </a:lnTo>
+                  <a:lnTo>
+                    <a:pt x="0" y="0"/>
+                  </a:lnTo>
+                </a:path>
+              </a:pathLst>
+            </a:custGeom>
+            <a:ln w="6775" cap="flat">
+              <a:solidFill>
+                <a:srgbClr val="EBEBEB">
+                  <a:alpha val="100000"/>
+                </a:srgbClr>
+              </a:solidFill>
+              <a:prstDash val="solid"/>
+              <a:round/>
+            </a:ln>
+          </p:spPr>
+          <p:txBody>
+            <a:bodyPr/>
+            <a:lstStyle/>
+            <a:p/>
+          </p:txBody>
+        </p:sp>
+        <p:sp>
+          <p:nvSpPr>
+            <p:cNvPr id="45" name="pl45"/>
+            <p:cNvSpPr/>
+            <p:nvPr/>
+          </p:nvSpPr>
+          <p:spPr>
+            <a:xfrm>
+              <a:off x="2542190" y="4336484"/>
+              <a:ext cx="0" cy="1317069"/>
+            </a:xfrm>
+            <a:custGeom>
+              <a:avLst/>
+              <a:pathLst>
+                <a:path w="0" h="1317069">
+                  <a:moveTo>
+                    <a:pt x="0" y="1317069"/>
+                  </a:moveTo>
+                  <a:lnTo>
+                    <a:pt x="0" y="0"/>
+                  </a:lnTo>
+                  <a:lnTo>
+                    <a:pt x="0" y="0"/>
+                  </a:lnTo>
+                </a:path>
+              </a:pathLst>
+            </a:custGeom>
+            <a:ln w="6775" cap="flat">
+              <a:solidFill>
+                <a:srgbClr val="EBEBEB">
+                  <a:alpha val="100000"/>
+                </a:srgbClr>
+              </a:solidFill>
+              <a:prstDash val="solid"/>
+              <a:round/>
+            </a:ln>
+          </p:spPr>
+          <p:txBody>
+            <a:bodyPr/>
+            <a:lstStyle/>
+            <a:p/>
+          </p:txBody>
+        </p:sp>
+        <p:sp>
+          <p:nvSpPr>
+            <p:cNvPr id="46" name="pl46"/>
+            <p:cNvSpPr/>
+            <p:nvPr/>
+          </p:nvSpPr>
+          <p:spPr>
+            <a:xfrm>
+              <a:off x="3355791" y="4336484"/>
+              <a:ext cx="0" cy="1317069"/>
+            </a:xfrm>
+            <a:custGeom>
+              <a:avLst/>
+              <a:pathLst>
+                <a:path w="0" h="1317069">
+                  <a:moveTo>
+                    <a:pt x="0" y="1317069"/>
+                  </a:moveTo>
+                  <a:lnTo>
+                    <a:pt x="0" y="0"/>
+                  </a:lnTo>
+                  <a:lnTo>
+                    <a:pt x="0" y="0"/>
+                  </a:lnTo>
+                </a:path>
+              </a:pathLst>
+            </a:custGeom>
+            <a:ln w="6775" cap="flat">
+              <a:solidFill>
+                <a:srgbClr val="EBEBEB">
+                  <a:alpha val="100000"/>
+                </a:srgbClr>
+              </a:solidFill>
+              <a:prstDash val="solid"/>
+              <a:round/>
+            </a:ln>
+          </p:spPr>
+          <p:txBody>
+            <a:bodyPr/>
+            <a:lstStyle/>
+            <a:p/>
+          </p:txBody>
+        </p:sp>
+        <p:sp>
+          <p:nvSpPr>
+            <p:cNvPr id="47" name="pl47"/>
+            <p:cNvSpPr/>
+            <p:nvPr/>
+          </p:nvSpPr>
+          <p:spPr>
+            <a:xfrm>
+              <a:off x="4169393" y="4336484"/>
+              <a:ext cx="0" cy="1317069"/>
+            </a:xfrm>
+            <a:custGeom>
+              <a:avLst/>
+              <a:pathLst>
+                <a:path w="0" h="1317069">
+                  <a:moveTo>
+                    <a:pt x="0" y="1317069"/>
+                  </a:moveTo>
+                  <a:lnTo>
+                    <a:pt x="0" y="0"/>
+                  </a:lnTo>
+                  <a:lnTo>
+                    <a:pt x="0" y="0"/>
+                  </a:lnTo>
+                </a:path>
+              </a:pathLst>
+            </a:custGeom>
+            <a:ln w="6775" cap="flat">
+              <a:solidFill>
+                <a:srgbClr val="EBEBEB">
+                  <a:alpha val="100000"/>
+                </a:srgbClr>
+              </a:solidFill>
+              <a:prstDash val="solid"/>
+              <a:round/>
+            </a:ln>
+          </p:spPr>
+          <p:txBody>
+            <a:bodyPr/>
+            <a:lstStyle/>
+            <a:p/>
+          </p:txBody>
+        </p:sp>
+        <p:sp>
+          <p:nvSpPr>
+            <p:cNvPr id="48" name="pl48"/>
+            <p:cNvSpPr/>
+            <p:nvPr/>
+          </p:nvSpPr>
+          <p:spPr>
+            <a:xfrm>
+              <a:off x="4982994" y="4336484"/>
+              <a:ext cx="0" cy="1317069"/>
+            </a:xfrm>
+            <a:custGeom>
+              <a:avLst/>
+              <a:pathLst>
+                <a:path w="0" h="1317069">
+                  <a:moveTo>
+                    <a:pt x="0" y="1317069"/>
+                  </a:moveTo>
+                  <a:lnTo>
+                    <a:pt x="0" y="0"/>
+                  </a:lnTo>
+                  <a:lnTo>
+                    <a:pt x="0" y="0"/>
+                  </a:lnTo>
+                </a:path>
+              </a:pathLst>
+            </a:custGeom>
+            <a:ln w="6775" cap="flat">
+              <a:solidFill>
+                <a:srgbClr val="EBEBEB">
+                  <a:alpha val="100000"/>
+                </a:srgbClr>
+              </a:solidFill>
+              <a:prstDash val="solid"/>
+              <a:round/>
+            </a:ln>
+          </p:spPr>
+          <p:txBody>
+            <a:bodyPr/>
+            <a:lstStyle/>
+            <a:p/>
+          </p:txBody>
+        </p:sp>
+        <p:sp>
+          <p:nvSpPr>
+            <p:cNvPr id="49" name="pl49"/>
+            <p:cNvSpPr/>
+            <p:nvPr/>
+          </p:nvSpPr>
+          <p:spPr>
+            <a:xfrm>
+              <a:off x="5796595" y="4336484"/>
+              <a:ext cx="0" cy="1317069"/>
+            </a:xfrm>
+            <a:custGeom>
+              <a:avLst/>
+              <a:pathLst>
+                <a:path w="0" h="1317069">
+                  <a:moveTo>
+                    <a:pt x="0" y="1317069"/>
+                  </a:moveTo>
+                  <a:lnTo>
+                    <a:pt x="0" y="0"/>
+                  </a:lnTo>
+                  <a:lnTo>
+                    <a:pt x="0" y="0"/>
+                  </a:lnTo>
+                </a:path>
+              </a:pathLst>
+            </a:custGeom>
+            <a:ln w="6775" cap="flat">
+              <a:solidFill>
+                <a:srgbClr val="EBEBEB">
+                  <a:alpha val="100000"/>
+                </a:srgbClr>
+              </a:solidFill>
+              <a:prstDash val="solid"/>
+              <a:round/>
+            </a:ln>
+          </p:spPr>
+          <p:txBody>
+            <a:bodyPr/>
+            <a:lstStyle/>
+            <a:p/>
+          </p:txBody>
+        </p:sp>
+        <p:sp>
+          <p:nvSpPr>
+            <p:cNvPr id="50" name="pl50"/>
+            <p:cNvSpPr/>
+            <p:nvPr/>
+          </p:nvSpPr>
+          <p:spPr>
+            <a:xfrm>
+              <a:off x="6610197" y="4336484"/>
+              <a:ext cx="0" cy="1317069"/>
+            </a:xfrm>
+            <a:custGeom>
+              <a:avLst/>
+              <a:pathLst>
+                <a:path w="0" h="1317069">
+                  <a:moveTo>
+                    <a:pt x="0" y="1317069"/>
+                  </a:moveTo>
+                  <a:lnTo>
+                    <a:pt x="0" y="0"/>
+                  </a:lnTo>
+                  <a:lnTo>
+                    <a:pt x="0" y="0"/>
+                  </a:lnTo>
+                </a:path>
+              </a:pathLst>
+            </a:custGeom>
+            <a:ln w="6775" cap="flat">
+              <a:solidFill>
+                <a:srgbClr val="EBEBEB">
+                  <a:alpha val="100000"/>
+                </a:srgbClr>
+              </a:solidFill>
+              <a:prstDash val="solid"/>
+              <a:round/>
+            </a:ln>
+          </p:spPr>
+          <p:txBody>
+            <a:bodyPr/>
+            <a:lstStyle/>
+            <a:p/>
+          </p:txBody>
+        </p:sp>
+        <p:sp>
+          <p:nvSpPr>
+            <p:cNvPr id="51" name="pl51"/>
+            <p:cNvSpPr/>
+            <p:nvPr/>
+          </p:nvSpPr>
+          <p:spPr>
+            <a:xfrm>
+              <a:off x="7423798" y="4336484"/>
+              <a:ext cx="0" cy="1317069"/>
+            </a:xfrm>
+            <a:custGeom>
+              <a:avLst/>
+              <a:pathLst>
+                <a:path w="0" h="1317069">
+                  <a:moveTo>
+                    <a:pt x="0" y="1317069"/>
+                  </a:moveTo>
+                  <a:lnTo>
+                    <a:pt x="0" y="0"/>
+                  </a:lnTo>
+                  <a:lnTo>
+                    <a:pt x="0" y="0"/>
+                  </a:lnTo>
+                </a:path>
+              </a:pathLst>
+            </a:custGeom>
+            <a:ln w="6775" cap="flat">
+              <a:solidFill>
+                <a:srgbClr val="EBEBEB">
+                  <a:alpha val="100000"/>
+                </a:srgbClr>
+              </a:solidFill>
+              <a:prstDash val="solid"/>
+              <a:round/>
+            </a:ln>
+          </p:spPr>
+          <p:txBody>
+            <a:bodyPr/>
+            <a:lstStyle/>
+            <a:p/>
+          </p:txBody>
+        </p:sp>
+        <p:sp>
+          <p:nvSpPr>
+            <p:cNvPr id="52" name="pl52"/>
+            <p:cNvSpPr/>
+            <p:nvPr/>
+          </p:nvSpPr>
+          <p:spPr>
+            <a:xfrm>
+              <a:off x="8237399" y="4336484"/>
+              <a:ext cx="0" cy="1317069"/>
+            </a:xfrm>
+            <a:custGeom>
+              <a:avLst/>
+              <a:pathLst>
+                <a:path w="0" h="1317069">
+                  <a:moveTo>
+                    <a:pt x="0" y="1317069"/>
+                  </a:moveTo>
+                  <a:lnTo>
+                    <a:pt x="0" y="0"/>
+                  </a:lnTo>
+                  <a:lnTo>
+                    <a:pt x="0" y="0"/>
+                  </a:lnTo>
+                </a:path>
+              </a:pathLst>
+            </a:custGeom>
+            <a:ln w="6775" cap="flat">
+              <a:solidFill>
+                <a:srgbClr val="EBEBEB">
+                  <a:alpha val="100000"/>
+                </a:srgbClr>
+              </a:solidFill>
+              <a:prstDash val="solid"/>
+              <a:round/>
+            </a:ln>
+          </p:spPr>
+          <p:txBody>
+            <a:bodyPr/>
+            <a:lstStyle/>
+            <a:p/>
+          </p:txBody>
+        </p:sp>
+        <p:sp>
+          <p:nvSpPr>
+            <p:cNvPr id="53" name="pl53"/>
+            <p:cNvSpPr/>
+            <p:nvPr/>
+          </p:nvSpPr>
+          <p:spPr>
+            <a:xfrm>
+              <a:off x="887106" y="5593686"/>
+              <a:ext cx="7660515" cy="0"/>
+            </a:xfrm>
+            <a:custGeom>
+              <a:avLst/>
+              <a:pathLst>
+                <a:path w="7660515" h="0">
+                  <a:moveTo>
+                    <a:pt x="0" y="0"/>
+                  </a:moveTo>
+                  <a:lnTo>
+                    <a:pt x="7660515" y="0"/>
+                  </a:lnTo>
+                  <a:lnTo>
+                    <a:pt x="7660515" y="0"/>
+                  </a:lnTo>
+                </a:path>
+              </a:pathLst>
+            </a:custGeom>
+            <a:ln w="13550" cap="flat">
+              <a:solidFill>
+                <a:srgbClr val="EBEBEB">
+                  <a:alpha val="100000"/>
+                </a:srgbClr>
+              </a:solidFill>
+              <a:prstDash val="solid"/>
+              <a:round/>
+            </a:ln>
+          </p:spPr>
+          <p:txBody>
+            <a:bodyPr/>
+            <a:lstStyle/>
+            <a:p/>
+          </p:txBody>
+        </p:sp>
+        <p:sp>
+          <p:nvSpPr>
+            <p:cNvPr id="54" name="pl54"/>
+            <p:cNvSpPr/>
+            <p:nvPr/>
+          </p:nvSpPr>
+          <p:spPr>
+            <a:xfrm>
+              <a:off x="887106" y="5294352"/>
+              <a:ext cx="7660515" cy="0"/>
+            </a:xfrm>
+            <a:custGeom>
+              <a:avLst/>
+              <a:pathLst>
+                <a:path w="7660515" h="0">
+                  <a:moveTo>
+                    <a:pt x="0" y="0"/>
+                  </a:moveTo>
+                  <a:lnTo>
+                    <a:pt x="7660515" y="0"/>
+                  </a:lnTo>
+                  <a:lnTo>
+                    <a:pt x="7660515" y="0"/>
+                  </a:lnTo>
+                </a:path>
+              </a:pathLst>
+            </a:custGeom>
+            <a:ln w="13550" cap="flat">
+              <a:solidFill>
+                <a:srgbClr val="EBEBEB">
+                  <a:alpha val="100000"/>
+                </a:srgbClr>
+              </a:solidFill>
+              <a:prstDash val="solid"/>
+              <a:round/>
+            </a:ln>
+          </p:spPr>
+          <p:txBody>
+            <a:bodyPr/>
+            <a:lstStyle/>
+            <a:p/>
+          </p:txBody>
+        </p:sp>
+        <p:sp>
+          <p:nvSpPr>
+            <p:cNvPr id="55" name="pl55"/>
+            <p:cNvSpPr/>
+            <p:nvPr/>
+          </p:nvSpPr>
+          <p:spPr>
+            <a:xfrm>
+              <a:off x="887106" y="4995019"/>
+              <a:ext cx="7660515" cy="0"/>
+            </a:xfrm>
+            <a:custGeom>
+              <a:avLst/>
+              <a:pathLst>
+                <a:path w="7660515" h="0">
+                  <a:moveTo>
+                    <a:pt x="0" y="0"/>
+                  </a:moveTo>
+                  <a:lnTo>
+                    <a:pt x="7660515" y="0"/>
+                  </a:lnTo>
+                  <a:lnTo>
+                    <a:pt x="7660515" y="0"/>
+                  </a:lnTo>
+                </a:path>
+              </a:pathLst>
+            </a:custGeom>
+            <a:ln w="13550" cap="flat">
+              <a:solidFill>
+                <a:srgbClr val="EBEBEB">
+                  <a:alpha val="100000"/>
+                </a:srgbClr>
+              </a:solidFill>
+              <a:prstDash val="solid"/>
+              <a:round/>
+            </a:ln>
+          </p:spPr>
+          <p:txBody>
+            <a:bodyPr/>
+            <a:lstStyle/>
+            <a:p/>
+          </p:txBody>
+        </p:sp>
+        <p:sp>
+          <p:nvSpPr>
+            <p:cNvPr id="56" name="pl56"/>
+            <p:cNvSpPr/>
+            <p:nvPr/>
+          </p:nvSpPr>
+          <p:spPr>
+            <a:xfrm>
+              <a:off x="887106" y="4695685"/>
+              <a:ext cx="7660515" cy="0"/>
+            </a:xfrm>
+            <a:custGeom>
+              <a:avLst/>
+              <a:pathLst>
+                <a:path w="7660515" h="0">
+                  <a:moveTo>
+                    <a:pt x="0" y="0"/>
+                  </a:moveTo>
+                  <a:lnTo>
+                    <a:pt x="7660515" y="0"/>
+                  </a:lnTo>
+                  <a:lnTo>
+                    <a:pt x="7660515" y="0"/>
+                  </a:lnTo>
+                </a:path>
+              </a:pathLst>
+            </a:custGeom>
+            <a:ln w="13550" cap="flat">
+              <a:solidFill>
+                <a:srgbClr val="EBEBEB">
+                  <a:alpha val="100000"/>
+                </a:srgbClr>
+              </a:solidFill>
+              <a:prstDash val="solid"/>
+              <a:round/>
+            </a:ln>
+          </p:spPr>
+          <p:txBody>
+            <a:bodyPr/>
+            <a:lstStyle/>
+            <a:p/>
+          </p:txBody>
+        </p:sp>
+        <p:sp>
+          <p:nvSpPr>
+            <p:cNvPr id="57" name="pl57"/>
+            <p:cNvSpPr/>
+            <p:nvPr/>
+          </p:nvSpPr>
+          <p:spPr>
+            <a:xfrm>
+              <a:off x="887106" y="4396351"/>
+              <a:ext cx="7660515" cy="0"/>
+            </a:xfrm>
+            <a:custGeom>
+              <a:avLst/>
+              <a:pathLst>
+                <a:path w="7660515" h="0">
+                  <a:moveTo>
+                    <a:pt x="0" y="0"/>
+                  </a:moveTo>
+                  <a:lnTo>
+                    <a:pt x="7660515" y="0"/>
+                  </a:lnTo>
+                  <a:lnTo>
+                    <a:pt x="7660515" y="0"/>
+                  </a:lnTo>
+                </a:path>
+              </a:pathLst>
+            </a:custGeom>
+            <a:ln w="13550" cap="flat">
+              <a:solidFill>
+                <a:srgbClr val="EBEBEB">
+                  <a:alpha val="100000"/>
+                </a:srgbClr>
+              </a:solidFill>
+              <a:prstDash val="solid"/>
+              <a:round/>
+            </a:ln>
+          </p:spPr>
+          <p:txBody>
+            <a:bodyPr/>
+            <a:lstStyle/>
+            <a:p/>
+          </p:txBody>
+        </p:sp>
+        <p:sp>
+          <p:nvSpPr>
+            <p:cNvPr id="58" name="pl58"/>
+            <p:cNvSpPr/>
+            <p:nvPr/>
+          </p:nvSpPr>
+          <p:spPr>
+            <a:xfrm>
+              <a:off x="1321788" y="4336484"/>
+              <a:ext cx="0" cy="1317069"/>
+            </a:xfrm>
+            <a:custGeom>
+              <a:avLst/>
+              <a:pathLst>
+                <a:path w="0" h="1317069">
+                  <a:moveTo>
+                    <a:pt x="0" y="1317069"/>
+                  </a:moveTo>
+                  <a:lnTo>
+                    <a:pt x="0" y="0"/>
+                  </a:lnTo>
+                  <a:lnTo>
+                    <a:pt x="0" y="0"/>
+                  </a:lnTo>
+                </a:path>
+              </a:pathLst>
+            </a:custGeom>
+            <a:ln w="13550" cap="flat">
+              <a:solidFill>
+                <a:srgbClr val="EBEBEB">
+                  <a:alpha val="100000"/>
+                </a:srgbClr>
+              </a:solidFill>
+              <a:prstDash val="solid"/>
+              <a:round/>
+            </a:ln>
+          </p:spPr>
+          <p:txBody>
+            <a:bodyPr/>
+            <a:lstStyle/>
+            <a:p/>
+          </p:txBody>
+        </p:sp>
+        <p:sp>
+          <p:nvSpPr>
+            <p:cNvPr id="59" name="pl59"/>
+            <p:cNvSpPr/>
+            <p:nvPr/>
+          </p:nvSpPr>
+          <p:spPr>
+            <a:xfrm>
+              <a:off x="2135389" y="4336484"/>
+              <a:ext cx="0" cy="1317069"/>
+            </a:xfrm>
+            <a:custGeom>
+              <a:avLst/>
+              <a:pathLst>
+                <a:path w="0" h="1317069">
+                  <a:moveTo>
+                    <a:pt x="0" y="1317069"/>
+                  </a:moveTo>
+                  <a:lnTo>
+                    <a:pt x="0" y="0"/>
+                  </a:lnTo>
+                  <a:lnTo>
+                    <a:pt x="0" y="0"/>
+                  </a:lnTo>
+                </a:path>
+              </a:pathLst>
+            </a:custGeom>
+            <a:ln w="13550" cap="flat">
+              <a:solidFill>
+                <a:srgbClr val="EBEBEB">
+                  <a:alpha val="100000"/>
+                </a:srgbClr>
+              </a:solidFill>
+              <a:prstDash val="solid"/>
+              <a:round/>
+            </a:ln>
+          </p:spPr>
+          <p:txBody>
+            <a:bodyPr/>
+            <a:lstStyle/>
+            <a:p/>
+          </p:txBody>
+        </p:sp>
+        <p:sp>
+          <p:nvSpPr>
+            <p:cNvPr id="60" name="pl60"/>
+            <p:cNvSpPr/>
+            <p:nvPr/>
+          </p:nvSpPr>
+          <p:spPr>
+            <a:xfrm>
+              <a:off x="2948991" y="4336484"/>
+              <a:ext cx="0" cy="1317069"/>
+            </a:xfrm>
+            <a:custGeom>
+              <a:avLst/>
+              <a:pathLst>
+                <a:path w="0" h="1317069">
+                  <a:moveTo>
+                    <a:pt x="0" y="1317069"/>
+                  </a:moveTo>
+                  <a:lnTo>
+                    <a:pt x="0" y="0"/>
+                  </a:lnTo>
+                  <a:lnTo>
+                    <a:pt x="0" y="0"/>
+                  </a:lnTo>
+                </a:path>
+              </a:pathLst>
+            </a:custGeom>
+            <a:ln w="13550" cap="flat">
+              <a:solidFill>
+                <a:srgbClr val="EBEBEB">
+                  <a:alpha val="100000"/>
+                </a:srgbClr>
+              </a:solidFill>
+              <a:prstDash val="solid"/>
+              <a:round/>
+            </a:ln>
+          </p:spPr>
+          <p:txBody>
+            <a:bodyPr/>
+            <a:lstStyle/>
+            <a:p/>
+          </p:txBody>
+        </p:sp>
+        <p:sp>
+          <p:nvSpPr>
+            <p:cNvPr id="61" name="pl61"/>
+            <p:cNvSpPr/>
+            <p:nvPr/>
+          </p:nvSpPr>
+          <p:spPr>
+            <a:xfrm>
+              <a:off x="3762592" y="4336484"/>
+              <a:ext cx="0" cy="1317069"/>
+            </a:xfrm>
+            <a:custGeom>
+              <a:avLst/>
+              <a:pathLst>
+                <a:path w="0" h="1317069">
+                  <a:moveTo>
+                    <a:pt x="0" y="1317069"/>
+                  </a:moveTo>
+                  <a:lnTo>
+                    <a:pt x="0" y="0"/>
+                  </a:lnTo>
+                  <a:lnTo>
+                    <a:pt x="0" y="0"/>
+                  </a:lnTo>
+                </a:path>
+              </a:pathLst>
+            </a:custGeom>
+            <a:ln w="13550" cap="flat">
+              <a:solidFill>
+                <a:srgbClr val="EBEBEB">
+                  <a:alpha val="100000"/>
+                </a:srgbClr>
+              </a:solidFill>
+              <a:prstDash val="solid"/>
+              <a:round/>
+            </a:ln>
+          </p:spPr>
+          <p:txBody>
+            <a:bodyPr/>
+            <a:lstStyle/>
+            <a:p/>
+          </p:txBody>
+        </p:sp>
+        <p:sp>
+          <p:nvSpPr>
+            <p:cNvPr id="62" name="pl62"/>
+            <p:cNvSpPr/>
+            <p:nvPr/>
+          </p:nvSpPr>
+          <p:spPr>
+            <a:xfrm>
+              <a:off x="4576193" y="4336484"/>
+              <a:ext cx="0" cy="1317069"/>
+            </a:xfrm>
+            <a:custGeom>
+              <a:avLst/>
+              <a:pathLst>
+                <a:path w="0" h="1317069">
+                  <a:moveTo>
+                    <a:pt x="0" y="1317069"/>
+                  </a:moveTo>
+                  <a:lnTo>
+                    <a:pt x="0" y="0"/>
+                  </a:lnTo>
+                  <a:lnTo>
+                    <a:pt x="0" y="0"/>
+                  </a:lnTo>
+                </a:path>
+              </a:pathLst>
+            </a:custGeom>
+            <a:ln w="13550" cap="flat">
+              <a:solidFill>
+                <a:srgbClr val="EBEBEB">
+                  <a:alpha val="100000"/>
+                </a:srgbClr>
+              </a:solidFill>
+              <a:prstDash val="solid"/>
+              <a:round/>
+            </a:ln>
+          </p:spPr>
+          <p:txBody>
+            <a:bodyPr/>
+            <a:lstStyle/>
+            <a:p/>
+          </p:txBody>
+        </p:sp>
+        <p:sp>
+          <p:nvSpPr>
+            <p:cNvPr id="63" name="pl63"/>
+            <p:cNvSpPr/>
+            <p:nvPr/>
+          </p:nvSpPr>
+          <p:spPr>
+            <a:xfrm>
+              <a:off x="5389795" y="4336484"/>
+              <a:ext cx="0" cy="1317069"/>
+            </a:xfrm>
+            <a:custGeom>
+              <a:avLst/>
+              <a:pathLst>
+                <a:path w="0" h="1317069">
+                  <a:moveTo>
+                    <a:pt x="0" y="1317069"/>
+                  </a:moveTo>
+                  <a:lnTo>
+                    <a:pt x="0" y="0"/>
+                  </a:lnTo>
+                  <a:lnTo>
+                    <a:pt x="0" y="0"/>
+                  </a:lnTo>
+                </a:path>
+              </a:pathLst>
+            </a:custGeom>
+            <a:ln w="13550" cap="flat">
+              <a:solidFill>
+                <a:srgbClr val="EBEBEB">
+                  <a:alpha val="100000"/>
+                </a:srgbClr>
+              </a:solidFill>
+              <a:prstDash val="solid"/>
+              <a:round/>
+            </a:ln>
+          </p:spPr>
+          <p:txBody>
+            <a:bodyPr/>
+            <a:lstStyle/>
+            <a:p/>
+          </p:txBody>
+        </p:sp>
+        <p:sp>
+          <p:nvSpPr>
+            <p:cNvPr id="64" name="pl64"/>
+            <p:cNvSpPr/>
+            <p:nvPr/>
+          </p:nvSpPr>
+          <p:spPr>
+            <a:xfrm>
+              <a:off x="6203396" y="4336484"/>
+              <a:ext cx="0" cy="1317069"/>
+            </a:xfrm>
+            <a:custGeom>
+              <a:avLst/>
+              <a:pathLst>
+                <a:path w="0" h="1317069">
+                  <a:moveTo>
+                    <a:pt x="0" y="1317069"/>
+                  </a:moveTo>
+                  <a:lnTo>
+                    <a:pt x="0" y="0"/>
+                  </a:lnTo>
+                  <a:lnTo>
+                    <a:pt x="0" y="0"/>
+                  </a:lnTo>
+                </a:path>
+              </a:pathLst>
+            </a:custGeom>
+            <a:ln w="13550" cap="flat">
+              <a:solidFill>
+                <a:srgbClr val="EBEBEB">
+                  <a:alpha val="100000"/>
+                </a:srgbClr>
+              </a:solidFill>
+              <a:prstDash val="solid"/>
+              <a:round/>
+            </a:ln>
+          </p:spPr>
+          <p:txBody>
+            <a:bodyPr/>
+            <a:lstStyle/>
+            <a:p/>
+          </p:txBody>
+        </p:sp>
+        <p:sp>
+          <p:nvSpPr>
+            <p:cNvPr id="65" name="pl65"/>
+            <p:cNvSpPr/>
+            <p:nvPr/>
+          </p:nvSpPr>
+          <p:spPr>
+            <a:xfrm>
+              <a:off x="7016997" y="4336484"/>
+              <a:ext cx="0" cy="1317069"/>
+            </a:xfrm>
+            <a:custGeom>
+              <a:avLst/>
+              <a:pathLst>
+                <a:path w="0" h="1317069">
+                  <a:moveTo>
+                    <a:pt x="0" y="1317069"/>
+                  </a:moveTo>
+                  <a:lnTo>
+                    <a:pt x="0" y="0"/>
+                  </a:lnTo>
+                  <a:lnTo>
+                    <a:pt x="0" y="0"/>
+                  </a:lnTo>
+                </a:path>
+              </a:pathLst>
+            </a:custGeom>
+            <a:ln w="13550" cap="flat">
+              <a:solidFill>
+                <a:srgbClr val="EBEBEB">
+                  <a:alpha val="100000"/>
+                </a:srgbClr>
+              </a:solidFill>
+              <a:prstDash val="solid"/>
+              <a:round/>
+            </a:ln>
+          </p:spPr>
+          <p:txBody>
+            <a:bodyPr/>
+            <a:lstStyle/>
+            <a:p/>
+          </p:txBody>
+        </p:sp>
+        <p:sp>
+          <p:nvSpPr>
+            <p:cNvPr id="66" name="pl66"/>
+            <p:cNvSpPr/>
+            <p:nvPr/>
+          </p:nvSpPr>
+          <p:spPr>
+            <a:xfrm>
+              <a:off x="7830599" y="4336484"/>
+              <a:ext cx="0" cy="1317069"/>
+            </a:xfrm>
+            <a:custGeom>
+              <a:avLst/>
+              <a:pathLst>
+                <a:path w="0" h="1317069">
+                  <a:moveTo>
+                    <a:pt x="0" y="1317069"/>
+                  </a:moveTo>
+                  <a:lnTo>
+                    <a:pt x="0" y="0"/>
+                  </a:lnTo>
+                  <a:lnTo>
+                    <a:pt x="0" y="0"/>
+                  </a:lnTo>
+                </a:path>
+              </a:pathLst>
+            </a:custGeom>
+            <a:ln w="13550" cap="flat">
+              <a:solidFill>
+                <a:srgbClr val="EBEBEB">
+                  <a:alpha val="100000"/>
+                </a:srgbClr>
+              </a:solidFill>
+              <a:prstDash val="solid"/>
+              <a:round/>
+            </a:ln>
+          </p:spPr>
+          <p:txBody>
+            <a:bodyPr/>
+            <a:lstStyle/>
+            <a:p/>
+          </p:txBody>
+        </p:sp>
+        <p:sp>
+          <p:nvSpPr>
+            <p:cNvPr id="67" name="pg67"/>
+            <p:cNvSpPr/>
+            <p:nvPr/>
+          </p:nvSpPr>
+          <p:spPr>
+            <a:xfrm>
+              <a:off x="1235312" y="4336484"/>
+              <a:ext cx="6964104" cy="1255159"/>
+            </a:xfrm>
+            <a:custGeom>
+              <a:avLst/>
+              <a:pathLst>
+                <a:path w="6964104" h="1255159">
+                  <a:moveTo>
+                    <a:pt x="2239732" y="0"/>
+                  </a:moveTo>
+                  <a:lnTo>
+                    <a:pt x="2251023" y="19927"/>
+                  </a:lnTo>
+                  <a:lnTo>
+                    <a:pt x="2321368" y="132752"/>
+                  </a:lnTo>
+                  <a:lnTo>
+                    <a:pt x="2391712" y="235289"/>
+                  </a:lnTo>
+                  <a:lnTo>
+                    <a:pt x="2462057" y="328476"/>
+                  </a:lnTo>
+                  <a:lnTo>
+                    <a:pt x="2532401" y="413165"/>
+                  </a:lnTo>
+                  <a:lnTo>
+                    <a:pt x="2602746" y="490131"/>
+                  </a:lnTo>
+                  <a:lnTo>
+                    <a:pt x="2673090" y="560079"/>
+                  </a:lnTo>
+                  <a:lnTo>
+                    <a:pt x="2743435" y="623649"/>
+                  </a:lnTo>
+                  <a:lnTo>
+                    <a:pt x="2813779" y="681421"/>
+                  </a:lnTo>
+                  <a:lnTo>
+                    <a:pt x="2884124" y="733926"/>
+                  </a:lnTo>
+                  <a:lnTo>
+                    <a:pt x="2954468" y="781643"/>
+                  </a:lnTo>
+                  <a:lnTo>
+                    <a:pt x="3024813" y="825008"/>
+                  </a:lnTo>
+                  <a:lnTo>
+                    <a:pt x="3095157" y="864419"/>
+                  </a:lnTo>
+                  <a:lnTo>
+                    <a:pt x="3165502" y="900236"/>
+                  </a:lnTo>
+                  <a:lnTo>
+                    <a:pt x="3235846" y="932788"/>
+                  </a:lnTo>
+                  <a:lnTo>
+                    <a:pt x="3306191" y="959124"/>
+                  </a:lnTo>
+                  <a:lnTo>
+                    <a:pt x="3376535" y="966927"/>
+                  </a:lnTo>
+                  <a:lnTo>
+                    <a:pt x="3446880" y="974526"/>
+                  </a:lnTo>
+                  <a:lnTo>
+                    <a:pt x="3517224" y="981926"/>
+                  </a:lnTo>
+                  <a:lnTo>
+                    <a:pt x="3587569" y="989133"/>
+                  </a:lnTo>
+                  <a:lnTo>
+                    <a:pt x="3657913" y="996150"/>
+                  </a:lnTo>
+                  <a:lnTo>
+                    <a:pt x="3728257" y="1002984"/>
+                  </a:lnTo>
+                  <a:lnTo>
+                    <a:pt x="3798602" y="1009639"/>
+                  </a:lnTo>
+                  <a:lnTo>
+                    <a:pt x="3868946" y="1016120"/>
+                  </a:lnTo>
+                  <a:lnTo>
+                    <a:pt x="3939291" y="1022432"/>
+                  </a:lnTo>
+                  <a:lnTo>
+                    <a:pt x="4009635" y="1028578"/>
+                  </a:lnTo>
+                  <a:lnTo>
+                    <a:pt x="4079980" y="1034563"/>
+                  </a:lnTo>
+                  <a:lnTo>
+                    <a:pt x="4150324" y="1040391"/>
+                  </a:lnTo>
+                  <a:lnTo>
+                    <a:pt x="4220669" y="1046067"/>
+                  </a:lnTo>
+                  <a:lnTo>
+                    <a:pt x="4291013" y="1051594"/>
+                  </a:lnTo>
+                  <a:lnTo>
+                    <a:pt x="4361358" y="1056977"/>
+                  </a:lnTo>
+                  <a:lnTo>
+                    <a:pt x="4431702" y="1062218"/>
+                  </a:lnTo>
+                  <a:lnTo>
+                    <a:pt x="4502047" y="1067323"/>
+                  </a:lnTo>
+                  <a:lnTo>
+                    <a:pt x="4572391" y="1072294"/>
+                  </a:lnTo>
+                  <a:lnTo>
+                    <a:pt x="4642736" y="1077134"/>
+                  </a:lnTo>
+                  <a:lnTo>
+                    <a:pt x="4713080" y="1081848"/>
+                  </a:lnTo>
+                  <a:lnTo>
+                    <a:pt x="4783425" y="1086439"/>
+                  </a:lnTo>
+                  <a:lnTo>
+                    <a:pt x="4853769" y="1090909"/>
+                  </a:lnTo>
+                  <a:lnTo>
+                    <a:pt x="4924114" y="1095262"/>
+                  </a:lnTo>
+                  <a:lnTo>
+                    <a:pt x="4994458" y="1099502"/>
+                  </a:lnTo>
+                  <a:lnTo>
+                    <a:pt x="5064803" y="1103630"/>
+                  </a:lnTo>
+                  <a:lnTo>
+                    <a:pt x="5135147" y="1107650"/>
+                  </a:lnTo>
+                  <a:lnTo>
+                    <a:pt x="5205492" y="1111566"/>
+                  </a:lnTo>
+                  <a:lnTo>
+                    <a:pt x="5275836" y="1115378"/>
+                  </a:lnTo>
+                  <a:lnTo>
+                    <a:pt x="5346181" y="1119091"/>
+                  </a:lnTo>
+                  <a:lnTo>
+                    <a:pt x="5416525" y="1122706"/>
+                  </a:lnTo>
+                  <a:lnTo>
+                    <a:pt x="5486870" y="1126227"/>
+                  </a:lnTo>
+                  <a:lnTo>
+                    <a:pt x="5557214" y="1129656"/>
+                  </a:lnTo>
+                  <a:lnTo>
+                    <a:pt x="5627559" y="1132995"/>
+                  </a:lnTo>
+                  <a:lnTo>
+                    <a:pt x="5697903" y="1136247"/>
+                  </a:lnTo>
+                  <a:lnTo>
+                    <a:pt x="5768248" y="1139413"/>
+                  </a:lnTo>
+                  <a:lnTo>
+                    <a:pt x="5838592" y="1142497"/>
+                  </a:lnTo>
+                  <a:lnTo>
+                    <a:pt x="5908937" y="1145499"/>
+                  </a:lnTo>
+                  <a:lnTo>
+                    <a:pt x="5979281" y="1148424"/>
+                  </a:lnTo>
+                  <a:lnTo>
+                    <a:pt x="6049626" y="1151271"/>
+                  </a:lnTo>
+                  <a:lnTo>
+                    <a:pt x="6119970" y="1154045"/>
+                  </a:lnTo>
+                  <a:lnTo>
+                    <a:pt x="6190315" y="1156745"/>
+                  </a:lnTo>
+                  <a:lnTo>
+                    <a:pt x="6260659" y="1159375"/>
+                  </a:lnTo>
+                  <a:lnTo>
+                    <a:pt x="6331004" y="1161936"/>
+                  </a:lnTo>
+                  <a:lnTo>
+                    <a:pt x="6401348" y="1164430"/>
+                  </a:lnTo>
+                  <a:lnTo>
+                    <a:pt x="6471693" y="1166858"/>
+                  </a:lnTo>
+                  <a:lnTo>
+                    <a:pt x="6542037" y="1169224"/>
+                  </a:lnTo>
+                  <a:lnTo>
+                    <a:pt x="6612382" y="1171527"/>
+                  </a:lnTo>
+                  <a:lnTo>
+                    <a:pt x="6682726" y="1173770"/>
+                  </a:lnTo>
+                  <a:lnTo>
+                    <a:pt x="6753071" y="1175954"/>
+                  </a:lnTo>
+                  <a:lnTo>
+                    <a:pt x="6823415" y="1178081"/>
+                  </a:lnTo>
+                  <a:lnTo>
+                    <a:pt x="6893760" y="1180152"/>
+                  </a:lnTo>
+                  <a:lnTo>
+                    <a:pt x="6964104" y="1182169"/>
+                  </a:lnTo>
+                  <a:lnTo>
+                    <a:pt x="6964104" y="1255159"/>
+                  </a:lnTo>
+                  <a:lnTo>
+                    <a:pt x="6893760" y="1254954"/>
+                  </a:lnTo>
+                  <a:lnTo>
+                    <a:pt x="6823415" y="1254729"/>
+                  </a:lnTo>
+                  <a:lnTo>
+                    <a:pt x="6753071" y="1254480"/>
+                  </a:lnTo>
+                  <a:lnTo>
+                    <a:pt x="6682726" y="1254207"/>
+                  </a:lnTo>
+                  <a:lnTo>
+                    <a:pt x="6612382" y="1253907"/>
+                  </a:lnTo>
+                  <a:lnTo>
+                    <a:pt x="6542037" y="1253576"/>
+                  </a:lnTo>
+                  <a:lnTo>
+                    <a:pt x="6471693" y="1253213"/>
+                  </a:lnTo>
+                  <a:lnTo>
+                    <a:pt x="6401348" y="1252812"/>
+                  </a:lnTo>
+                  <a:lnTo>
+                    <a:pt x="6331004" y="1252372"/>
+                  </a:lnTo>
+                  <a:lnTo>
+                    <a:pt x="6260659" y="1251887"/>
+                  </a:lnTo>
+                  <a:lnTo>
+                    <a:pt x="6190315" y="1251354"/>
+                  </a:lnTo>
+                  <a:lnTo>
+                    <a:pt x="6119970" y="1250767"/>
+                  </a:lnTo>
+                  <a:lnTo>
+                    <a:pt x="6049626" y="1250121"/>
+                  </a:lnTo>
+                  <a:lnTo>
+                    <a:pt x="5979281" y="1249411"/>
+                  </a:lnTo>
+                  <a:lnTo>
+                    <a:pt x="5908937" y="1248629"/>
+                  </a:lnTo>
+                  <a:lnTo>
+                    <a:pt x="5838592" y="1247769"/>
+                  </a:lnTo>
+                  <a:lnTo>
+                    <a:pt x="5768248" y="1246823"/>
+                  </a:lnTo>
+                  <a:lnTo>
+                    <a:pt x="5697903" y="1245781"/>
+                  </a:lnTo>
+                  <a:lnTo>
+                    <a:pt x="5627559" y="1244635"/>
+                  </a:lnTo>
+                  <a:lnTo>
+                    <a:pt x="5557214" y="1243375"/>
+                  </a:lnTo>
+                  <a:lnTo>
+                    <a:pt x="5486870" y="1241987"/>
+                  </a:lnTo>
+                  <a:lnTo>
+                    <a:pt x="5416525" y="1240461"/>
+                  </a:lnTo>
+                  <a:lnTo>
+                    <a:pt x="5346181" y="1238781"/>
+                  </a:lnTo>
+                  <a:lnTo>
+                    <a:pt x="5275836" y="1236932"/>
+                  </a:lnTo>
+                  <a:lnTo>
+                    <a:pt x="5205492" y="1234899"/>
+                  </a:lnTo>
+                  <a:lnTo>
+                    <a:pt x="5135147" y="1232661"/>
+                  </a:lnTo>
+                  <a:lnTo>
+                    <a:pt x="5064803" y="1230198"/>
+                  </a:lnTo>
+                  <a:lnTo>
+                    <a:pt x="4994458" y="1227489"/>
+                  </a:lnTo>
+                  <a:lnTo>
+                    <a:pt x="4924114" y="1224508"/>
+                  </a:lnTo>
+                  <a:lnTo>
+                    <a:pt x="4853769" y="1221227"/>
+                  </a:lnTo>
+                  <a:lnTo>
+                    <a:pt x="4783425" y="1217617"/>
+                  </a:lnTo>
+                  <a:lnTo>
+                    <a:pt x="4713080" y="1213646"/>
+                  </a:lnTo>
+                  <a:lnTo>
+                    <a:pt x="4642736" y="1209275"/>
+                  </a:lnTo>
+                  <a:lnTo>
+                    <a:pt x="4572391" y="1204466"/>
+                  </a:lnTo>
+                  <a:lnTo>
+                    <a:pt x="4502047" y="1199175"/>
+                  </a:lnTo>
+                  <a:lnTo>
+                    <a:pt x="4431702" y="1193353"/>
+                  </a:lnTo>
+                  <a:lnTo>
+                    <a:pt x="4361358" y="1186946"/>
+                  </a:lnTo>
+                  <a:lnTo>
+                    <a:pt x="4291013" y="1179897"/>
+                  </a:lnTo>
+                  <a:lnTo>
+                    <a:pt x="4220669" y="1172140"/>
+                  </a:lnTo>
+                  <a:lnTo>
+                    <a:pt x="4150324" y="1163605"/>
+                  </a:lnTo>
+                  <a:lnTo>
+                    <a:pt x="4079980" y="1154214"/>
+                  </a:lnTo>
+                  <a:lnTo>
+                    <a:pt x="4009635" y="1143880"/>
+                  </a:lnTo>
+                  <a:lnTo>
+                    <a:pt x="3939291" y="1132510"/>
+                  </a:lnTo>
+                  <a:lnTo>
+                    <a:pt x="3868946" y="1119999"/>
+                  </a:lnTo>
+                  <a:lnTo>
+                    <a:pt x="3798602" y="1106232"/>
+                  </a:lnTo>
+                  <a:lnTo>
+                    <a:pt x="3728257" y="1091084"/>
+                  </a:lnTo>
+                  <a:lnTo>
+                    <a:pt x="3657913" y="1074416"/>
+                  </a:lnTo>
+                  <a:lnTo>
+                    <a:pt x="3587569" y="1056075"/>
+                  </a:lnTo>
+                  <a:lnTo>
+                    <a:pt x="3517224" y="1035895"/>
+                  </a:lnTo>
+                  <a:lnTo>
+                    <a:pt x="3446880" y="1013689"/>
+                  </a:lnTo>
+                  <a:lnTo>
+                    <a:pt x="3376535" y="989256"/>
+                  </a:lnTo>
+                  <a:lnTo>
+                    <a:pt x="3306191" y="962370"/>
+                  </a:lnTo>
+                  <a:lnTo>
+                    <a:pt x="3235846" y="951111"/>
+                  </a:lnTo>
+                  <a:lnTo>
+                    <a:pt x="3165502" y="942882"/>
+                  </a:lnTo>
+                  <a:lnTo>
+                    <a:pt x="3095157" y="934433"/>
+                  </a:lnTo>
+                  <a:lnTo>
+                    <a:pt x="3024813" y="925756"/>
+                  </a:lnTo>
+                  <a:lnTo>
+                    <a:pt x="2954468" y="916846"/>
+                  </a:lnTo>
+                  <a:lnTo>
+                    <a:pt x="2884124" y="907696"/>
+                  </a:lnTo>
+                  <a:lnTo>
+                    <a:pt x="2813779" y="898301"/>
+                  </a:lnTo>
+                  <a:lnTo>
+                    <a:pt x="2743435" y="888652"/>
+                  </a:lnTo>
+                  <a:lnTo>
+                    <a:pt x="2673090" y="878745"/>
+                  </a:lnTo>
+                  <a:lnTo>
+                    <a:pt x="2602746" y="868571"/>
+                  </a:lnTo>
+                  <a:lnTo>
+                    <a:pt x="2532401" y="858124"/>
+                  </a:lnTo>
+                  <a:lnTo>
+                    <a:pt x="2462057" y="847395"/>
+                  </a:lnTo>
+                  <a:lnTo>
+                    <a:pt x="2391712" y="836379"/>
+                  </a:lnTo>
+                  <a:lnTo>
+                    <a:pt x="2321368" y="825066"/>
+                  </a:lnTo>
+                  <a:lnTo>
+                    <a:pt x="2251023" y="813449"/>
+                  </a:lnTo>
+                  <a:lnTo>
+                    <a:pt x="2180679" y="801520"/>
+                  </a:lnTo>
+                  <a:lnTo>
+                    <a:pt x="2110334" y="789270"/>
+                  </a:lnTo>
+                  <a:lnTo>
+                    <a:pt x="2039990" y="776691"/>
+                  </a:lnTo>
+                  <a:lnTo>
+                    <a:pt x="1969645" y="763774"/>
+                  </a:lnTo>
+                  <a:lnTo>
+                    <a:pt x="1899301" y="750509"/>
+                  </a:lnTo>
+                  <a:lnTo>
+                    <a:pt x="1828956" y="736888"/>
+                  </a:lnTo>
+                  <a:lnTo>
+                    <a:pt x="1758612" y="722901"/>
+                  </a:lnTo>
+                  <a:lnTo>
+                    <a:pt x="1688267" y="708537"/>
+                  </a:lnTo>
+                  <a:lnTo>
+                    <a:pt x="1617923" y="693788"/>
+                  </a:lnTo>
+                  <a:lnTo>
+                    <a:pt x="1547578" y="678642"/>
+                  </a:lnTo>
+                  <a:lnTo>
+                    <a:pt x="1477234" y="663089"/>
+                  </a:lnTo>
+                  <a:lnTo>
+                    <a:pt x="1406889" y="647117"/>
+                  </a:lnTo>
+                  <a:lnTo>
+                    <a:pt x="1336545" y="630717"/>
+                  </a:lnTo>
+                  <a:lnTo>
+                    <a:pt x="1266200" y="613875"/>
+                  </a:lnTo>
+                  <a:lnTo>
+                    <a:pt x="1195856" y="596581"/>
+                  </a:lnTo>
+                  <a:lnTo>
+                    <a:pt x="1125511" y="578822"/>
+                  </a:lnTo>
+                  <a:lnTo>
+                    <a:pt x="1055167" y="560585"/>
+                  </a:lnTo>
+                  <a:lnTo>
+                    <a:pt x="984822" y="541859"/>
+                  </a:lnTo>
+                  <a:lnTo>
+                    <a:pt x="914478" y="522628"/>
+                  </a:lnTo>
+                  <a:lnTo>
+                    <a:pt x="844133" y="502881"/>
+                  </a:lnTo>
+                  <a:lnTo>
+                    <a:pt x="773789" y="482603"/>
+                  </a:lnTo>
+                  <a:lnTo>
+                    <a:pt x="703444" y="461780"/>
+                  </a:lnTo>
+                  <a:lnTo>
+                    <a:pt x="633100" y="440397"/>
+                  </a:lnTo>
+                  <a:lnTo>
+                    <a:pt x="562755" y="418440"/>
+                  </a:lnTo>
+                  <a:lnTo>
+                    <a:pt x="492411" y="395892"/>
+                  </a:lnTo>
+                  <a:lnTo>
+                    <a:pt x="422066" y="372737"/>
+                  </a:lnTo>
+                  <a:lnTo>
+                    <a:pt x="351722" y="348961"/>
+                  </a:lnTo>
+                  <a:lnTo>
+                    <a:pt x="281377" y="324545"/>
+                  </a:lnTo>
+                  <a:lnTo>
+                    <a:pt x="211033" y="299473"/>
+                  </a:lnTo>
+                  <a:lnTo>
+                    <a:pt x="140688" y="273727"/>
+                  </a:lnTo>
+                  <a:lnTo>
+                    <a:pt x="70344" y="247288"/>
+                  </a:lnTo>
+                  <a:lnTo>
+                    <a:pt x="0" y="220139"/>
+                  </a:lnTo>
+                  <a:close/>
+                </a:path>
+              </a:pathLst>
+            </a:custGeom>
+            <a:solidFill>
+              <a:srgbClr val="FF8C00">
+                <a:alpha val="20000"/>
+              </a:srgbClr>
+            </a:solidFill>
+          </p:spPr>
+          <p:txBody>
+            <a:bodyPr/>
+            <a:lstStyle/>
+            <a:p/>
+          </p:txBody>
+        </p:sp>
+        <p:sp>
+          <p:nvSpPr>
+            <p:cNvPr id="68" name="pl68"/>
+            <p:cNvSpPr/>
+            <p:nvPr/>
+          </p:nvSpPr>
+          <p:spPr>
+            <a:xfrm>
+              <a:off x="3475044" y="4336484"/>
+              <a:ext cx="4724372" cy="1182169"/>
+            </a:xfrm>
+            <a:custGeom>
+              <a:avLst/>
+              <a:pathLst>
+                <a:path w="4724372" h="1182169">
+                  <a:moveTo>
+                    <a:pt x="0" y="0"/>
+                  </a:moveTo>
+                  <a:lnTo>
+                    <a:pt x="11291" y="19927"/>
+                  </a:lnTo>
+                  <a:lnTo>
+                    <a:pt x="81635" y="132752"/>
+                  </a:lnTo>
+                  <a:lnTo>
+                    <a:pt x="151980" y="235289"/>
+                  </a:lnTo>
+                  <a:lnTo>
+                    <a:pt x="222324" y="328476"/>
+                  </a:lnTo>
+                  <a:lnTo>
+                    <a:pt x="292669" y="413165"/>
+                  </a:lnTo>
+                  <a:lnTo>
+                    <a:pt x="363013" y="490131"/>
+                  </a:lnTo>
+                  <a:lnTo>
+                    <a:pt x="433358" y="560079"/>
+                  </a:lnTo>
+                  <a:lnTo>
+                    <a:pt x="503702" y="623649"/>
+                  </a:lnTo>
+                  <a:lnTo>
+                    <a:pt x="574047" y="681421"/>
+                  </a:lnTo>
+                  <a:lnTo>
+                    <a:pt x="644391" y="733926"/>
+                  </a:lnTo>
+                  <a:lnTo>
+                    <a:pt x="714736" y="781643"/>
+                  </a:lnTo>
+                  <a:lnTo>
+                    <a:pt x="785080" y="825008"/>
+                  </a:lnTo>
+                  <a:lnTo>
+                    <a:pt x="855425" y="864419"/>
+                  </a:lnTo>
+                  <a:lnTo>
+                    <a:pt x="925769" y="900236"/>
+                  </a:lnTo>
+                  <a:lnTo>
+                    <a:pt x="996114" y="932788"/>
+                  </a:lnTo>
+                  <a:lnTo>
+                    <a:pt x="1066458" y="959124"/>
+                  </a:lnTo>
+                  <a:lnTo>
+                    <a:pt x="1136803" y="966927"/>
+                  </a:lnTo>
+                  <a:lnTo>
+                    <a:pt x="1207147" y="974526"/>
+                  </a:lnTo>
+                  <a:lnTo>
+                    <a:pt x="1277492" y="981926"/>
+                  </a:lnTo>
+                  <a:lnTo>
+                    <a:pt x="1347836" y="989133"/>
+                  </a:lnTo>
+                  <a:lnTo>
+                    <a:pt x="1418181" y="996150"/>
+                  </a:lnTo>
+                  <a:lnTo>
+                    <a:pt x="1488525" y="1002984"/>
+                  </a:lnTo>
+                  <a:lnTo>
+                    <a:pt x="1558870" y="1009639"/>
+                  </a:lnTo>
+                  <a:lnTo>
+                    <a:pt x="1629214" y="1016120"/>
+                  </a:lnTo>
+                  <a:lnTo>
+                    <a:pt x="1699559" y="1022432"/>
+                  </a:lnTo>
+                  <a:lnTo>
+                    <a:pt x="1769903" y="1028578"/>
+                  </a:lnTo>
+                  <a:lnTo>
+                    <a:pt x="1840248" y="1034563"/>
+                  </a:lnTo>
+                  <a:lnTo>
+                    <a:pt x="1910592" y="1040391"/>
+                  </a:lnTo>
+                  <a:lnTo>
+                    <a:pt x="1980937" y="1046067"/>
+                  </a:lnTo>
+                  <a:lnTo>
+                    <a:pt x="2051281" y="1051594"/>
+                  </a:lnTo>
+                  <a:lnTo>
+                    <a:pt x="2121626" y="1056977"/>
+                  </a:lnTo>
+                  <a:lnTo>
+                    <a:pt x="2191970" y="1062218"/>
+                  </a:lnTo>
+                  <a:lnTo>
+                    <a:pt x="2262315" y="1067323"/>
+                  </a:lnTo>
+                  <a:lnTo>
+                    <a:pt x="2332659" y="1072294"/>
+                  </a:lnTo>
+                  <a:lnTo>
+                    <a:pt x="2403004" y="1077134"/>
+                  </a:lnTo>
+                  <a:lnTo>
+                    <a:pt x="2473348" y="1081848"/>
+                  </a:lnTo>
+                  <a:lnTo>
+                    <a:pt x="2543693" y="1086439"/>
+                  </a:lnTo>
+                  <a:lnTo>
+                    <a:pt x="2614037" y="1090909"/>
+                  </a:lnTo>
+                  <a:lnTo>
+                    <a:pt x="2684382" y="1095262"/>
+                  </a:lnTo>
+                  <a:lnTo>
+                    <a:pt x="2754726" y="1099502"/>
+                  </a:lnTo>
+                  <a:lnTo>
+                    <a:pt x="2825071" y="1103630"/>
+                  </a:lnTo>
+                  <a:lnTo>
+                    <a:pt x="2895415" y="1107650"/>
+                  </a:lnTo>
+                  <a:lnTo>
+                    <a:pt x="2965760" y="1111566"/>
+                  </a:lnTo>
+                  <a:lnTo>
+                    <a:pt x="3036104" y="1115378"/>
+                  </a:lnTo>
+                  <a:lnTo>
+                    <a:pt x="3106449" y="1119091"/>
+                  </a:lnTo>
+                  <a:lnTo>
+                    <a:pt x="3176793" y="1122706"/>
+                  </a:lnTo>
+                  <a:lnTo>
+                    <a:pt x="3247138" y="1126227"/>
+                  </a:lnTo>
+                  <a:lnTo>
+                    <a:pt x="3317482" y="1129656"/>
+                  </a:lnTo>
+                  <a:lnTo>
+                    <a:pt x="3387827" y="1132995"/>
+                  </a:lnTo>
+                  <a:lnTo>
+                    <a:pt x="3458171" y="1136247"/>
+                  </a:lnTo>
+                  <a:lnTo>
+                    <a:pt x="3528516" y="1139413"/>
+                  </a:lnTo>
+                  <a:lnTo>
+                    <a:pt x="3598860" y="1142497"/>
+                  </a:lnTo>
+                  <a:lnTo>
+                    <a:pt x="3669205" y="1145499"/>
+                  </a:lnTo>
+                  <a:lnTo>
+                    <a:pt x="3739549" y="1148424"/>
+                  </a:lnTo>
+                  <a:lnTo>
+                    <a:pt x="3809893" y="1151271"/>
+                  </a:lnTo>
+                  <a:lnTo>
+                    <a:pt x="3880238" y="1154045"/>
+                  </a:lnTo>
+                  <a:lnTo>
+                    <a:pt x="3950582" y="1156745"/>
+                  </a:lnTo>
+                  <a:lnTo>
+                    <a:pt x="4020927" y="1159375"/>
+                  </a:lnTo>
+                  <a:lnTo>
+                    <a:pt x="4091271" y="1161936"/>
+                  </a:lnTo>
+                  <a:lnTo>
+                    <a:pt x="4161616" y="1164430"/>
+                  </a:lnTo>
+                  <a:lnTo>
+                    <a:pt x="4231960" y="1166858"/>
+                  </a:lnTo>
+                  <a:lnTo>
+                    <a:pt x="4302305" y="1169224"/>
+                  </a:lnTo>
+                  <a:lnTo>
+                    <a:pt x="4372649" y="1171527"/>
+                  </a:lnTo>
+                  <a:lnTo>
+                    <a:pt x="4442994" y="1173770"/>
+                  </a:lnTo>
+                  <a:lnTo>
+                    <a:pt x="4513338" y="1175954"/>
+                  </a:lnTo>
+                  <a:lnTo>
+                    <a:pt x="4583683" y="1178081"/>
+                  </a:lnTo>
+                  <a:lnTo>
+                    <a:pt x="4654027" y="1180152"/>
+                  </a:lnTo>
+                  <a:lnTo>
+                    <a:pt x="4724372" y="1182169"/>
+                  </a:lnTo>
+                </a:path>
+              </a:pathLst>
+            </a:custGeom>
+          </p:spPr>
+          <p:txBody>
+            <a:bodyPr/>
+            <a:lstStyle/>
+            <a:p/>
+          </p:txBody>
+        </p:sp>
+        <p:sp>
+          <p:nvSpPr>
+            <p:cNvPr id="69" name="pl69"/>
+            <p:cNvSpPr/>
+            <p:nvPr/>
+          </p:nvSpPr>
+          <p:spPr>
+            <a:xfrm>
+              <a:off x="1235312" y="4556624"/>
+              <a:ext cx="6964104" cy="1035019"/>
+            </a:xfrm>
+            <a:custGeom>
+              <a:avLst/>
+              <a:pathLst>
+                <a:path w="6964104" h="1035019">
+                  <a:moveTo>
+                    <a:pt x="6964104" y="1035019"/>
+                  </a:moveTo>
+                  <a:lnTo>
+                    <a:pt x="6893760" y="1034814"/>
+                  </a:lnTo>
+                  <a:lnTo>
+                    <a:pt x="6823415" y="1034589"/>
+                  </a:lnTo>
+                  <a:lnTo>
+                    <a:pt x="6753071" y="1034340"/>
+                  </a:lnTo>
+                  <a:lnTo>
+                    <a:pt x="6682726" y="1034067"/>
+                  </a:lnTo>
+                  <a:lnTo>
+                    <a:pt x="6612382" y="1033767"/>
+                  </a:lnTo>
+                  <a:lnTo>
+                    <a:pt x="6542037" y="1033436"/>
+                  </a:lnTo>
+                  <a:lnTo>
+                    <a:pt x="6471693" y="1033073"/>
+                  </a:lnTo>
+                  <a:lnTo>
+                    <a:pt x="6401348" y="1032672"/>
+                  </a:lnTo>
+                  <a:lnTo>
+                    <a:pt x="6331004" y="1032232"/>
+                  </a:lnTo>
+                  <a:lnTo>
+                    <a:pt x="6260659" y="1031747"/>
+                  </a:lnTo>
+                  <a:lnTo>
+                    <a:pt x="6190315" y="1031214"/>
+                  </a:lnTo>
+                  <a:lnTo>
+                    <a:pt x="6119970" y="1030627"/>
+                  </a:lnTo>
+                  <a:lnTo>
+                    <a:pt x="6049626" y="1029982"/>
+                  </a:lnTo>
+                  <a:lnTo>
+                    <a:pt x="5979281" y="1029271"/>
+                  </a:lnTo>
+                  <a:lnTo>
+                    <a:pt x="5908937" y="1028489"/>
+                  </a:lnTo>
+                  <a:lnTo>
+                    <a:pt x="5838592" y="1027629"/>
+                  </a:lnTo>
+                  <a:lnTo>
+                    <a:pt x="5768248" y="1026683"/>
+                  </a:lnTo>
+                  <a:lnTo>
+                    <a:pt x="5697903" y="1025641"/>
+                  </a:lnTo>
+                  <a:lnTo>
+                    <a:pt x="5627559" y="1024495"/>
+                  </a:lnTo>
+                  <a:lnTo>
+                    <a:pt x="5557214" y="1023235"/>
+                  </a:lnTo>
+                  <a:lnTo>
+                    <a:pt x="5486870" y="1021847"/>
+                  </a:lnTo>
+                  <a:lnTo>
+                    <a:pt x="5416525" y="1020321"/>
+                  </a:lnTo>
+                  <a:lnTo>
+                    <a:pt x="5346181" y="1018641"/>
+                  </a:lnTo>
+                  <a:lnTo>
+                    <a:pt x="5275836" y="1016792"/>
+                  </a:lnTo>
+                  <a:lnTo>
+                    <a:pt x="5205492" y="1014759"/>
+                  </a:lnTo>
+                  <a:lnTo>
+                    <a:pt x="5135147" y="1012521"/>
+                  </a:lnTo>
+                  <a:lnTo>
+                    <a:pt x="5064803" y="1010058"/>
+                  </a:lnTo>
+                  <a:lnTo>
+                    <a:pt x="4994458" y="1007349"/>
+                  </a:lnTo>
+                  <a:lnTo>
+                    <a:pt x="4924114" y="1004368"/>
+                  </a:lnTo>
+                  <a:lnTo>
+                    <a:pt x="4853769" y="1001087"/>
+                  </a:lnTo>
+                  <a:lnTo>
+                    <a:pt x="4783425" y="997477"/>
+                  </a:lnTo>
+                  <a:lnTo>
+                    <a:pt x="4713080" y="993506"/>
+                  </a:lnTo>
+                  <a:lnTo>
+                    <a:pt x="4642736" y="989135"/>
+                  </a:lnTo>
+                  <a:lnTo>
+                    <a:pt x="4572391" y="984326"/>
+                  </a:lnTo>
+                  <a:lnTo>
+                    <a:pt x="4502047" y="979035"/>
+                  </a:lnTo>
+                  <a:lnTo>
+                    <a:pt x="4431702" y="973213"/>
+                  </a:lnTo>
+                  <a:lnTo>
+                    <a:pt x="4361358" y="966806"/>
+                  </a:lnTo>
+                  <a:lnTo>
+                    <a:pt x="4291013" y="959757"/>
+                  </a:lnTo>
+                  <a:lnTo>
+                    <a:pt x="4220669" y="952000"/>
+                  </a:lnTo>
+                  <a:lnTo>
+                    <a:pt x="4150324" y="943465"/>
+                  </a:lnTo>
+                  <a:lnTo>
+                    <a:pt x="4079980" y="934074"/>
+                  </a:lnTo>
+                  <a:lnTo>
+                    <a:pt x="4009635" y="923740"/>
+                  </a:lnTo>
+                  <a:lnTo>
+                    <a:pt x="3939291" y="912370"/>
+                  </a:lnTo>
+                  <a:lnTo>
+                    <a:pt x="3868946" y="899859"/>
+                  </a:lnTo>
+                  <a:lnTo>
+                    <a:pt x="3798602" y="886092"/>
+                  </a:lnTo>
+                  <a:lnTo>
+                    <a:pt x="3728257" y="870944"/>
+                  </a:lnTo>
+                  <a:lnTo>
+                    <a:pt x="3657913" y="854276"/>
+                  </a:lnTo>
+                  <a:lnTo>
+                    <a:pt x="3587569" y="835935"/>
+                  </a:lnTo>
+                  <a:lnTo>
+                    <a:pt x="3517224" y="815755"/>
+                  </a:lnTo>
+                  <a:lnTo>
+                    <a:pt x="3446880" y="793549"/>
+                  </a:lnTo>
+                  <a:lnTo>
+                    <a:pt x="3376535" y="769116"/>
+                  </a:lnTo>
+                  <a:lnTo>
+                    <a:pt x="3306191" y="742230"/>
+                  </a:lnTo>
+                  <a:lnTo>
+                    <a:pt x="3235846" y="730971"/>
+                  </a:lnTo>
+                  <a:lnTo>
+                    <a:pt x="3165502" y="722742"/>
+                  </a:lnTo>
+                  <a:lnTo>
+                    <a:pt x="3095157" y="714293"/>
+                  </a:lnTo>
+                  <a:lnTo>
+                    <a:pt x="3024813" y="705616"/>
+                  </a:lnTo>
+                  <a:lnTo>
+                    <a:pt x="2954468" y="696706"/>
+                  </a:lnTo>
+                  <a:lnTo>
+                    <a:pt x="2884124" y="687556"/>
+                  </a:lnTo>
+                  <a:lnTo>
+                    <a:pt x="2813779" y="678161"/>
+                  </a:lnTo>
+                  <a:lnTo>
+                    <a:pt x="2743435" y="668512"/>
+                  </a:lnTo>
+                  <a:lnTo>
+                    <a:pt x="2673090" y="658605"/>
+                  </a:lnTo>
+                  <a:lnTo>
+                    <a:pt x="2602746" y="648431"/>
+                  </a:lnTo>
+                  <a:lnTo>
+                    <a:pt x="2532401" y="637984"/>
+                  </a:lnTo>
+                  <a:lnTo>
+                    <a:pt x="2462057" y="627255"/>
+                  </a:lnTo>
+                  <a:lnTo>
+                    <a:pt x="2391712" y="616239"/>
+                  </a:lnTo>
+                  <a:lnTo>
+                    <a:pt x="2321368" y="604926"/>
+                  </a:lnTo>
+                  <a:lnTo>
+                    <a:pt x="2251023" y="593309"/>
+                  </a:lnTo>
+                  <a:lnTo>
+                    <a:pt x="2180679" y="581380"/>
+                  </a:lnTo>
+                  <a:lnTo>
+                    <a:pt x="2110334" y="569130"/>
+                  </a:lnTo>
+                  <a:lnTo>
+                    <a:pt x="2039990" y="556551"/>
+                  </a:lnTo>
+                  <a:lnTo>
+                    <a:pt x="1969645" y="543634"/>
+                  </a:lnTo>
+                  <a:lnTo>
+                    <a:pt x="1899301" y="530369"/>
+                  </a:lnTo>
+                  <a:lnTo>
+                    <a:pt x="1828956" y="516748"/>
+                  </a:lnTo>
+                  <a:lnTo>
+                    <a:pt x="1758612" y="502761"/>
+                  </a:lnTo>
+                  <a:lnTo>
+                    <a:pt x="1688267" y="488397"/>
+                  </a:lnTo>
+                  <a:lnTo>
+                    <a:pt x="1617923" y="473648"/>
+                  </a:lnTo>
+                  <a:lnTo>
+                    <a:pt x="1547578" y="458502"/>
+                  </a:lnTo>
+                  <a:lnTo>
+                    <a:pt x="1477234" y="442949"/>
+                  </a:lnTo>
+                  <a:lnTo>
+                    <a:pt x="1406889" y="426977"/>
+                  </a:lnTo>
+                  <a:lnTo>
+                    <a:pt x="1336545" y="410577"/>
+                  </a:lnTo>
+                  <a:lnTo>
+                    <a:pt x="1266200" y="393735"/>
+                  </a:lnTo>
+                  <a:lnTo>
+                    <a:pt x="1195856" y="376441"/>
+                  </a:lnTo>
+                  <a:lnTo>
+                    <a:pt x="1125511" y="358682"/>
+                  </a:lnTo>
+                  <a:lnTo>
+                    <a:pt x="1055167" y="340445"/>
+                  </a:lnTo>
+                  <a:lnTo>
+                    <a:pt x="984822" y="321719"/>
+                  </a:lnTo>
+                  <a:lnTo>
+                    <a:pt x="914478" y="302489"/>
+                  </a:lnTo>
+                  <a:lnTo>
+                    <a:pt x="844133" y="282741"/>
+                  </a:lnTo>
+                  <a:lnTo>
+                    <a:pt x="773789" y="262463"/>
+                  </a:lnTo>
+                  <a:lnTo>
+                    <a:pt x="703444" y="241640"/>
+                  </a:lnTo>
+                  <a:lnTo>
+                    <a:pt x="633100" y="220257"/>
+                  </a:lnTo>
+                  <a:lnTo>
+                    <a:pt x="562755" y="198300"/>
+                  </a:lnTo>
+                  <a:lnTo>
+                    <a:pt x="492411" y="175752"/>
+                  </a:lnTo>
+                  <a:lnTo>
+                    <a:pt x="422066" y="152597"/>
+                  </a:lnTo>
+                  <a:lnTo>
+                    <a:pt x="351722" y="128821"/>
+                  </a:lnTo>
+                  <a:lnTo>
+                    <a:pt x="281377" y="104405"/>
+                  </a:lnTo>
+                  <a:lnTo>
+                    <a:pt x="211033" y="79333"/>
+                  </a:lnTo>
+                  <a:lnTo>
+                    <a:pt x="140688" y="53587"/>
+                  </a:lnTo>
+                  <a:lnTo>
+                    <a:pt x="70344" y="27148"/>
+                  </a:lnTo>
+                  <a:lnTo>
+                    <a:pt x="0" y="0"/>
+                  </a:lnTo>
+                </a:path>
+              </a:pathLst>
+            </a:custGeom>
+          </p:spPr>
+          <p:txBody>
+            <a:bodyPr/>
+            <a:lstStyle/>
+            <a:p/>
+          </p:txBody>
+        </p:sp>
+        <p:sp>
+          <p:nvSpPr>
+            <p:cNvPr id="70" name="pl70"/>
+            <p:cNvSpPr/>
+            <p:nvPr/>
+          </p:nvSpPr>
+          <p:spPr>
+            <a:xfrm>
+              <a:off x="2877881" y="4336484"/>
+              <a:ext cx="5321535" cy="1244821"/>
+            </a:xfrm>
+            <a:custGeom>
+              <a:avLst/>
+              <a:pathLst>
+                <a:path w="5321535" h="1244821">
+                  <a:moveTo>
+                    <a:pt x="0" y="0"/>
+                  </a:moveTo>
+                  <a:lnTo>
+                    <a:pt x="45698" y="49412"/>
+                  </a:lnTo>
+                  <a:lnTo>
+                    <a:pt x="116043" y="120968"/>
+                  </a:lnTo>
+                  <a:lnTo>
+                    <a:pt x="186387" y="188284"/>
+                  </a:lnTo>
+                  <a:lnTo>
+                    <a:pt x="256732" y="251612"/>
+                  </a:lnTo>
+                  <a:lnTo>
+                    <a:pt x="327076" y="311188"/>
+                  </a:lnTo>
+                  <a:lnTo>
+                    <a:pt x="397421" y="367235"/>
+                  </a:lnTo>
+                  <a:lnTo>
+                    <a:pt x="467765" y="419961"/>
+                  </a:lnTo>
+                  <a:lnTo>
+                    <a:pt x="538110" y="469563"/>
+                  </a:lnTo>
+                  <a:lnTo>
+                    <a:pt x="608454" y="516227"/>
+                  </a:lnTo>
+                  <a:lnTo>
+                    <a:pt x="678799" y="560126"/>
+                  </a:lnTo>
+                  <a:lnTo>
+                    <a:pt x="749143" y="601424"/>
+                  </a:lnTo>
+                  <a:lnTo>
+                    <a:pt x="819488" y="640276"/>
+                  </a:lnTo>
+                  <a:lnTo>
+                    <a:pt x="889832" y="676825"/>
+                  </a:lnTo>
+                  <a:lnTo>
+                    <a:pt x="960177" y="711210"/>
+                  </a:lnTo>
+                  <a:lnTo>
+                    <a:pt x="1030521" y="743557"/>
+                  </a:lnTo>
+                  <a:lnTo>
+                    <a:pt x="1100866" y="773988"/>
+                  </a:lnTo>
+                  <a:lnTo>
+                    <a:pt x="1171210" y="802616"/>
+                  </a:lnTo>
+                  <a:lnTo>
+                    <a:pt x="1241555" y="829548"/>
+                  </a:lnTo>
+                  <a:lnTo>
+                    <a:pt x="1311899" y="854884"/>
+                  </a:lnTo>
+                  <a:lnTo>
+                    <a:pt x="1382244" y="878720"/>
+                  </a:lnTo>
+                  <a:lnTo>
+                    <a:pt x="1452588" y="901143"/>
+                  </a:lnTo>
+                  <a:lnTo>
+                    <a:pt x="1522933" y="922237"/>
+                  </a:lnTo>
+                  <a:lnTo>
+                    <a:pt x="1593277" y="942082"/>
+                  </a:lnTo>
+                  <a:lnTo>
+                    <a:pt x="1663622" y="960752"/>
+                  </a:lnTo>
+                  <a:lnTo>
+                    <a:pt x="1733966" y="978315"/>
+                  </a:lnTo>
+                  <a:lnTo>
+                    <a:pt x="1804311" y="994837"/>
+                  </a:lnTo>
+                  <a:lnTo>
+                    <a:pt x="1874655" y="1010381"/>
+                  </a:lnTo>
+                  <a:lnTo>
+                    <a:pt x="1945000" y="1025004"/>
+                  </a:lnTo>
+                  <a:lnTo>
+                    <a:pt x="2015344" y="1038761"/>
+                  </a:lnTo>
+                  <a:lnTo>
+                    <a:pt x="2085689" y="1051702"/>
+                  </a:lnTo>
+                  <a:lnTo>
+                    <a:pt x="2156033" y="1063877"/>
+                  </a:lnTo>
+                  <a:lnTo>
+                    <a:pt x="2226378" y="1075331"/>
+                  </a:lnTo>
+                  <a:lnTo>
+                    <a:pt x="2296722" y="1086105"/>
+                  </a:lnTo>
+                  <a:lnTo>
+                    <a:pt x="2367066" y="1096242"/>
+                  </a:lnTo>
+                  <a:lnTo>
+                    <a:pt x="2437411" y="1105778"/>
+                  </a:lnTo>
+                  <a:lnTo>
+                    <a:pt x="2507755" y="1114749"/>
+                  </a:lnTo>
+                  <a:lnTo>
+                    <a:pt x="2578100" y="1123189"/>
+                  </a:lnTo>
+                  <a:lnTo>
+                    <a:pt x="2648444" y="1131128"/>
+                  </a:lnTo>
+                  <a:lnTo>
+                    <a:pt x="2718789" y="1138598"/>
+                  </a:lnTo>
+                  <a:lnTo>
+                    <a:pt x="2789133" y="1145624"/>
+                  </a:lnTo>
+                  <a:lnTo>
+                    <a:pt x="2859478" y="1152235"/>
+                  </a:lnTo>
+                  <a:lnTo>
+                    <a:pt x="2929822" y="1158454"/>
+                  </a:lnTo>
+                  <a:lnTo>
+                    <a:pt x="3000167" y="1164304"/>
+                  </a:lnTo>
+                  <a:lnTo>
+                    <a:pt x="3070511" y="1169808"/>
+                  </a:lnTo>
+                  <a:lnTo>
+                    <a:pt x="3140856" y="1174985"/>
+                  </a:lnTo>
+                  <a:lnTo>
+                    <a:pt x="3211200" y="1179856"/>
+                  </a:lnTo>
+                  <a:lnTo>
+                    <a:pt x="3281545" y="1184439"/>
+                  </a:lnTo>
+                  <a:lnTo>
+                    <a:pt x="3351889" y="1188749"/>
+                  </a:lnTo>
+                  <a:lnTo>
+                    <a:pt x="3422234" y="1192805"/>
+                  </a:lnTo>
+                  <a:lnTo>
+                    <a:pt x="3492578" y="1196620"/>
+                  </a:lnTo>
+                  <a:lnTo>
+                    <a:pt x="3562923" y="1200209"/>
+                  </a:lnTo>
+                  <a:lnTo>
+                    <a:pt x="3633267" y="1203586"/>
+                  </a:lnTo>
+                  <a:lnTo>
+                    <a:pt x="3703612" y="1206762"/>
+                  </a:lnTo>
+                  <a:lnTo>
+                    <a:pt x="3773956" y="1209750"/>
+                  </a:lnTo>
+                  <a:lnTo>
+                    <a:pt x="3844301" y="1212562"/>
+                  </a:lnTo>
+                  <a:lnTo>
+                    <a:pt x="3914645" y="1215206"/>
+                  </a:lnTo>
+                  <a:lnTo>
+                    <a:pt x="3984990" y="1217694"/>
+                  </a:lnTo>
+                  <a:lnTo>
+                    <a:pt x="4055334" y="1220035"/>
+                  </a:lnTo>
+                  <a:lnTo>
+                    <a:pt x="4125679" y="1222237"/>
+                  </a:lnTo>
+                  <a:lnTo>
+                    <a:pt x="4196023" y="1224309"/>
+                  </a:lnTo>
+                  <a:lnTo>
+                    <a:pt x="4266368" y="1226257"/>
+                  </a:lnTo>
+                  <a:lnTo>
+                    <a:pt x="4336712" y="1228091"/>
+                  </a:lnTo>
+                  <a:lnTo>
+                    <a:pt x="4407057" y="1229815"/>
+                  </a:lnTo>
+                  <a:lnTo>
+                    <a:pt x="4477401" y="1231438"/>
+                  </a:lnTo>
+                  <a:lnTo>
+                    <a:pt x="4547746" y="1232964"/>
+                  </a:lnTo>
+                  <a:lnTo>
+                    <a:pt x="4618090" y="1234400"/>
+                  </a:lnTo>
+                  <a:lnTo>
+                    <a:pt x="4688435" y="1235751"/>
+                  </a:lnTo>
+                  <a:lnTo>
+                    <a:pt x="4758779" y="1237022"/>
+                  </a:lnTo>
+                  <a:lnTo>
+                    <a:pt x="4829124" y="1238217"/>
+                  </a:lnTo>
+                  <a:lnTo>
+                    <a:pt x="4899468" y="1239342"/>
+                  </a:lnTo>
+                  <a:lnTo>
+                    <a:pt x="4969813" y="1240400"/>
+                  </a:lnTo>
+                  <a:lnTo>
+                    <a:pt x="5040157" y="1241396"/>
+                  </a:lnTo>
+                  <a:lnTo>
+                    <a:pt x="5110502" y="1242332"/>
+                  </a:lnTo>
+                  <a:lnTo>
+                    <a:pt x="5180846" y="1243213"/>
+                  </a:lnTo>
+                  <a:lnTo>
+                    <a:pt x="5251191" y="1244042"/>
+                  </a:lnTo>
+                  <a:lnTo>
+                    <a:pt x="5321535" y="1244821"/>
+                  </a:lnTo>
+                </a:path>
+              </a:pathLst>
+            </a:custGeom>
+            <a:ln w="27101" cap="flat">
+              <a:solidFill>
+                <a:srgbClr val="FF8C00">
+                  <a:alpha val="100000"/>
+                </a:srgbClr>
+              </a:solidFill>
+              <a:prstDash val="solid"/>
+              <a:round/>
+            </a:ln>
+          </p:spPr>
+          <p:txBody>
+            <a:bodyPr/>
+            <a:lstStyle/>
+            <a:p/>
+          </p:txBody>
+        </p:sp>
+        <p:sp>
+          <p:nvSpPr>
+            <p:cNvPr id="71" name="pl71"/>
+            <p:cNvSpPr/>
+            <p:nvPr/>
+          </p:nvSpPr>
+          <p:spPr>
+            <a:xfrm>
+              <a:off x="887106" y="5294352"/>
+              <a:ext cx="7660515" cy="0"/>
+            </a:xfrm>
+            <a:custGeom>
+              <a:avLst/>
+              <a:pathLst>
+                <a:path w="7660515" h="0">
+                  <a:moveTo>
+                    <a:pt x="0" y="0"/>
+                  </a:moveTo>
+                  <a:lnTo>
+                    <a:pt x="7660515" y="0"/>
+                  </a:lnTo>
+                  <a:lnTo>
+                    <a:pt x="7660515" y="0"/>
+                  </a:lnTo>
+                </a:path>
+              </a:pathLst>
+            </a:custGeom>
+            <a:ln w="13550" cap="flat">
+              <a:solidFill>
+                <a:srgbClr val="7F7F7F">
+                  <a:alpha val="100000"/>
+                </a:srgbClr>
+              </a:solidFill>
+              <a:prstDash val="dash"/>
+              <a:round/>
+            </a:ln>
+          </p:spPr>
+          <p:txBody>
+            <a:bodyPr/>
+            <a:lstStyle/>
+            <a:p/>
+          </p:txBody>
+        </p:sp>
+        <p:sp>
+          <p:nvSpPr>
+            <p:cNvPr id="72" name="pl72"/>
+            <p:cNvSpPr/>
+            <p:nvPr/>
+          </p:nvSpPr>
+          <p:spPr>
+            <a:xfrm>
+              <a:off x="4530353" y="4336484"/>
+              <a:ext cx="0" cy="1317069"/>
+            </a:xfrm>
+            <a:custGeom>
+              <a:avLst/>
+              <a:pathLst>
+                <a:path w="0" h="1317069">
+                  <a:moveTo>
+                    <a:pt x="0" y="1317069"/>
+                  </a:moveTo>
+                  <a:lnTo>
+                    <a:pt x="0" y="0"/>
+                  </a:lnTo>
+                  <a:lnTo>
+                    <a:pt x="0" y="0"/>
+                  </a:lnTo>
+                </a:path>
+              </a:pathLst>
+            </a:custGeom>
+            <a:ln w="13550" cap="flat">
+              <a:solidFill>
+                <a:srgbClr val="666666">
+                  <a:alpha val="100000"/>
+                </a:srgbClr>
+              </a:solidFill>
+              <a:prstDash val="dot"/>
+              <a:round/>
+            </a:ln>
+          </p:spPr>
+          <p:txBody>
+            <a:bodyPr/>
+            <a:lstStyle/>
+            <a:p/>
+          </p:txBody>
+        </p:sp>
+        <p:sp>
+          <p:nvSpPr>
+            <p:cNvPr id="73" name="tx73"/>
+            <p:cNvSpPr/>
+            <p:nvPr/>
+          </p:nvSpPr>
+          <p:spPr>
+            <a:xfrm>
+              <a:off x="762297" y="5553636"/>
+              <a:ext cx="62179" cy="80101"/>
+            </a:xfrm>
+            <a:prstGeom prst="rect">
+              <a:avLst/>
+            </a:prstGeom>
+            <a:noFill/>
+          </p:spPr>
+          <p:txBody>
+            <a:bodyPr lIns="0" rIns="0" tIns="0" bIns="0" anchorCtr="1" anchor="ctr" wrap="none"/>
+            <a:lstStyle/>
+            <a:p>
+              <a:pPr algn="l" marL="0" marR="0" indent="0">
+                <a:lnSpc>
+                  <a:spcPts val="880"/>
+                </a:lnSpc>
+                <a:spcBef>
+                  <a:spcPts val="0"/>
+                </a:spcBef>
+                <a:spcAft>
+                  <a:spcPts val="0"/>
+                </a:spcAft>
+              </a:pPr>
+              <a:r>
+                <a:rPr sz="880">
+                  <a:solidFill>
+                    <a:srgbClr val="4D4D4D">
+                      <a:alpha val="100000"/>
+                    </a:srgbClr>
+                  </a:solidFill>
+                  <a:latin typeface="Helvetica"/>
+                  <a:cs typeface="Helvetica"/>
+                </a:rPr>
+                <a:t>0</a:t>
+              </a:r>
+            </a:p>
+          </p:txBody>
+        </p:sp>
+        <p:sp>
+          <p:nvSpPr>
+            <p:cNvPr id="74" name="tx74"/>
+            <p:cNvSpPr/>
+            <p:nvPr/>
+          </p:nvSpPr>
+          <p:spPr>
+            <a:xfrm>
+              <a:off x="762297" y="5254302"/>
+              <a:ext cx="62179" cy="80101"/>
+            </a:xfrm>
+            <a:prstGeom prst="rect">
+              <a:avLst/>
+            </a:prstGeom>
+            <a:noFill/>
+          </p:spPr>
+          <p:txBody>
+            <a:bodyPr lIns="0" rIns="0" tIns="0" bIns="0" anchorCtr="1" anchor="ctr" wrap="none"/>
+            <a:lstStyle/>
+            <a:p>
+              <a:pPr algn="l" marL="0" marR="0" indent="0">
+                <a:lnSpc>
+                  <a:spcPts val="880"/>
+                </a:lnSpc>
+                <a:spcBef>
+                  <a:spcPts val="0"/>
+                </a:spcBef>
+                <a:spcAft>
+                  <a:spcPts val="0"/>
+                </a:spcAft>
+              </a:pPr>
+              <a:r>
+                <a:rPr sz="880">
+                  <a:solidFill>
+                    <a:srgbClr val="4D4D4D">
+                      <a:alpha val="100000"/>
+                    </a:srgbClr>
+                  </a:solidFill>
+                  <a:latin typeface="Helvetica"/>
+                  <a:cs typeface="Helvetica"/>
+                </a:rPr>
+                <a:t>1</a:t>
+              </a:r>
+            </a:p>
+          </p:txBody>
+        </p:sp>
+        <p:sp>
+          <p:nvSpPr>
+            <p:cNvPr id="75" name="tx75"/>
+            <p:cNvSpPr/>
+            <p:nvPr/>
+          </p:nvSpPr>
+          <p:spPr>
+            <a:xfrm>
+              <a:off x="762297" y="4954968"/>
+              <a:ext cx="62179" cy="80101"/>
+            </a:xfrm>
+            <a:prstGeom prst="rect">
+              <a:avLst/>
+            </a:prstGeom>
+            <a:noFill/>
+          </p:spPr>
+          <p:txBody>
+            <a:bodyPr lIns="0" rIns="0" tIns="0" bIns="0" anchorCtr="1" anchor="ctr" wrap="none"/>
+            <a:lstStyle/>
+            <a:p>
+              <a:pPr algn="l" marL="0" marR="0" indent="0">
+                <a:lnSpc>
+                  <a:spcPts val="880"/>
+                </a:lnSpc>
+                <a:spcBef>
+                  <a:spcPts val="0"/>
+                </a:spcBef>
+                <a:spcAft>
+                  <a:spcPts val="0"/>
+                </a:spcAft>
+              </a:pPr>
+              <a:r>
+                <a:rPr sz="880">
+                  <a:solidFill>
+                    <a:srgbClr val="4D4D4D">
+                      <a:alpha val="100000"/>
+                    </a:srgbClr>
+                  </a:solidFill>
+                  <a:latin typeface="Helvetica"/>
+                  <a:cs typeface="Helvetica"/>
+                </a:rPr>
+                <a:t>2</a:t>
+              </a:r>
+            </a:p>
+          </p:txBody>
+        </p:sp>
+        <p:sp>
+          <p:nvSpPr>
+            <p:cNvPr id="76" name="tx76"/>
+            <p:cNvSpPr/>
+            <p:nvPr/>
+          </p:nvSpPr>
+          <p:spPr>
+            <a:xfrm>
+              <a:off x="762297" y="4655634"/>
+              <a:ext cx="62179" cy="80101"/>
+            </a:xfrm>
+            <a:prstGeom prst="rect">
+              <a:avLst/>
+            </a:prstGeom>
+            <a:noFill/>
+          </p:spPr>
+          <p:txBody>
+            <a:bodyPr lIns="0" rIns="0" tIns="0" bIns="0" anchorCtr="1" anchor="ctr" wrap="none"/>
+            <a:lstStyle/>
+            <a:p>
+              <a:pPr algn="l" marL="0" marR="0" indent="0">
+                <a:lnSpc>
+                  <a:spcPts val="880"/>
+                </a:lnSpc>
+                <a:spcBef>
+                  <a:spcPts val="0"/>
+                </a:spcBef>
+                <a:spcAft>
+                  <a:spcPts val="0"/>
+                </a:spcAft>
+              </a:pPr>
+              <a:r>
+                <a:rPr sz="880">
+                  <a:solidFill>
+                    <a:srgbClr val="4D4D4D">
+                      <a:alpha val="100000"/>
+                    </a:srgbClr>
+                  </a:solidFill>
+                  <a:latin typeface="Helvetica"/>
+                  <a:cs typeface="Helvetica"/>
+                </a:rPr>
+                <a:t>3</a:t>
+              </a:r>
+            </a:p>
+          </p:txBody>
+        </p:sp>
+        <p:sp>
+          <p:nvSpPr>
+            <p:cNvPr id="77" name="tx77"/>
+            <p:cNvSpPr/>
+            <p:nvPr/>
+          </p:nvSpPr>
+          <p:spPr>
+            <a:xfrm>
+              <a:off x="762297" y="4356300"/>
+              <a:ext cx="62179" cy="80101"/>
+            </a:xfrm>
+            <a:prstGeom prst="rect">
+              <a:avLst/>
+            </a:prstGeom>
+            <a:noFill/>
+          </p:spPr>
+          <p:txBody>
+            <a:bodyPr lIns="0" rIns="0" tIns="0" bIns="0" anchorCtr="1" anchor="ctr" wrap="none"/>
+            <a:lstStyle/>
+            <a:p>
+              <a:pPr algn="l" marL="0" marR="0" indent="0">
+                <a:lnSpc>
+                  <a:spcPts val="880"/>
+                </a:lnSpc>
+                <a:spcBef>
+                  <a:spcPts val="0"/>
+                </a:spcBef>
+                <a:spcAft>
+                  <a:spcPts val="0"/>
+                </a:spcAft>
+              </a:pPr>
+              <a:r>
+                <a:rPr sz="880">
+                  <a:solidFill>
+                    <a:srgbClr val="4D4D4D">
+                      <a:alpha val="100000"/>
+                    </a:srgbClr>
+                  </a:solidFill>
+                  <a:latin typeface="Helvetica"/>
+                  <a:cs typeface="Helvetica"/>
+                </a:rPr>
+                <a:t>4</a:t>
+              </a:r>
+            </a:p>
+          </p:txBody>
+        </p:sp>
+        <p:sp>
+          <p:nvSpPr>
+            <p:cNvPr id="78" name="tx78"/>
+            <p:cNvSpPr/>
+            <p:nvPr/>
+          </p:nvSpPr>
+          <p:spPr>
+            <a:xfrm>
+              <a:off x="1241001" y="5716183"/>
+              <a:ext cx="161574" cy="80101"/>
+            </a:xfrm>
+            <a:prstGeom prst="rect">
+              <a:avLst/>
+            </a:prstGeom>
+            <a:noFill/>
+          </p:spPr>
+          <p:txBody>
+            <a:bodyPr lIns="0" rIns="0" tIns="0" bIns="0" anchorCtr="1" anchor="ctr" wrap="none"/>
+            <a:lstStyle/>
+            <a:p>
+              <a:pPr algn="l" marL="0" marR="0" indent="0">
+                <a:lnSpc>
+                  <a:spcPts val="880"/>
+                </a:lnSpc>
+                <a:spcBef>
+                  <a:spcPts val="0"/>
+                </a:spcBef>
+                <a:spcAft>
+                  <a:spcPts val="0"/>
+                </a:spcAft>
+              </a:pPr>
+              <a:r>
+                <a:rPr sz="880">
+                  <a:solidFill>
+                    <a:srgbClr val="4D4D4D">
+                      <a:alpha val="100000"/>
+                    </a:srgbClr>
+                  </a:solidFill>
+                  <a:latin typeface="Helvetica"/>
+                  <a:cs typeface="Helvetica"/>
+                </a:rPr>
+                <a:t>-40</a:t>
+              </a:r>
+            </a:p>
+          </p:txBody>
+        </p:sp>
+        <p:sp>
+          <p:nvSpPr>
+            <p:cNvPr id="79" name="tx79"/>
+            <p:cNvSpPr/>
+            <p:nvPr/>
+          </p:nvSpPr>
+          <p:spPr>
+            <a:xfrm>
+              <a:off x="2054602" y="5716183"/>
+              <a:ext cx="161574" cy="80101"/>
+            </a:xfrm>
+            <a:prstGeom prst="rect">
+              <a:avLst/>
+            </a:prstGeom>
+            <a:noFill/>
+          </p:spPr>
+          <p:txBody>
+            <a:bodyPr lIns="0" rIns="0" tIns="0" bIns="0" anchorCtr="1" anchor="ctr" wrap="none"/>
+            <a:lstStyle/>
+            <a:p>
+              <a:pPr algn="l" marL="0" marR="0" indent="0">
+                <a:lnSpc>
+                  <a:spcPts val="880"/>
+                </a:lnSpc>
+                <a:spcBef>
+                  <a:spcPts val="0"/>
+                </a:spcBef>
+                <a:spcAft>
+                  <a:spcPts val="0"/>
+                </a:spcAft>
+              </a:pPr>
+              <a:r>
+                <a:rPr sz="880">
+                  <a:solidFill>
+                    <a:srgbClr val="4D4D4D">
+                      <a:alpha val="100000"/>
+                    </a:srgbClr>
+                  </a:solidFill>
+                  <a:latin typeface="Helvetica"/>
+                  <a:cs typeface="Helvetica"/>
+                </a:rPr>
+                <a:t>-30</a:t>
+              </a:r>
+            </a:p>
+          </p:txBody>
+        </p:sp>
+        <p:sp>
+          <p:nvSpPr>
+            <p:cNvPr id="80" name="tx80"/>
+            <p:cNvSpPr/>
+            <p:nvPr/>
+          </p:nvSpPr>
+          <p:spPr>
+            <a:xfrm>
+              <a:off x="2868203" y="5716183"/>
+              <a:ext cx="161574" cy="80101"/>
+            </a:xfrm>
+            <a:prstGeom prst="rect">
+              <a:avLst/>
+            </a:prstGeom>
+            <a:noFill/>
+          </p:spPr>
+          <p:txBody>
+            <a:bodyPr lIns="0" rIns="0" tIns="0" bIns="0" anchorCtr="1" anchor="ctr" wrap="none"/>
+            <a:lstStyle/>
+            <a:p>
+              <a:pPr algn="l" marL="0" marR="0" indent="0">
+                <a:lnSpc>
+                  <a:spcPts val="880"/>
+                </a:lnSpc>
+                <a:spcBef>
+                  <a:spcPts val="0"/>
+                </a:spcBef>
+                <a:spcAft>
+                  <a:spcPts val="0"/>
+                </a:spcAft>
+              </a:pPr>
+              <a:r>
+                <a:rPr sz="880">
+                  <a:solidFill>
+                    <a:srgbClr val="4D4D4D">
+                      <a:alpha val="100000"/>
+                    </a:srgbClr>
+                  </a:solidFill>
+                  <a:latin typeface="Helvetica"/>
+                  <a:cs typeface="Helvetica"/>
+                </a:rPr>
+                <a:t>-20</a:t>
+              </a:r>
+            </a:p>
+          </p:txBody>
+        </p:sp>
+        <p:sp>
+          <p:nvSpPr>
+            <p:cNvPr id="81" name="tx81"/>
+            <p:cNvSpPr/>
+            <p:nvPr/>
+          </p:nvSpPr>
+          <p:spPr>
+            <a:xfrm>
+              <a:off x="3681805" y="5716183"/>
+              <a:ext cx="161574" cy="80101"/>
+            </a:xfrm>
+            <a:prstGeom prst="rect">
+              <a:avLst/>
+            </a:prstGeom>
+            <a:noFill/>
+          </p:spPr>
+          <p:txBody>
+            <a:bodyPr lIns="0" rIns="0" tIns="0" bIns="0" anchorCtr="1" anchor="ctr" wrap="none"/>
+            <a:lstStyle/>
+            <a:p>
+              <a:pPr algn="l" marL="0" marR="0" indent="0">
+                <a:lnSpc>
+                  <a:spcPts val="880"/>
+                </a:lnSpc>
+                <a:spcBef>
+                  <a:spcPts val="0"/>
+                </a:spcBef>
+                <a:spcAft>
+                  <a:spcPts val="0"/>
+                </a:spcAft>
+              </a:pPr>
+              <a:r>
+                <a:rPr sz="880">
+                  <a:solidFill>
+                    <a:srgbClr val="4D4D4D">
+                      <a:alpha val="100000"/>
+                    </a:srgbClr>
+                  </a:solidFill>
+                  <a:latin typeface="Helvetica"/>
+                  <a:cs typeface="Helvetica"/>
+                </a:rPr>
+                <a:t>-10</a:t>
+              </a:r>
+            </a:p>
+          </p:txBody>
+        </p:sp>
+        <p:sp>
+          <p:nvSpPr>
+            <p:cNvPr id="82" name="tx82"/>
+            <p:cNvSpPr/>
+            <p:nvPr/>
+          </p:nvSpPr>
+          <p:spPr>
+            <a:xfrm>
+              <a:off x="4545104" y="5716183"/>
+              <a:ext cx="62179" cy="80101"/>
+            </a:xfrm>
+            <a:prstGeom prst="rect">
+              <a:avLst/>
+            </a:prstGeom>
+            <a:noFill/>
+          </p:spPr>
+          <p:txBody>
+            <a:bodyPr lIns="0" rIns="0" tIns="0" bIns="0" anchorCtr="1" anchor="ctr" wrap="none"/>
+            <a:lstStyle/>
+            <a:p>
+              <a:pPr algn="l" marL="0" marR="0" indent="0">
+                <a:lnSpc>
+                  <a:spcPts val="880"/>
+                </a:lnSpc>
+                <a:spcBef>
+                  <a:spcPts val="0"/>
+                </a:spcBef>
+                <a:spcAft>
+                  <a:spcPts val="0"/>
+                </a:spcAft>
+              </a:pPr>
+              <a:r>
+                <a:rPr sz="880">
+                  <a:solidFill>
+                    <a:srgbClr val="4D4D4D">
+                      <a:alpha val="100000"/>
+                    </a:srgbClr>
+                  </a:solidFill>
+                  <a:latin typeface="Helvetica"/>
+                  <a:cs typeface="Helvetica"/>
+                </a:rPr>
+                <a:t>0</a:t>
+              </a:r>
+            </a:p>
+          </p:txBody>
+        </p:sp>
+        <p:sp>
+          <p:nvSpPr>
+            <p:cNvPr id="83" name="tx83"/>
+            <p:cNvSpPr/>
+            <p:nvPr/>
+          </p:nvSpPr>
+          <p:spPr>
+            <a:xfrm>
+              <a:off x="5327615" y="5716183"/>
+              <a:ext cx="124358" cy="80101"/>
+            </a:xfrm>
+            <a:prstGeom prst="rect">
+              <a:avLst/>
+            </a:prstGeom>
+            <a:noFill/>
+          </p:spPr>
+          <p:txBody>
+            <a:bodyPr lIns="0" rIns="0" tIns="0" bIns="0" anchorCtr="1" anchor="ctr" wrap="none"/>
+            <a:lstStyle/>
+            <a:p>
+              <a:pPr algn="l" marL="0" marR="0" indent="0">
+                <a:lnSpc>
+                  <a:spcPts val="880"/>
+                </a:lnSpc>
+                <a:spcBef>
+                  <a:spcPts val="0"/>
+                </a:spcBef>
+                <a:spcAft>
+                  <a:spcPts val="0"/>
+                </a:spcAft>
+              </a:pPr>
+              <a:r>
+                <a:rPr sz="880">
+                  <a:solidFill>
+                    <a:srgbClr val="4D4D4D">
+                      <a:alpha val="100000"/>
+                    </a:srgbClr>
+                  </a:solidFill>
+                  <a:latin typeface="Helvetica"/>
+                  <a:cs typeface="Helvetica"/>
+                </a:rPr>
+                <a:t>10</a:t>
+              </a:r>
+            </a:p>
+          </p:txBody>
+        </p:sp>
+        <p:sp>
+          <p:nvSpPr>
+            <p:cNvPr id="84" name="tx84"/>
+            <p:cNvSpPr/>
+            <p:nvPr/>
+          </p:nvSpPr>
+          <p:spPr>
+            <a:xfrm>
+              <a:off x="6141217" y="5716183"/>
+              <a:ext cx="124358" cy="80101"/>
+            </a:xfrm>
+            <a:prstGeom prst="rect">
+              <a:avLst/>
+            </a:prstGeom>
+            <a:noFill/>
+          </p:spPr>
+          <p:txBody>
+            <a:bodyPr lIns="0" rIns="0" tIns="0" bIns="0" anchorCtr="1" anchor="ctr" wrap="none"/>
+            <a:lstStyle/>
+            <a:p>
+              <a:pPr algn="l" marL="0" marR="0" indent="0">
+                <a:lnSpc>
+                  <a:spcPts val="880"/>
+                </a:lnSpc>
+                <a:spcBef>
+                  <a:spcPts val="0"/>
+                </a:spcBef>
+                <a:spcAft>
+                  <a:spcPts val="0"/>
+                </a:spcAft>
+              </a:pPr>
+              <a:r>
+                <a:rPr sz="880">
+                  <a:solidFill>
+                    <a:srgbClr val="4D4D4D">
+                      <a:alpha val="100000"/>
+                    </a:srgbClr>
+                  </a:solidFill>
+                  <a:latin typeface="Helvetica"/>
+                  <a:cs typeface="Helvetica"/>
+                </a:rPr>
+                <a:t>20</a:t>
+              </a:r>
+            </a:p>
+          </p:txBody>
+        </p:sp>
+        <p:sp>
+          <p:nvSpPr>
+            <p:cNvPr id="85" name="tx85"/>
+            <p:cNvSpPr/>
+            <p:nvPr/>
+          </p:nvSpPr>
+          <p:spPr>
+            <a:xfrm>
+              <a:off x="6954818" y="5716183"/>
+              <a:ext cx="124358" cy="80101"/>
+            </a:xfrm>
+            <a:prstGeom prst="rect">
+              <a:avLst/>
+            </a:prstGeom>
+            <a:noFill/>
+          </p:spPr>
+          <p:txBody>
+            <a:bodyPr lIns="0" rIns="0" tIns="0" bIns="0" anchorCtr="1" anchor="ctr" wrap="none"/>
+            <a:lstStyle/>
+            <a:p>
+              <a:pPr algn="l" marL="0" marR="0" indent="0">
+                <a:lnSpc>
+                  <a:spcPts val="880"/>
+                </a:lnSpc>
+                <a:spcBef>
+                  <a:spcPts val="0"/>
+                </a:spcBef>
+                <a:spcAft>
+                  <a:spcPts val="0"/>
+                </a:spcAft>
+              </a:pPr>
+              <a:r>
+                <a:rPr sz="880">
+                  <a:solidFill>
+                    <a:srgbClr val="4D4D4D">
+                      <a:alpha val="100000"/>
+                    </a:srgbClr>
+                  </a:solidFill>
+                  <a:latin typeface="Helvetica"/>
+                  <a:cs typeface="Helvetica"/>
+                </a:rPr>
+                <a:t>30</a:t>
+              </a:r>
+            </a:p>
+          </p:txBody>
+        </p:sp>
+        <p:sp>
+          <p:nvSpPr>
+            <p:cNvPr id="86" name="tx86"/>
+            <p:cNvSpPr/>
+            <p:nvPr/>
+          </p:nvSpPr>
+          <p:spPr>
+            <a:xfrm>
+              <a:off x="7768419" y="5716183"/>
+              <a:ext cx="124358" cy="80101"/>
+            </a:xfrm>
+            <a:prstGeom prst="rect">
+              <a:avLst/>
+            </a:prstGeom>
+            <a:noFill/>
+          </p:spPr>
+          <p:txBody>
+            <a:bodyPr lIns="0" rIns="0" tIns="0" bIns="0" anchorCtr="1" anchor="ctr" wrap="none"/>
+            <a:lstStyle/>
+            <a:p>
+              <a:pPr algn="l" marL="0" marR="0" indent="0">
+                <a:lnSpc>
+                  <a:spcPts val="880"/>
+                </a:lnSpc>
+                <a:spcBef>
+                  <a:spcPts val="0"/>
+                </a:spcBef>
+                <a:spcAft>
+                  <a:spcPts val="0"/>
+                </a:spcAft>
+              </a:pPr>
+              <a:r>
+                <a:rPr sz="880">
+                  <a:solidFill>
+                    <a:srgbClr val="4D4D4D">
+                      <a:alpha val="100000"/>
+                    </a:srgbClr>
+                  </a:solidFill>
+                  <a:latin typeface="Helvetica"/>
+                  <a:cs typeface="Helvetica"/>
+                </a:rPr>
+                <a:t>40</a:t>
+              </a:r>
+            </a:p>
+          </p:txBody>
+        </p:sp>
+        <p:sp>
+          <p:nvSpPr>
+            <p:cNvPr id="87" name="tx87"/>
+            <p:cNvSpPr/>
+            <p:nvPr/>
+          </p:nvSpPr>
+          <p:spPr>
+            <a:xfrm>
+              <a:off x="2928340" y="5855859"/>
+              <a:ext cx="3578047" cy="100218"/>
+            </a:xfrm>
+            <a:prstGeom prst="rect">
+              <a:avLst/>
+            </a:prstGeom>
+            <a:noFill/>
+          </p:spPr>
+          <p:txBody>
+            <a:bodyPr lIns="0" rIns="0" tIns="0" bIns="0" anchorCtr="1" anchor="ctr" wrap="none"/>
+            <a:lstStyle/>
+            <a:p>
+              <a:pPr algn="l" marL="0" marR="0" indent="0">
+                <a:lnSpc>
+                  <a:spcPts val="1100"/>
+                </a:lnSpc>
+                <a:spcBef>
+                  <a:spcPts val="0"/>
+                </a:spcBef>
+                <a:spcAft>
+                  <a:spcPts val="0"/>
+                </a:spcAft>
+              </a:pPr>
+              <a:r>
+                <a:rPr sz="1100">
+                  <a:solidFill>
+                    <a:srgbClr val="000000">
+                      <a:alpha val="100000"/>
+                    </a:srgbClr>
+                  </a:solidFill>
+                  <a:latin typeface="Helvetica"/>
+                  <a:cs typeface="Helvetica"/>
+                </a:rPr>
+                <a:t>eGFR difference (%): 100 × (CKD-EPI Cr-Cys − CG) / CG</a:t>
+              </a:r>
+            </a:p>
+          </p:txBody>
+        </p:sp>
+        <p:sp>
+          <p:nvSpPr>
+            <p:cNvPr id="88" name="tx88"/>
+            <p:cNvSpPr/>
+            <p:nvPr/>
+          </p:nvSpPr>
+          <p:spPr>
+            <a:xfrm rot="-5400000">
+              <a:off x="138035" y="4944909"/>
+              <a:ext cx="1016904" cy="100218"/>
+            </a:xfrm>
+            <a:prstGeom prst="rect">
+              <a:avLst/>
+            </a:prstGeom>
+            <a:noFill/>
+          </p:spPr>
+          <p:txBody>
+            <a:bodyPr lIns="0" rIns="0" tIns="0" bIns="0" anchorCtr="1" anchor="ctr" wrap="none"/>
+            <a:lstStyle/>
+            <a:p>
+              <a:pPr algn="l" marL="0" marR="0" indent="0">
+                <a:lnSpc>
+                  <a:spcPts val="1100"/>
+                </a:lnSpc>
+                <a:spcBef>
+                  <a:spcPts val="0"/>
+                </a:spcBef>
+                <a:spcAft>
+                  <a:spcPts val="0"/>
+                </a:spcAft>
+              </a:pPr>
+              <a:r>
+                <a:rPr sz="1100">
+                  <a:solidFill>
+                    <a:srgbClr val="000000">
+                      <a:alpha val="100000"/>
+                    </a:srgbClr>
+                  </a:solidFill>
+                  <a:latin typeface="Helvetica"/>
+                  <a:cs typeface="Helvetica"/>
+                </a:rPr>
+                <a:t>subHR (95% CI)</a:t>
+              </a:r>
+            </a:p>
+          </p:txBody>
+        </p:sp>
+        <p:sp>
+          <p:nvSpPr>
+            <p:cNvPr id="89" name="tx89"/>
+            <p:cNvSpPr/>
+            <p:nvPr/>
+          </p:nvSpPr>
+          <p:spPr>
+            <a:xfrm>
+              <a:off x="887106" y="4159544"/>
+              <a:ext cx="6451914" cy="82021"/>
+            </a:xfrm>
+            <a:prstGeom prst="rect">
+              <a:avLst/>
+            </a:prstGeom>
+            <a:noFill/>
+          </p:spPr>
+          <p:txBody>
+            <a:bodyPr lIns="0" rIns="0" tIns="0" bIns="0" anchorCtr="1" anchor="ctr" wrap="none"/>
+            <a:lstStyle/>
+            <a:p>
+              <a:pPr algn="l" marL="0" marR="0" indent="0">
+                <a:lnSpc>
+                  <a:spcPts val="900"/>
+                </a:lnSpc>
+                <a:spcBef>
+                  <a:spcPts val="0"/>
+                </a:spcBef>
+                <a:spcAft>
+                  <a:spcPts val="0"/>
+                </a:spcAft>
+              </a:pPr>
+              <a:r>
+                <a:rPr sz="900">
+                  <a:solidFill>
+                    <a:srgbClr val="404040">
+                      <a:alpha val="100000"/>
+                    </a:srgbClr>
+                  </a:solidFill>
+                  <a:latin typeface="Helvetica"/>
+                  <a:cs typeface="Helvetica"/>
+                </a:rPr>
+                <a:t>subHR per 10 % decline: 2.03 (1.36-3.02), p = &lt;0.001  |  per IQR decline (Δ = 29.9 %): 8.27 (2.50-27.34)  |  IQR: [-15.0, 14.9] %</a:t>
+              </a:r>
+            </a:p>
+          </p:txBody>
+        </p:sp>
+        <p:sp>
+          <p:nvSpPr>
+            <p:cNvPr id="90" name="tx90"/>
+            <p:cNvSpPr/>
+            <p:nvPr/>
+          </p:nvSpPr>
+          <p:spPr>
+            <a:xfrm>
+              <a:off x="887106" y="3932770"/>
               <a:ext cx="1769272" cy="120152"/>
             </a:xfrm>
             <a:prstGeom prst="rect">
